--- a/Campus_Complaint_Management_System_Mini_Project_Presentation.pptx
+++ b/Campus_Complaint_Management_System_Mini_Project_Presentation.pptx
@@ -3099,25 +3099,23 @@
       <p:grpSpPr/>
       <p:sp>
         <p:nvSpPr>
-          <p:cNvPr id="2" name="Rounded Rectangle 1"/>
+          <p:cNvPr id="2" name="Rectangle 1"/>
           <p:cNvSpPr/>
           <p:nvPr/>
         </p:nvSpPr>
         <p:spPr>
           <a:xfrm>
-            <a:off x="731520" y="640080"/>
-            <a:ext cx="10728655" cy="5577840"/>
-          </a:xfrm>
-          <a:prstGeom prst="roundRect">
+            <a:off x="731520" y="1188720"/>
+            <a:ext cx="109728" cy="4389120"/>
+          </a:xfrm>
+          <a:prstGeom prst="rect">
             <a:avLst/>
           </a:prstGeom>
           <a:solidFill>
-            <a:srgbClr val="F8FAFC"/>
+            <a:srgbClr val="2563EB"/>
           </a:solidFill>
-          <a:ln w="15240">
-            <a:solidFill>
-              <a:srgbClr val="CBD5E1"/>
-            </a:solidFill>
+          <a:ln>
+            <a:noFill/>
           </a:ln>
         </p:spPr>
         <p:style>
@@ -3144,57 +3142,14 @@
       </p:sp>
       <p:sp>
         <p:nvSpPr>
-          <p:cNvPr id="3" name="Rectangle 2"/>
-          <p:cNvSpPr/>
+          <p:cNvPr id="3" name="TextBox 2"/>
+          <p:cNvSpPr txBox="1"/>
           <p:nvPr/>
         </p:nvSpPr>
         <p:spPr>
           <a:xfrm>
             <a:off x="1097280" y="1097280"/>
-            <a:ext cx="164592" cy="4663440"/>
-          </a:xfrm>
-          <a:prstGeom prst="rect">
-            <a:avLst/>
-          </a:prstGeom>
-          <a:solidFill>
-            <a:srgbClr val="0F2744"/>
-          </a:solidFill>
-          <a:ln>
-            <a:noFill/>
-          </a:ln>
-        </p:spPr>
-        <p:style>
-          <a:lnRef idx="1">
-            <a:schemeClr val="accent1"/>
-          </a:lnRef>
-          <a:fillRef idx="3">
-            <a:schemeClr val="accent1"/>
-          </a:fillRef>
-          <a:effectRef idx="2">
-            <a:schemeClr val="accent1"/>
-          </a:effectRef>
-          <a:fontRef idx="minor">
-            <a:schemeClr val="lt1"/>
-          </a:fontRef>
-        </p:style>
-        <p:txBody>
-          <a:bodyPr rtlCol="0" anchor="ctr"/>
-          <a:lstStyle/>
-          <a:p>
-            <a:pPr algn="ctr"/>
-          </a:p>
-        </p:txBody>
-      </p:sp>
-      <p:sp>
-        <p:nvSpPr>
-          <p:cNvPr id="4" name="TextBox 3"/>
-          <p:cNvSpPr txBox="1"/>
-          <p:nvPr/>
-        </p:nvSpPr>
-        <p:spPr>
-          <a:xfrm>
-            <a:off x="1463040" y="1051560"/>
-            <a:ext cx="9601200" cy="4754880"/>
+            <a:ext cx="10332720" cy="4480560"/>
           </a:xfrm>
           <a:prstGeom prst="rect">
             <a:avLst/>
@@ -3206,36 +3161,56 @@
             <a:spAutoFit/>
           </a:bodyPr>
           <a:lstStyle/>
+          <a:p>
+            <a:pPr>
+              <a:spcAft>
+                <a:spcPts val="1200"/>
+              </a:spcAft>
+              <a:defRPr sz="2000" b="1">
+                <a:solidFill>
+                  <a:srgbClr val="2563EB"/>
+                </a:solidFill>
+                <a:latin typeface="Arial"/>
+              </a:defRPr>
+            </a:pPr>
+            <a:r>
+              <a:t>23CS4219 — SOFTWARE ENGINEERING LABORATORY</a:t>
+            </a:r>
+          </a:p>
           <a:p>
             <a:pPr>
               <a:spcAft>
                 <a:spcPts val="1000"/>
               </a:spcAft>
-              <a:defRPr sz="2000" b="1">
-                <a:solidFill>
-                  <a:srgbClr val="1D4ED8"/>
-                </a:solidFill>
-                <a:latin typeface="Arial"/>
-              </a:defRPr>
-            </a:pPr>
-            <a:r>
-              <a:t>23CS4219 — SOFTWARE ENGINEERING LABORATORY</a:t>
+              <a:defRPr sz="3600" b="1">
+                <a:solidFill>
+                  <a:srgbClr val="0F172A"/>
+                </a:solidFill>
+                <a:latin typeface="Arial"/>
+              </a:defRPr>
+            </a:pPr>
+            <a:r>
+              <a:t>Campus Complaint &amp; Maintenance</a:t>
+            </a:r>
+            <a:br/>
+            <a:r>
+              <a:t>Management System</a:t>
             </a:r>
           </a:p>
           <a:p>
             <a:pPr>
               <a:spcAft>
-                <a:spcPts val="800"/>
+                <a:spcPts val="2600"/>
               </a:spcAft>
-              <a:defRPr sz="3600" b="1">
-                <a:solidFill>
-                  <a:srgbClr val="0F2744"/>
-                </a:solidFill>
-                <a:latin typeface="Arial"/>
-              </a:defRPr>
-            </a:pPr>
-            <a:r>
-              <a:t>Campus Complaint &amp; Maintenance Management System</a:t>
+              <a:defRPr sz="2200">
+                <a:solidFill>
+                  <a:srgbClr val="475569"/>
+                </a:solidFill>
+                <a:latin typeface="Arial"/>
+              </a:defRPr>
+            </a:pPr>
+            <a:r>
+              <a:t>A Role-Based Full-Stack Web Application for Institutional Facility Grievance Tracking</a:t>
             </a:r>
           </a:p>
           <a:p>
@@ -3243,15 +3218,22 @@
               <a:spcAft>
                 <a:spcPts val="2400"/>
               </a:spcAft>
-              <a:defRPr sz="2200" b="0">
-                <a:solidFill>
-                  <a:srgbClr val="334155"/>
-                </a:solidFill>
-                <a:latin typeface="Arial"/>
-              </a:defRPr>
-            </a:pPr>
-            <a:r>
-              <a:t>A Role-Based Full-Stack Web Application for Institutional Facility Grievance Tracking</a:t>
+            </a:pPr>
+            <a:r>
+              <a:rPr b="1" sz="1800">
+                <a:solidFill>
+                  <a:srgbClr val="0F172A"/>
+                </a:solidFill>
+              </a:rPr>
+              <a:t>CORE WORKFLOW:  </a:t>
+            </a:r>
+            <a:r>
+              <a:rPr sz="1800">
+                <a:solidFill>
+                  <a:srgbClr val="2563EB"/>
+                </a:solidFill>
+              </a:rPr>
+              <a:t>Student Grievance Lodging  →  Administrative Triage  →  Technician Work Orders  →  Audited Resolution</a:t>
             </a:r>
           </a:p>
           <a:p>
@@ -3261,20 +3243,20 @@
               </a:spcBef>
             </a:pPr>
             <a:r>
-              <a:rPr b="1" sz="2000">
-                <a:solidFill>
-                  <a:srgbClr val="0F2744"/>
+              <a:rPr b="1" sz="1900">
+                <a:solidFill>
+                  <a:srgbClr val="0F172A"/>
                 </a:solidFill>
               </a:rPr>
               <a:t>Student Name:    </a:t>
             </a:r>
             <a:r>
-              <a:rPr sz="2000">
-                <a:solidFill>
-                  <a:srgbClr val="111827"/>
+              <a:rPr sz="1900">
+                <a:solidFill>
+                  <a:srgbClr val="1E293B"/>
                 </a:solidFill>
               </a:rPr>
-              <a:t>Karthikeyan Gullipalli  (Roll No: [ROLL NUMBER])</a:t>
+              <a:t>Karthikeyan Gullipalli (Roll No: [ROLL NUMBER])</a:t>
             </a:r>
           </a:p>
           <a:p>
@@ -3284,20 +3266,20 @@
               </a:spcBef>
             </a:pPr>
             <a:r>
-              <a:rPr b="1" sz="2000">
-                <a:solidFill>
-                  <a:srgbClr val="0F2744"/>
+              <a:rPr b="1" sz="1900">
+                <a:solidFill>
+                  <a:srgbClr val="0F172A"/>
                 </a:solidFill>
               </a:rPr>
-              <a:t>Faculty Guide:   </a:t>
-            </a:r>
-            <a:r>
-              <a:rPr sz="2000">
-                <a:solidFill>
-                  <a:srgbClr val="111827"/>
+              <a:t>Course &amp; Dept:   </a:t>
+            </a:r>
+            <a:r>
+              <a:rPr sz="1900">
+                <a:solidFill>
+                  <a:srgbClr val="1E293B"/>
                 </a:solidFill>
               </a:rPr>
-              <a:t>[GUIDE NAME]</a:t>
+              <a:t>B.Tech CSE  |  Department of Computer Science and Engineering</a:t>
             </a:r>
           </a:p>
           <a:p>
@@ -3307,20 +3289,20 @@
               </a:spcBef>
             </a:pPr>
             <a:r>
-              <a:rPr b="1" sz="2000">
-                <a:solidFill>
-                  <a:srgbClr val="0F2744"/>
+              <a:rPr b="1" sz="1900">
+                <a:solidFill>
+                  <a:srgbClr val="0F172A"/>
                 </a:solidFill>
               </a:rPr>
-              <a:t>Department:      </a:t>
-            </a:r>
-            <a:r>
-              <a:rPr sz="2000">
-                <a:solidFill>
-                  <a:srgbClr val="111827"/>
+              <a:t>Institution:     </a:t>
+            </a:r>
+            <a:r>
+              <a:rPr sz="1900">
+                <a:solidFill>
+                  <a:srgbClr val="1E293B"/>
                 </a:solidFill>
               </a:rPr>
-              <a:t>Department of Computer Science and Engineering</a:t>
+              <a:t>Anil Neerukonda Institute of Technology &amp; Sciences (ANITS)</a:t>
             </a:r>
           </a:p>
           <a:p>
@@ -3330,43 +3312,20 @@
               </a:spcBef>
             </a:pPr>
             <a:r>
-              <a:rPr b="1" sz="2000">
-                <a:solidFill>
-                  <a:srgbClr val="0F2744"/>
+              <a:rPr b="1" sz="1900">
+                <a:solidFill>
+                  <a:srgbClr val="0F172A"/>
                 </a:solidFill>
               </a:rPr>
-              <a:t>Institution:     </a:t>
-            </a:r>
-            <a:r>
-              <a:rPr sz="2000">
-                <a:solidFill>
-                  <a:srgbClr val="111827"/>
+              <a:t>Faculty Guide:   </a:t>
+            </a:r>
+            <a:r>
+              <a:rPr sz="1900">
+                <a:solidFill>
+                  <a:srgbClr val="1E293B"/>
                 </a:solidFill>
               </a:rPr>
-              <a:t>Anil Neerukonda Institute of Technology &amp; Sciences (ANITS)</a:t>
-            </a:r>
-          </a:p>
-          <a:p>
-            <a:pPr>
-              <a:spcBef>
-                <a:spcPts val="400"/>
-              </a:spcBef>
-            </a:pPr>
-            <a:r>
-              <a:rPr b="1" sz="2000">
-                <a:solidFill>
-                  <a:srgbClr val="0F2744"/>
-                </a:solidFill>
-              </a:rPr>
-              <a:t>Academic Year:   </a:t>
-            </a:r>
-            <a:r>
-              <a:rPr sz="2000">
-                <a:solidFill>
-                  <a:srgbClr val="111827"/>
-                </a:solidFill>
-              </a:rPr>
-              <a:t>2024–2025</a:t>
+              <a:t>[GUIDE NAME]  |  Academic Year: 2024–2025</a:t>
             </a:r>
           </a:p>
         </p:txBody>
@@ -3406,7 +3365,7 @@
           <a:noFill/>
         </p:spPr>
         <p:txBody>
-          <a:bodyPr wrap="square" lIns="0" tIns="0" rIns="0" bIns="0">
+          <a:bodyPr wrap="none" lIns="0" tIns="0" rIns="0" bIns="0">
             <a:spAutoFit/>
           </a:bodyPr>
           <a:lstStyle/>
@@ -3414,7 +3373,7 @@
             <a:pPr>
               <a:defRPr sz="1800" b="1">
                 <a:solidFill>
-                  <a:srgbClr val="1D4ED8"/>
+                  <a:srgbClr val="2563EB"/>
                 </a:solidFill>
                 <a:latin typeface="Arial"/>
               </a:defRPr>
@@ -3442,7 +3401,7 @@
           <a:noFill/>
         </p:spPr>
         <p:txBody>
-          <a:bodyPr wrap="square" lIns="0" tIns="0" rIns="0" bIns="0">
+          <a:bodyPr wrap="none" lIns="0" tIns="0" rIns="0" bIns="0">
             <a:spAutoFit/>
           </a:bodyPr>
           <a:lstStyle/>
@@ -3450,13 +3409,13 @@
             <a:pPr>
               <a:defRPr sz="3200" b="1">
                 <a:solidFill>
-                  <a:srgbClr val="0F2744"/>
-                </a:solidFill>
-                <a:latin typeface="Arial"/>
-              </a:defRPr>
-            </a:pPr>
-            <a:r>
-              <a:t>Engineering Milestones, Current Constraints &amp; System Roadmap</a:t>
+                  <a:srgbClr val="0F172A"/>
+                </a:solidFill>
+                <a:latin typeface="Arial"/>
+              </a:defRPr>
+            </a:pPr>
+            <a:r>
+              <a:t>System Achievements, Practical Limitations &amp; Future Roadmap</a:t>
             </a:r>
           </a:p>
         </p:txBody>
@@ -3469,7 +3428,7 @@
         </p:nvSpPr>
         <p:spPr>
           <a:xfrm>
-            <a:off x="731520" y="6236208"/>
+            <a:off x="731520" y="6263640"/>
             <a:ext cx="10728655" cy="13716"/>
           </a:xfrm>
           <a:prstGeom prst="rect">
@@ -3513,7 +3472,7 @@
         <p:spPr>
           <a:xfrm>
             <a:off x="731520" y="6327648"/>
-            <a:ext cx="8412480" cy="320040"/>
+            <a:ext cx="8229600" cy="320040"/>
           </a:xfrm>
           <a:prstGeom prst="rect">
             <a:avLst/>
@@ -3529,13 +3488,13 @@
             <a:pPr>
               <a:defRPr sz="1600" b="1">
                 <a:solidFill>
-                  <a:srgbClr val="334155"/>
-                </a:solidFill>
-                <a:latin typeface="Arial"/>
-              </a:defRPr>
-            </a:pPr>
-            <a:r>
-              <a:t>Campus Complaint &amp; Maintenance Management System  |  Software Engineering Mini Project</a:t>
+                  <a:srgbClr val="475569"/>
+                </a:solidFill>
+                <a:latin typeface="Arial"/>
+              </a:defRPr>
+            </a:pPr>
+            <a:r>
+              <a:t>Campus Complaint &amp; Maintenance Management System  |  Software Engineering Lab</a:t>
             </a:r>
           </a:p>
         </p:txBody>
@@ -3565,7 +3524,7 @@
             <a:pPr algn="r">
               <a:defRPr sz="1600" b="1">
                 <a:solidFill>
-                  <a:srgbClr val="1D4ED8"/>
+                  <a:srgbClr val="2563EB"/>
                 </a:solidFill>
                 <a:latin typeface="Arial"/>
               </a:defRPr>
@@ -3578,7 +3537,7 @@
       </p:sp>
       <p:sp>
         <p:nvSpPr>
-          <p:cNvPr id="7" name="Rounded Rectangle 6"/>
+          <p:cNvPr id="7" name="Rectangle 6"/>
           <p:cNvSpPr/>
           <p:nvPr/>
         </p:nvSpPr>
@@ -3587,13 +3546,13 @@
             <a:off x="731520" y="1325880"/>
             <a:ext cx="3392424" cy="4069080"/>
           </a:xfrm>
-          <a:prstGeom prst="roundRect">
+          <a:prstGeom prst="rect">
             <a:avLst/>
           </a:prstGeom>
           <a:solidFill>
             <a:srgbClr val="F0FDF4"/>
           </a:solidFill>
-          <a:ln w="15240">
+          <a:ln w="19050">
             <a:solidFill>
               <a:srgbClr val="22C55E"/>
             </a:solidFill>
@@ -3646,7 +3605,7 @@
             <a:pPr>
               <a:defRPr sz="2200" b="1">
                 <a:solidFill>
-                  <a:srgbClr val="14532D"/>
+                  <a:srgbClr val="15803D"/>
                 </a:solidFill>
                 <a:latin typeface="Arial"/>
               </a:defRPr>
@@ -3662,12 +3621,12 @@
               </a:spcBef>
               <a:defRPr sz="1900">
                 <a:solidFill>
-                  <a:srgbClr val="111827"/>
-                </a:solidFill>
-              </a:defRPr>
-            </a:pPr>
-            <a:r>
-              <a:t>✓ Eliminated error-prone manual logbooks with a 24/7 web-based grievance ecosystem.</a:t>
+                  <a:srgbClr val="1E293B"/>
+                </a:solidFill>
+              </a:defRPr>
+            </a:pPr>
+            <a:r>
+              <a:t>✓ Eliminated error-prone manual logbooks with a 24/7 web-based grievance portal.</a:t>
             </a:r>
           </a:p>
           <a:p>
@@ -3677,7 +3636,7 @@
               </a:spcBef>
               <a:defRPr sz="1900">
                 <a:solidFill>
-                  <a:srgbClr val="111827"/>
+                  <a:srgbClr val="1E293B"/>
                 </a:solidFill>
               </a:defRPr>
             </a:pPr>
@@ -3692,7 +3651,7 @@
               </a:spcBef>
               <a:defRPr sz="1900">
                 <a:solidFill>
-                  <a:srgbClr val="111827"/>
+                  <a:srgbClr val="1E293B"/>
                 </a:solidFill>
               </a:defRPr>
             </a:pPr>
@@ -3707,7 +3666,7 @@
               </a:spcBef>
               <a:defRPr sz="1900">
                 <a:solidFill>
-                  <a:srgbClr val="111827"/>
+                  <a:srgbClr val="1E293B"/>
                 </a:solidFill>
               </a:defRPr>
             </a:pPr>
@@ -3719,7 +3678,7 @@
       </p:sp>
       <p:sp>
         <p:nvSpPr>
-          <p:cNvPr id="9" name="Rounded Rectangle 8"/>
+          <p:cNvPr id="9" name="Rectangle 8"/>
           <p:cNvSpPr/>
           <p:nvPr/>
         </p:nvSpPr>
@@ -3728,13 +3687,13 @@
             <a:off x="4398264" y="1325880"/>
             <a:ext cx="3392424" cy="4069080"/>
           </a:xfrm>
-          <a:prstGeom prst="roundRect">
+          <a:prstGeom prst="rect">
             <a:avLst/>
           </a:prstGeom>
           <a:solidFill>
-            <a:srgbClr val="FFFBEB"/>
+            <a:srgbClr val="FEF3C7"/>
           </a:solidFill>
-          <a:ln w="15240">
+          <a:ln w="19050">
             <a:solidFill>
               <a:srgbClr val="F59E0B"/>
             </a:solidFill>
@@ -3787,7 +3746,7 @@
             <a:pPr>
               <a:defRPr sz="2200" b="1">
                 <a:solidFill>
-                  <a:srgbClr val="92400E"/>
+                  <a:srgbClr val="B45309"/>
                 </a:solidFill>
                 <a:latin typeface="Arial"/>
               </a:defRPr>
@@ -3803,7 +3762,7 @@
               </a:spcBef>
               <a:defRPr sz="1900">
                 <a:solidFill>
-                  <a:srgbClr val="111827"/>
+                  <a:srgbClr val="1E293B"/>
                 </a:solidFill>
               </a:defRPr>
             </a:pPr>
@@ -3818,7 +3777,7 @@
               </a:spcBef>
               <a:defRPr sz="1900">
                 <a:solidFill>
-                  <a:srgbClr val="111827"/>
+                  <a:srgbClr val="1E293B"/>
                 </a:solidFill>
               </a:defRPr>
             </a:pPr>
@@ -3833,7 +3792,7 @@
               </a:spcBef>
               <a:defRPr sz="1900">
                 <a:solidFill>
-                  <a:srgbClr val="111827"/>
+                  <a:srgbClr val="1E293B"/>
                 </a:solidFill>
               </a:defRPr>
             </a:pPr>
@@ -3845,7 +3804,7 @@
       </p:sp>
       <p:sp>
         <p:nvSpPr>
-          <p:cNvPr id="11" name="Rounded Rectangle 10"/>
+          <p:cNvPr id="11" name="Rectangle 10"/>
           <p:cNvSpPr/>
           <p:nvPr/>
         </p:nvSpPr>
@@ -3854,15 +3813,15 @@
             <a:off x="8065008" y="1325880"/>
             <a:ext cx="3392424" cy="4069080"/>
           </a:xfrm>
-          <a:prstGeom prst="roundRect">
+          <a:prstGeom prst="rect">
             <a:avLst/>
           </a:prstGeom>
           <a:solidFill>
-            <a:srgbClr val="EFF6FF"/>
+            <a:srgbClr val="F1F5F9"/>
           </a:solidFill>
-          <a:ln w="15240">
+          <a:ln w="19050">
             <a:solidFill>
-              <a:srgbClr val="3B82F6"/>
+              <a:srgbClr val="2563EB"/>
             </a:solidFill>
           </a:ln>
         </p:spPr>
@@ -3913,7 +3872,7 @@
             <a:pPr>
               <a:defRPr sz="2200" b="1">
                 <a:solidFill>
-                  <a:srgbClr val="1D4ED8"/>
+                  <a:srgbClr val="2563EB"/>
                 </a:solidFill>
                 <a:latin typeface="Arial"/>
               </a:defRPr>
@@ -3929,12 +3888,12 @@
               </a:spcBef>
               <a:defRPr sz="1900">
                 <a:solidFill>
-                  <a:srgbClr val="111827"/>
-                </a:solidFill>
-              </a:defRPr>
-            </a:pPr>
-            <a:r>
-              <a:t>→ Integration of Nodemailer (SMTP) and Twilio (SMS) for automated alerts.</a:t>
+                  <a:srgbClr val="1E293B"/>
+                </a:solidFill>
+              </a:defRPr>
+            </a:pPr>
+            <a:r>
+              <a:t>→ Integration of Nodemailer (SMTP) and Twilio (SMS) for automated push alerts.</a:t>
             </a:r>
           </a:p>
           <a:p>
@@ -3944,7 +3903,7 @@
               </a:spcBef>
               <a:defRPr sz="1900">
                 <a:solidFill>
-                  <a:srgbClr val="111827"/>
+                  <a:srgbClr val="1E293B"/>
                 </a:solidFill>
               </a:defRPr>
             </a:pPr>
@@ -3959,7 +3918,7 @@
               </a:spcBef>
               <a:defRPr sz="1900">
                 <a:solidFill>
-                  <a:srgbClr val="111827"/>
+                  <a:srgbClr val="1E293B"/>
                 </a:solidFill>
               </a:defRPr>
             </a:pPr>
@@ -3974,7 +3933,7 @@
               </a:spcBef>
               <a:defRPr sz="1900">
                 <a:solidFill>
-                  <a:srgbClr val="111827"/>
+                  <a:srgbClr val="1E293B"/>
                 </a:solidFill>
               </a:defRPr>
             </a:pPr>
@@ -3992,7 +3951,7 @@
         </p:nvSpPr>
         <p:spPr>
           <a:xfrm>
-            <a:off x="731520" y="5532120"/>
+            <a:off x="731520" y="5559552"/>
             <a:ext cx="10728655" cy="594360"/>
           </a:xfrm>
           <a:prstGeom prst="rect">
@@ -4009,7 +3968,7 @@
             <a:pPr algn="ctr">
               <a:defRPr sz="2600" b="1">
                 <a:solidFill>
-                  <a:srgbClr val="0F2744"/>
+                  <a:srgbClr val="0F172A"/>
                 </a:solidFill>
                 <a:latin typeface="Arial"/>
               </a:defRPr>
@@ -4055,7 +4014,7 @@
           <a:noFill/>
         </p:spPr>
         <p:txBody>
-          <a:bodyPr wrap="square" lIns="0" tIns="0" rIns="0" bIns="0">
+          <a:bodyPr wrap="none" lIns="0" tIns="0" rIns="0" bIns="0">
             <a:spAutoFit/>
           </a:bodyPr>
           <a:lstStyle/>
@@ -4063,7 +4022,7 @@
             <a:pPr>
               <a:defRPr sz="1800" b="1">
                 <a:solidFill>
-                  <a:srgbClr val="1D4ED8"/>
+                  <a:srgbClr val="2563EB"/>
                 </a:solidFill>
                 <a:latin typeface="Arial"/>
               </a:defRPr>
@@ -4091,7 +4050,7 @@
           <a:noFill/>
         </p:spPr>
         <p:txBody>
-          <a:bodyPr wrap="square" lIns="0" tIns="0" rIns="0" bIns="0">
+          <a:bodyPr wrap="none" lIns="0" tIns="0" rIns="0" bIns="0">
             <a:spAutoFit/>
           </a:bodyPr>
           <a:lstStyle/>
@@ -4099,13 +4058,13 @@
             <a:pPr>
               <a:defRPr sz="3200" b="1">
                 <a:solidFill>
-                  <a:srgbClr val="0F2744"/>
-                </a:solidFill>
-                <a:latin typeface="Arial"/>
-              </a:defRPr>
-            </a:pPr>
-            <a:r>
-              <a:t>Manual Paper Registers vs. Digital Campus Grievance Platform</a:t>
+                  <a:srgbClr val="0F172A"/>
+                </a:solidFill>
+                <a:latin typeface="Arial"/>
+              </a:defRPr>
+            </a:pPr>
+            <a:r>
+              <a:t>Traditional Paper Process vs. Proposed CCMS System</a:t>
             </a:r>
           </a:p>
         </p:txBody>
@@ -4118,7 +4077,7 @@
         </p:nvSpPr>
         <p:spPr>
           <a:xfrm>
-            <a:off x="731520" y="6236208"/>
+            <a:off x="731520" y="6263640"/>
             <a:ext cx="10728655" cy="13716"/>
           </a:xfrm>
           <a:prstGeom prst="rect">
@@ -4162,7 +4121,7 @@
         <p:spPr>
           <a:xfrm>
             <a:off x="731520" y="6327648"/>
-            <a:ext cx="8412480" cy="320040"/>
+            <a:ext cx="8229600" cy="320040"/>
           </a:xfrm>
           <a:prstGeom prst="rect">
             <a:avLst/>
@@ -4178,13 +4137,13 @@
             <a:pPr>
               <a:defRPr sz="1600" b="1">
                 <a:solidFill>
-                  <a:srgbClr val="334155"/>
-                </a:solidFill>
-                <a:latin typeface="Arial"/>
-              </a:defRPr>
-            </a:pPr>
-            <a:r>
-              <a:t>Campus Complaint &amp; Maintenance Management System  |  Software Engineering Mini Project</a:t>
+                  <a:srgbClr val="475569"/>
+                </a:solidFill>
+                <a:latin typeface="Arial"/>
+              </a:defRPr>
+            </a:pPr>
+            <a:r>
+              <a:t>Campus Complaint &amp; Maintenance Management System  |  Software Engineering Lab</a:t>
             </a:r>
           </a:p>
         </p:txBody>
@@ -4214,7 +4173,7 @@
             <a:pPr algn="r">
               <a:defRPr sz="1600" b="1">
                 <a:solidFill>
-                  <a:srgbClr val="1D4ED8"/>
+                  <a:srgbClr val="2563EB"/>
                 </a:solidFill>
                 <a:latin typeface="Arial"/>
               </a:defRPr>
@@ -4227,59 +4186,14 @@
       </p:sp>
       <p:sp>
         <p:nvSpPr>
-          <p:cNvPr id="7" name="Rounded Rectangle 6"/>
-          <p:cNvSpPr/>
-          <p:nvPr/>
-        </p:nvSpPr>
-        <p:spPr>
-          <a:xfrm>
-            <a:off x="731520" y="1325880"/>
-            <a:ext cx="10728655" cy="2240280"/>
-          </a:xfrm>
-          <a:prstGeom prst="roundRect">
-            <a:avLst/>
-          </a:prstGeom>
-          <a:solidFill>
-            <a:srgbClr val="FEF2F2"/>
-          </a:solidFill>
-          <a:ln w="15240">
-            <a:solidFill>
-              <a:srgbClr val="EF4444"/>
-            </a:solidFill>
-          </a:ln>
-        </p:spPr>
-        <p:style>
-          <a:lnRef idx="1">
-            <a:schemeClr val="accent1"/>
-          </a:lnRef>
-          <a:fillRef idx="3">
-            <a:schemeClr val="accent1"/>
-          </a:fillRef>
-          <a:effectRef idx="2">
-            <a:schemeClr val="accent1"/>
-          </a:effectRef>
-          <a:fontRef idx="minor">
-            <a:schemeClr val="lt1"/>
-          </a:fontRef>
-        </p:style>
-        <p:txBody>
-          <a:bodyPr rtlCol="0" anchor="ctr"/>
-          <a:lstStyle/>
-          <a:p>
-            <a:pPr algn="ctr"/>
-          </a:p>
-        </p:txBody>
-      </p:sp>
-      <p:sp>
-        <p:nvSpPr>
-          <p:cNvPr id="8" name="TextBox 7"/>
+          <p:cNvPr id="7" name="TextBox 6"/>
           <p:cNvSpPr txBox="1"/>
           <p:nvPr/>
         </p:nvSpPr>
         <p:spPr>
           <a:xfrm>
-            <a:off x="914400" y="1417320"/>
-            <a:ext cx="10332720" cy="320040"/>
+            <a:off x="731520" y="1280160"/>
+            <a:ext cx="5029200" cy="365760"/>
           </a:xfrm>
           <a:prstGeom prst="rect">
             <a:avLst/>
@@ -4293,35 +4207,35 @@
           <a:lstStyle/>
           <a:p>
             <a:pPr>
-              <a:defRPr sz="2200" b="1">
-                <a:solidFill>
-                  <a:srgbClr val="991B1B"/>
-                </a:solidFill>
-                <a:latin typeface="Arial"/>
-              </a:defRPr>
-            </a:pPr>
-            <a:r>
-              <a:t>Traditional Process: Physical Paper Logbooks &amp; Verbal Dispatch</a:t>
-            </a:r>
-          </a:p>
-        </p:txBody>
-      </p:sp>
-      <p:sp>
-        <p:nvSpPr>
-          <p:cNvPr id="9" name="Rounded Rectangle 8"/>
+              <a:defRPr sz="2400" b="1">
+                <a:solidFill>
+                  <a:srgbClr val="B91C1C"/>
+                </a:solidFill>
+                <a:latin typeface="Arial"/>
+              </a:defRPr>
+            </a:pPr>
+            <a:r>
+              <a:t>Traditional Process (Manual)</a:t>
+            </a:r>
+          </a:p>
+        </p:txBody>
+      </p:sp>
+      <p:sp>
+        <p:nvSpPr>
+          <p:cNvPr id="8" name="Rectangle 7"/>
           <p:cNvSpPr/>
           <p:nvPr/>
         </p:nvSpPr>
         <p:spPr>
           <a:xfrm>
-            <a:off x="914400" y="1810512"/>
-            <a:ext cx="2194560" cy="475488"/>
-          </a:xfrm>
-          <a:prstGeom prst="roundRect">
+            <a:off x="731520" y="1783080"/>
+            <a:ext cx="4389120" cy="548640"/>
+          </a:xfrm>
+          <a:prstGeom prst="rect">
             <a:avLst/>
           </a:prstGeom>
           <a:solidFill>
-            <a:srgbClr val="FFFFFF"/>
+            <a:srgbClr val="FEF2F2"/>
           </a:solidFill>
           <a:ln w="19050">
             <a:solidFill>
@@ -4348,9 +4262,9 @@
           <a:lstStyle/>
           <a:p>
             <a:pPr algn="ctr">
-              <a:defRPr sz="1800" b="1">
-                <a:solidFill>
-                  <a:srgbClr val="991B1B"/>
+              <a:defRPr sz="1900" b="1">
+                <a:solidFill>
+                  <a:srgbClr val="B91C1C"/>
                 </a:solidFill>
                 <a:latin typeface="Arial"/>
               </a:defRPr>
@@ -4363,16 +4277,16 @@
       </p:sp>
       <p:sp>
         <p:nvSpPr>
-          <p:cNvPr id="10" name="Right Arrow 9"/>
+          <p:cNvPr id="9" name="Down Arrow 8"/>
           <p:cNvSpPr/>
           <p:nvPr/>
         </p:nvSpPr>
         <p:spPr>
           <a:xfrm>
-            <a:off x="3200400" y="1947672"/>
-            <a:ext cx="274320" cy="182880"/>
-          </a:xfrm>
-          <a:prstGeom prst="rightArrow">
+            <a:off x="2834640" y="2350008"/>
+            <a:ext cx="182880" cy="274320"/>
+          </a:xfrm>
+          <a:prstGeom prst="downArrow">
             <a:avLst/>
           </a:prstGeom>
           <a:solidFill>
@@ -4406,20 +4320,20 @@
       </p:sp>
       <p:sp>
         <p:nvSpPr>
-          <p:cNvPr id="11" name="Rounded Rectangle 10"/>
+          <p:cNvPr id="10" name="Rectangle 9"/>
           <p:cNvSpPr/>
           <p:nvPr/>
         </p:nvSpPr>
         <p:spPr>
           <a:xfrm>
-            <a:off x="3566160" y="1810512"/>
-            <a:ext cx="2194560" cy="475488"/>
-          </a:xfrm>
-          <a:prstGeom prst="roundRect">
+            <a:off x="731520" y="2651760"/>
+            <a:ext cx="4389120" cy="548640"/>
+          </a:xfrm>
+          <a:prstGeom prst="rect">
             <a:avLst/>
           </a:prstGeom>
           <a:solidFill>
-            <a:srgbClr val="FFFFFF"/>
+            <a:srgbClr val="FEF2F2"/>
           </a:solidFill>
           <a:ln w="19050">
             <a:solidFill>
@@ -4446,9 +4360,9 @@
           <a:lstStyle/>
           <a:p>
             <a:pPr algn="ctr">
-              <a:defRPr sz="1800" b="1">
-                <a:solidFill>
-                  <a:srgbClr val="991B1B"/>
+              <a:defRPr sz="1900" b="1">
+                <a:solidFill>
+                  <a:srgbClr val="B91C1C"/>
                 </a:solidFill>
                 <a:latin typeface="Arial"/>
               </a:defRPr>
@@ -4461,16 +4375,16 @@
       </p:sp>
       <p:sp>
         <p:nvSpPr>
-          <p:cNvPr id="12" name="Right Arrow 11"/>
+          <p:cNvPr id="11" name="Down Arrow 10"/>
           <p:cNvSpPr/>
           <p:nvPr/>
         </p:nvSpPr>
         <p:spPr>
           <a:xfrm>
-            <a:off x="5852160" y="1947672"/>
-            <a:ext cx="274320" cy="182880"/>
-          </a:xfrm>
-          <a:prstGeom prst="rightArrow">
+            <a:off x="2834640" y="3218688"/>
+            <a:ext cx="182880" cy="274320"/>
+          </a:xfrm>
+          <a:prstGeom prst="downArrow">
             <a:avLst/>
           </a:prstGeom>
           <a:solidFill>
@@ -4504,20 +4418,20 @@
       </p:sp>
       <p:sp>
         <p:nvSpPr>
-          <p:cNvPr id="13" name="Rounded Rectangle 12"/>
+          <p:cNvPr id="12" name="Rectangle 11"/>
           <p:cNvSpPr/>
           <p:nvPr/>
         </p:nvSpPr>
         <p:spPr>
           <a:xfrm>
-            <a:off x="6217920" y="1810512"/>
-            <a:ext cx="2194560" cy="475488"/>
-          </a:xfrm>
-          <a:prstGeom prst="roundRect">
+            <a:off x="731520" y="3520439"/>
+            <a:ext cx="4389120" cy="548640"/>
+          </a:xfrm>
+          <a:prstGeom prst="rect">
             <a:avLst/>
           </a:prstGeom>
           <a:solidFill>
-            <a:srgbClr val="FFFFFF"/>
+            <a:srgbClr val="FEF2F2"/>
           </a:solidFill>
           <a:ln w="19050">
             <a:solidFill>
@@ -4544,31 +4458,31 @@
           <a:lstStyle/>
           <a:p>
             <a:pPr algn="ctr">
-              <a:defRPr sz="1800" b="1">
-                <a:solidFill>
-                  <a:srgbClr val="991B1B"/>
-                </a:solidFill>
-                <a:latin typeface="Arial"/>
-              </a:defRPr>
-            </a:pPr>
-            <a:r>
-              <a:t>Verbal Work Orders</a:t>
-            </a:r>
-          </a:p>
-        </p:txBody>
-      </p:sp>
-      <p:sp>
-        <p:nvSpPr>
-          <p:cNvPr id="14" name="Right Arrow 13"/>
+              <a:defRPr sz="1900" b="1">
+                <a:solidFill>
+                  <a:srgbClr val="B91C1C"/>
+                </a:solidFill>
+                <a:latin typeface="Arial"/>
+              </a:defRPr>
+            </a:pPr>
+            <a:r>
+              <a:t>Verbal Work Order</a:t>
+            </a:r>
+          </a:p>
+        </p:txBody>
+      </p:sp>
+      <p:sp>
+        <p:nvSpPr>
+          <p:cNvPr id="13" name="Down Arrow 12"/>
           <p:cNvSpPr/>
           <p:nvPr/>
         </p:nvSpPr>
         <p:spPr>
           <a:xfrm>
-            <a:off x="8503920" y="1947672"/>
-            <a:ext cx="274320" cy="182880"/>
-          </a:xfrm>
-          <a:prstGeom prst="rightArrow">
+            <a:off x="2834640" y="4087368"/>
+            <a:ext cx="182880" cy="274320"/>
+          </a:xfrm>
+          <a:prstGeom prst="downArrow">
             <a:avLst/>
           </a:prstGeom>
           <a:solidFill>
@@ -4602,20 +4516,20 @@
       </p:sp>
       <p:sp>
         <p:nvSpPr>
-          <p:cNvPr id="15" name="Rounded Rectangle 14"/>
+          <p:cNvPr id="14" name="Rectangle 13"/>
           <p:cNvSpPr/>
           <p:nvPr/>
         </p:nvSpPr>
         <p:spPr>
           <a:xfrm>
-            <a:off x="8869680" y="1810512"/>
-            <a:ext cx="2286000" cy="475488"/>
-          </a:xfrm>
-          <a:prstGeom prst="roundRect">
+            <a:off x="731520" y="4389120"/>
+            <a:ext cx="4389120" cy="548640"/>
+          </a:xfrm>
+          <a:prstGeom prst="rect">
             <a:avLst/>
           </a:prstGeom>
           <a:solidFill>
-            <a:srgbClr val="FFFFFF"/>
+            <a:srgbClr val="FEF2F2"/>
           </a:solidFill>
           <a:ln w="19050">
             <a:solidFill>
@@ -4642,126 +4556,29 @@
           <a:lstStyle/>
           <a:p>
             <a:pPr algn="ctr">
-              <a:defRPr sz="1800" b="1">
-                <a:solidFill>
-                  <a:srgbClr val="991B1B"/>
-                </a:solidFill>
-                <a:latin typeface="Arial"/>
-              </a:defRPr>
-            </a:pPr>
-            <a:r>
-              <a:t>No Tracking / Lost</a:t>
-            </a:r>
-          </a:p>
-        </p:txBody>
-      </p:sp>
-      <p:sp>
-        <p:nvSpPr>
-          <p:cNvPr id="16" name="TextBox 15"/>
+              <a:defRPr sz="1900" b="1">
+                <a:solidFill>
+                  <a:srgbClr val="B91C1C"/>
+                </a:solidFill>
+                <a:latin typeface="Arial"/>
+              </a:defRPr>
+            </a:pPr>
+            <a:r>
+              <a:t>No Tracking</a:t>
+            </a:r>
+          </a:p>
+        </p:txBody>
+      </p:sp>
+      <p:sp>
+        <p:nvSpPr>
+          <p:cNvPr id="15" name="TextBox 14"/>
           <p:cNvSpPr txBox="1"/>
           <p:nvPr/>
         </p:nvSpPr>
         <p:spPr>
           <a:xfrm>
-            <a:off x="914400" y="2377440"/>
-            <a:ext cx="10332720" cy="1051560"/>
-          </a:xfrm>
-          <a:prstGeom prst="rect">
-            <a:avLst/>
-          </a:prstGeom>
-          <a:noFill/>
-        </p:spPr>
-        <p:txBody>
-          <a:bodyPr wrap="square" lIns="0" tIns="0">
-            <a:spAutoFit/>
-          </a:bodyPr>
-          <a:lstStyle/>
-          <a:p>
-            <a:pPr>
-              <a:defRPr sz="2000">
-                <a:solidFill>
-                  <a:srgbClr val="111827"/>
-                </a:solidFill>
-                <a:latin typeface="Arial"/>
-              </a:defRPr>
-            </a:pPr>
-            <a:r>
-              <a:t>• Physical Vulnerability: Logbooks are prone to damage, misplacement, and zero data backup.</a:t>
-            </a:r>
-          </a:p>
-          <a:p>
-            <a:pPr>
-              <a:spcBef>
-                <a:spcPts val="400"/>
-              </a:spcBef>
-              <a:defRPr sz="2000">
-                <a:solidFill>
-                  <a:srgbClr val="111827"/>
-                </a:solidFill>
-                <a:latin typeface="Arial"/>
-              </a:defRPr>
-            </a:pPr>
-            <a:r>
-              <a:t>• Zero Transparency &amp; Accountability: Complainants cannot track progress; verbal orders lack audit trails.</a:t>
-            </a:r>
-          </a:p>
-        </p:txBody>
-      </p:sp>
-      <p:sp>
-        <p:nvSpPr>
-          <p:cNvPr id="17" name="Rounded Rectangle 16"/>
-          <p:cNvSpPr/>
-          <p:nvPr/>
-        </p:nvSpPr>
-        <p:spPr>
-          <a:xfrm>
-            <a:off x="731520" y="3749039"/>
-            <a:ext cx="10728655" cy="2240280"/>
-          </a:xfrm>
-          <a:prstGeom prst="roundRect">
-            <a:avLst/>
-          </a:prstGeom>
-          <a:solidFill>
-            <a:srgbClr val="F0FDF4"/>
-          </a:solidFill>
-          <a:ln w="15240">
-            <a:solidFill>
-              <a:srgbClr val="22C55E"/>
-            </a:solidFill>
-          </a:ln>
-        </p:spPr>
-        <p:style>
-          <a:lnRef idx="1">
-            <a:schemeClr val="accent1"/>
-          </a:lnRef>
-          <a:fillRef idx="3">
-            <a:schemeClr val="accent1"/>
-          </a:fillRef>
-          <a:effectRef idx="2">
-            <a:schemeClr val="accent1"/>
-          </a:effectRef>
-          <a:fontRef idx="minor">
-            <a:schemeClr val="lt1"/>
-          </a:fontRef>
-        </p:style>
-        <p:txBody>
-          <a:bodyPr rtlCol="0" anchor="ctr"/>
-          <a:lstStyle/>
-          <a:p>
-            <a:pPr algn="ctr"/>
-          </a:p>
-        </p:txBody>
-      </p:sp>
-      <p:sp>
-        <p:nvSpPr>
-          <p:cNvPr id="18" name="TextBox 17"/>
-          <p:cNvSpPr txBox="1"/>
-          <p:nvPr/>
-        </p:nvSpPr>
-        <p:spPr>
-          <a:xfrm>
-            <a:off x="914400" y="3840480"/>
-            <a:ext cx="10332720" cy="320040"/>
+            <a:off x="6217920" y="1280160"/>
+            <a:ext cx="5212080" cy="365760"/>
           </a:xfrm>
           <a:prstGeom prst="rect">
             <a:avLst/>
@@ -4775,35 +4592,35 @@
           <a:lstStyle/>
           <a:p>
             <a:pPr>
-              <a:defRPr sz="2200" b="1">
-                <a:solidFill>
-                  <a:srgbClr val="14532D"/>
-                </a:solidFill>
-                <a:latin typeface="Arial"/>
-              </a:defRPr>
-            </a:pPr>
-            <a:r>
-              <a:t>Proposed CCMS: Structured Full-Stack Web Platform</a:t>
-            </a:r>
-          </a:p>
-        </p:txBody>
-      </p:sp>
-      <p:sp>
-        <p:nvSpPr>
-          <p:cNvPr id="19" name="Rounded Rectangle 18"/>
+              <a:defRPr sz="2400" b="1">
+                <a:solidFill>
+                  <a:srgbClr val="15803D"/>
+                </a:solidFill>
+                <a:latin typeface="Arial"/>
+              </a:defRPr>
+            </a:pPr>
+            <a:r>
+              <a:t>Proposed System (CCMS Web Portal)</a:t>
+            </a:r>
+          </a:p>
+        </p:txBody>
+      </p:sp>
+      <p:sp>
+        <p:nvSpPr>
+          <p:cNvPr id="16" name="Rectangle 15"/>
           <p:cNvSpPr/>
           <p:nvPr/>
         </p:nvSpPr>
         <p:spPr>
           <a:xfrm>
-            <a:off x="914400" y="4233672"/>
-            <a:ext cx="2194560" cy="475488"/>
-          </a:xfrm>
-          <a:prstGeom prst="roundRect">
+            <a:off x="6217920" y="1783080"/>
+            <a:ext cx="5212080" cy="475488"/>
+          </a:xfrm>
+          <a:prstGeom prst="rect">
             <a:avLst/>
           </a:prstGeom>
           <a:solidFill>
-            <a:srgbClr val="FFFFFF"/>
+            <a:srgbClr val="F0FDF4"/>
           </a:solidFill>
           <a:ln w="19050">
             <a:solidFill>
@@ -4832,29 +4649,29 @@
             <a:pPr algn="ctr">
               <a:defRPr sz="1800" b="1">
                 <a:solidFill>
-                  <a:srgbClr val="14532D"/>
-                </a:solidFill>
-                <a:latin typeface="Arial"/>
-              </a:defRPr>
-            </a:pPr>
-            <a:r>
-              <a:t>24/7 Web Portal</a:t>
-            </a:r>
-          </a:p>
-        </p:txBody>
-      </p:sp>
-      <p:sp>
-        <p:nvSpPr>
-          <p:cNvPr id="20" name="Right Arrow 19"/>
+                  <a:srgbClr val="15803D"/>
+                </a:solidFill>
+                <a:latin typeface="Arial"/>
+              </a:defRPr>
+            </a:pPr>
+            <a:r>
+              <a:t>Web Portal (24/7 Access)</a:t>
+            </a:r>
+          </a:p>
+        </p:txBody>
+      </p:sp>
+      <p:sp>
+        <p:nvSpPr>
+          <p:cNvPr id="17" name="Down Arrow 16"/>
           <p:cNvSpPr/>
           <p:nvPr/>
         </p:nvSpPr>
         <p:spPr>
           <a:xfrm>
-            <a:off x="3200400" y="4370832"/>
-            <a:ext cx="274320" cy="182880"/>
-          </a:xfrm>
-          <a:prstGeom prst="rightArrow">
+            <a:off x="8732520" y="2267712"/>
+            <a:ext cx="164592" cy="182880"/>
+          </a:xfrm>
+          <a:prstGeom prst="downArrow">
             <a:avLst/>
           </a:prstGeom>
           <a:solidFill>
@@ -4888,20 +4705,20 @@
       </p:sp>
       <p:sp>
         <p:nvSpPr>
-          <p:cNvPr id="21" name="Rounded Rectangle 20"/>
+          <p:cNvPr id="18" name="Rectangle 17"/>
           <p:cNvSpPr/>
           <p:nvPr/>
         </p:nvSpPr>
         <p:spPr>
           <a:xfrm>
-            <a:off x="3566160" y="4233672"/>
-            <a:ext cx="2194560" cy="475488"/>
-          </a:xfrm>
-          <a:prstGeom prst="roundRect">
+            <a:off x="6217920" y="2459736"/>
+            <a:ext cx="5212080" cy="475488"/>
+          </a:xfrm>
+          <a:prstGeom prst="rect">
             <a:avLst/>
           </a:prstGeom>
           <a:solidFill>
-            <a:srgbClr val="FFFFFF"/>
+            <a:srgbClr val="F0FDF4"/>
           </a:solidFill>
           <a:ln w="19050">
             <a:solidFill>
@@ -4930,29 +4747,29 @@
             <a:pPr algn="ctr">
               <a:defRPr sz="1800" b="1">
                 <a:solidFill>
-                  <a:srgbClr val="14532D"/>
-                </a:solidFill>
-                <a:latin typeface="Arial"/>
-              </a:defRPr>
-            </a:pPr>
-            <a:r>
-              <a:t>Admin Triage</a:t>
-            </a:r>
-          </a:p>
-        </p:txBody>
-      </p:sp>
-      <p:sp>
-        <p:nvSpPr>
-          <p:cNvPr id="22" name="Right Arrow 21"/>
+                  <a:srgbClr val="15803D"/>
+                </a:solidFill>
+                <a:latin typeface="Arial"/>
+              </a:defRPr>
+            </a:pPr>
+            <a:r>
+              <a:t>Admin Verification</a:t>
+            </a:r>
+          </a:p>
+        </p:txBody>
+      </p:sp>
+      <p:sp>
+        <p:nvSpPr>
+          <p:cNvPr id="19" name="Down Arrow 18"/>
           <p:cNvSpPr/>
           <p:nvPr/>
         </p:nvSpPr>
         <p:spPr>
           <a:xfrm>
-            <a:off x="5852160" y="4370832"/>
-            <a:ext cx="274320" cy="182880"/>
-          </a:xfrm>
-          <a:prstGeom prst="rightArrow">
+            <a:off x="8732520" y="2944368"/>
+            <a:ext cx="164592" cy="182880"/>
+          </a:xfrm>
+          <a:prstGeom prst="downArrow">
             <a:avLst/>
           </a:prstGeom>
           <a:solidFill>
@@ -4986,20 +4803,20 @@
       </p:sp>
       <p:sp>
         <p:nvSpPr>
-          <p:cNvPr id="23" name="Rounded Rectangle 22"/>
+          <p:cNvPr id="20" name="Rectangle 19"/>
           <p:cNvSpPr/>
           <p:nvPr/>
         </p:nvSpPr>
         <p:spPr>
           <a:xfrm>
-            <a:off x="6217920" y="4233672"/>
-            <a:ext cx="2194560" cy="475488"/>
-          </a:xfrm>
-          <a:prstGeom prst="roundRect">
+            <a:off x="6217920" y="3136391"/>
+            <a:ext cx="5212080" cy="475488"/>
+          </a:xfrm>
+          <a:prstGeom prst="rect">
             <a:avLst/>
           </a:prstGeom>
           <a:solidFill>
-            <a:srgbClr val="FFFFFF"/>
+            <a:srgbClr val="F0FDF4"/>
           </a:solidFill>
           <a:ln w="19050">
             <a:solidFill>
@@ -5028,29 +4845,29 @@
             <a:pPr algn="ctr">
               <a:defRPr sz="1800" b="1">
                 <a:solidFill>
-                  <a:srgbClr val="14532D"/>
-                </a:solidFill>
-                <a:latin typeface="Arial"/>
-              </a:defRPr>
-            </a:pPr>
-            <a:r>
-              <a:t>Technician Queue</a:t>
-            </a:r>
-          </a:p>
-        </p:txBody>
-      </p:sp>
-      <p:sp>
-        <p:nvSpPr>
-          <p:cNvPr id="24" name="Right Arrow 23"/>
+                  <a:srgbClr val="15803D"/>
+                </a:solidFill>
+                <a:latin typeface="Arial"/>
+              </a:defRPr>
+            </a:pPr>
+            <a:r>
+              <a:t>Staff Assignment</a:t>
+            </a:r>
+          </a:p>
+        </p:txBody>
+      </p:sp>
+      <p:sp>
+        <p:nvSpPr>
+          <p:cNvPr id="21" name="Down Arrow 20"/>
           <p:cNvSpPr/>
           <p:nvPr/>
         </p:nvSpPr>
         <p:spPr>
           <a:xfrm>
-            <a:off x="8503920" y="4370832"/>
-            <a:ext cx="274320" cy="182880"/>
-          </a:xfrm>
-          <a:prstGeom prst="rightArrow">
+            <a:off x="8732520" y="3621024"/>
+            <a:ext cx="164592" cy="182880"/>
+          </a:xfrm>
+          <a:prstGeom prst="downArrow">
             <a:avLst/>
           </a:prstGeom>
           <a:solidFill>
@@ -5084,20 +4901,20 @@
       </p:sp>
       <p:sp>
         <p:nvSpPr>
-          <p:cNvPr id="25" name="Rounded Rectangle 24"/>
+          <p:cNvPr id="22" name="Rectangle 21"/>
           <p:cNvSpPr/>
           <p:nvPr/>
         </p:nvSpPr>
         <p:spPr>
           <a:xfrm>
-            <a:off x="8869680" y="4233672"/>
-            <a:ext cx="2286000" cy="475488"/>
-          </a:xfrm>
-          <a:prstGeom prst="roundRect">
+            <a:off x="6217920" y="3813048"/>
+            <a:ext cx="5212080" cy="475488"/>
+          </a:xfrm>
+          <a:prstGeom prst="rect">
             <a:avLst/>
           </a:prstGeom>
           <a:solidFill>
-            <a:srgbClr val="FFFFFF"/>
+            <a:srgbClr val="F0FDF4"/>
           </a:solidFill>
           <a:ln w="19050">
             <a:solidFill>
@@ -5126,65 +4943,172 @@
             <a:pPr algn="ctr">
               <a:defRPr sz="1800" b="1">
                 <a:solidFill>
-                  <a:srgbClr val="14532D"/>
-                </a:solidFill>
-                <a:latin typeface="Arial"/>
-              </a:defRPr>
-            </a:pPr>
-            <a:r>
-              <a:t>Audit &amp; Feedback</a:t>
-            </a:r>
-          </a:p>
-        </p:txBody>
-      </p:sp>
-      <p:sp>
-        <p:nvSpPr>
-          <p:cNvPr id="26" name="TextBox 25"/>
-          <p:cNvSpPr txBox="1"/>
-          <p:nvPr/>
-        </p:nvSpPr>
-        <p:spPr>
-          <a:xfrm>
-            <a:off x="914400" y="4800600"/>
-            <a:ext cx="10332720" cy="1051560"/>
-          </a:xfrm>
-          <a:prstGeom prst="rect">
-            <a:avLst/>
-          </a:prstGeom>
-          <a:noFill/>
-        </p:spPr>
-        <p:txBody>
-          <a:bodyPr wrap="square" lIns="0" tIns="0">
-            <a:spAutoFit/>
-          </a:bodyPr>
-          <a:lstStyle/>
-          <a:p>
-            <a:pPr>
-              <a:defRPr sz="2000">
-                <a:solidFill>
-                  <a:srgbClr val="111827"/>
-                </a:solidFill>
-                <a:latin typeface="Arial"/>
-              </a:defRPr>
-            </a:pPr>
-            <a:r>
-              <a:t>• Location &amp; Urgency Tagging: Complaints mapped to exact buildings, floors, and rooms with priority levels.</a:t>
-            </a:r>
-          </a:p>
-          <a:p>
-            <a:pPr>
-              <a:spcBef>
-                <a:spcPts val="400"/>
-              </a:spcBef>
-              <a:defRPr sz="2000">
-                <a:solidFill>
-                  <a:srgbClr val="111827"/>
-                </a:solidFill>
-                <a:latin typeface="Arial"/>
-              </a:defRPr>
-            </a:pPr>
-            <a:r>
-              <a:t>• Complete Lifecycle Governance: Real-time status progression, staff assignment, and immutable audit logs.</a:t>
+                  <a:srgbClr val="15803D"/>
+                </a:solidFill>
+                <a:latin typeface="Arial"/>
+              </a:defRPr>
+            </a:pPr>
+            <a:r>
+              <a:t>Status Tracking</a:t>
+            </a:r>
+          </a:p>
+        </p:txBody>
+      </p:sp>
+      <p:sp>
+        <p:nvSpPr>
+          <p:cNvPr id="23" name="Down Arrow 22"/>
+          <p:cNvSpPr/>
+          <p:nvPr/>
+        </p:nvSpPr>
+        <p:spPr>
+          <a:xfrm>
+            <a:off x="8732520" y="4297680"/>
+            <a:ext cx="164592" cy="182880"/>
+          </a:xfrm>
+          <a:prstGeom prst="downArrow">
+            <a:avLst/>
+          </a:prstGeom>
+          <a:solidFill>
+            <a:srgbClr val="22C55E"/>
+          </a:solidFill>
+          <a:ln>
+            <a:noFill/>
+          </a:ln>
+        </p:spPr>
+        <p:style>
+          <a:lnRef idx="1">
+            <a:schemeClr val="accent1"/>
+          </a:lnRef>
+          <a:fillRef idx="3">
+            <a:schemeClr val="accent1"/>
+          </a:fillRef>
+          <a:effectRef idx="2">
+            <a:schemeClr val="accent1"/>
+          </a:effectRef>
+          <a:fontRef idx="minor">
+            <a:schemeClr val="lt1"/>
+          </a:fontRef>
+        </p:style>
+        <p:txBody>
+          <a:bodyPr rtlCol="0" anchor="ctr"/>
+          <a:lstStyle/>
+          <a:p>
+            <a:pPr algn="ctr"/>
+          </a:p>
+        </p:txBody>
+      </p:sp>
+      <p:sp>
+        <p:nvSpPr>
+          <p:cNvPr id="24" name="Rectangle 23"/>
+          <p:cNvSpPr/>
+          <p:nvPr/>
+        </p:nvSpPr>
+        <p:spPr>
+          <a:xfrm>
+            <a:off x="6217920" y="4489704"/>
+            <a:ext cx="5212080" cy="475488"/>
+          </a:xfrm>
+          <a:prstGeom prst="rect">
+            <a:avLst/>
+          </a:prstGeom>
+          <a:solidFill>
+            <a:srgbClr val="F0FDF4"/>
+          </a:solidFill>
+          <a:ln w="19050">
+            <a:solidFill>
+              <a:srgbClr val="22C55E"/>
+            </a:solidFill>
+          </a:ln>
+        </p:spPr>
+        <p:style>
+          <a:lnRef idx="1">
+            <a:schemeClr val="accent1"/>
+          </a:lnRef>
+          <a:fillRef idx="3">
+            <a:schemeClr val="accent1"/>
+          </a:fillRef>
+          <a:effectRef idx="2">
+            <a:schemeClr val="accent1"/>
+          </a:effectRef>
+          <a:fontRef idx="minor">
+            <a:schemeClr val="lt1"/>
+          </a:fontRef>
+        </p:style>
+        <p:txBody>
+          <a:bodyPr rtlCol="0" anchor="ctr" wrap="square"/>
+          <a:lstStyle/>
+          <a:p>
+            <a:pPr algn="ctr">
+              <a:defRPr sz="1800" b="1">
+                <a:solidFill>
+                  <a:srgbClr val="15803D"/>
+                </a:solidFill>
+                <a:latin typeface="Arial"/>
+              </a:defRPr>
+            </a:pPr>
+            <a:r>
+              <a:t>Resolution &amp; Feedback</a:t>
+            </a:r>
+          </a:p>
+        </p:txBody>
+      </p:sp>
+      <p:sp>
+        <p:nvSpPr>
+          <p:cNvPr id="25" name="Rectangle 24"/>
+          <p:cNvSpPr/>
+          <p:nvPr/>
+        </p:nvSpPr>
+        <p:spPr>
+          <a:xfrm>
+            <a:off x="731520" y="5349240"/>
+            <a:ext cx="10728655" cy="685800"/>
+          </a:xfrm>
+          <a:prstGeom prst="rect">
+            <a:avLst/>
+          </a:prstGeom>
+          <a:solidFill>
+            <a:srgbClr val="F1F5F9"/>
+          </a:solidFill>
+          <a:ln w="19050">
+            <a:solidFill>
+              <a:srgbClr val="CBD5E1"/>
+            </a:solidFill>
+          </a:ln>
+        </p:spPr>
+        <p:style>
+          <a:lnRef idx="1">
+            <a:schemeClr val="accent1"/>
+          </a:lnRef>
+          <a:fillRef idx="3">
+            <a:schemeClr val="accent1"/>
+          </a:fillRef>
+          <a:effectRef idx="2">
+            <a:schemeClr val="accent1"/>
+          </a:effectRef>
+          <a:fontRef idx="minor">
+            <a:schemeClr val="lt1"/>
+          </a:fontRef>
+        </p:style>
+        <p:txBody>
+          <a:bodyPr rtlCol="0" anchor="ctr"/>
+          <a:lstStyle/>
+          <a:p>
+            <a:pPr algn="ctr"/>
+            <a:r>
+              <a:rPr b="1" sz="2000">
+                <a:solidFill>
+                  <a:srgbClr val="0F172A"/>
+                </a:solidFill>
+              </a:rPr>
+              <a:t>Core Bottlenecks Eliminated:   </a:t>
+            </a:r>
+            <a:r>
+              <a:rPr b="1" sz="2000">
+                <a:solidFill>
+                  <a:srgbClr val="B91C1C"/>
+                </a:solidFill>
+              </a:rPr>
+              <a:t>No Tracking  →  No Accountability  →  No Centralized Records</a:t>
             </a:r>
           </a:p>
         </p:txBody>
@@ -5224,7 +5148,7 @@
           <a:noFill/>
         </p:spPr>
         <p:txBody>
-          <a:bodyPr wrap="square" lIns="0" tIns="0" rIns="0" bIns="0">
+          <a:bodyPr wrap="none" lIns="0" tIns="0" rIns="0" bIns="0">
             <a:spAutoFit/>
           </a:bodyPr>
           <a:lstStyle/>
@@ -5232,7 +5156,7 @@
             <a:pPr>
               <a:defRPr sz="1800" b="1">
                 <a:solidFill>
-                  <a:srgbClr val="1D4ED8"/>
+                  <a:srgbClr val="2563EB"/>
                 </a:solidFill>
                 <a:latin typeface="Arial"/>
               </a:defRPr>
@@ -5260,7 +5184,7 @@
           <a:noFill/>
         </p:spPr>
         <p:txBody>
-          <a:bodyPr wrap="square" lIns="0" tIns="0" rIns="0" bIns="0">
+          <a:bodyPr wrap="none" lIns="0" tIns="0" rIns="0" bIns="0">
             <a:spAutoFit/>
           </a:bodyPr>
           <a:lstStyle/>
@@ -5268,13 +5192,13 @@
             <a:pPr>
               <a:defRPr sz="3200" b="1">
                 <a:solidFill>
-                  <a:srgbClr val="0F2744"/>
-                </a:solidFill>
-                <a:latin typeface="Arial"/>
-              </a:defRPr>
-            </a:pPr>
-            <a:r>
-              <a:t>SDLC Lifecycle Progression &amp; Requirements Traceability</a:t>
+                  <a:srgbClr val="0F172A"/>
+                </a:solidFill>
+                <a:latin typeface="Arial"/>
+              </a:defRPr>
+            </a:pPr>
+            <a:r>
+              <a:t>SDLC Progression &amp; Requirements Traceability</a:t>
             </a:r>
           </a:p>
         </p:txBody>
@@ -5287,7 +5211,7 @@
         </p:nvSpPr>
         <p:spPr>
           <a:xfrm>
-            <a:off x="731520" y="6236208"/>
+            <a:off x="731520" y="6263640"/>
             <a:ext cx="10728655" cy="13716"/>
           </a:xfrm>
           <a:prstGeom prst="rect">
@@ -5331,7 +5255,7 @@
         <p:spPr>
           <a:xfrm>
             <a:off x="731520" y="6327648"/>
-            <a:ext cx="8412480" cy="320040"/>
+            <a:ext cx="8229600" cy="320040"/>
           </a:xfrm>
           <a:prstGeom prst="rect">
             <a:avLst/>
@@ -5347,13 +5271,13 @@
             <a:pPr>
               <a:defRPr sz="1600" b="1">
                 <a:solidFill>
-                  <a:srgbClr val="334155"/>
-                </a:solidFill>
-                <a:latin typeface="Arial"/>
-              </a:defRPr>
-            </a:pPr>
-            <a:r>
-              <a:t>Campus Complaint &amp; Maintenance Management System  |  Software Engineering Mini Project</a:t>
+                  <a:srgbClr val="475569"/>
+                </a:solidFill>
+                <a:latin typeface="Arial"/>
+              </a:defRPr>
+            </a:pPr>
+            <a:r>
+              <a:t>Campus Complaint &amp; Maintenance Management System  |  Software Engineering Lab</a:t>
             </a:r>
           </a:p>
         </p:txBody>
@@ -5383,7 +5307,7 @@
             <a:pPr algn="r">
               <a:defRPr sz="1600" b="1">
                 <a:solidFill>
-                  <a:srgbClr val="1D4ED8"/>
+                  <a:srgbClr val="2563EB"/>
                 </a:solidFill>
                 <a:latin typeface="Arial"/>
               </a:defRPr>
@@ -5396,24 +5320,24 @@
       </p:sp>
       <p:sp>
         <p:nvSpPr>
-          <p:cNvPr id="7" name="Rounded Rectangle 6"/>
+          <p:cNvPr id="7" name="Rectangle 6"/>
           <p:cNvSpPr/>
           <p:nvPr/>
         </p:nvSpPr>
         <p:spPr>
           <a:xfrm>
             <a:off x="731520" y="1325880"/>
-            <a:ext cx="10728655" cy="1143000"/>
-          </a:xfrm>
-          <a:prstGeom prst="roundRect">
+            <a:ext cx="1554480" cy="594360"/>
+          </a:xfrm>
+          <a:prstGeom prst="rect">
             <a:avLst/>
           </a:prstGeom>
           <a:solidFill>
-            <a:srgbClr val="EFF6FF"/>
+            <a:srgbClr val="0F172A"/>
           </a:solidFill>
-          <a:ln w="15240">
+          <a:ln w="19050">
             <a:solidFill>
-              <a:srgbClr val="3B82F6"/>
+              <a:srgbClr val="0F172A"/>
             </a:solidFill>
           </a:ln>
         </p:spPr>
@@ -5432,34 +5356,42 @@
           </a:fontRef>
         </p:style>
         <p:txBody>
-          <a:bodyPr rtlCol="0" anchor="ctr"/>
-          <a:lstStyle/>
-          <a:p>
-            <a:pPr algn="ctr"/>
-          </a:p>
-        </p:txBody>
-      </p:sp>
-      <p:sp>
-        <p:nvSpPr>
-          <p:cNvPr id="8" name="Rounded Rectangle 7"/>
+          <a:bodyPr rtlCol="0" anchor="ctr" wrap="square"/>
+          <a:lstStyle/>
+          <a:p>
+            <a:pPr algn="ctr">
+              <a:defRPr sz="1900" b="1">
+                <a:solidFill>
+                  <a:srgbClr val="FFFFFF"/>
+                </a:solidFill>
+                <a:latin typeface="Arial"/>
+              </a:defRPr>
+            </a:pPr>
+            <a:r>
+              <a:t>Requirements</a:t>
+            </a:r>
+          </a:p>
+        </p:txBody>
+      </p:sp>
+      <p:sp>
+        <p:nvSpPr>
+          <p:cNvPr id="8" name="Right Arrow 7"/>
           <p:cNvSpPr/>
           <p:nvPr/>
         </p:nvSpPr>
         <p:spPr>
           <a:xfrm>
-            <a:off x="914400" y="1627632"/>
-            <a:ext cx="1417320" cy="530352"/>
-          </a:xfrm>
-          <a:prstGeom prst="roundRect">
+            <a:off x="2331720" y="1508760"/>
+            <a:ext cx="182880" cy="201168"/>
+          </a:xfrm>
+          <a:prstGeom prst="rightArrow">
             <a:avLst/>
           </a:prstGeom>
           <a:solidFill>
-            <a:srgbClr val="0F2744"/>
+            <a:srgbClr val="2563EB"/>
           </a:solidFill>
-          <a:ln w="19050">
-            <a:solidFill>
-              <a:srgbClr val="0F2744"/>
-            </a:solidFill>
+          <a:ln>
+            <a:noFill/>
           </a:ln>
         </p:spPr>
         <p:style>
@@ -5477,42 +5409,34 @@
           </a:fontRef>
         </p:style>
         <p:txBody>
-          <a:bodyPr rtlCol="0" anchor="ctr" wrap="square"/>
-          <a:lstStyle/>
-          <a:p>
-            <a:pPr algn="ctr">
-              <a:defRPr sz="1800" b="1">
-                <a:solidFill>
-                  <a:srgbClr val="FFFFFF"/>
-                </a:solidFill>
-                <a:latin typeface="Arial"/>
-              </a:defRPr>
-            </a:pPr>
-            <a:r>
-              <a:t>Requirements</a:t>
-            </a:r>
-          </a:p>
-        </p:txBody>
-      </p:sp>
-      <p:sp>
-        <p:nvSpPr>
-          <p:cNvPr id="9" name="Right Arrow 8"/>
+          <a:bodyPr rtlCol="0" anchor="ctr"/>
+          <a:lstStyle/>
+          <a:p>
+            <a:pPr algn="ctr"/>
+          </a:p>
+        </p:txBody>
+      </p:sp>
+      <p:sp>
+        <p:nvSpPr>
+          <p:cNvPr id="9" name="Rectangle 8"/>
           <p:cNvSpPr/>
           <p:nvPr/>
         </p:nvSpPr>
         <p:spPr>
           <a:xfrm>
-            <a:off x="2404872" y="1792224"/>
-            <a:ext cx="201168" cy="182880"/>
-          </a:xfrm>
-          <a:prstGeom prst="rightArrow">
+            <a:off x="2560320" y="1325880"/>
+            <a:ext cx="1554480" cy="594360"/>
+          </a:xfrm>
+          <a:prstGeom prst="rect">
             <a:avLst/>
           </a:prstGeom>
           <a:solidFill>
-            <a:srgbClr val="1D4ED8"/>
+            <a:srgbClr val="0F172A"/>
           </a:solidFill>
-          <a:ln>
-            <a:noFill/>
+          <a:ln w="19050">
+            <a:solidFill>
+              <a:srgbClr val="0F172A"/>
+            </a:solidFill>
           </a:ln>
         </p:spPr>
         <p:style>
@@ -5530,34 +5454,42 @@
           </a:fontRef>
         </p:style>
         <p:txBody>
-          <a:bodyPr rtlCol="0" anchor="ctr"/>
-          <a:lstStyle/>
-          <a:p>
-            <a:pPr algn="ctr"/>
-          </a:p>
-        </p:txBody>
-      </p:sp>
-      <p:sp>
-        <p:nvSpPr>
-          <p:cNvPr id="10" name="Rounded Rectangle 9"/>
+          <a:bodyPr rtlCol="0" anchor="ctr" wrap="square"/>
+          <a:lstStyle/>
+          <a:p>
+            <a:pPr algn="ctr">
+              <a:defRPr sz="1900" b="1">
+                <a:solidFill>
+                  <a:srgbClr val="FFFFFF"/>
+                </a:solidFill>
+                <a:latin typeface="Arial"/>
+              </a:defRPr>
+            </a:pPr>
+            <a:r>
+              <a:t>Design</a:t>
+            </a:r>
+          </a:p>
+        </p:txBody>
+      </p:sp>
+      <p:sp>
+        <p:nvSpPr>
+          <p:cNvPr id="10" name="Right Arrow 9"/>
           <p:cNvSpPr/>
           <p:nvPr/>
         </p:nvSpPr>
         <p:spPr>
           <a:xfrm>
-            <a:off x="2697480" y="1627632"/>
-            <a:ext cx="1417320" cy="530352"/>
-          </a:xfrm>
-          <a:prstGeom prst="roundRect">
+            <a:off x="4160520" y="1508760"/>
+            <a:ext cx="182880" cy="201168"/>
+          </a:xfrm>
+          <a:prstGeom prst="rightArrow">
             <a:avLst/>
           </a:prstGeom>
           <a:solidFill>
-            <a:srgbClr val="0F2744"/>
+            <a:srgbClr val="2563EB"/>
           </a:solidFill>
-          <a:ln w="19050">
-            <a:solidFill>
-              <a:srgbClr val="0F2744"/>
-            </a:solidFill>
+          <a:ln>
+            <a:noFill/>
           </a:ln>
         </p:spPr>
         <p:style>
@@ -5575,42 +5507,34 @@
           </a:fontRef>
         </p:style>
         <p:txBody>
-          <a:bodyPr rtlCol="0" anchor="ctr" wrap="square"/>
-          <a:lstStyle/>
-          <a:p>
-            <a:pPr algn="ctr">
-              <a:defRPr sz="1800" b="1">
-                <a:solidFill>
-                  <a:srgbClr val="FFFFFF"/>
-                </a:solidFill>
-                <a:latin typeface="Arial"/>
-              </a:defRPr>
-            </a:pPr>
-            <a:r>
-              <a:t>System Design</a:t>
-            </a:r>
-          </a:p>
-        </p:txBody>
-      </p:sp>
-      <p:sp>
-        <p:nvSpPr>
-          <p:cNvPr id="11" name="Right Arrow 10"/>
+          <a:bodyPr rtlCol="0" anchor="ctr"/>
+          <a:lstStyle/>
+          <a:p>
+            <a:pPr algn="ctr"/>
+          </a:p>
+        </p:txBody>
+      </p:sp>
+      <p:sp>
+        <p:nvSpPr>
+          <p:cNvPr id="11" name="Rectangle 10"/>
           <p:cNvSpPr/>
           <p:nvPr/>
         </p:nvSpPr>
         <p:spPr>
           <a:xfrm>
-            <a:off x="4187952" y="1792224"/>
-            <a:ext cx="201168" cy="182880"/>
-          </a:xfrm>
-          <a:prstGeom prst="rightArrow">
+            <a:off x="4389120" y="1325880"/>
+            <a:ext cx="1554480" cy="594360"/>
+          </a:xfrm>
+          <a:prstGeom prst="rect">
             <a:avLst/>
           </a:prstGeom>
           <a:solidFill>
-            <a:srgbClr val="1D4ED8"/>
+            <a:srgbClr val="0F172A"/>
           </a:solidFill>
-          <a:ln>
-            <a:noFill/>
+          <a:ln w="19050">
+            <a:solidFill>
+              <a:srgbClr val="0F172A"/>
+            </a:solidFill>
           </a:ln>
         </p:spPr>
         <p:style>
@@ -5628,34 +5552,42 @@
           </a:fontRef>
         </p:style>
         <p:txBody>
-          <a:bodyPr rtlCol="0" anchor="ctr"/>
-          <a:lstStyle/>
-          <a:p>
-            <a:pPr algn="ctr"/>
-          </a:p>
-        </p:txBody>
-      </p:sp>
-      <p:sp>
-        <p:nvSpPr>
-          <p:cNvPr id="12" name="Rounded Rectangle 11"/>
+          <a:bodyPr rtlCol="0" anchor="ctr" wrap="square"/>
+          <a:lstStyle/>
+          <a:p>
+            <a:pPr algn="ctr">
+              <a:defRPr sz="1900" b="1">
+                <a:solidFill>
+                  <a:srgbClr val="FFFFFF"/>
+                </a:solidFill>
+                <a:latin typeface="Arial"/>
+              </a:defRPr>
+            </a:pPr>
+            <a:r>
+              <a:t>Implementation</a:t>
+            </a:r>
+          </a:p>
+        </p:txBody>
+      </p:sp>
+      <p:sp>
+        <p:nvSpPr>
+          <p:cNvPr id="12" name="Right Arrow 11"/>
           <p:cNvSpPr/>
           <p:nvPr/>
         </p:nvSpPr>
         <p:spPr>
           <a:xfrm>
-            <a:off x="4480560" y="1627632"/>
-            <a:ext cx="1417320" cy="530352"/>
-          </a:xfrm>
-          <a:prstGeom prst="roundRect">
+            <a:off x="5989320" y="1508760"/>
+            <a:ext cx="182880" cy="201168"/>
+          </a:xfrm>
+          <a:prstGeom prst="rightArrow">
             <a:avLst/>
           </a:prstGeom>
           <a:solidFill>
-            <a:srgbClr val="0F2744"/>
+            <a:srgbClr val="2563EB"/>
           </a:solidFill>
-          <a:ln w="19050">
-            <a:solidFill>
-              <a:srgbClr val="0F2744"/>
-            </a:solidFill>
+          <a:ln>
+            <a:noFill/>
           </a:ln>
         </p:spPr>
         <p:style>
@@ -5673,42 +5605,34 @@
           </a:fontRef>
         </p:style>
         <p:txBody>
-          <a:bodyPr rtlCol="0" anchor="ctr" wrap="square"/>
-          <a:lstStyle/>
-          <a:p>
-            <a:pPr algn="ctr">
-              <a:defRPr sz="1800" b="1">
-                <a:solidFill>
-                  <a:srgbClr val="FFFFFF"/>
-                </a:solidFill>
-                <a:latin typeface="Arial"/>
-              </a:defRPr>
-            </a:pPr>
-            <a:r>
-              <a:t>Implementation</a:t>
-            </a:r>
-          </a:p>
-        </p:txBody>
-      </p:sp>
-      <p:sp>
-        <p:nvSpPr>
-          <p:cNvPr id="13" name="Right Arrow 12"/>
+          <a:bodyPr rtlCol="0" anchor="ctr"/>
+          <a:lstStyle/>
+          <a:p>
+            <a:pPr algn="ctr"/>
+          </a:p>
+        </p:txBody>
+      </p:sp>
+      <p:sp>
+        <p:nvSpPr>
+          <p:cNvPr id="13" name="Rectangle 12"/>
           <p:cNvSpPr/>
           <p:nvPr/>
         </p:nvSpPr>
         <p:spPr>
           <a:xfrm>
-            <a:off x="5971032" y="1792224"/>
-            <a:ext cx="201168" cy="182880"/>
-          </a:xfrm>
-          <a:prstGeom prst="rightArrow">
+            <a:off x="6217920" y="1325880"/>
+            <a:ext cx="1554480" cy="594360"/>
+          </a:xfrm>
+          <a:prstGeom prst="rect">
             <a:avLst/>
           </a:prstGeom>
           <a:solidFill>
-            <a:srgbClr val="1D4ED8"/>
+            <a:srgbClr val="0F172A"/>
           </a:solidFill>
-          <a:ln>
-            <a:noFill/>
+          <a:ln w="19050">
+            <a:solidFill>
+              <a:srgbClr val="0F172A"/>
+            </a:solidFill>
           </a:ln>
         </p:spPr>
         <p:style>
@@ -5726,34 +5650,42 @@
           </a:fontRef>
         </p:style>
         <p:txBody>
-          <a:bodyPr rtlCol="0" anchor="ctr"/>
-          <a:lstStyle/>
-          <a:p>
-            <a:pPr algn="ctr"/>
-          </a:p>
-        </p:txBody>
-      </p:sp>
-      <p:sp>
-        <p:nvSpPr>
-          <p:cNvPr id="14" name="Rounded Rectangle 13"/>
+          <a:bodyPr rtlCol="0" anchor="ctr" wrap="square"/>
+          <a:lstStyle/>
+          <a:p>
+            <a:pPr algn="ctr">
+              <a:defRPr sz="1900" b="1">
+                <a:solidFill>
+                  <a:srgbClr val="FFFFFF"/>
+                </a:solidFill>
+                <a:latin typeface="Arial"/>
+              </a:defRPr>
+            </a:pPr>
+            <a:r>
+              <a:t>Security</a:t>
+            </a:r>
+          </a:p>
+        </p:txBody>
+      </p:sp>
+      <p:sp>
+        <p:nvSpPr>
+          <p:cNvPr id="14" name="Right Arrow 13"/>
           <p:cNvSpPr/>
           <p:nvPr/>
         </p:nvSpPr>
         <p:spPr>
           <a:xfrm>
-            <a:off x="6263640" y="1627632"/>
-            <a:ext cx="1417320" cy="530352"/>
-          </a:xfrm>
-          <a:prstGeom prst="roundRect">
+            <a:off x="7818120" y="1508760"/>
+            <a:ext cx="182880" cy="201168"/>
+          </a:xfrm>
+          <a:prstGeom prst="rightArrow">
             <a:avLst/>
           </a:prstGeom>
           <a:solidFill>
-            <a:srgbClr val="0F2744"/>
+            <a:srgbClr val="2563EB"/>
           </a:solidFill>
-          <a:ln w="19050">
-            <a:solidFill>
-              <a:srgbClr val="0F2744"/>
-            </a:solidFill>
+          <a:ln>
+            <a:noFill/>
           </a:ln>
         </p:spPr>
         <p:style>
@@ -5771,42 +5703,34 @@
           </a:fontRef>
         </p:style>
         <p:txBody>
-          <a:bodyPr rtlCol="0" anchor="ctr" wrap="square"/>
-          <a:lstStyle/>
-          <a:p>
-            <a:pPr algn="ctr">
-              <a:defRPr sz="1800" b="1">
-                <a:solidFill>
-                  <a:srgbClr val="FFFFFF"/>
-                </a:solidFill>
-                <a:latin typeface="Arial"/>
-              </a:defRPr>
-            </a:pPr>
-            <a:r>
-              <a:t>Security</a:t>
-            </a:r>
-          </a:p>
-        </p:txBody>
-      </p:sp>
-      <p:sp>
-        <p:nvSpPr>
-          <p:cNvPr id="15" name="Right Arrow 14"/>
+          <a:bodyPr rtlCol="0" anchor="ctr"/>
+          <a:lstStyle/>
+          <a:p>
+            <a:pPr algn="ctr"/>
+          </a:p>
+        </p:txBody>
+      </p:sp>
+      <p:sp>
+        <p:nvSpPr>
+          <p:cNvPr id="15" name="Rectangle 14"/>
           <p:cNvSpPr/>
           <p:nvPr/>
         </p:nvSpPr>
         <p:spPr>
           <a:xfrm>
-            <a:off x="7754112" y="1792224"/>
-            <a:ext cx="201168" cy="182880"/>
-          </a:xfrm>
-          <a:prstGeom prst="rightArrow">
+            <a:off x="8046720" y="1325880"/>
+            <a:ext cx="1554480" cy="594360"/>
+          </a:xfrm>
+          <a:prstGeom prst="rect">
             <a:avLst/>
           </a:prstGeom>
           <a:solidFill>
-            <a:srgbClr val="1D4ED8"/>
+            <a:srgbClr val="0F172A"/>
           </a:solidFill>
-          <a:ln>
-            <a:noFill/>
+          <a:ln w="19050">
+            <a:solidFill>
+              <a:srgbClr val="0F172A"/>
+            </a:solidFill>
           </a:ln>
         </p:spPr>
         <p:style>
@@ -5824,34 +5748,42 @@
           </a:fontRef>
         </p:style>
         <p:txBody>
-          <a:bodyPr rtlCol="0" anchor="ctr"/>
-          <a:lstStyle/>
-          <a:p>
-            <a:pPr algn="ctr"/>
-          </a:p>
-        </p:txBody>
-      </p:sp>
-      <p:sp>
-        <p:nvSpPr>
-          <p:cNvPr id="16" name="Rounded Rectangle 15"/>
+          <a:bodyPr rtlCol="0" anchor="ctr" wrap="square"/>
+          <a:lstStyle/>
+          <a:p>
+            <a:pPr algn="ctr">
+              <a:defRPr sz="1900" b="1">
+                <a:solidFill>
+                  <a:srgbClr val="FFFFFF"/>
+                </a:solidFill>
+                <a:latin typeface="Arial"/>
+              </a:defRPr>
+            </a:pPr>
+            <a:r>
+              <a:t>Testing</a:t>
+            </a:r>
+          </a:p>
+        </p:txBody>
+      </p:sp>
+      <p:sp>
+        <p:nvSpPr>
+          <p:cNvPr id="16" name="Right Arrow 15"/>
           <p:cNvSpPr/>
           <p:nvPr/>
         </p:nvSpPr>
         <p:spPr>
           <a:xfrm>
-            <a:off x="8046720" y="1627632"/>
-            <a:ext cx="1417320" cy="530352"/>
-          </a:xfrm>
-          <a:prstGeom prst="roundRect">
+            <a:off x="9646920" y="1508760"/>
+            <a:ext cx="182880" cy="201168"/>
+          </a:xfrm>
+          <a:prstGeom prst="rightArrow">
             <a:avLst/>
           </a:prstGeom>
           <a:solidFill>
-            <a:srgbClr val="0F2744"/>
+            <a:srgbClr val="2563EB"/>
           </a:solidFill>
-          <a:ln w="19050">
-            <a:solidFill>
-              <a:srgbClr val="0F2744"/>
-            </a:solidFill>
+          <a:ln>
+            <a:noFill/>
           </a:ln>
         </p:spPr>
         <p:style>
@@ -5869,42 +5801,34 @@
           </a:fontRef>
         </p:style>
         <p:txBody>
-          <a:bodyPr rtlCol="0" anchor="ctr" wrap="square"/>
-          <a:lstStyle/>
-          <a:p>
-            <a:pPr algn="ctr">
-              <a:defRPr sz="1800" b="1">
-                <a:solidFill>
-                  <a:srgbClr val="FFFFFF"/>
-                </a:solidFill>
-                <a:latin typeface="Arial"/>
-              </a:defRPr>
-            </a:pPr>
-            <a:r>
-              <a:t>Testing</a:t>
-            </a:r>
-          </a:p>
-        </p:txBody>
-      </p:sp>
-      <p:sp>
-        <p:nvSpPr>
-          <p:cNvPr id="17" name="Right Arrow 16"/>
+          <a:bodyPr rtlCol="0" anchor="ctr"/>
+          <a:lstStyle/>
+          <a:p>
+            <a:pPr algn="ctr"/>
+          </a:p>
+        </p:txBody>
+      </p:sp>
+      <p:sp>
+        <p:nvSpPr>
+          <p:cNvPr id="17" name="Rectangle 16"/>
           <p:cNvSpPr/>
           <p:nvPr/>
         </p:nvSpPr>
         <p:spPr>
           <a:xfrm>
-            <a:off x="9537192" y="1792224"/>
-            <a:ext cx="201168" cy="182880"/>
-          </a:xfrm>
-          <a:prstGeom prst="rightArrow">
+            <a:off x="9875520" y="1325880"/>
+            <a:ext cx="1584655" cy="594360"/>
+          </a:xfrm>
+          <a:prstGeom prst="rect">
             <a:avLst/>
           </a:prstGeom>
           <a:solidFill>
-            <a:srgbClr val="1D4ED8"/>
+            <a:srgbClr val="0F172A"/>
           </a:solidFill>
-          <a:ln>
-            <a:noFill/>
+          <a:ln w="19050">
+            <a:solidFill>
+              <a:srgbClr val="0F172A"/>
+            </a:solidFill>
           </a:ln>
         </p:spPr>
         <p:style>
@@ -5922,56 +5846,11 @@
           </a:fontRef>
         </p:style>
         <p:txBody>
-          <a:bodyPr rtlCol="0" anchor="ctr"/>
-          <a:lstStyle/>
-          <a:p>
-            <a:pPr algn="ctr"/>
-          </a:p>
-        </p:txBody>
-      </p:sp>
-      <p:sp>
-        <p:nvSpPr>
-          <p:cNvPr id="18" name="Rounded Rectangle 17"/>
-          <p:cNvSpPr/>
-          <p:nvPr/>
-        </p:nvSpPr>
-        <p:spPr>
-          <a:xfrm>
-            <a:off x="9829800" y="1627632"/>
-            <a:ext cx="1417320" cy="530352"/>
-          </a:xfrm>
-          <a:prstGeom prst="roundRect">
-            <a:avLst/>
-          </a:prstGeom>
-          <a:solidFill>
-            <a:srgbClr val="0F2744"/>
-          </a:solidFill>
-          <a:ln w="19050">
-            <a:solidFill>
-              <a:srgbClr val="0F2744"/>
-            </a:solidFill>
-          </a:ln>
-        </p:spPr>
-        <p:style>
-          <a:lnRef idx="1">
-            <a:schemeClr val="accent1"/>
-          </a:lnRef>
-          <a:fillRef idx="3">
-            <a:schemeClr val="accent1"/>
-          </a:fillRef>
-          <a:effectRef idx="2">
-            <a:schemeClr val="accent1"/>
-          </a:effectRef>
-          <a:fontRef idx="minor">
-            <a:schemeClr val="lt1"/>
-          </a:fontRef>
-        </p:style>
-        <p:txBody>
           <a:bodyPr rtlCol="0" anchor="ctr" wrap="square"/>
           <a:lstStyle/>
           <a:p>
             <a:pPr algn="ctr">
-              <a:defRPr sz="1800" b="1">
+              <a:defRPr sz="1900" b="1">
                 <a:solidFill>
                   <a:srgbClr val="FFFFFF"/>
                 </a:solidFill>
@@ -5986,59 +5865,14 @@
       </p:sp>
       <p:sp>
         <p:nvSpPr>
-          <p:cNvPr id="19" name="Rounded Rectangle 18"/>
-          <p:cNvSpPr/>
-          <p:nvPr/>
-        </p:nvSpPr>
-        <p:spPr>
-          <a:xfrm>
-            <a:off x="731520" y="2651760"/>
-            <a:ext cx="10728655" cy="3429000"/>
-          </a:xfrm>
-          <a:prstGeom prst="roundRect">
-            <a:avLst/>
-          </a:prstGeom>
-          <a:solidFill>
-            <a:srgbClr val="FFFFFF"/>
-          </a:solidFill>
-          <a:ln w="15240">
-            <a:solidFill>
-              <a:srgbClr val="CBD5E1"/>
-            </a:solidFill>
-          </a:ln>
-        </p:spPr>
-        <p:style>
-          <a:lnRef idx="1">
-            <a:schemeClr val="accent1"/>
-          </a:lnRef>
-          <a:fillRef idx="3">
-            <a:schemeClr val="accent1"/>
-          </a:fillRef>
-          <a:effectRef idx="2">
-            <a:schemeClr val="accent1"/>
-          </a:effectRef>
-          <a:fontRef idx="minor">
-            <a:schemeClr val="lt1"/>
-          </a:fontRef>
-        </p:style>
-        <p:txBody>
-          <a:bodyPr rtlCol="0" anchor="ctr"/>
-          <a:lstStyle/>
-          <a:p>
-            <a:pPr algn="ctr"/>
-          </a:p>
-        </p:txBody>
-      </p:sp>
-      <p:sp>
-        <p:nvSpPr>
-          <p:cNvPr id="20" name="TextBox 19"/>
+          <p:cNvPr id="18" name="TextBox 17"/>
           <p:cNvSpPr txBox="1"/>
           <p:nvPr/>
         </p:nvSpPr>
         <p:spPr>
           <a:xfrm>
-            <a:off x="914400" y="2788920"/>
-            <a:ext cx="10332720" cy="365760"/>
+            <a:off x="731520" y="2194560"/>
+            <a:ext cx="10728655" cy="365760"/>
           </a:xfrm>
           <a:prstGeom prst="rect">
             <a:avLst/>
@@ -6052,29 +5886,29 @@
           <a:lstStyle/>
           <a:p>
             <a:pPr>
-              <a:defRPr sz="2200" b="1">
-                <a:solidFill>
-                  <a:srgbClr val="0F2744"/>
-                </a:solidFill>
-                <a:latin typeface="Arial"/>
-              </a:defRPr>
-            </a:pPr>
-            <a:r>
-              <a:t>Requirements Traceability: Demand  →  Engineering Implementation</a:t>
-            </a:r>
-          </a:p>
-        </p:txBody>
-      </p:sp>
-      <p:sp>
-        <p:nvSpPr>
-          <p:cNvPr id="21" name="TextBox 20"/>
+              <a:defRPr sz="2400" b="1">
+                <a:solidFill>
+                  <a:srgbClr val="0F172A"/>
+                </a:solidFill>
+                <a:latin typeface="Arial"/>
+              </a:defRPr>
+            </a:pPr>
+            <a:r>
+              <a:t>Requirement → Implementation Traceability Mapping</a:t>
+            </a:r>
+          </a:p>
+        </p:txBody>
+      </p:sp>
+      <p:sp>
+        <p:nvSpPr>
+          <p:cNvPr id="19" name="TextBox 18"/>
           <p:cNvSpPr txBox="1"/>
           <p:nvPr/>
         </p:nvSpPr>
         <p:spPr>
           <a:xfrm>
-            <a:off x="914400" y="3246120"/>
-            <a:ext cx="10332720" cy="2697480"/>
+            <a:off x="731520" y="2651760"/>
+            <a:ext cx="10728655" cy="3383280"/>
           </a:xfrm>
           <a:prstGeom prst="rect">
             <a:avLst/>
@@ -6088,195 +5922,183 @@
           <a:lstStyle/>
           <a:p>
             <a:r>
-              <a:rPr b="1" sz="1900">
-                <a:solidFill>
-                  <a:srgbClr val="1D4ED8"/>
-                </a:solidFill>
-                <a:latin typeface="Arial"/>
+              <a:rPr b="1" sz="2000">
+                <a:solidFill>
+                  <a:srgbClr val="2563EB"/>
+                </a:solidFill>
               </a:rPr>
-              <a:t>Secure Multi-Role Access         </a:t>
+              <a:t>• Secure Access             </a:t>
             </a:r>
             <a:r>
               <a:rPr b="1" sz="2000">
                 <a:solidFill>
-                  <a:srgbClr val="0F2744"/>
+                  <a:srgbClr val="0F172A"/>
                 </a:solidFill>
               </a:rPr>
-              <a:t> →  </a:t>
-            </a:r>
-            <a:r>
-              <a:rPr sz="1900">
-                <a:solidFill>
-                  <a:srgbClr val="111827"/>
-                </a:solidFill>
-                <a:latin typeface="Arial"/>
+              <a:t>→   </a:t>
+            </a:r>
+            <a:r>
+              <a:rPr sz="2000">
+                <a:solidFill>
+                  <a:srgbClr val="1E293B"/>
+                </a:solidFill>
               </a:rPr>
-              <a:t>bcryptjs (10 rounds) + Stateless JWT with verifyToken / requireRole middleware guards</a:t>
+              <a:t>Stateless JWT authentication + bcryptjs hashing + verifyToken middleware</a:t>
             </a:r>
           </a:p>
           <a:p>
             <a:pPr>
               <a:spcBef>
-                <a:spcPts val="800"/>
+                <a:spcPts val="1000"/>
               </a:spcBef>
             </a:pPr>
             <a:r>
-              <a:rPr b="1" sz="1900">
-                <a:solidFill>
-                  <a:srgbClr val="1D4ED8"/>
-                </a:solidFill>
-                <a:latin typeface="Arial"/>
+              <a:rPr b="1" sz="2000">
+                <a:solidFill>
+                  <a:srgbClr val="2563EB"/>
+                </a:solidFill>
               </a:rPr>
-              <a:t>Structured Grievance Lodging     </a:t>
+              <a:t>• Complaint Lodging         </a:t>
             </a:r>
             <a:r>
               <a:rPr b="1" sz="2000">
                 <a:solidFill>
-                  <a:srgbClr val="0F2744"/>
+                  <a:srgbClr val="0F172A"/>
                 </a:solidFill>
               </a:rPr>
-              <a:t> →  </a:t>
-            </a:r>
-            <a:r>
-              <a:rPr sz="1900">
-                <a:solidFill>
-                  <a:srgbClr val="111827"/>
-                </a:solidFill>
-                <a:latin typeface="Arial"/>
+              <a:t>→   </a:t>
+            </a:r>
+            <a:r>
+              <a:rPr sz="2000">
+                <a:solidFill>
+                  <a:srgbClr val="1E293B"/>
+                </a:solidFill>
               </a:rPr>
-              <a:t>Dynamic React form with Category &amp; Location dropdowns + Multer photo attachment</a:t>
+              <a:t>Dynamic React form + campus category &amp; room mapping + Multer photo upload</a:t>
             </a:r>
           </a:p>
           <a:p>
             <a:pPr>
               <a:spcBef>
-                <a:spcPts val="800"/>
+                <a:spcPts val="1000"/>
               </a:spcBef>
             </a:pPr>
             <a:r>
-              <a:rPr b="1" sz="1900">
-                <a:solidFill>
-                  <a:srgbClr val="1D4ED8"/>
-                </a:solidFill>
-                <a:latin typeface="Arial"/>
+              <a:rPr b="1" sz="2000">
+                <a:solidFill>
+                  <a:srgbClr val="2563EB"/>
+                </a:solidFill>
               </a:rPr>
-              <a:t>Administrative Triage &amp; Control  </a:t>
+              <a:t>• Admin Control             </a:t>
             </a:r>
             <a:r>
               <a:rPr b="1" sz="2000">
                 <a:solidFill>
-                  <a:srgbClr val="0F2744"/>
+                  <a:srgbClr val="0F172A"/>
                 </a:solidFill>
               </a:rPr>
-              <a:t> →  </a:t>
-            </a:r>
-            <a:r>
-              <a:rPr sz="1900">
-                <a:solidFill>
-                  <a:srgbClr val="111827"/>
-                </a:solidFill>
-                <a:latin typeface="Arial"/>
+              <a:t>→   </a:t>
+            </a:r>
+            <a:r>
+              <a:rPr sz="2000">
+                <a:solidFill>
+                  <a:srgbClr val="1E293B"/>
+                </a:solidFill>
               </a:rPr>
-              <a:t>Centralized Admin Dashboard with status filtering and one-click Verify / Reject actions</a:t>
+              <a:t>Centralized administrative dashboard with status filters + staff assignment</a:t>
             </a:r>
           </a:p>
           <a:p>
             <a:pPr>
               <a:spcBef>
-                <a:spcPts val="800"/>
+                <a:spcPts val="1000"/>
               </a:spcBef>
             </a:pPr>
             <a:r>
-              <a:rPr b="1" sz="1900">
-                <a:solidFill>
-                  <a:srgbClr val="1D4ED8"/>
-                </a:solidFill>
-                <a:latin typeface="Arial"/>
+              <a:rPr b="1" sz="2000">
+                <a:solidFill>
+                  <a:srgbClr val="2563EB"/>
+                </a:solidFill>
               </a:rPr>
-              <a:t>Technician Task Dispatching      </a:t>
+              <a:t>• Audited Lifecycle         </a:t>
             </a:r>
             <a:r>
               <a:rPr b="1" sz="2000">
                 <a:solidFill>
-                  <a:srgbClr val="0F2744"/>
+                  <a:srgbClr val="0F172A"/>
                 </a:solidFill>
               </a:rPr>
-              <a:t> →  </a:t>
-            </a:r>
-            <a:r>
-              <a:rPr sz="1900">
-                <a:solidFill>
-                  <a:srgbClr val="111827"/>
-                </a:solidFill>
-                <a:latin typeface="Arial"/>
+              <a:t>→   </a:t>
+            </a:r>
+            <a:r>
+              <a:rPr sz="2000">
+                <a:solidFill>
+                  <a:srgbClr val="1E293B"/>
+                </a:solidFill>
               </a:rPr>
-              <a:t>Assignment controller dispatching work orders to dedicated staff task queues</a:t>
+              <a:t>Strict server-side Finite State Machine validator + immutable complaint_updates log</a:t>
             </a:r>
           </a:p>
           <a:p>
             <a:pPr>
               <a:spcBef>
-                <a:spcPts val="800"/>
+                <a:spcPts val="1000"/>
               </a:spcBef>
             </a:pPr>
             <a:r>
-              <a:rPr b="1" sz="1900">
-                <a:solidFill>
-                  <a:srgbClr val="1D4ED8"/>
-                </a:solidFill>
-                <a:latin typeface="Arial"/>
+              <a:rPr b="1" sz="2000">
+                <a:solidFill>
+                  <a:srgbClr val="2563EB"/>
+                </a:solidFill>
               </a:rPr>
-              <a:t>Audited Lifecycle Governance     </a:t>
+              <a:t>• Technician Execution      </a:t>
             </a:r>
             <a:r>
               <a:rPr b="1" sz="2000">
                 <a:solidFill>
-                  <a:srgbClr val="0F2744"/>
+                  <a:srgbClr val="0F172A"/>
                 </a:solidFill>
               </a:rPr>
-              <a:t> →  </a:t>
-            </a:r>
-            <a:r>
-              <a:rPr sz="1900">
-                <a:solidFill>
-                  <a:srgbClr val="111827"/>
-                </a:solidFill>
-                <a:latin typeface="Arial"/>
+              <a:t>→   </a:t>
+            </a:r>
+            <a:r>
+              <a:rPr sz="2000">
+                <a:solidFill>
+                  <a:srgbClr val="1E293B"/>
+                </a:solidFill>
               </a:rPr>
-              <a:t>Finite State Machine transition validator with immutable complaint_updates logging</a:t>
+              <a:t>Dedicated work order queue with real-time status progression (IN_PROGRESS → RESOLVED)</a:t>
             </a:r>
           </a:p>
           <a:p>
             <a:pPr>
               <a:spcBef>
-                <a:spcPts val="800"/>
+                <a:spcPts val="1000"/>
               </a:spcBef>
             </a:pPr>
             <a:r>
-              <a:rPr b="1" sz="1900">
-                <a:solidFill>
-                  <a:srgbClr val="1D4ED8"/>
-                </a:solidFill>
-                <a:latin typeface="Arial"/>
+              <a:rPr b="1" sz="2000">
+                <a:solidFill>
+                  <a:srgbClr val="2563EB"/>
+                </a:solidFill>
               </a:rPr>
-              <a:t>Resolution Verification &amp; Quality </a:t>
+              <a:t>• Quality Feedback          </a:t>
             </a:r>
             <a:r>
               <a:rPr b="1" sz="2000">
                 <a:solidFill>
-                  <a:srgbClr val="0F2744"/>
+                  <a:srgbClr val="0F172A"/>
                 </a:solidFill>
               </a:rPr>
-              <a:t> →  </a:t>
-            </a:r>
-            <a:r>
-              <a:rPr sz="1900">
-                <a:solidFill>
-                  <a:srgbClr val="111827"/>
-                </a:solidFill>
-                <a:latin typeface="Arial"/>
+              <a:t>→   </a:t>
+            </a:r>
+            <a:r>
+              <a:rPr sz="2000">
+                <a:solidFill>
+                  <a:srgbClr val="1E293B"/>
+                </a:solidFill>
               </a:rPr>
-              <a:t>1 to 5 star student rating submission + reopening capability for unresolved issues</a:t>
+              <a:t>Post-resolution 1 to 5 star rating submission + reopening mechanism for recurring issues</a:t>
             </a:r>
           </a:p>
         </p:txBody>
@@ -6316,7 +6138,7 @@
           <a:noFill/>
         </p:spPr>
         <p:txBody>
-          <a:bodyPr wrap="square" lIns="0" tIns="0" rIns="0" bIns="0">
+          <a:bodyPr wrap="none" lIns="0" tIns="0" rIns="0" bIns="0">
             <a:spAutoFit/>
           </a:bodyPr>
           <a:lstStyle/>
@@ -6324,7 +6146,7 @@
             <a:pPr>
               <a:defRPr sz="1800" b="1">
                 <a:solidFill>
-                  <a:srgbClr val="1D4ED8"/>
+                  <a:srgbClr val="2563EB"/>
                 </a:solidFill>
                 <a:latin typeface="Arial"/>
               </a:defRPr>
@@ -6352,7 +6174,7 @@
           <a:noFill/>
         </p:spPr>
         <p:txBody>
-          <a:bodyPr wrap="square" lIns="0" tIns="0" rIns="0" bIns="0">
+          <a:bodyPr wrap="none" lIns="0" tIns="0" rIns="0" bIns="0">
             <a:spAutoFit/>
           </a:bodyPr>
           <a:lstStyle/>
@@ -6360,13 +6182,13 @@
             <a:pPr>
               <a:defRPr sz="3200" b="1">
                 <a:solidFill>
-                  <a:srgbClr val="0F2744"/>
-                </a:solidFill>
-                <a:latin typeface="Arial"/>
-              </a:defRPr>
-            </a:pPr>
-            <a:r>
-              <a:t>Decoupled 3-Tier Client-Server Architecture with Stateless API Security</a:t>
+                  <a:srgbClr val="0F172A"/>
+                </a:solidFill>
+                <a:latin typeface="Arial"/>
+              </a:defRPr>
+            </a:pPr>
+            <a:r>
+              <a:t>Decoupled 3-Tier Layered Architecture with Stateless API Security</a:t>
             </a:r>
           </a:p>
         </p:txBody>
@@ -6379,7 +6201,7 @@
         </p:nvSpPr>
         <p:spPr>
           <a:xfrm>
-            <a:off x="731520" y="6236208"/>
+            <a:off x="731520" y="6263640"/>
             <a:ext cx="10728655" cy="13716"/>
           </a:xfrm>
           <a:prstGeom prst="rect">
@@ -6423,7 +6245,7 @@
         <p:spPr>
           <a:xfrm>
             <a:off x="731520" y="6327648"/>
-            <a:ext cx="8412480" cy="320040"/>
+            <a:ext cx="8229600" cy="320040"/>
           </a:xfrm>
           <a:prstGeom prst="rect">
             <a:avLst/>
@@ -6439,13 +6261,13 @@
             <a:pPr>
               <a:defRPr sz="1600" b="1">
                 <a:solidFill>
-                  <a:srgbClr val="334155"/>
-                </a:solidFill>
-                <a:latin typeface="Arial"/>
-              </a:defRPr>
-            </a:pPr>
-            <a:r>
-              <a:t>Campus Complaint &amp; Maintenance Management System  |  Software Engineering Mini Project</a:t>
+                  <a:srgbClr val="475569"/>
+                </a:solidFill>
+                <a:latin typeface="Arial"/>
+              </a:defRPr>
+            </a:pPr>
+            <a:r>
+              <a:t>Campus Complaint &amp; Maintenance Management System  |  Software Engineering Lab</a:t>
             </a:r>
           </a:p>
         </p:txBody>
@@ -6475,7 +6297,7 @@
             <a:pPr algn="r">
               <a:defRPr sz="1600" b="1">
                 <a:solidFill>
-                  <a:srgbClr val="1D4ED8"/>
+                  <a:srgbClr val="2563EB"/>
                 </a:solidFill>
                 <a:latin typeface="Arial"/>
               </a:defRPr>
@@ -6488,24 +6310,24 @@
       </p:sp>
       <p:sp>
         <p:nvSpPr>
-          <p:cNvPr id="7" name="Rounded Rectangle 6"/>
+          <p:cNvPr id="7" name="Rectangle 6"/>
           <p:cNvSpPr/>
           <p:nvPr/>
         </p:nvSpPr>
         <p:spPr>
           <a:xfrm>
             <a:off x="731520" y="1325880"/>
-            <a:ext cx="5669280" cy="4754880"/>
-          </a:xfrm>
-          <a:prstGeom prst="roundRect">
+            <a:ext cx="5669280" cy="530352"/>
+          </a:xfrm>
+          <a:prstGeom prst="rect">
             <a:avLst/>
           </a:prstGeom>
           <a:solidFill>
-            <a:srgbClr val="F8FAFC"/>
+            <a:srgbClr val="FFFFFF"/>
           </a:solidFill>
-          <a:ln w="15240">
+          <a:ln w="19050">
             <a:solidFill>
-              <a:srgbClr val="CBD5E1"/>
+              <a:srgbClr val="0F172A"/>
             </a:solidFill>
           </a:ln>
         </p:spPr>
@@ -6524,6 +6346,59 @@
           </a:fontRef>
         </p:style>
         <p:txBody>
+          <a:bodyPr rtlCol="0" anchor="ctr" wrap="square"/>
+          <a:lstStyle/>
+          <a:p>
+            <a:pPr algn="ctr">
+              <a:defRPr sz="1800" b="1">
+                <a:solidFill>
+                  <a:srgbClr val="0F172A"/>
+                </a:solidFill>
+                <a:latin typeface="Arial"/>
+              </a:defRPr>
+            </a:pPr>
+            <a:r>
+              <a:t>Student  •  Faculty  •  Admin  •  Maintenance Staff</a:t>
+            </a:r>
+          </a:p>
+        </p:txBody>
+      </p:sp>
+      <p:sp>
+        <p:nvSpPr>
+          <p:cNvPr id="8" name="Down Arrow 7"/>
+          <p:cNvSpPr/>
+          <p:nvPr/>
+        </p:nvSpPr>
+        <p:spPr>
+          <a:xfrm>
+            <a:off x="3474720" y="1874519"/>
+            <a:ext cx="182880" cy="228600"/>
+          </a:xfrm>
+          <a:prstGeom prst="downArrow">
+            <a:avLst/>
+          </a:prstGeom>
+          <a:solidFill>
+            <a:srgbClr val="2563EB"/>
+          </a:solidFill>
+          <a:ln>
+            <a:noFill/>
+          </a:ln>
+        </p:spPr>
+        <p:style>
+          <a:lnRef idx="1">
+            <a:schemeClr val="accent1"/>
+          </a:lnRef>
+          <a:fillRef idx="3">
+            <a:schemeClr val="accent1"/>
+          </a:fillRef>
+          <a:effectRef idx="2">
+            <a:schemeClr val="accent1"/>
+          </a:effectRef>
+          <a:fontRef idx="minor">
+            <a:schemeClr val="lt1"/>
+          </a:fontRef>
+        </p:style>
+        <p:txBody>
           <a:bodyPr rtlCol="0" anchor="ctr"/>
           <a:lstStyle/>
           <a:p>
@@ -6533,16 +6408,16 @@
       </p:sp>
       <p:sp>
         <p:nvSpPr>
-          <p:cNvPr id="8" name="Rounded Rectangle 7"/>
+          <p:cNvPr id="9" name="Rectangle 8"/>
           <p:cNvSpPr/>
           <p:nvPr/>
         </p:nvSpPr>
         <p:spPr>
           <a:xfrm>
-            <a:off x="1005840" y="1554480"/>
-            <a:ext cx="5120640" cy="868680"/>
-          </a:xfrm>
-          <a:prstGeom prst="roundRect">
+            <a:off x="731520" y="2121408"/>
+            <a:ext cx="5669280" cy="658368"/>
+          </a:xfrm>
+          <a:prstGeom prst="rect">
             <a:avLst/>
           </a:prstGeom>
           <a:solidFill>
@@ -6550,7 +6425,7 @@
           </a:solidFill>
           <a:ln w="19050">
             <a:solidFill>
-              <a:srgbClr val="1D4ED8"/>
+              <a:srgbClr val="2563EB"/>
             </a:solidFill>
           </a:ln>
         </p:spPr>
@@ -6575,37 +6450,37 @@
             <a:pPr algn="ctr">
               <a:defRPr sz="1800" b="1">
                 <a:solidFill>
-                  <a:srgbClr val="0F2744"/>
-                </a:solidFill>
-                <a:latin typeface="Arial"/>
-              </a:defRPr>
-            </a:pPr>
-            <a:r>
-              <a:t>Presentation Tier (Client SPA)</a:t>
+                  <a:srgbClr val="0F172A"/>
+                </a:solidFill>
+                <a:latin typeface="Arial"/>
+              </a:defRPr>
+            </a:pPr>
+            <a:r>
+              <a:t>React 18 + Vite Frontend (SPA)</a:t>
             </a:r>
             <a:br/>
             <a:r>
-              <a:t>React 18 • Vite 5 • Tailwind CSS • Axios Interceptor</a:t>
-            </a:r>
-          </a:p>
-        </p:txBody>
-      </p:sp>
-      <p:sp>
-        <p:nvSpPr>
-          <p:cNvPr id="9" name="Down Arrow 8"/>
+              <a:t>Component Hierarchy • Tailwind CSS • Axios Client</a:t>
+            </a:r>
+          </a:p>
+        </p:txBody>
+      </p:sp>
+      <p:sp>
+        <p:nvSpPr>
+          <p:cNvPr id="10" name="Down Arrow 9"/>
           <p:cNvSpPr/>
           <p:nvPr/>
         </p:nvSpPr>
         <p:spPr>
           <a:xfrm>
-            <a:off x="3474720" y="2514600"/>
-            <a:ext cx="201168" cy="320040"/>
+            <a:off x="3474720" y="2798064"/>
+            <a:ext cx="182880" cy="228600"/>
           </a:xfrm>
           <a:prstGeom prst="downArrow">
             <a:avLst/>
           </a:prstGeom>
           <a:solidFill>
-            <a:srgbClr val="1D4ED8"/>
+            <a:srgbClr val="2563EB"/>
           </a:solidFill>
           <a:ln>
             <a:noFill/>
@@ -6635,51 +6510,16 @@
       </p:sp>
       <p:sp>
         <p:nvSpPr>
-          <p:cNvPr id="10" name="TextBox 9"/>
-          <p:cNvSpPr txBox="1"/>
-          <p:nvPr/>
-        </p:nvSpPr>
-        <p:spPr>
-          <a:xfrm>
-            <a:off x="3749039" y="2514600"/>
-            <a:ext cx="2377440" cy="320040"/>
-          </a:xfrm>
-          <a:prstGeom prst="rect">
-            <a:avLst/>
-          </a:prstGeom>
-          <a:noFill/>
-        </p:spPr>
-        <p:txBody>
-          <a:bodyPr wrap="none">
-            <a:spAutoFit/>
-          </a:bodyPr>
-          <a:lstStyle/>
-          <a:p>
-            <a:pPr>
-              <a:defRPr sz="1600" b="1">
-                <a:solidFill>
-                  <a:srgbClr val="1D4ED8"/>
-                </a:solidFill>
-              </a:defRPr>
-            </a:pPr>
-            <a:r>
-              <a:t>HTTPS REST + Bearer JWT</a:t>
-            </a:r>
-          </a:p>
-        </p:txBody>
-      </p:sp>
-      <p:sp>
-        <p:nvSpPr>
-          <p:cNvPr id="11" name="Rounded Rectangle 10"/>
+          <p:cNvPr id="11" name="Rectangle 10"/>
           <p:cNvSpPr/>
           <p:nvPr/>
         </p:nvSpPr>
         <p:spPr>
           <a:xfrm>
-            <a:off x="1005840" y="2926080"/>
-            <a:ext cx="5120640" cy="960120"/>
-          </a:xfrm>
-          <a:prstGeom prst="roundRect">
+            <a:off x="731520" y="3044952"/>
+            <a:ext cx="5669280" cy="658368"/>
+          </a:xfrm>
+          <a:prstGeom prst="rect">
             <a:avLst/>
           </a:prstGeom>
           <a:solidFill>
@@ -6687,7 +6527,7 @@
           </a:solidFill>
           <a:ln w="19050">
             <a:solidFill>
-              <a:srgbClr val="1D4ED8"/>
+              <a:srgbClr val="2563EB"/>
             </a:solidFill>
           </a:ln>
         </p:spPr>
@@ -6712,21 +6552,17 @@
             <a:pPr algn="ctr">
               <a:defRPr sz="1800" b="1">
                 <a:solidFill>
-                  <a:srgbClr val="0F2744"/>
-                </a:solidFill>
-                <a:latin typeface="Arial"/>
-              </a:defRPr>
-            </a:pPr>
-            <a:r>
-              <a:t>Application Tier (REST API Server)</a:t>
+                  <a:srgbClr val="0F172A"/>
+                </a:solidFill>
+                <a:latin typeface="Arial"/>
+              </a:defRPr>
+            </a:pPr>
+            <a:r>
+              <a:t>Node.js + Express REST API</a:t>
             </a:r>
             <a:br/>
             <a:r>
-              <a:t>Node.js 18 LTS • Express 4.19 • Multer Upload</a:t>
-            </a:r>
-            <a:br/>
-            <a:r>
-              <a:t>JWT Auth Middleware • State Machine Validator</a:t>
+              <a:t>Authentication • Validation • Multer Upload • State Machine</a:t>
             </a:r>
           </a:p>
         </p:txBody>
@@ -6739,14 +6575,14 @@
         </p:nvSpPr>
         <p:spPr>
           <a:xfrm>
-            <a:off x="3474720" y="3977639"/>
-            <a:ext cx="201168" cy="320040"/>
+            <a:off x="3474720" y="3721608"/>
+            <a:ext cx="182880" cy="228600"/>
           </a:xfrm>
           <a:prstGeom prst="downArrow">
             <a:avLst/>
           </a:prstGeom>
           <a:solidFill>
-            <a:srgbClr val="1D4ED8"/>
+            <a:srgbClr val="2563EB"/>
           </a:solidFill>
           <a:ln>
             <a:noFill/>
@@ -6776,59 +6612,24 @@
       </p:sp>
       <p:sp>
         <p:nvSpPr>
-          <p:cNvPr id="13" name="TextBox 12"/>
-          <p:cNvSpPr txBox="1"/>
-          <p:nvPr/>
-        </p:nvSpPr>
-        <p:spPr>
-          <a:xfrm>
-            <a:off x="3749039" y="3977639"/>
-            <a:ext cx="2377440" cy="320040"/>
-          </a:xfrm>
-          <a:prstGeom prst="rect">
-            <a:avLst/>
-          </a:prstGeom>
-          <a:noFill/>
-        </p:spPr>
-        <p:txBody>
-          <a:bodyPr wrap="none">
-            <a:spAutoFit/>
-          </a:bodyPr>
-          <a:lstStyle/>
-          <a:p>
-            <a:pPr>
-              <a:defRPr sz="1600" b="1">
-                <a:solidFill>
-                  <a:srgbClr val="1D4ED8"/>
-                </a:solidFill>
-              </a:defRPr>
-            </a:pPr>
-            <a:r>
-              <a:t>Parameterized Queries (Pool)</a:t>
-            </a:r>
-          </a:p>
-        </p:txBody>
-      </p:sp>
-      <p:sp>
-        <p:nvSpPr>
-          <p:cNvPr id="14" name="Rounded Rectangle 13"/>
+          <p:cNvPr id="13" name="Rectangle 12"/>
           <p:cNvSpPr/>
           <p:nvPr/>
         </p:nvSpPr>
         <p:spPr>
           <a:xfrm>
-            <a:off x="1005840" y="4389120"/>
-            <a:ext cx="5120640" cy="868680"/>
-          </a:xfrm>
-          <a:prstGeom prst="roundRect">
+            <a:off x="731520" y="3968496"/>
+            <a:ext cx="5669280" cy="658368"/>
+          </a:xfrm>
+          <a:prstGeom prst="rect">
             <a:avLst/>
           </a:prstGeom>
           <a:solidFill>
-            <a:srgbClr val="FFFFFF"/>
+            <a:srgbClr val="0F172A"/>
           </a:solidFill>
           <a:ln w="19050">
             <a:solidFill>
-              <a:srgbClr val="0F2744"/>
+              <a:srgbClr val="0F172A"/>
             </a:solidFill>
           </a:ln>
         </p:spPr>
@@ -6853,45 +6654,41 @@
             <a:pPr algn="ctr">
               <a:defRPr sz="1800" b="1">
                 <a:solidFill>
-                  <a:srgbClr val="0F2744"/>
-                </a:solidFill>
-                <a:latin typeface="Arial"/>
-              </a:defRPr>
-            </a:pPr>
-            <a:r>
-              <a:t>Data Tier (Relational Storage)</a:t>
+                  <a:srgbClr val="FFFFFF"/>
+                </a:solidFill>
+                <a:latin typeface="Arial"/>
+              </a:defRPr>
+            </a:pPr>
+            <a:r>
+              <a:t>MySQL 8 Relational Database (ccms_db)</a:t>
             </a:r>
             <a:br/>
             <a:r>
-              <a:t>MySQL 8 Relational Database (ccms_db)</a:t>
-            </a:r>
-            <a:br/>
-            <a:r>
-              <a:t>7 Normalized 3NF Tables • InnoDB Transactions</a:t>
-            </a:r>
-          </a:p>
-        </p:txBody>
-      </p:sp>
-      <p:sp>
-        <p:nvSpPr>
-          <p:cNvPr id="15" name="Rounded Rectangle 14"/>
+              <a:t>7 Normalized 3NF Tables • InnoDB Engine • Connection Pool</a:t>
+            </a:r>
+          </a:p>
+        </p:txBody>
+      </p:sp>
+      <p:sp>
+        <p:nvSpPr>
+          <p:cNvPr id="14" name="Rectangle 13"/>
           <p:cNvSpPr/>
           <p:nvPr/>
         </p:nvSpPr>
         <p:spPr>
           <a:xfrm>
-            <a:off x="6675120" y="1325880"/>
-            <a:ext cx="4785055" cy="4754880"/>
-          </a:xfrm>
-          <a:prstGeom prst="roundRect">
+            <a:off x="4389120" y="3044952"/>
+            <a:ext cx="1920240" cy="658368"/>
+          </a:xfrm>
+          <a:prstGeom prst="rect">
             <a:avLst/>
           </a:prstGeom>
           <a:solidFill>
-            <a:srgbClr val="FFFFFF"/>
+            <a:srgbClr val="F1F5F9"/>
           </a:solidFill>
-          <a:ln w="15240">
+          <a:ln w="19050">
             <a:solidFill>
-              <a:srgbClr val="CBD5E1"/>
+              <a:srgbClr val="2563EB"/>
             </a:solidFill>
           </a:ln>
         </p:spPr>
@@ -6910,23 +6707,37 @@
           </a:fontRef>
         </p:style>
         <p:txBody>
-          <a:bodyPr rtlCol="0" anchor="ctr"/>
-          <a:lstStyle/>
-          <a:p>
-            <a:pPr algn="ctr"/>
-          </a:p>
-        </p:txBody>
-      </p:sp>
-      <p:sp>
-        <p:nvSpPr>
-          <p:cNvPr id="16" name="TextBox 15"/>
+          <a:bodyPr rtlCol="0" anchor="ctr" wrap="square"/>
+          <a:lstStyle/>
+          <a:p>
+            <a:pPr algn="ctr">
+              <a:defRPr sz="1600" b="1">
+                <a:solidFill>
+                  <a:srgbClr val="2563EB"/>
+                </a:solidFill>
+                <a:latin typeface="Arial"/>
+              </a:defRPr>
+            </a:pPr>
+            <a:r>
+              <a:t>JWT Auth Sideflow</a:t>
+            </a:r>
+            <a:br/>
+            <a:r>
+              <a:t>verifyToken Guard</a:t>
+            </a:r>
+          </a:p>
+        </p:txBody>
+      </p:sp>
+      <p:sp>
+        <p:nvSpPr>
+          <p:cNvPr id="15" name="TextBox 14"/>
           <p:cNvSpPr txBox="1"/>
           <p:nvPr/>
         </p:nvSpPr>
         <p:spPr>
           <a:xfrm>
-            <a:off x="6903720" y="1508760"/>
-            <a:ext cx="4343400" cy="4389120"/>
+            <a:off x="6675120" y="1325880"/>
+            <a:ext cx="4785055" cy="4114800"/>
           </a:xfrm>
           <a:prstGeom prst="rect">
             <a:avLst/>
@@ -6941,11 +6752,11 @@
           <a:p>
             <a:pPr>
               <a:spcAft>
-                <a:spcPts val="1400"/>
+                <a:spcPts val="1600"/>
               </a:spcAft>
               <a:defRPr sz="2400" b="1">
                 <a:solidFill>
-                  <a:srgbClr val="0F2744"/>
+                  <a:srgbClr val="0F172A"/>
                 </a:solidFill>
                 <a:latin typeface="Arial"/>
               </a:defRPr>
@@ -6957,97 +6768,73 @@
           <a:p>
             <a:pPr>
               <a:spcBef>
-                <a:spcPts val="1000"/>
+                <a:spcPts val="1400"/>
               </a:spcBef>
             </a:pPr>
             <a:r>
-              <a:rPr b="1" sz="2000">
-                <a:solidFill>
-                  <a:srgbClr val="1D4ED8"/>
+              <a:rPr b="1" sz="2100">
+                <a:solidFill>
+                  <a:srgbClr val="2563EB"/>
                 </a:solidFill>
               </a:rPr>
-              <a:t>• Separation of Concerns:
+              <a:t>• Separation of Concerns
 </a:t>
             </a:r>
             <a:r>
               <a:rPr sz="1900">
                 <a:solidFill>
-                  <a:srgbClr val="111827"/>
+                  <a:srgbClr val="1E293B"/>
                 </a:solidFill>
               </a:rPr>
-              <a:t>The presentation layer is strictly decoupled from storage. The client never queries the database directly; all operations pass through audited REST controllers.</a:t>
+              <a:t>Presentation layer is strictly decoupled from storage. The client never accesses MySQL directly; all operations are governed by validated REST endpoints.</a:t>
             </a:r>
           </a:p>
           <a:p>
             <a:pPr>
               <a:spcBef>
-                <a:spcPts val="1000"/>
+                <a:spcPts val="1400"/>
               </a:spcBef>
             </a:pPr>
             <a:r>
-              <a:rPr b="1" sz="2000">
-                <a:solidFill>
-                  <a:srgbClr val="1D4ED8"/>
+              <a:rPr b="1" sz="2100">
+                <a:solidFill>
+                  <a:srgbClr val="2563EB"/>
                 </a:solidFill>
               </a:rPr>
-              <a:t>• Stateless Authorization:
+              <a:t>• Stateless JWT Authorization
 </a:t>
             </a:r>
             <a:r>
               <a:rPr sz="1900">
                 <a:solidFill>
-                  <a:srgbClr val="111827"/>
+                  <a:srgbClr val="1E293B"/>
                 </a:solidFill>
               </a:rPr>
-              <a:t>JSON Web Tokens (JWT) eliminate server-side session memory. Each request carries cryptographic proof of role, supporting seamless horizontal scaling.</a:t>
+              <a:t>Eliminates server session storage. Each request carries a signed HS256 Bearer token, enabling horizontal scaling and high concurrency.</a:t>
             </a:r>
           </a:p>
           <a:p>
             <a:pPr>
               <a:spcBef>
-                <a:spcPts val="1000"/>
+                <a:spcPts val="1400"/>
               </a:spcBef>
             </a:pPr>
             <a:r>
-              <a:rPr b="1" sz="2000">
-                <a:solidFill>
-                  <a:srgbClr val="1D4ED8"/>
+              <a:rPr b="1" sz="2100">
+                <a:solidFill>
+                  <a:srgbClr val="2563EB"/>
                 </a:solidFill>
               </a:rPr>
-              <a:t>• Relational Integrity &amp; ACID:
+              <a:t>• Relational Integrity &amp; ACID
 </a:t>
             </a:r>
             <a:r>
               <a:rPr sz="1900">
                 <a:solidFill>
-                  <a:srgbClr val="111827"/>
+                  <a:srgbClr val="1E293B"/>
                 </a:solidFill>
               </a:rPr>
-              <a:t>MySQL InnoDB engine enforces strict foreign keys, atomic transactions for status transitions, and data integrity across complaint history.</a:t>
-            </a:r>
-          </a:p>
-          <a:p>
-            <a:pPr>
-              <a:spcBef>
-                <a:spcPts val="1000"/>
-              </a:spcBef>
-            </a:pPr>
-            <a:r>
-              <a:rPr b="1" sz="2000">
-                <a:solidFill>
-                  <a:srgbClr val="1D4ED8"/>
-                </a:solidFill>
-              </a:rPr>
-              <a:t>• Defense in Depth Security:
-</a:t>
-            </a:r>
-            <a:r>
-              <a:rPr sz="1900">
-                <a:solidFill>
-                  <a:srgbClr val="111827"/>
-                </a:solidFill>
-              </a:rPr>
-              <a:t>Layered defense combining client route guards, express-validator sanitization, parameterized queries, and bcryptjs password salting.</a:t>
+              <a:t>Normalized schema with foreign key constraints, atomic transactions, and parameterized SQL queries eliminating SQL injection risks.</a:t>
             </a:r>
           </a:p>
         </p:txBody>
@@ -7087,7 +6874,7 @@
           <a:noFill/>
         </p:spPr>
         <p:txBody>
-          <a:bodyPr wrap="square" lIns="0" tIns="0" rIns="0" bIns="0">
+          <a:bodyPr wrap="none" lIns="0" tIns="0" rIns="0" bIns="0">
             <a:spAutoFit/>
           </a:bodyPr>
           <a:lstStyle/>
@@ -7095,7 +6882,7 @@
             <a:pPr>
               <a:defRPr sz="1800" b="1">
                 <a:solidFill>
-                  <a:srgbClr val="1D4ED8"/>
+                  <a:srgbClr val="2563EB"/>
                 </a:solidFill>
                 <a:latin typeface="Arial"/>
               </a:defRPr>
@@ -7123,7 +6910,7 @@
           <a:noFill/>
         </p:spPr>
         <p:txBody>
-          <a:bodyPr wrap="square" lIns="0" tIns="0" rIns="0" bIns="0">
+          <a:bodyPr wrap="none" lIns="0" tIns="0" rIns="0" bIns="0">
             <a:spAutoFit/>
           </a:bodyPr>
           <a:lstStyle/>
@@ -7131,7 +6918,7 @@
             <a:pPr>
               <a:defRPr sz="3200" b="1">
                 <a:solidFill>
-                  <a:srgbClr val="0F2744"/>
+                  <a:srgbClr val="0F172A"/>
                 </a:solidFill>
                 <a:latin typeface="Arial"/>
               </a:defRPr>
@@ -7150,7 +6937,7 @@
         </p:nvSpPr>
         <p:spPr>
           <a:xfrm>
-            <a:off x="731520" y="6236208"/>
+            <a:off x="731520" y="6263640"/>
             <a:ext cx="10728655" cy="13716"/>
           </a:xfrm>
           <a:prstGeom prst="rect">
@@ -7194,7 +6981,7 @@
         <p:spPr>
           <a:xfrm>
             <a:off x="731520" y="6327648"/>
-            <a:ext cx="8412480" cy="320040"/>
+            <a:ext cx="8229600" cy="320040"/>
           </a:xfrm>
           <a:prstGeom prst="rect">
             <a:avLst/>
@@ -7210,13 +6997,13 @@
             <a:pPr>
               <a:defRPr sz="1600" b="1">
                 <a:solidFill>
-                  <a:srgbClr val="334155"/>
-                </a:solidFill>
-                <a:latin typeface="Arial"/>
-              </a:defRPr>
-            </a:pPr>
-            <a:r>
-              <a:t>Campus Complaint &amp; Maintenance Management System  |  Software Engineering Mini Project</a:t>
+                  <a:srgbClr val="475569"/>
+                </a:solidFill>
+                <a:latin typeface="Arial"/>
+              </a:defRPr>
+            </a:pPr>
+            <a:r>
+              <a:t>Campus Complaint &amp; Maintenance Management System  |  Software Engineering Lab</a:t>
             </a:r>
           </a:p>
         </p:txBody>
@@ -7246,7 +7033,7 @@
             <a:pPr algn="r">
               <a:defRPr sz="1600" b="1">
                 <a:solidFill>
-                  <a:srgbClr val="1D4ED8"/>
+                  <a:srgbClr val="2563EB"/>
                 </a:solidFill>
                 <a:latin typeface="Arial"/>
               </a:defRPr>
@@ -7259,24 +7046,24 @@
       </p:sp>
       <p:sp>
         <p:nvSpPr>
-          <p:cNvPr id="7" name="Rounded Rectangle 6"/>
+          <p:cNvPr id="7" name="Rectangle 6"/>
           <p:cNvSpPr/>
           <p:nvPr/>
         </p:nvSpPr>
         <p:spPr>
           <a:xfrm>
-            <a:off x="731520" y="1325880"/>
-            <a:ext cx="10728655" cy="1965960"/>
-          </a:xfrm>
-          <a:prstGeom prst="roundRect">
+            <a:off x="731520" y="1463040"/>
+            <a:ext cx="1280160" cy="640080"/>
+          </a:xfrm>
+          <a:prstGeom prst="rect">
             <a:avLst/>
           </a:prstGeom>
           <a:solidFill>
-            <a:srgbClr val="F8FAFC"/>
+            <a:srgbClr val="0F172A"/>
           </a:solidFill>
-          <a:ln w="15240">
+          <a:ln w="19050">
             <a:solidFill>
-              <a:srgbClr val="CBD5E1"/>
+              <a:srgbClr val="0F172A"/>
             </a:solidFill>
           </a:ln>
         </p:spPr>
@@ -7295,70 +7082,42 @@
           </a:fontRef>
         </p:style>
         <p:txBody>
-          <a:bodyPr rtlCol="0" anchor="ctr"/>
-          <a:lstStyle/>
-          <a:p>
-            <a:pPr algn="ctr"/>
-          </a:p>
-        </p:txBody>
-      </p:sp>
-      <p:sp>
-        <p:nvSpPr>
-          <p:cNvPr id="8" name="TextBox 7"/>
-          <p:cNvSpPr txBox="1"/>
-          <p:nvPr/>
-        </p:nvSpPr>
-        <p:spPr>
-          <a:xfrm>
-            <a:off x="914400" y="1417320"/>
-            <a:ext cx="10332720" cy="320040"/>
-          </a:xfrm>
-          <a:prstGeom prst="rect">
-            <a:avLst/>
-          </a:prstGeom>
-          <a:noFill/>
-        </p:spPr>
-        <p:txBody>
-          <a:bodyPr wrap="none" lIns="0" tIns="0">
-            <a:spAutoFit/>
-          </a:bodyPr>
-          <a:lstStyle/>
-          <a:p>
-            <a:pPr>
-              <a:defRPr sz="2200" b="1">
-                <a:solidFill>
-                  <a:srgbClr val="0F2744"/>
-                </a:solidFill>
-                <a:latin typeface="Arial"/>
-              </a:defRPr>
-            </a:pPr>
-            <a:r>
-              <a:t>Finite State Machine (FSM) Lifecycle Flowchart</a:t>
-            </a:r>
-          </a:p>
-        </p:txBody>
-      </p:sp>
-      <p:sp>
-        <p:nvSpPr>
-          <p:cNvPr id="9" name="Rounded Rectangle 8"/>
+          <a:bodyPr rtlCol="0" anchor="ctr" wrap="square"/>
+          <a:lstStyle/>
+          <a:p>
+            <a:pPr algn="ctr">
+              <a:defRPr sz="1900" b="1">
+                <a:solidFill>
+                  <a:srgbClr val="FFFFFF"/>
+                </a:solidFill>
+                <a:latin typeface="Arial"/>
+              </a:defRPr>
+            </a:pPr>
+            <a:r>
+              <a:t>NEW</a:t>
+            </a:r>
+          </a:p>
+        </p:txBody>
+      </p:sp>
+      <p:sp>
+        <p:nvSpPr>
+          <p:cNvPr id="8" name="Right Arrow 7"/>
           <p:cNvSpPr/>
           <p:nvPr/>
         </p:nvSpPr>
         <p:spPr>
           <a:xfrm>
-            <a:off x="914400" y="1874519"/>
-            <a:ext cx="1280160" cy="502920"/>
-          </a:xfrm>
-          <a:prstGeom prst="roundRect">
+            <a:off x="2084832" y="1664208"/>
+            <a:ext cx="219456" cy="201168"/>
+          </a:xfrm>
+          <a:prstGeom prst="rightArrow">
             <a:avLst/>
           </a:prstGeom>
           <a:solidFill>
-            <a:srgbClr val="0F2744"/>
+            <a:srgbClr val="2563EB"/>
           </a:solidFill>
-          <a:ln w="19050">
-            <a:solidFill>
-              <a:srgbClr val="0F2744"/>
-            </a:solidFill>
+          <a:ln>
+            <a:noFill/>
           </a:ln>
         </p:spPr>
         <p:style>
@@ -7376,42 +7135,34 @@
           </a:fontRef>
         </p:style>
         <p:txBody>
-          <a:bodyPr rtlCol="0" anchor="ctr" wrap="square"/>
-          <a:lstStyle/>
-          <a:p>
-            <a:pPr algn="ctr">
-              <a:defRPr sz="1800" b="1">
-                <a:solidFill>
-                  <a:srgbClr val="FFFFFF"/>
-                </a:solidFill>
-                <a:latin typeface="Arial"/>
-              </a:defRPr>
-            </a:pPr>
-            <a:r>
-              <a:t>NEW</a:t>
-            </a:r>
-          </a:p>
-        </p:txBody>
-      </p:sp>
-      <p:sp>
-        <p:nvSpPr>
-          <p:cNvPr id="10" name="Right Arrow 9"/>
+          <a:bodyPr rtlCol="0" anchor="ctr"/>
+          <a:lstStyle/>
+          <a:p>
+            <a:pPr algn="ctr"/>
+          </a:p>
+        </p:txBody>
+      </p:sp>
+      <p:sp>
+        <p:nvSpPr>
+          <p:cNvPr id="9" name="Rectangle 8"/>
           <p:cNvSpPr/>
           <p:nvPr/>
         </p:nvSpPr>
         <p:spPr>
           <a:xfrm>
-            <a:off x="2267712" y="2020824"/>
-            <a:ext cx="201168" cy="182880"/>
-          </a:xfrm>
-          <a:prstGeom prst="rightArrow">
+            <a:off x="2468880" y="1463040"/>
+            <a:ext cx="1463040" cy="640080"/>
+          </a:xfrm>
+          <a:prstGeom prst="rect">
             <a:avLst/>
           </a:prstGeom>
           <a:solidFill>
-            <a:srgbClr val="1D4ED8"/>
+            <a:srgbClr val="0F172A"/>
           </a:solidFill>
-          <a:ln>
-            <a:noFill/>
+          <a:ln w="19050">
+            <a:solidFill>
+              <a:srgbClr val="0F172A"/>
+            </a:solidFill>
           </a:ln>
         </p:spPr>
         <p:style>
@@ -7429,34 +7180,42 @@
           </a:fontRef>
         </p:style>
         <p:txBody>
-          <a:bodyPr rtlCol="0" anchor="ctr"/>
-          <a:lstStyle/>
-          <a:p>
-            <a:pPr algn="ctr"/>
-          </a:p>
-        </p:txBody>
-      </p:sp>
-      <p:sp>
-        <p:nvSpPr>
-          <p:cNvPr id="11" name="Rounded Rectangle 10"/>
+          <a:bodyPr rtlCol="0" anchor="ctr" wrap="square"/>
+          <a:lstStyle/>
+          <a:p>
+            <a:pPr algn="ctr">
+              <a:defRPr sz="1900" b="1">
+                <a:solidFill>
+                  <a:srgbClr val="FFFFFF"/>
+                </a:solidFill>
+                <a:latin typeface="Arial"/>
+              </a:defRPr>
+            </a:pPr>
+            <a:r>
+              <a:t>VERIFIED</a:t>
+            </a:r>
+          </a:p>
+        </p:txBody>
+      </p:sp>
+      <p:sp>
+        <p:nvSpPr>
+          <p:cNvPr id="10" name="Right Arrow 9"/>
           <p:cNvSpPr/>
           <p:nvPr/>
         </p:nvSpPr>
         <p:spPr>
           <a:xfrm>
-            <a:off x="2560320" y="1874519"/>
-            <a:ext cx="1463040" cy="502920"/>
-          </a:xfrm>
-          <a:prstGeom prst="roundRect">
+            <a:off x="4005072" y="1664208"/>
+            <a:ext cx="219456" cy="201168"/>
+          </a:xfrm>
+          <a:prstGeom prst="rightArrow">
             <a:avLst/>
           </a:prstGeom>
           <a:solidFill>
-            <a:srgbClr val="0F2744"/>
+            <a:srgbClr val="2563EB"/>
           </a:solidFill>
-          <a:ln w="19050">
-            <a:solidFill>
-              <a:srgbClr val="0F2744"/>
-            </a:solidFill>
+          <a:ln>
+            <a:noFill/>
           </a:ln>
         </p:spPr>
         <p:style>
@@ -7474,42 +7233,34 @@
           </a:fontRef>
         </p:style>
         <p:txBody>
-          <a:bodyPr rtlCol="0" anchor="ctr" wrap="square"/>
-          <a:lstStyle/>
-          <a:p>
-            <a:pPr algn="ctr">
-              <a:defRPr sz="1800" b="1">
-                <a:solidFill>
-                  <a:srgbClr val="FFFFFF"/>
-                </a:solidFill>
-                <a:latin typeface="Arial"/>
-              </a:defRPr>
-            </a:pPr>
-            <a:r>
-              <a:t>VERIFIED</a:t>
-            </a:r>
-          </a:p>
-        </p:txBody>
-      </p:sp>
-      <p:sp>
-        <p:nvSpPr>
-          <p:cNvPr id="12" name="Right Arrow 11"/>
+          <a:bodyPr rtlCol="0" anchor="ctr"/>
+          <a:lstStyle/>
+          <a:p>
+            <a:pPr algn="ctr"/>
+          </a:p>
+        </p:txBody>
+      </p:sp>
+      <p:sp>
+        <p:nvSpPr>
+          <p:cNvPr id="11" name="Rectangle 10"/>
           <p:cNvSpPr/>
           <p:nvPr/>
         </p:nvSpPr>
         <p:spPr>
           <a:xfrm>
-            <a:off x="4096512" y="2020824"/>
-            <a:ext cx="201168" cy="182880"/>
-          </a:xfrm>
-          <a:prstGeom prst="rightArrow">
+            <a:off x="4389120" y="1463040"/>
+            <a:ext cx="1463040" cy="640080"/>
+          </a:xfrm>
+          <a:prstGeom prst="rect">
             <a:avLst/>
           </a:prstGeom>
           <a:solidFill>
-            <a:srgbClr val="1D4ED8"/>
+            <a:srgbClr val="0F172A"/>
           </a:solidFill>
-          <a:ln>
-            <a:noFill/>
+          <a:ln w="19050">
+            <a:solidFill>
+              <a:srgbClr val="0F172A"/>
+            </a:solidFill>
           </a:ln>
         </p:spPr>
         <p:style>
@@ -7527,34 +7278,42 @@
           </a:fontRef>
         </p:style>
         <p:txBody>
-          <a:bodyPr rtlCol="0" anchor="ctr"/>
-          <a:lstStyle/>
-          <a:p>
-            <a:pPr algn="ctr"/>
-          </a:p>
-        </p:txBody>
-      </p:sp>
-      <p:sp>
-        <p:nvSpPr>
-          <p:cNvPr id="13" name="Rounded Rectangle 12"/>
+          <a:bodyPr rtlCol="0" anchor="ctr" wrap="square"/>
+          <a:lstStyle/>
+          <a:p>
+            <a:pPr algn="ctr">
+              <a:defRPr sz="1900" b="1">
+                <a:solidFill>
+                  <a:srgbClr val="FFFFFF"/>
+                </a:solidFill>
+                <a:latin typeface="Arial"/>
+              </a:defRPr>
+            </a:pPr>
+            <a:r>
+              <a:t>ASSIGNED</a:t>
+            </a:r>
+          </a:p>
+        </p:txBody>
+      </p:sp>
+      <p:sp>
+        <p:nvSpPr>
+          <p:cNvPr id="12" name="Right Arrow 11"/>
           <p:cNvSpPr/>
           <p:nvPr/>
         </p:nvSpPr>
         <p:spPr>
           <a:xfrm>
-            <a:off x="4389120" y="1874519"/>
-            <a:ext cx="1463040" cy="502920"/>
-          </a:xfrm>
-          <a:prstGeom prst="roundRect">
+            <a:off x="5925312" y="1664208"/>
+            <a:ext cx="219456" cy="201168"/>
+          </a:xfrm>
+          <a:prstGeom prst="rightArrow">
             <a:avLst/>
           </a:prstGeom>
           <a:solidFill>
-            <a:srgbClr val="0F2744"/>
+            <a:srgbClr val="2563EB"/>
           </a:solidFill>
-          <a:ln w="19050">
-            <a:solidFill>
-              <a:srgbClr val="0F2744"/>
-            </a:solidFill>
+          <a:ln>
+            <a:noFill/>
           </a:ln>
         </p:spPr>
         <p:style>
@@ -7572,42 +7331,34 @@
           </a:fontRef>
         </p:style>
         <p:txBody>
-          <a:bodyPr rtlCol="0" anchor="ctr" wrap="square"/>
-          <a:lstStyle/>
-          <a:p>
-            <a:pPr algn="ctr">
-              <a:defRPr sz="1800" b="1">
-                <a:solidFill>
-                  <a:srgbClr val="FFFFFF"/>
-                </a:solidFill>
-                <a:latin typeface="Arial"/>
-              </a:defRPr>
-            </a:pPr>
-            <a:r>
-              <a:t>ASSIGNED</a:t>
-            </a:r>
-          </a:p>
-        </p:txBody>
-      </p:sp>
-      <p:sp>
-        <p:nvSpPr>
-          <p:cNvPr id="14" name="Right Arrow 13"/>
+          <a:bodyPr rtlCol="0" anchor="ctr"/>
+          <a:lstStyle/>
+          <a:p>
+            <a:pPr algn="ctr"/>
+          </a:p>
+        </p:txBody>
+      </p:sp>
+      <p:sp>
+        <p:nvSpPr>
+          <p:cNvPr id="13" name="Rectangle 12"/>
           <p:cNvSpPr/>
           <p:nvPr/>
         </p:nvSpPr>
         <p:spPr>
           <a:xfrm>
-            <a:off x="5925312" y="2020824"/>
-            <a:ext cx="201168" cy="182880"/>
-          </a:xfrm>
-          <a:prstGeom prst="rightArrow">
+            <a:off x="6309360" y="1463040"/>
+            <a:ext cx="1645920" cy="640080"/>
+          </a:xfrm>
+          <a:prstGeom prst="rect">
             <a:avLst/>
           </a:prstGeom>
           <a:solidFill>
-            <a:srgbClr val="1D4ED8"/>
+            <a:srgbClr val="0F172A"/>
           </a:solidFill>
-          <a:ln>
-            <a:noFill/>
+          <a:ln w="19050">
+            <a:solidFill>
+              <a:srgbClr val="0F172A"/>
+            </a:solidFill>
           </a:ln>
         </p:spPr>
         <p:style>
@@ -7625,34 +7376,42 @@
           </a:fontRef>
         </p:style>
         <p:txBody>
-          <a:bodyPr rtlCol="0" anchor="ctr"/>
-          <a:lstStyle/>
-          <a:p>
-            <a:pPr algn="ctr"/>
-          </a:p>
-        </p:txBody>
-      </p:sp>
-      <p:sp>
-        <p:nvSpPr>
-          <p:cNvPr id="15" name="Rounded Rectangle 14"/>
+          <a:bodyPr rtlCol="0" anchor="ctr" wrap="square"/>
+          <a:lstStyle/>
+          <a:p>
+            <a:pPr algn="ctr">
+              <a:defRPr sz="1900" b="1">
+                <a:solidFill>
+                  <a:srgbClr val="FFFFFF"/>
+                </a:solidFill>
+                <a:latin typeface="Arial"/>
+              </a:defRPr>
+            </a:pPr>
+            <a:r>
+              <a:t>IN PROGRESS</a:t>
+            </a:r>
+          </a:p>
+        </p:txBody>
+      </p:sp>
+      <p:sp>
+        <p:nvSpPr>
+          <p:cNvPr id="14" name="Right Arrow 13"/>
           <p:cNvSpPr/>
           <p:nvPr/>
         </p:nvSpPr>
         <p:spPr>
           <a:xfrm>
-            <a:off x="6217920" y="1874519"/>
-            <a:ext cx="1645920" cy="502920"/>
-          </a:xfrm>
-          <a:prstGeom prst="roundRect">
+            <a:off x="8028432" y="1664208"/>
+            <a:ext cx="219456" cy="201168"/>
+          </a:xfrm>
+          <a:prstGeom prst="rightArrow">
             <a:avLst/>
           </a:prstGeom>
           <a:solidFill>
-            <a:srgbClr val="0F2744"/>
+            <a:srgbClr val="2563EB"/>
           </a:solidFill>
-          <a:ln w="19050">
-            <a:solidFill>
-              <a:srgbClr val="0F2744"/>
-            </a:solidFill>
+          <a:ln>
+            <a:noFill/>
           </a:ln>
         </p:spPr>
         <p:style>
@@ -7670,42 +7429,34 @@
           </a:fontRef>
         </p:style>
         <p:txBody>
-          <a:bodyPr rtlCol="0" anchor="ctr" wrap="square"/>
-          <a:lstStyle/>
-          <a:p>
-            <a:pPr algn="ctr">
-              <a:defRPr sz="1800" b="1">
-                <a:solidFill>
-                  <a:srgbClr val="FFFFFF"/>
-                </a:solidFill>
-                <a:latin typeface="Arial"/>
-              </a:defRPr>
-            </a:pPr>
-            <a:r>
-              <a:t>IN_PROGRESS</a:t>
-            </a:r>
-          </a:p>
-        </p:txBody>
-      </p:sp>
-      <p:sp>
-        <p:nvSpPr>
-          <p:cNvPr id="16" name="Right Arrow 15"/>
+          <a:bodyPr rtlCol="0" anchor="ctr"/>
+          <a:lstStyle/>
+          <a:p>
+            <a:pPr algn="ctr"/>
+          </a:p>
+        </p:txBody>
+      </p:sp>
+      <p:sp>
+        <p:nvSpPr>
+          <p:cNvPr id="15" name="Rectangle 14"/>
           <p:cNvSpPr/>
           <p:nvPr/>
         </p:nvSpPr>
         <p:spPr>
           <a:xfrm>
-            <a:off x="7936992" y="2020824"/>
-            <a:ext cx="201168" cy="182880"/>
-          </a:xfrm>
-          <a:prstGeom prst="rightArrow">
+            <a:off x="8412480" y="1463040"/>
+            <a:ext cx="1463040" cy="640080"/>
+          </a:xfrm>
+          <a:prstGeom prst="rect">
             <a:avLst/>
           </a:prstGeom>
           <a:solidFill>
-            <a:srgbClr val="1D4ED8"/>
+            <a:srgbClr val="0F172A"/>
           </a:solidFill>
-          <a:ln>
-            <a:noFill/>
+          <a:ln w="19050">
+            <a:solidFill>
+              <a:srgbClr val="0F172A"/>
+            </a:solidFill>
           </a:ln>
         </p:spPr>
         <p:style>
@@ -7723,34 +7474,42 @@
           </a:fontRef>
         </p:style>
         <p:txBody>
-          <a:bodyPr rtlCol="0" anchor="ctr"/>
-          <a:lstStyle/>
-          <a:p>
-            <a:pPr algn="ctr"/>
-          </a:p>
-        </p:txBody>
-      </p:sp>
-      <p:sp>
-        <p:nvSpPr>
-          <p:cNvPr id="17" name="Rounded Rectangle 16"/>
+          <a:bodyPr rtlCol="0" anchor="ctr" wrap="square"/>
+          <a:lstStyle/>
+          <a:p>
+            <a:pPr algn="ctr">
+              <a:defRPr sz="1900" b="1">
+                <a:solidFill>
+                  <a:srgbClr val="FFFFFF"/>
+                </a:solidFill>
+                <a:latin typeface="Arial"/>
+              </a:defRPr>
+            </a:pPr>
+            <a:r>
+              <a:t>RESOLVED</a:t>
+            </a:r>
+          </a:p>
+        </p:txBody>
+      </p:sp>
+      <p:sp>
+        <p:nvSpPr>
+          <p:cNvPr id="16" name="Right Arrow 15"/>
           <p:cNvSpPr/>
           <p:nvPr/>
         </p:nvSpPr>
         <p:spPr>
           <a:xfrm>
-            <a:off x="8229600" y="1874519"/>
-            <a:ext cx="1463040" cy="502920"/>
-          </a:xfrm>
-          <a:prstGeom prst="roundRect">
+            <a:off x="9948672" y="1664208"/>
+            <a:ext cx="219456" cy="201168"/>
+          </a:xfrm>
+          <a:prstGeom prst="rightArrow">
             <a:avLst/>
           </a:prstGeom>
           <a:solidFill>
-            <a:srgbClr val="0F2744"/>
+            <a:srgbClr val="2563EB"/>
           </a:solidFill>
-          <a:ln w="19050">
-            <a:solidFill>
-              <a:srgbClr val="0F2744"/>
-            </a:solidFill>
+          <a:ln>
+            <a:noFill/>
           </a:ln>
         </p:spPr>
         <p:style>
@@ -7768,42 +7527,34 @@
           </a:fontRef>
         </p:style>
         <p:txBody>
-          <a:bodyPr rtlCol="0" anchor="ctr" wrap="square"/>
-          <a:lstStyle/>
-          <a:p>
-            <a:pPr algn="ctr">
-              <a:defRPr sz="1800" b="1">
-                <a:solidFill>
-                  <a:srgbClr val="FFFFFF"/>
-                </a:solidFill>
-                <a:latin typeface="Arial"/>
-              </a:defRPr>
-            </a:pPr>
-            <a:r>
-              <a:t>RESOLVED</a:t>
-            </a:r>
-          </a:p>
-        </p:txBody>
-      </p:sp>
-      <p:sp>
-        <p:nvSpPr>
-          <p:cNvPr id="18" name="Right Arrow 17"/>
+          <a:bodyPr rtlCol="0" anchor="ctr"/>
+          <a:lstStyle/>
+          <a:p>
+            <a:pPr algn="ctr"/>
+          </a:p>
+        </p:txBody>
+      </p:sp>
+      <p:sp>
+        <p:nvSpPr>
+          <p:cNvPr id="17" name="Rectangle 16"/>
           <p:cNvSpPr/>
           <p:nvPr/>
         </p:nvSpPr>
         <p:spPr>
           <a:xfrm>
-            <a:off x="9765792" y="2020824"/>
-            <a:ext cx="201168" cy="182880"/>
-          </a:xfrm>
-          <a:prstGeom prst="rightArrow">
+            <a:off x="10332720" y="1463040"/>
+            <a:ext cx="1127455" cy="640080"/>
+          </a:xfrm>
+          <a:prstGeom prst="rect">
             <a:avLst/>
           </a:prstGeom>
           <a:solidFill>
-            <a:srgbClr val="1D4ED8"/>
+            <a:srgbClr val="0F172A"/>
           </a:solidFill>
-          <a:ln>
-            <a:noFill/>
+          <a:ln w="19050">
+            <a:solidFill>
+              <a:srgbClr val="0F172A"/>
+            </a:solidFill>
           </a:ln>
         </p:spPr>
         <p:style>
@@ -7821,33 +7572,43 @@
           </a:fontRef>
         </p:style>
         <p:txBody>
-          <a:bodyPr rtlCol="0" anchor="ctr"/>
-          <a:lstStyle/>
-          <a:p>
-            <a:pPr algn="ctr"/>
-          </a:p>
-        </p:txBody>
-      </p:sp>
-      <p:sp>
-        <p:nvSpPr>
-          <p:cNvPr id="19" name="Rounded Rectangle 18"/>
+          <a:bodyPr rtlCol="0" anchor="ctr" wrap="square"/>
+          <a:lstStyle/>
+          <a:p>
+            <a:pPr algn="ctr">
+              <a:defRPr sz="1900" b="1">
+                <a:solidFill>
+                  <a:srgbClr val="FFFFFF"/>
+                </a:solidFill>
+                <a:latin typeface="Arial"/>
+              </a:defRPr>
+            </a:pPr>
+            <a:r>
+              <a:t>CLOSED</a:t>
+            </a:r>
+          </a:p>
+        </p:txBody>
+      </p:sp>
+      <p:sp>
+        <p:nvSpPr>
+          <p:cNvPr id="18" name="Rectangle 17"/>
           <p:cNvSpPr/>
           <p:nvPr/>
         </p:nvSpPr>
         <p:spPr>
           <a:xfrm>
-            <a:off x="10058400" y="1874519"/>
-            <a:ext cx="1188720" cy="502920"/>
-          </a:xfrm>
-          <a:prstGeom prst="roundRect">
+            <a:off x="2468880" y="2423160"/>
+            <a:ext cx="2011680" cy="502920"/>
+          </a:xfrm>
+          <a:prstGeom prst="rect">
             <a:avLst/>
           </a:prstGeom>
           <a:solidFill>
-            <a:srgbClr val="0F2744"/>
+            <a:srgbClr val="FEF2F2"/>
           </a:solidFill>
           <a:ln w="19050">
             <a:solidFill>
-              <a:srgbClr val="0F2744"/>
+              <a:srgbClr val="EF4444"/>
             </a:solidFill>
           </a:ln>
         </p:spPr>
@@ -7870,82 +7631,38 @@
           <a:lstStyle/>
           <a:p>
             <a:pPr algn="ctr">
-              <a:defRPr sz="1800" b="1">
-                <a:solidFill>
-                  <a:srgbClr val="FFFFFF"/>
-                </a:solidFill>
-                <a:latin typeface="Arial"/>
-              </a:defRPr>
-            </a:pPr>
-            <a:r>
-              <a:t>CLOSED</a:t>
-            </a:r>
-          </a:p>
-        </p:txBody>
-      </p:sp>
-      <p:sp>
-        <p:nvSpPr>
-          <p:cNvPr id="20" name="TextBox 19"/>
-          <p:cNvSpPr txBox="1"/>
-          <p:nvPr/>
-        </p:nvSpPr>
-        <p:spPr>
-          <a:xfrm>
-            <a:off x="914400" y="2651760"/>
-            <a:ext cx="10332720" cy="502920"/>
-          </a:xfrm>
-          <a:prstGeom prst="rect">
-            <a:avLst/>
-          </a:prstGeom>
-          <a:noFill/>
-        </p:spPr>
-        <p:txBody>
-          <a:bodyPr wrap="none" lIns="0" tIns="0">
-            <a:spAutoFit/>
-          </a:bodyPr>
-          <a:lstStyle/>
-          <a:p>
-            <a:r>
-              <a:rPr b="1" sz="1900">
-                <a:solidFill>
-                  <a:srgbClr val="0F2744"/>
-                </a:solidFill>
-              </a:rPr>
-              <a:t>Exception &amp; Feedback Branches:  </a:t>
-            </a:r>
-            <a:r>
-              <a:rPr sz="1900">
-                <a:solidFill>
-                  <a:srgbClr val="334155"/>
-                </a:solidFill>
-              </a:rPr>
-              <a:t>• NEW / VERIFIED → REJECTED (Invalid or out-of-scope ticket dismissed with reason)
-• CLOSED → REOPENED (Student flags that recurring defect was not resolved properly)</a:t>
-            </a:r>
-          </a:p>
-        </p:txBody>
-      </p:sp>
-      <p:sp>
-        <p:nvSpPr>
-          <p:cNvPr id="21" name="Rounded Rectangle 20"/>
+              <a:defRPr sz="1700" b="1">
+                <a:solidFill>
+                  <a:srgbClr val="B91C1C"/>
+                </a:solidFill>
+                <a:latin typeface="Arial"/>
+              </a:defRPr>
+            </a:pPr>
+            <a:r>
+              <a:t>REJECTED (Invalid)</a:t>
+            </a:r>
+          </a:p>
+        </p:txBody>
+      </p:sp>
+      <p:sp>
+        <p:nvSpPr>
+          <p:cNvPr id="19" name="Down Arrow 18"/>
           <p:cNvSpPr/>
           <p:nvPr/>
         </p:nvSpPr>
         <p:spPr>
           <a:xfrm>
-            <a:off x="731520" y="3474720"/>
-            <a:ext cx="3392424" cy="2606040"/>
-          </a:xfrm>
-          <a:prstGeom prst="roundRect">
+            <a:off x="3383280" y="2121408"/>
+            <a:ext cx="164592" cy="274320"/>
+          </a:xfrm>
+          <a:prstGeom prst="downArrow">
             <a:avLst/>
           </a:prstGeom>
           <a:solidFill>
-            <a:srgbClr val="FFFFFF"/>
+            <a:srgbClr val="EF4444"/>
           </a:solidFill>
-          <a:ln w="15240">
-            <a:solidFill>
-              <a:srgbClr val="CBD5E1"/>
-            </a:solidFill>
+          <a:ln>
+            <a:noFill/>
           </a:ln>
         </p:spPr>
         <p:style>
@@ -7972,105 +7689,24 @@
       </p:sp>
       <p:sp>
         <p:nvSpPr>
-          <p:cNvPr id="22" name="TextBox 21"/>
-          <p:cNvSpPr txBox="1"/>
-          <p:nvPr/>
-        </p:nvSpPr>
-        <p:spPr>
-          <a:xfrm>
-            <a:off x="914400" y="3611879"/>
-            <a:ext cx="3026664" cy="2331720"/>
-          </a:xfrm>
-          <a:prstGeom prst="rect">
-            <a:avLst/>
-          </a:prstGeom>
-          <a:noFill/>
-        </p:spPr>
-        <p:txBody>
-          <a:bodyPr wrap="square" lIns="0" tIns="0">
-            <a:spAutoFit/>
-          </a:bodyPr>
-          <a:lstStyle/>
-          <a:p>
-            <a:pPr>
-              <a:defRPr sz="2100" b="1">
-                <a:solidFill>
-                  <a:srgbClr val="1D4ED8"/>
-                </a:solidFill>
-                <a:latin typeface="Arial"/>
-              </a:defRPr>
-            </a:pPr>
-            <a:r>
-              <a:t>1. Student / Faculty</a:t>
-            </a:r>
-          </a:p>
-          <a:p>
-            <a:pPr>
-              <a:spcBef>
-                <a:spcPts val="600"/>
-              </a:spcBef>
-              <a:defRPr sz="1900">
-                <a:solidFill>
-                  <a:srgbClr val="111827"/>
-                </a:solidFill>
-              </a:defRPr>
-            </a:pPr>
-            <a:r>
-              <a:t>• Lodges complaint with building, room, and photo.</a:t>
-            </a:r>
-          </a:p>
-          <a:p>
-            <a:pPr>
-              <a:spcBef>
-                <a:spcPts val="600"/>
-              </a:spcBef>
-              <a:defRPr sz="1900">
-                <a:solidFill>
-                  <a:srgbClr val="111827"/>
-                </a:solidFill>
-              </a:defRPr>
-            </a:pPr>
-            <a:r>
-              <a:t>• Monitors real-time status &amp; updates.</a:t>
-            </a:r>
-          </a:p>
-          <a:p>
-            <a:pPr>
-              <a:spcBef>
-                <a:spcPts val="600"/>
-              </a:spcBef>
-              <a:defRPr sz="1900">
-                <a:solidFill>
-                  <a:srgbClr val="111827"/>
-                </a:solidFill>
-              </a:defRPr>
-            </a:pPr>
-            <a:r>
-              <a:t>• Confirms repair &amp; provides 1–5 star rating.</a:t>
-            </a:r>
-          </a:p>
-        </p:txBody>
-      </p:sp>
-      <p:sp>
-        <p:nvSpPr>
-          <p:cNvPr id="23" name="Rounded Rectangle 22"/>
+          <p:cNvPr id="20" name="Rectangle 19"/>
           <p:cNvSpPr/>
           <p:nvPr/>
         </p:nvSpPr>
         <p:spPr>
           <a:xfrm>
-            <a:off x="4398264" y="3474720"/>
-            <a:ext cx="3392424" cy="2606040"/>
-          </a:xfrm>
-          <a:prstGeom prst="roundRect">
+            <a:off x="9418320" y="2423160"/>
+            <a:ext cx="2041855" cy="502920"/>
+          </a:xfrm>
+          <a:prstGeom prst="rect">
             <a:avLst/>
           </a:prstGeom>
           <a:solidFill>
-            <a:srgbClr val="FFFFFF"/>
+            <a:srgbClr val="FEF3C7"/>
           </a:solidFill>
-          <a:ln w="15240">
+          <a:ln w="19050">
             <a:solidFill>
-              <a:srgbClr val="CBD5E1"/>
+              <a:srgbClr val="F59E0B"/>
             </a:solidFill>
           </a:ln>
         </p:spPr>
@@ -8089,115 +7725,42 @@
           </a:fontRef>
         </p:style>
         <p:txBody>
-          <a:bodyPr rtlCol="0" anchor="ctr"/>
-          <a:lstStyle/>
-          <a:p>
-            <a:pPr algn="ctr"/>
-          </a:p>
-        </p:txBody>
-      </p:sp>
-      <p:sp>
-        <p:nvSpPr>
-          <p:cNvPr id="24" name="TextBox 23"/>
-          <p:cNvSpPr txBox="1"/>
-          <p:nvPr/>
-        </p:nvSpPr>
-        <p:spPr>
-          <a:xfrm>
-            <a:off x="4581144" y="3611879"/>
-            <a:ext cx="3026664" cy="2331720"/>
-          </a:xfrm>
-          <a:prstGeom prst="rect">
-            <a:avLst/>
-          </a:prstGeom>
-          <a:noFill/>
-        </p:spPr>
-        <p:txBody>
-          <a:bodyPr wrap="square" lIns="0" tIns="0">
-            <a:spAutoFit/>
-          </a:bodyPr>
-          <a:lstStyle/>
-          <a:p>
-            <a:pPr>
-              <a:defRPr sz="2100" b="1">
-                <a:solidFill>
-                  <a:srgbClr val="0F2744"/>
-                </a:solidFill>
-                <a:latin typeface="Arial"/>
-              </a:defRPr>
-            </a:pPr>
-            <a:r>
-              <a:t>2. Administrator</a:t>
-            </a:r>
-          </a:p>
-          <a:p>
-            <a:pPr>
-              <a:spcBef>
-                <a:spcPts val="600"/>
-              </a:spcBef>
-              <a:defRPr sz="1900">
-                <a:solidFill>
-                  <a:srgbClr val="111827"/>
-                </a:solidFill>
-              </a:defRPr>
-            </a:pPr>
-            <a:r>
-              <a:t>• Reviews validity; marks VERIFIED or REJECTED.</a:t>
-            </a:r>
-          </a:p>
-          <a:p>
-            <a:pPr>
-              <a:spcBef>
-                <a:spcPts val="600"/>
-              </a:spcBef>
-              <a:defRPr sz="1900">
-                <a:solidFill>
-                  <a:srgbClr val="111827"/>
-                </a:solidFill>
-              </a:defRPr>
-            </a:pPr>
-            <a:r>
-              <a:t>• Assigns ticket to designated maintenance staff.</a:t>
-            </a:r>
-          </a:p>
-          <a:p>
-            <a:pPr>
-              <a:spcBef>
-                <a:spcPts val="600"/>
-              </a:spcBef>
-              <a:defRPr sz="1900">
-                <a:solidFill>
-                  <a:srgbClr val="111827"/>
-                </a:solidFill>
-              </a:defRPr>
-            </a:pPr>
-            <a:r>
-              <a:t>• Monitors SLA resolution &amp; closes tickets.</a:t>
-            </a:r>
-          </a:p>
-        </p:txBody>
-      </p:sp>
-      <p:sp>
-        <p:nvSpPr>
-          <p:cNvPr id="25" name="Rounded Rectangle 24"/>
+          <a:bodyPr rtlCol="0" anchor="ctr" wrap="square"/>
+          <a:lstStyle/>
+          <a:p>
+            <a:pPr algn="ctr">
+              <a:defRPr sz="1700" b="1">
+                <a:solidFill>
+                  <a:srgbClr val="B45309"/>
+                </a:solidFill>
+                <a:latin typeface="Arial"/>
+              </a:defRPr>
+            </a:pPr>
+            <a:r>
+              <a:t>REOPENED (Persistent)</a:t>
+            </a:r>
+          </a:p>
+        </p:txBody>
+      </p:sp>
+      <p:sp>
+        <p:nvSpPr>
+          <p:cNvPr id="21" name="Down Arrow 20"/>
           <p:cNvSpPr/>
           <p:nvPr/>
         </p:nvSpPr>
         <p:spPr>
           <a:xfrm>
-            <a:off x="8065008" y="3474720"/>
-            <a:ext cx="3392424" cy="2606040"/>
-          </a:xfrm>
-          <a:prstGeom prst="roundRect">
+            <a:off x="10332720" y="2121408"/>
+            <a:ext cx="164592" cy="274320"/>
+          </a:xfrm>
+          <a:prstGeom prst="downArrow">
             <a:avLst/>
           </a:prstGeom>
           <a:solidFill>
-            <a:srgbClr val="FFFFFF"/>
+            <a:srgbClr val="F59E0B"/>
           </a:solidFill>
-          <a:ln w="15240">
-            <a:solidFill>
-              <a:srgbClr val="CBD5E1"/>
-            </a:solidFill>
+          <a:ln>
+            <a:noFill/>
           </a:ln>
         </p:spPr>
         <p:style>
@@ -8224,14 +7787,59 @@
       </p:sp>
       <p:sp>
         <p:nvSpPr>
-          <p:cNvPr id="26" name="TextBox 25"/>
+          <p:cNvPr id="22" name="Rectangle 21"/>
+          <p:cNvSpPr/>
+          <p:nvPr/>
+        </p:nvSpPr>
+        <p:spPr>
+          <a:xfrm>
+            <a:off x="731520" y="3337560"/>
+            <a:ext cx="3392424" cy="2560320"/>
+          </a:xfrm>
+          <a:prstGeom prst="rect">
+            <a:avLst/>
+          </a:prstGeom>
+          <a:solidFill>
+            <a:srgbClr val="F1F5F9"/>
+          </a:solidFill>
+          <a:ln w="19050">
+            <a:solidFill>
+              <a:srgbClr val="CBD5E1"/>
+            </a:solidFill>
+          </a:ln>
+        </p:spPr>
+        <p:style>
+          <a:lnRef idx="1">
+            <a:schemeClr val="accent1"/>
+          </a:lnRef>
+          <a:fillRef idx="3">
+            <a:schemeClr val="accent1"/>
+          </a:fillRef>
+          <a:effectRef idx="2">
+            <a:schemeClr val="accent1"/>
+          </a:effectRef>
+          <a:fontRef idx="minor">
+            <a:schemeClr val="lt1"/>
+          </a:fontRef>
+        </p:style>
+        <p:txBody>
+          <a:bodyPr rtlCol="0" anchor="ctr"/>
+          <a:lstStyle/>
+          <a:p>
+            <a:pPr algn="ctr"/>
+          </a:p>
+        </p:txBody>
+      </p:sp>
+      <p:sp>
+        <p:nvSpPr>
+          <p:cNvPr id="23" name="TextBox 22"/>
           <p:cNvSpPr txBox="1"/>
           <p:nvPr/>
         </p:nvSpPr>
         <p:spPr>
           <a:xfrm>
-            <a:off x="8247888" y="3611879"/>
-            <a:ext cx="3026664" cy="2331720"/>
+            <a:off x="914400" y="3474720"/>
+            <a:ext cx="3026664" cy="2286000"/>
           </a:xfrm>
           <a:prstGeom prst="rect">
             <a:avLst/>
@@ -8245,60 +7853,417 @@
           <a:lstStyle/>
           <a:p>
             <a:pPr>
-              <a:defRPr sz="2100" b="1">
-                <a:solidFill>
-                  <a:srgbClr val="14532D"/>
-                </a:solidFill>
-                <a:latin typeface="Arial"/>
-              </a:defRPr>
-            </a:pPr>
-            <a:r>
-              <a:t>3. Maintenance Staff</a:t>
+              <a:defRPr sz="2200" b="1">
+                <a:solidFill>
+                  <a:srgbClr val="2563EB"/>
+                </a:solidFill>
+                <a:latin typeface="Arial"/>
+              </a:defRPr>
+            </a:pPr>
+            <a:r>
+              <a:t>Student / Faculty</a:t>
             </a:r>
           </a:p>
           <a:p>
             <a:pPr>
               <a:spcBef>
-                <a:spcPts val="600"/>
+                <a:spcPts val="400"/>
               </a:spcBef>
-              <a:defRPr sz="1900">
-                <a:solidFill>
-                  <a:srgbClr val="111827"/>
-                </a:solidFill>
-              </a:defRPr>
-            </a:pPr>
-            <a:r>
-              <a:t>• Receives work orders in dedicated queue.</a:t>
+              <a:defRPr sz="1900" b="1">
+                <a:solidFill>
+                  <a:srgbClr val="0F172A"/>
+                </a:solidFill>
+                <a:latin typeface="Arial"/>
+              </a:defRPr>
+            </a:pPr>
+            <a:r>
+              <a:t>Submit  →  Track  →  Rate</a:t>
             </a:r>
           </a:p>
           <a:p>
             <a:pPr>
               <a:spcBef>
-                <a:spcPts val="600"/>
+                <a:spcPts val="500"/>
               </a:spcBef>
-              <a:defRPr sz="1900">
-                <a:solidFill>
-                  <a:srgbClr val="111827"/>
-                </a:solidFill>
-              </a:defRPr>
-            </a:pPr>
-            <a:r>
-              <a:t>• Transitions status to IN_PROGRESS upon start.</a:t>
+              <a:defRPr sz="1800">
+                <a:solidFill>
+                  <a:srgbClr val="1E293B"/>
+                </a:solidFill>
+                <a:latin typeface="Arial"/>
+              </a:defRPr>
+            </a:pPr>
+            <a:r>
+              <a:t>• Lodges complaint with campus building &amp; room.</a:t>
             </a:r>
           </a:p>
           <a:p>
             <a:pPr>
               <a:spcBef>
-                <a:spcPts val="600"/>
+                <a:spcPts val="500"/>
               </a:spcBef>
-              <a:defRPr sz="1900">
-                <a:solidFill>
-                  <a:srgbClr val="111827"/>
-                </a:solidFill>
-              </a:defRPr>
-            </a:pPr>
-            <a:r>
-              <a:t>• Records diagnostic remarks &amp; marks RESOLVED.</a:t>
+              <a:defRPr sz="1800">
+                <a:solidFill>
+                  <a:srgbClr val="1E293B"/>
+                </a:solidFill>
+                <a:latin typeface="Arial"/>
+              </a:defRPr>
+            </a:pPr>
+            <a:r>
+              <a:t>• Attaches optional photographic evidence.</a:t>
+            </a:r>
+          </a:p>
+          <a:p>
+            <a:pPr>
+              <a:spcBef>
+                <a:spcPts val="500"/>
+              </a:spcBef>
+              <a:defRPr sz="1800">
+                <a:solidFill>
+                  <a:srgbClr val="1E293B"/>
+                </a:solidFill>
+                <a:latin typeface="Arial"/>
+              </a:defRPr>
+            </a:pPr>
+            <a:r>
+              <a:t>• Monitors real-time status progression.</a:t>
+            </a:r>
+          </a:p>
+          <a:p>
+            <a:pPr>
+              <a:spcBef>
+                <a:spcPts val="500"/>
+              </a:spcBef>
+              <a:defRPr sz="1800">
+                <a:solidFill>
+                  <a:srgbClr val="1E293B"/>
+                </a:solidFill>
+                <a:latin typeface="Arial"/>
+              </a:defRPr>
+            </a:pPr>
+            <a:r>
+              <a:t>• Submits 1–5 star rating upon resolution.</a:t>
+            </a:r>
+          </a:p>
+        </p:txBody>
+      </p:sp>
+      <p:sp>
+        <p:nvSpPr>
+          <p:cNvPr id="24" name="Rectangle 23"/>
+          <p:cNvSpPr/>
+          <p:nvPr/>
+        </p:nvSpPr>
+        <p:spPr>
+          <a:xfrm>
+            <a:off x="4398264" y="3337560"/>
+            <a:ext cx="3392424" cy="2560320"/>
+          </a:xfrm>
+          <a:prstGeom prst="rect">
+            <a:avLst/>
+          </a:prstGeom>
+          <a:solidFill>
+            <a:srgbClr val="F1F5F9"/>
+          </a:solidFill>
+          <a:ln w="19050">
+            <a:solidFill>
+              <a:srgbClr val="CBD5E1"/>
+            </a:solidFill>
+          </a:ln>
+        </p:spPr>
+        <p:style>
+          <a:lnRef idx="1">
+            <a:schemeClr val="accent1"/>
+          </a:lnRef>
+          <a:fillRef idx="3">
+            <a:schemeClr val="accent1"/>
+          </a:fillRef>
+          <a:effectRef idx="2">
+            <a:schemeClr val="accent1"/>
+          </a:effectRef>
+          <a:fontRef idx="minor">
+            <a:schemeClr val="lt1"/>
+          </a:fontRef>
+        </p:style>
+        <p:txBody>
+          <a:bodyPr rtlCol="0" anchor="ctr"/>
+          <a:lstStyle/>
+          <a:p>
+            <a:pPr algn="ctr"/>
+          </a:p>
+        </p:txBody>
+      </p:sp>
+      <p:sp>
+        <p:nvSpPr>
+          <p:cNvPr id="25" name="TextBox 24"/>
+          <p:cNvSpPr txBox="1"/>
+          <p:nvPr/>
+        </p:nvSpPr>
+        <p:spPr>
+          <a:xfrm>
+            <a:off x="4581144" y="3474720"/>
+            <a:ext cx="3026664" cy="2286000"/>
+          </a:xfrm>
+          <a:prstGeom prst="rect">
+            <a:avLst/>
+          </a:prstGeom>
+          <a:noFill/>
+        </p:spPr>
+        <p:txBody>
+          <a:bodyPr wrap="square" lIns="0" tIns="0">
+            <a:spAutoFit/>
+          </a:bodyPr>
+          <a:lstStyle/>
+          <a:p>
+            <a:pPr>
+              <a:defRPr sz="2200" b="1">
+                <a:solidFill>
+                  <a:srgbClr val="0F172A"/>
+                </a:solidFill>
+                <a:latin typeface="Arial"/>
+              </a:defRPr>
+            </a:pPr>
+            <a:r>
+              <a:t>Administrator</a:t>
+            </a:r>
+          </a:p>
+          <a:p>
+            <a:pPr>
+              <a:spcBef>
+                <a:spcPts val="400"/>
+              </a:spcBef>
+              <a:defRPr sz="1900" b="1">
+                <a:solidFill>
+                  <a:srgbClr val="0F172A"/>
+                </a:solidFill>
+                <a:latin typeface="Arial"/>
+              </a:defRPr>
+            </a:pPr>
+            <a:r>
+              <a:t>Verify  →  Assign  →  Close</a:t>
+            </a:r>
+          </a:p>
+          <a:p>
+            <a:pPr>
+              <a:spcBef>
+                <a:spcPts val="500"/>
+              </a:spcBef>
+              <a:defRPr sz="1800">
+                <a:solidFill>
+                  <a:srgbClr val="1E293B"/>
+                </a:solidFill>
+                <a:latin typeface="Arial"/>
+              </a:defRPr>
+            </a:pPr>
+            <a:r>
+              <a:t>• Reviews complaint details and authenticity.</a:t>
+            </a:r>
+          </a:p>
+          <a:p>
+            <a:pPr>
+              <a:spcBef>
+                <a:spcPts val="500"/>
+              </a:spcBef>
+              <a:defRPr sz="1800">
+                <a:solidFill>
+                  <a:srgbClr val="1E293B"/>
+                </a:solidFill>
+                <a:latin typeface="Arial"/>
+              </a:defRPr>
+            </a:pPr>
+            <a:r>
+              <a:t>• Accepts (VERIFIED) or dismisses (REJECTED).</a:t>
+            </a:r>
+          </a:p>
+          <a:p>
+            <a:pPr>
+              <a:spcBef>
+                <a:spcPts val="500"/>
+              </a:spcBef>
+              <a:defRPr sz="1800">
+                <a:solidFill>
+                  <a:srgbClr val="1E293B"/>
+                </a:solidFill>
+                <a:latin typeface="Arial"/>
+              </a:defRPr>
+            </a:pPr>
+            <a:r>
+              <a:t>• Assigns task to active technician.</a:t>
+            </a:r>
+          </a:p>
+          <a:p>
+            <a:pPr>
+              <a:spcBef>
+                <a:spcPts val="500"/>
+              </a:spcBef>
+              <a:defRPr sz="1800">
+                <a:solidFill>
+                  <a:srgbClr val="1E293B"/>
+                </a:solidFill>
+                <a:latin typeface="Arial"/>
+              </a:defRPr>
+            </a:pPr>
+            <a:r>
+              <a:t>• Reviews repair notes &amp; confirms closure.</a:t>
+            </a:r>
+          </a:p>
+        </p:txBody>
+      </p:sp>
+      <p:sp>
+        <p:nvSpPr>
+          <p:cNvPr id="26" name="Rectangle 25"/>
+          <p:cNvSpPr/>
+          <p:nvPr/>
+        </p:nvSpPr>
+        <p:spPr>
+          <a:xfrm>
+            <a:off x="8065008" y="3337560"/>
+            <a:ext cx="3392424" cy="2560320"/>
+          </a:xfrm>
+          <a:prstGeom prst="rect">
+            <a:avLst/>
+          </a:prstGeom>
+          <a:solidFill>
+            <a:srgbClr val="F1F5F9"/>
+          </a:solidFill>
+          <a:ln w="19050">
+            <a:solidFill>
+              <a:srgbClr val="CBD5E1"/>
+            </a:solidFill>
+          </a:ln>
+        </p:spPr>
+        <p:style>
+          <a:lnRef idx="1">
+            <a:schemeClr val="accent1"/>
+          </a:lnRef>
+          <a:fillRef idx="3">
+            <a:schemeClr val="accent1"/>
+          </a:fillRef>
+          <a:effectRef idx="2">
+            <a:schemeClr val="accent1"/>
+          </a:effectRef>
+          <a:fontRef idx="minor">
+            <a:schemeClr val="lt1"/>
+          </a:fontRef>
+        </p:style>
+        <p:txBody>
+          <a:bodyPr rtlCol="0" anchor="ctr"/>
+          <a:lstStyle/>
+          <a:p>
+            <a:pPr algn="ctr"/>
+          </a:p>
+        </p:txBody>
+      </p:sp>
+      <p:sp>
+        <p:nvSpPr>
+          <p:cNvPr id="27" name="TextBox 26"/>
+          <p:cNvSpPr txBox="1"/>
+          <p:nvPr/>
+        </p:nvSpPr>
+        <p:spPr>
+          <a:xfrm>
+            <a:off x="8247888" y="3474720"/>
+            <a:ext cx="3026664" cy="2286000"/>
+          </a:xfrm>
+          <a:prstGeom prst="rect">
+            <a:avLst/>
+          </a:prstGeom>
+          <a:noFill/>
+        </p:spPr>
+        <p:txBody>
+          <a:bodyPr wrap="square" lIns="0" tIns="0">
+            <a:spAutoFit/>
+          </a:bodyPr>
+          <a:lstStyle/>
+          <a:p>
+            <a:pPr>
+              <a:defRPr sz="2200" b="1">
+                <a:solidFill>
+                  <a:srgbClr val="15803D"/>
+                </a:solidFill>
+                <a:latin typeface="Arial"/>
+              </a:defRPr>
+            </a:pPr>
+            <a:r>
+              <a:t>Maintenance Staff</a:t>
+            </a:r>
+          </a:p>
+          <a:p>
+            <a:pPr>
+              <a:spcBef>
+                <a:spcPts val="400"/>
+              </a:spcBef>
+              <a:defRPr sz="1900" b="1">
+                <a:solidFill>
+                  <a:srgbClr val="0F172A"/>
+                </a:solidFill>
+                <a:latin typeface="Arial"/>
+              </a:defRPr>
+            </a:pPr>
+            <a:r>
+              <a:t>Accept  →  Work  →  Resolve</a:t>
+            </a:r>
+          </a:p>
+          <a:p>
+            <a:pPr>
+              <a:spcBef>
+                <a:spcPts val="500"/>
+              </a:spcBef>
+              <a:defRPr sz="1800">
+                <a:solidFill>
+                  <a:srgbClr val="1E293B"/>
+                </a:solidFill>
+                <a:latin typeface="Arial"/>
+              </a:defRPr>
+            </a:pPr>
+            <a:r>
+              <a:t>• Accesses assigned work orders queue.</a:t>
+            </a:r>
+          </a:p>
+          <a:p>
+            <a:pPr>
+              <a:spcBef>
+                <a:spcPts val="500"/>
+              </a:spcBef>
+              <a:defRPr sz="1800">
+                <a:solidFill>
+                  <a:srgbClr val="1E293B"/>
+                </a:solidFill>
+                <a:latin typeface="Arial"/>
+              </a:defRPr>
+            </a:pPr>
+            <a:r>
+              <a:t>• Begins physical remediation (IN PROGRESS).</a:t>
+            </a:r>
+          </a:p>
+          <a:p>
+            <a:pPr>
+              <a:spcBef>
+                <a:spcPts val="500"/>
+              </a:spcBef>
+              <a:defRPr sz="1800">
+                <a:solidFill>
+                  <a:srgbClr val="1E293B"/>
+                </a:solidFill>
+                <a:latin typeface="Arial"/>
+              </a:defRPr>
+            </a:pPr>
+            <a:r>
+              <a:t>• Logs diagnostic &amp; repair remarks.</a:t>
+            </a:r>
+          </a:p>
+          <a:p>
+            <a:pPr>
+              <a:spcBef>
+                <a:spcPts val="500"/>
+              </a:spcBef>
+              <a:defRPr sz="1800">
+                <a:solidFill>
+                  <a:srgbClr val="1E293B"/>
+                </a:solidFill>
+                <a:latin typeface="Arial"/>
+              </a:defRPr>
+            </a:pPr>
+            <a:r>
+              <a:t>• Marks complaint successfully RESOLVED.</a:t>
             </a:r>
           </a:p>
         </p:txBody>
@@ -8338,7 +8303,7 @@
           <a:noFill/>
         </p:spPr>
         <p:txBody>
-          <a:bodyPr wrap="square" lIns="0" tIns="0" rIns="0" bIns="0">
+          <a:bodyPr wrap="none" lIns="0" tIns="0" rIns="0" bIns="0">
             <a:spAutoFit/>
           </a:bodyPr>
           <a:lstStyle/>
@@ -8346,13 +8311,13 @@
             <a:pPr>
               <a:defRPr sz="1800" b="1">
                 <a:solidFill>
-                  <a:srgbClr val="1D4ED8"/>
-                </a:solidFill>
-                <a:latin typeface="Arial"/>
-              </a:defRPr>
-            </a:pPr>
-            <a:r>
-              <a:t>5. MAJOR MODULES &amp; TECH STACK</a:t>
+                  <a:srgbClr val="2563EB"/>
+                </a:solidFill>
+                <a:latin typeface="Arial"/>
+              </a:defRPr>
+            </a:pPr>
+            <a:r>
+              <a:t>5. MAJOR MODULES &amp; TECHNOLOGY STACK</a:t>
             </a:r>
           </a:p>
         </p:txBody>
@@ -8374,7 +8339,7 @@
           <a:noFill/>
         </p:spPr>
         <p:txBody>
-          <a:bodyPr wrap="square" lIns="0" tIns="0" rIns="0" bIns="0">
+          <a:bodyPr wrap="none" lIns="0" tIns="0" rIns="0" bIns="0">
             <a:spAutoFit/>
           </a:bodyPr>
           <a:lstStyle/>
@@ -8382,13 +8347,13 @@
             <a:pPr>
               <a:defRPr sz="3200" b="1">
                 <a:solidFill>
-                  <a:srgbClr val="0F2744"/>
-                </a:solidFill>
-                <a:latin typeface="Arial"/>
-              </a:defRPr>
-            </a:pPr>
-            <a:r>
-              <a:t>Cohesive Functional Modules Mapped to Modern Technologies</a:t>
+                  <a:srgbClr val="0F172A"/>
+                </a:solidFill>
+                <a:latin typeface="Arial"/>
+              </a:defRPr>
+            </a:pPr>
+            <a:r>
+              <a:t>Functional System Modules &amp; Production Software Stack</a:t>
             </a:r>
           </a:p>
         </p:txBody>
@@ -8401,7 +8366,7 @@
         </p:nvSpPr>
         <p:spPr>
           <a:xfrm>
-            <a:off x="731520" y="6236208"/>
+            <a:off x="731520" y="6263640"/>
             <a:ext cx="10728655" cy="13716"/>
           </a:xfrm>
           <a:prstGeom prst="rect">
@@ -8445,7 +8410,7 @@
         <p:spPr>
           <a:xfrm>
             <a:off x="731520" y="6327648"/>
-            <a:ext cx="8412480" cy="320040"/>
+            <a:ext cx="8229600" cy="320040"/>
           </a:xfrm>
           <a:prstGeom prst="rect">
             <a:avLst/>
@@ -8461,13 +8426,13 @@
             <a:pPr>
               <a:defRPr sz="1600" b="1">
                 <a:solidFill>
-                  <a:srgbClr val="334155"/>
-                </a:solidFill>
-                <a:latin typeface="Arial"/>
-              </a:defRPr>
-            </a:pPr>
-            <a:r>
-              <a:t>Campus Complaint &amp; Maintenance Management System  |  Software Engineering Mini Project</a:t>
+                  <a:srgbClr val="475569"/>
+                </a:solidFill>
+                <a:latin typeface="Arial"/>
+              </a:defRPr>
+            </a:pPr>
+            <a:r>
+              <a:t>Campus Complaint &amp; Maintenance Management System  |  Software Engineering Lab</a:t>
             </a:r>
           </a:p>
         </p:txBody>
@@ -8497,7 +8462,7 @@
             <a:pPr algn="r">
               <a:defRPr sz="1600" b="1">
                 <a:solidFill>
-                  <a:srgbClr val="1D4ED8"/>
+                  <a:srgbClr val="2563EB"/>
                 </a:solidFill>
                 <a:latin typeface="Arial"/>
               </a:defRPr>
@@ -8510,24 +8475,60 @@
       </p:sp>
       <p:sp>
         <p:nvSpPr>
-          <p:cNvPr id="7" name="Rounded Rectangle 6"/>
+          <p:cNvPr id="7" name="TextBox 6"/>
+          <p:cNvSpPr txBox="1"/>
+          <p:nvPr/>
+        </p:nvSpPr>
+        <p:spPr>
+          <a:xfrm>
+            <a:off x="731520" y="1280160"/>
+            <a:ext cx="5029200" cy="365760"/>
+          </a:xfrm>
+          <a:prstGeom prst="rect">
+            <a:avLst/>
+          </a:prstGeom>
+          <a:noFill/>
+        </p:spPr>
+        <p:txBody>
+          <a:bodyPr wrap="none" lIns="0" tIns="0">
+            <a:spAutoFit/>
+          </a:bodyPr>
+          <a:lstStyle/>
+          <a:p>
+            <a:pPr>
+              <a:defRPr sz="2400" b="1">
+                <a:solidFill>
+                  <a:srgbClr val="0F172A"/>
+                </a:solidFill>
+                <a:latin typeface="Arial"/>
+              </a:defRPr>
+            </a:pPr>
+            <a:r>
+              <a:t>System Functional Modules</a:t>
+            </a:r>
+          </a:p>
+        </p:txBody>
+      </p:sp>
+      <p:sp>
+        <p:nvSpPr>
+          <p:cNvPr id="8" name="Rectangle 7"/>
           <p:cNvSpPr/>
           <p:nvPr/>
         </p:nvSpPr>
         <p:spPr>
           <a:xfrm>
-            <a:off x="731520" y="1325880"/>
-            <a:ext cx="5212080" cy="4754880"/>
-          </a:xfrm>
-          <a:prstGeom prst="roundRect">
+            <a:off x="731520" y="1783080"/>
+            <a:ext cx="5029200" cy="566928"/>
+          </a:xfrm>
+          <a:prstGeom prst="rect">
             <a:avLst/>
           </a:prstGeom>
           <a:solidFill>
-            <a:srgbClr val="F8FAFC"/>
+            <a:srgbClr val="FFFFFF"/>
           </a:solidFill>
-          <a:ln w="15240">
+          <a:ln w="19050">
             <a:solidFill>
-              <a:srgbClr val="CBD5E1"/>
+              <a:srgbClr val="2563EB"/>
             </a:solidFill>
           </a:ln>
         </p:spPr>
@@ -8546,188 +8547,46 @@
           </a:fontRef>
         </p:style>
         <p:txBody>
-          <a:bodyPr rtlCol="0" anchor="ctr"/>
-          <a:lstStyle/>
-          <a:p>
-            <a:pPr algn="ctr"/>
-          </a:p>
-        </p:txBody>
-      </p:sp>
-      <p:sp>
-        <p:nvSpPr>
-          <p:cNvPr id="8" name="TextBox 7"/>
-          <p:cNvSpPr txBox="1"/>
-          <p:nvPr/>
-        </p:nvSpPr>
-        <p:spPr>
-          <a:xfrm>
-            <a:off x="960120" y="1508760"/>
-            <a:ext cx="4754880" cy="4389120"/>
-          </a:xfrm>
-          <a:prstGeom prst="rect">
-            <a:avLst/>
-          </a:prstGeom>
-          <a:noFill/>
-        </p:spPr>
-        <p:txBody>
-          <a:bodyPr wrap="square" lIns="0" tIns="0">
-            <a:spAutoFit/>
-          </a:bodyPr>
-          <a:lstStyle/>
-          <a:p>
-            <a:pPr>
-              <a:spcAft>
-                <a:spcPts val="1200"/>
-              </a:spcAft>
-              <a:defRPr sz="2400" b="1">
-                <a:solidFill>
-                  <a:srgbClr val="0F2744"/>
-                </a:solidFill>
-                <a:latin typeface="Arial"/>
-              </a:defRPr>
-            </a:pPr>
-            <a:r>
-              <a:t>Major System Modules</a:t>
-            </a:r>
-          </a:p>
-          <a:p>
-            <a:pPr>
-              <a:spcBef>
-                <a:spcPts val="800"/>
-              </a:spcBef>
-            </a:pPr>
-            <a:r>
-              <a:rPr b="1" sz="2000">
-                <a:solidFill>
-                  <a:srgbClr val="1D4ED8"/>
-                </a:solidFill>
-              </a:rPr>
-              <a:t>• Authentication &amp; RBAC: </a:t>
-            </a:r>
-            <a:r>
-              <a:rPr sz="1900">
-                <a:solidFill>
-                  <a:srgbClr val="111827"/>
-                </a:solidFill>
-              </a:rPr>
-              <a:t>User registration, bcryptjs hashing, JWT token issuance, and Student/Faculty/Maintenance/Admin route protection.</a:t>
-            </a:r>
-          </a:p>
-          <a:p>
-            <a:pPr>
-              <a:spcBef>
-                <a:spcPts val="800"/>
-              </a:spcBef>
-            </a:pPr>
-            <a:r>
-              <a:rPr b="1" sz="2000">
-                <a:solidFill>
-                  <a:srgbClr val="1D4ED8"/>
-                </a:solidFill>
-              </a:rPr>
-              <a:t>• Complaint Lodging: </a:t>
-            </a:r>
-            <a:r>
-              <a:rPr sz="1900">
-                <a:solidFill>
-                  <a:srgbClr val="111827"/>
-                </a:solidFill>
-              </a:rPr>
-              <a:t>Dynamic React form mapping issues to campus buildings &amp; rooms, Multer image upload, unique CMP-ID generation.</a:t>
-            </a:r>
-          </a:p>
-          <a:p>
-            <a:pPr>
-              <a:spcBef>
-                <a:spcPts val="800"/>
-              </a:spcBef>
-            </a:pPr>
-            <a:r>
-              <a:rPr b="1" sz="2000">
-                <a:solidFill>
-                  <a:srgbClr val="1D4ED8"/>
-                </a:solidFill>
-              </a:rPr>
-              <a:t>• Admin Control Center: </a:t>
-            </a:r>
-            <a:r>
-              <a:rPr sz="1900">
-                <a:solidFill>
-                  <a:srgbClr val="111827"/>
-                </a:solidFill>
-              </a:rPr>
-              <a:t>Campus-wide ticket visibility, multi-criteria filtering, one-click verify/reject, and technician allocation.</a:t>
-            </a:r>
-          </a:p>
-          <a:p>
-            <a:pPr>
-              <a:spcBef>
-                <a:spcPts val="800"/>
-              </a:spcBef>
-            </a:pPr>
-            <a:r>
-              <a:rPr b="1" sz="2000">
-                <a:solidFill>
-                  <a:srgbClr val="1D4ED8"/>
-                </a:solidFill>
-              </a:rPr>
-              <a:t>• Maintenance Task Queue: </a:t>
-            </a:r>
-            <a:r>
-              <a:rPr sz="1900">
-                <a:solidFill>
-                  <a:srgbClr val="111827"/>
-                </a:solidFill>
-              </a:rPr>
-              <a:t>Staff-focused work order queue with real-time status transitions (In Progress) and resolution remarks logging.</a:t>
-            </a:r>
-          </a:p>
-          <a:p>
-            <a:pPr>
-              <a:spcBef>
-                <a:spcPts val="800"/>
-              </a:spcBef>
-            </a:pPr>
-            <a:r>
-              <a:rPr b="1" sz="2000">
-                <a:solidFill>
-                  <a:srgbClr val="1D4ED8"/>
-                </a:solidFill>
-              </a:rPr>
-              <a:t>• Audit History &amp; Feedback: </a:t>
-            </a:r>
-            <a:r>
-              <a:rPr sz="1900">
-                <a:solidFill>
-                  <a:srgbClr val="111827"/>
-                </a:solidFill>
-              </a:rPr>
-              <a:t>Append-only status history in complaint_updates and 1 to 5 star user feedback collection.</a:t>
-            </a:r>
-          </a:p>
-        </p:txBody>
-      </p:sp>
-      <p:sp>
-        <p:nvSpPr>
-          <p:cNvPr id="9" name="Rounded Rectangle 8"/>
+          <a:bodyPr rtlCol="0" anchor="ctr" wrap="square"/>
+          <a:lstStyle/>
+          <a:p>
+            <a:pPr algn="ctr">
+              <a:defRPr sz="1700" b="1">
+                <a:solidFill>
+                  <a:srgbClr val="0F172A"/>
+                </a:solidFill>
+                <a:latin typeface="Arial"/>
+              </a:defRPr>
+            </a:pPr>
+            <a:r>
+              <a:t>Authentication &amp; RBAC</a:t>
+            </a:r>
+            <a:br/>
+            <a:r>
+              <a:t>(Registration, login, JWT token issuance, and role access guards)</a:t>
+            </a:r>
+          </a:p>
+        </p:txBody>
+      </p:sp>
+      <p:sp>
+        <p:nvSpPr>
+          <p:cNvPr id="9" name="Down Arrow 8"/>
           <p:cNvSpPr/>
           <p:nvPr/>
         </p:nvSpPr>
         <p:spPr>
           <a:xfrm>
-            <a:off x="6248095" y="1325880"/>
-            <a:ext cx="5212080" cy="4754880"/>
-          </a:xfrm>
-          <a:prstGeom prst="roundRect">
+            <a:off x="3154680" y="2368296"/>
+            <a:ext cx="182880" cy="256032"/>
+          </a:xfrm>
+          <a:prstGeom prst="downArrow">
             <a:avLst/>
           </a:prstGeom>
           <a:solidFill>
-            <a:srgbClr val="FFFFFF"/>
+            <a:srgbClr val="2563EB"/>
           </a:solidFill>
-          <a:ln w="15240">
-            <a:solidFill>
-              <a:srgbClr val="CBD5E1"/>
-            </a:solidFill>
+          <a:ln>
+            <a:noFill/>
           </a:ln>
         </p:spPr>
         <p:style>
@@ -8754,14 +8613,460 @@
       </p:sp>
       <p:sp>
         <p:nvSpPr>
-          <p:cNvPr id="10" name="TextBox 9"/>
+          <p:cNvPr id="10" name="Rectangle 9"/>
+          <p:cNvSpPr/>
+          <p:nvPr/>
+        </p:nvSpPr>
+        <p:spPr>
+          <a:xfrm>
+            <a:off x="731520" y="2651760"/>
+            <a:ext cx="5029200" cy="566928"/>
+          </a:xfrm>
+          <a:prstGeom prst="rect">
+            <a:avLst/>
+          </a:prstGeom>
+          <a:solidFill>
+            <a:srgbClr val="FFFFFF"/>
+          </a:solidFill>
+          <a:ln w="19050">
+            <a:solidFill>
+              <a:srgbClr val="2563EB"/>
+            </a:solidFill>
+          </a:ln>
+        </p:spPr>
+        <p:style>
+          <a:lnRef idx="1">
+            <a:schemeClr val="accent1"/>
+          </a:lnRef>
+          <a:fillRef idx="3">
+            <a:schemeClr val="accent1"/>
+          </a:fillRef>
+          <a:effectRef idx="2">
+            <a:schemeClr val="accent1"/>
+          </a:effectRef>
+          <a:fontRef idx="minor">
+            <a:schemeClr val="lt1"/>
+          </a:fontRef>
+        </p:style>
+        <p:txBody>
+          <a:bodyPr rtlCol="0" anchor="ctr" wrap="square"/>
+          <a:lstStyle/>
+          <a:p>
+            <a:pPr algn="ctr">
+              <a:defRPr sz="1700" b="1">
+                <a:solidFill>
+                  <a:srgbClr val="0F172A"/>
+                </a:solidFill>
+                <a:latin typeface="Arial"/>
+              </a:defRPr>
+            </a:pPr>
+            <a:r>
+              <a:t>Complaint Lodging</a:t>
+            </a:r>
+            <a:br/>
+            <a:r>
+              <a:t>(Dynamic React form, category/room selection, Multer file upload)</a:t>
+            </a:r>
+          </a:p>
+        </p:txBody>
+      </p:sp>
+      <p:sp>
+        <p:nvSpPr>
+          <p:cNvPr id="11" name="Down Arrow 10"/>
+          <p:cNvSpPr/>
+          <p:nvPr/>
+        </p:nvSpPr>
+        <p:spPr>
+          <a:xfrm>
+            <a:off x="3154680" y="3236976"/>
+            <a:ext cx="182880" cy="256032"/>
+          </a:xfrm>
+          <a:prstGeom prst="downArrow">
+            <a:avLst/>
+          </a:prstGeom>
+          <a:solidFill>
+            <a:srgbClr val="2563EB"/>
+          </a:solidFill>
+          <a:ln>
+            <a:noFill/>
+          </a:ln>
+        </p:spPr>
+        <p:style>
+          <a:lnRef idx="1">
+            <a:schemeClr val="accent1"/>
+          </a:lnRef>
+          <a:fillRef idx="3">
+            <a:schemeClr val="accent1"/>
+          </a:fillRef>
+          <a:effectRef idx="2">
+            <a:schemeClr val="accent1"/>
+          </a:effectRef>
+          <a:fontRef idx="minor">
+            <a:schemeClr val="lt1"/>
+          </a:fontRef>
+        </p:style>
+        <p:txBody>
+          <a:bodyPr rtlCol="0" anchor="ctr"/>
+          <a:lstStyle/>
+          <a:p>
+            <a:pPr algn="ctr"/>
+          </a:p>
+        </p:txBody>
+      </p:sp>
+      <p:sp>
+        <p:nvSpPr>
+          <p:cNvPr id="12" name="Rectangle 11"/>
+          <p:cNvSpPr/>
+          <p:nvPr/>
+        </p:nvSpPr>
+        <p:spPr>
+          <a:xfrm>
+            <a:off x="731520" y="3520439"/>
+            <a:ext cx="5029200" cy="566928"/>
+          </a:xfrm>
+          <a:prstGeom prst="rect">
+            <a:avLst/>
+          </a:prstGeom>
+          <a:solidFill>
+            <a:srgbClr val="FFFFFF"/>
+          </a:solidFill>
+          <a:ln w="19050">
+            <a:solidFill>
+              <a:srgbClr val="2563EB"/>
+            </a:solidFill>
+          </a:ln>
+        </p:spPr>
+        <p:style>
+          <a:lnRef idx="1">
+            <a:schemeClr val="accent1"/>
+          </a:lnRef>
+          <a:fillRef idx="3">
+            <a:schemeClr val="accent1"/>
+          </a:fillRef>
+          <a:effectRef idx="2">
+            <a:schemeClr val="accent1"/>
+          </a:effectRef>
+          <a:fontRef idx="minor">
+            <a:schemeClr val="lt1"/>
+          </a:fontRef>
+        </p:style>
+        <p:txBody>
+          <a:bodyPr rtlCol="0" anchor="ctr" wrap="square"/>
+          <a:lstStyle/>
+          <a:p>
+            <a:pPr algn="ctr">
+              <a:defRPr sz="1700" b="1">
+                <a:solidFill>
+                  <a:srgbClr val="0F172A"/>
+                </a:solidFill>
+                <a:latin typeface="Arial"/>
+              </a:defRPr>
+            </a:pPr>
+            <a:r>
+              <a:t>Admin Control Center</a:t>
+            </a:r>
+            <a:br/>
+            <a:r>
+              <a:t>(Campus-wide triage, status filters, staff assignment interface)</a:t>
+            </a:r>
+          </a:p>
+        </p:txBody>
+      </p:sp>
+      <p:sp>
+        <p:nvSpPr>
+          <p:cNvPr id="13" name="Down Arrow 12"/>
+          <p:cNvSpPr/>
+          <p:nvPr/>
+        </p:nvSpPr>
+        <p:spPr>
+          <a:xfrm>
+            <a:off x="3154680" y="4105655"/>
+            <a:ext cx="182880" cy="256032"/>
+          </a:xfrm>
+          <a:prstGeom prst="downArrow">
+            <a:avLst/>
+          </a:prstGeom>
+          <a:solidFill>
+            <a:srgbClr val="2563EB"/>
+          </a:solidFill>
+          <a:ln>
+            <a:noFill/>
+          </a:ln>
+        </p:spPr>
+        <p:style>
+          <a:lnRef idx="1">
+            <a:schemeClr val="accent1"/>
+          </a:lnRef>
+          <a:fillRef idx="3">
+            <a:schemeClr val="accent1"/>
+          </a:fillRef>
+          <a:effectRef idx="2">
+            <a:schemeClr val="accent1"/>
+          </a:effectRef>
+          <a:fontRef idx="minor">
+            <a:schemeClr val="lt1"/>
+          </a:fontRef>
+        </p:style>
+        <p:txBody>
+          <a:bodyPr rtlCol="0" anchor="ctr"/>
+          <a:lstStyle/>
+          <a:p>
+            <a:pPr algn="ctr"/>
+          </a:p>
+        </p:txBody>
+      </p:sp>
+      <p:sp>
+        <p:nvSpPr>
+          <p:cNvPr id="14" name="Rectangle 13"/>
+          <p:cNvSpPr/>
+          <p:nvPr/>
+        </p:nvSpPr>
+        <p:spPr>
+          <a:xfrm>
+            <a:off x="731520" y="4389120"/>
+            <a:ext cx="5029200" cy="566928"/>
+          </a:xfrm>
+          <a:prstGeom prst="rect">
+            <a:avLst/>
+          </a:prstGeom>
+          <a:solidFill>
+            <a:srgbClr val="FFFFFF"/>
+          </a:solidFill>
+          <a:ln w="19050">
+            <a:solidFill>
+              <a:srgbClr val="2563EB"/>
+            </a:solidFill>
+          </a:ln>
+        </p:spPr>
+        <p:style>
+          <a:lnRef idx="1">
+            <a:schemeClr val="accent1"/>
+          </a:lnRef>
+          <a:fillRef idx="3">
+            <a:schemeClr val="accent1"/>
+          </a:fillRef>
+          <a:effectRef idx="2">
+            <a:schemeClr val="accent1"/>
+          </a:effectRef>
+          <a:fontRef idx="minor">
+            <a:schemeClr val="lt1"/>
+          </a:fontRef>
+        </p:style>
+        <p:txBody>
+          <a:bodyPr rtlCol="0" anchor="ctr" wrap="square"/>
+          <a:lstStyle/>
+          <a:p>
+            <a:pPr algn="ctr">
+              <a:defRPr sz="1700" b="1">
+                <a:solidFill>
+                  <a:srgbClr val="0F172A"/>
+                </a:solidFill>
+                <a:latin typeface="Arial"/>
+              </a:defRPr>
+            </a:pPr>
+            <a:r>
+              <a:t>Maintenance Work Orders</a:t>
+            </a:r>
+            <a:br/>
+            <a:r>
+              <a:t>(Technician task queue, work commencement, resolution remarks)</a:t>
+            </a:r>
+          </a:p>
+        </p:txBody>
+      </p:sp>
+      <p:sp>
+        <p:nvSpPr>
+          <p:cNvPr id="15" name="Down Arrow 14"/>
+          <p:cNvSpPr/>
+          <p:nvPr/>
+        </p:nvSpPr>
+        <p:spPr>
+          <a:xfrm>
+            <a:off x="3154680" y="4974336"/>
+            <a:ext cx="182880" cy="256032"/>
+          </a:xfrm>
+          <a:prstGeom prst="downArrow">
+            <a:avLst/>
+          </a:prstGeom>
+          <a:solidFill>
+            <a:srgbClr val="2563EB"/>
+          </a:solidFill>
+          <a:ln>
+            <a:noFill/>
+          </a:ln>
+        </p:spPr>
+        <p:style>
+          <a:lnRef idx="1">
+            <a:schemeClr val="accent1"/>
+          </a:lnRef>
+          <a:fillRef idx="3">
+            <a:schemeClr val="accent1"/>
+          </a:fillRef>
+          <a:effectRef idx="2">
+            <a:schemeClr val="accent1"/>
+          </a:effectRef>
+          <a:fontRef idx="minor">
+            <a:schemeClr val="lt1"/>
+          </a:fontRef>
+        </p:style>
+        <p:txBody>
+          <a:bodyPr rtlCol="0" anchor="ctr"/>
+          <a:lstStyle/>
+          <a:p>
+            <a:pPr algn="ctr"/>
+          </a:p>
+        </p:txBody>
+      </p:sp>
+      <p:sp>
+        <p:nvSpPr>
+          <p:cNvPr id="16" name="Rectangle 15"/>
+          <p:cNvSpPr/>
+          <p:nvPr/>
+        </p:nvSpPr>
+        <p:spPr>
+          <a:xfrm>
+            <a:off x="731520" y="5257800"/>
+            <a:ext cx="5029200" cy="566928"/>
+          </a:xfrm>
+          <a:prstGeom prst="rect">
+            <a:avLst/>
+          </a:prstGeom>
+          <a:solidFill>
+            <a:srgbClr val="FFFFFF"/>
+          </a:solidFill>
+          <a:ln w="19050">
+            <a:solidFill>
+              <a:srgbClr val="2563EB"/>
+            </a:solidFill>
+          </a:ln>
+        </p:spPr>
+        <p:style>
+          <a:lnRef idx="1">
+            <a:schemeClr val="accent1"/>
+          </a:lnRef>
+          <a:fillRef idx="3">
+            <a:schemeClr val="accent1"/>
+          </a:fillRef>
+          <a:effectRef idx="2">
+            <a:schemeClr val="accent1"/>
+          </a:effectRef>
+          <a:fontRef idx="minor">
+            <a:schemeClr val="lt1"/>
+          </a:fontRef>
+        </p:style>
+        <p:txBody>
+          <a:bodyPr rtlCol="0" anchor="ctr" wrap="square"/>
+          <a:lstStyle/>
+          <a:p>
+            <a:pPr algn="ctr">
+              <a:defRPr sz="1700" b="1">
+                <a:solidFill>
+                  <a:srgbClr val="0F172A"/>
+                </a:solidFill>
+                <a:latin typeface="Arial"/>
+              </a:defRPr>
+            </a:pPr>
+            <a:r>
+              <a:t>Audit History &amp; Feedback</a:t>
+            </a:r>
+            <a:br/>
+            <a:r>
+              <a:t>(Append-only status history in complaint_updates + student rating)</a:t>
+            </a:r>
+          </a:p>
+        </p:txBody>
+      </p:sp>
+      <p:sp>
+        <p:nvSpPr>
+          <p:cNvPr id="17" name="TextBox 16"/>
           <p:cNvSpPr txBox="1"/>
           <p:nvPr/>
         </p:nvSpPr>
         <p:spPr>
           <a:xfrm>
-            <a:off x="6476695" y="1508760"/>
-            <a:ext cx="4754880" cy="4389120"/>
+            <a:off x="6217920" y="1280160"/>
+            <a:ext cx="5212080" cy="365760"/>
+          </a:xfrm>
+          <a:prstGeom prst="rect">
+            <a:avLst/>
+          </a:prstGeom>
+          <a:noFill/>
+        </p:spPr>
+        <p:txBody>
+          <a:bodyPr wrap="none" lIns="0" tIns="0">
+            <a:spAutoFit/>
+          </a:bodyPr>
+          <a:lstStyle/>
+          <a:p>
+            <a:pPr>
+              <a:defRPr sz="2400" b="1">
+                <a:solidFill>
+                  <a:srgbClr val="0F172A"/>
+                </a:solidFill>
+                <a:latin typeface="Arial"/>
+              </a:defRPr>
+            </a:pPr>
+            <a:r>
+              <a:t>Production Technology Stack</a:t>
+            </a:r>
+          </a:p>
+        </p:txBody>
+      </p:sp>
+      <p:sp>
+        <p:nvSpPr>
+          <p:cNvPr id="18" name="Rectangle 17"/>
+          <p:cNvSpPr/>
+          <p:nvPr/>
+        </p:nvSpPr>
+        <p:spPr>
+          <a:xfrm>
+            <a:off x="6217920" y="1783080"/>
+            <a:ext cx="5242255" cy="868680"/>
+          </a:xfrm>
+          <a:prstGeom prst="rect">
+            <a:avLst/>
+          </a:prstGeom>
+          <a:solidFill>
+            <a:srgbClr val="F1F5F9"/>
+          </a:solidFill>
+          <a:ln w="19050">
+            <a:solidFill>
+              <a:srgbClr val="CBD5E1"/>
+            </a:solidFill>
+          </a:ln>
+        </p:spPr>
+        <p:style>
+          <a:lnRef idx="1">
+            <a:schemeClr val="accent1"/>
+          </a:lnRef>
+          <a:fillRef idx="3">
+            <a:schemeClr val="accent1"/>
+          </a:fillRef>
+          <a:effectRef idx="2">
+            <a:schemeClr val="accent1"/>
+          </a:effectRef>
+          <a:fontRef idx="minor">
+            <a:schemeClr val="lt1"/>
+          </a:fontRef>
+        </p:style>
+        <p:txBody>
+          <a:bodyPr rtlCol="0" anchor="ctr"/>
+          <a:lstStyle/>
+          <a:p>
+            <a:pPr algn="ctr"/>
+          </a:p>
+        </p:txBody>
+      </p:sp>
+      <p:sp>
+        <p:nvSpPr>
+          <p:cNvPr id="19" name="TextBox 18"/>
+          <p:cNvSpPr txBox="1"/>
+          <p:nvPr/>
+        </p:nvSpPr>
+        <p:spPr>
+          <a:xfrm>
+            <a:off x="6400800" y="1874519"/>
+            <a:ext cx="4876495" cy="685800"/>
           </a:xfrm>
           <a:prstGeom prst="rect">
             <a:avLst/>
@@ -8775,114 +9080,322 @@
           <a:lstStyle/>
           <a:p>
             <a:pPr>
-              <a:spcAft>
-                <a:spcPts val="1200"/>
-              </a:spcAft>
-              <a:defRPr sz="2400" b="1">
-                <a:solidFill>
-                  <a:srgbClr val="0F2744"/>
-                </a:solidFill>
-                <a:latin typeface="Arial"/>
-              </a:defRPr>
-            </a:pPr>
-            <a:r>
-              <a:t>Production Technology Stack</a:t>
+              <a:defRPr sz="2100" b="1">
+                <a:solidFill>
+                  <a:srgbClr val="0F172A"/>
+                </a:solidFill>
+                <a:latin typeface="Arial"/>
+              </a:defRPr>
+            </a:pPr>
+            <a:r>
+              <a:t>Frontend Tier</a:t>
             </a:r>
           </a:p>
           <a:p>
             <a:pPr>
               <a:spcBef>
-                <a:spcPts val="1200"/>
+                <a:spcPts val="400"/>
               </a:spcBef>
-            </a:pPr>
-            <a:r>
-              <a:rPr b="1" sz="2100">
-                <a:solidFill>
-                  <a:srgbClr val="0F2744"/>
-                </a:solidFill>
-              </a:rPr>
-              <a:t>Frontend Tier
-</a:t>
-            </a:r>
-            <a:r>
-              <a:rPr sz="2000">
-                <a:solidFill>
-                  <a:srgbClr val="334155"/>
-                </a:solidFill>
-              </a:rPr>
-              <a:t>React 18.2 SPA, Vite 5.0 (Build Tool), Tailwind CSS 3.3 (Styling), React Router v6, Axios 1.6</a:t>
+              <a:defRPr sz="1900">
+                <a:solidFill>
+                  <a:srgbClr val="2563EB"/>
+                </a:solidFill>
+                <a:latin typeface="Arial"/>
+              </a:defRPr>
+            </a:pPr>
+            <a:r>
+              <a:t>React 18  •  Vite 5  •  Tailwind CSS  •  Axios  •  React Router</a:t>
+            </a:r>
+          </a:p>
+        </p:txBody>
+      </p:sp>
+      <p:sp>
+        <p:nvSpPr>
+          <p:cNvPr id="20" name="Rectangle 19"/>
+          <p:cNvSpPr/>
+          <p:nvPr/>
+        </p:nvSpPr>
+        <p:spPr>
+          <a:xfrm>
+            <a:off x="6217920" y="2862072"/>
+            <a:ext cx="5242255" cy="868680"/>
+          </a:xfrm>
+          <a:prstGeom prst="rect">
+            <a:avLst/>
+          </a:prstGeom>
+          <a:solidFill>
+            <a:srgbClr val="F1F5F9"/>
+          </a:solidFill>
+          <a:ln w="19050">
+            <a:solidFill>
+              <a:srgbClr val="CBD5E1"/>
+            </a:solidFill>
+          </a:ln>
+        </p:spPr>
+        <p:style>
+          <a:lnRef idx="1">
+            <a:schemeClr val="accent1"/>
+          </a:lnRef>
+          <a:fillRef idx="3">
+            <a:schemeClr val="accent1"/>
+          </a:fillRef>
+          <a:effectRef idx="2">
+            <a:schemeClr val="accent1"/>
+          </a:effectRef>
+          <a:fontRef idx="minor">
+            <a:schemeClr val="lt1"/>
+          </a:fontRef>
+        </p:style>
+        <p:txBody>
+          <a:bodyPr rtlCol="0" anchor="ctr"/>
+          <a:lstStyle/>
+          <a:p>
+            <a:pPr algn="ctr"/>
+          </a:p>
+        </p:txBody>
+      </p:sp>
+      <p:sp>
+        <p:nvSpPr>
+          <p:cNvPr id="21" name="TextBox 20"/>
+          <p:cNvSpPr txBox="1"/>
+          <p:nvPr/>
+        </p:nvSpPr>
+        <p:spPr>
+          <a:xfrm>
+            <a:off x="6400800" y="2953512"/>
+            <a:ext cx="4876495" cy="685800"/>
+          </a:xfrm>
+          <a:prstGeom prst="rect">
+            <a:avLst/>
+          </a:prstGeom>
+          <a:noFill/>
+        </p:spPr>
+        <p:txBody>
+          <a:bodyPr wrap="square" lIns="0" tIns="0">
+            <a:spAutoFit/>
+          </a:bodyPr>
+          <a:lstStyle/>
+          <a:p>
+            <a:pPr>
+              <a:defRPr sz="2100" b="1">
+                <a:solidFill>
+                  <a:srgbClr val="0F172A"/>
+                </a:solidFill>
+                <a:latin typeface="Arial"/>
+              </a:defRPr>
+            </a:pPr>
+            <a:r>
+              <a:t>Backend Tier</a:t>
             </a:r>
           </a:p>
           <a:p>
             <a:pPr>
               <a:spcBef>
-                <a:spcPts val="1200"/>
+                <a:spcPts val="400"/>
               </a:spcBef>
-            </a:pPr>
-            <a:r>
-              <a:rPr b="1" sz="2100">
-                <a:solidFill>
-                  <a:srgbClr val="0F2744"/>
-                </a:solidFill>
-              </a:rPr>
-              <a:t>Backend Tier
-</a:t>
-            </a:r>
-            <a:r>
-              <a:rPr sz="2000">
-                <a:solidFill>
-                  <a:srgbClr val="334155"/>
-                </a:solidFill>
-              </a:rPr>
-              <a:t>Node.js 18+ LTS, Express.js 4.19 REST API, express-validator, Multer 1.4 (Evidence Upload)</a:t>
+              <a:defRPr sz="1900">
+                <a:solidFill>
+                  <a:srgbClr val="2563EB"/>
+                </a:solidFill>
+                <a:latin typeface="Arial"/>
+              </a:defRPr>
+            </a:pPr>
+            <a:r>
+              <a:t>Node.js 18 LTS  •  Express 4.19  •  express-validator  •  Multer</a:t>
+            </a:r>
+          </a:p>
+        </p:txBody>
+      </p:sp>
+      <p:sp>
+        <p:nvSpPr>
+          <p:cNvPr id="22" name="Rectangle 21"/>
+          <p:cNvSpPr/>
+          <p:nvPr/>
+        </p:nvSpPr>
+        <p:spPr>
+          <a:xfrm>
+            <a:off x="6217920" y="3941063"/>
+            <a:ext cx="5242255" cy="868680"/>
+          </a:xfrm>
+          <a:prstGeom prst="rect">
+            <a:avLst/>
+          </a:prstGeom>
+          <a:solidFill>
+            <a:srgbClr val="F1F5F9"/>
+          </a:solidFill>
+          <a:ln w="19050">
+            <a:solidFill>
+              <a:srgbClr val="CBD5E1"/>
+            </a:solidFill>
+          </a:ln>
+        </p:spPr>
+        <p:style>
+          <a:lnRef idx="1">
+            <a:schemeClr val="accent1"/>
+          </a:lnRef>
+          <a:fillRef idx="3">
+            <a:schemeClr val="accent1"/>
+          </a:fillRef>
+          <a:effectRef idx="2">
+            <a:schemeClr val="accent1"/>
+          </a:effectRef>
+          <a:fontRef idx="minor">
+            <a:schemeClr val="lt1"/>
+          </a:fontRef>
+        </p:style>
+        <p:txBody>
+          <a:bodyPr rtlCol="0" anchor="ctr"/>
+          <a:lstStyle/>
+          <a:p>
+            <a:pPr algn="ctr"/>
+          </a:p>
+        </p:txBody>
+      </p:sp>
+      <p:sp>
+        <p:nvSpPr>
+          <p:cNvPr id="23" name="TextBox 22"/>
+          <p:cNvSpPr txBox="1"/>
+          <p:nvPr/>
+        </p:nvSpPr>
+        <p:spPr>
+          <a:xfrm>
+            <a:off x="6400800" y="4032503"/>
+            <a:ext cx="4876495" cy="685800"/>
+          </a:xfrm>
+          <a:prstGeom prst="rect">
+            <a:avLst/>
+          </a:prstGeom>
+          <a:noFill/>
+        </p:spPr>
+        <p:txBody>
+          <a:bodyPr wrap="square" lIns="0" tIns="0">
+            <a:spAutoFit/>
+          </a:bodyPr>
+          <a:lstStyle/>
+          <a:p>
+            <a:pPr>
+              <a:defRPr sz="2100" b="1">
+                <a:solidFill>
+                  <a:srgbClr val="0F172A"/>
+                </a:solidFill>
+                <a:latin typeface="Arial"/>
+              </a:defRPr>
+            </a:pPr>
+            <a:r>
+              <a:t>Database &amp; Storage</a:t>
             </a:r>
           </a:p>
           <a:p>
             <a:pPr>
               <a:spcBef>
-                <a:spcPts val="1200"/>
+                <a:spcPts val="400"/>
               </a:spcBef>
-            </a:pPr>
-            <a:r>
-              <a:rPr b="1" sz="2100">
-                <a:solidFill>
-                  <a:srgbClr val="0F2744"/>
-                </a:solidFill>
-              </a:rPr>
-              <a:t>Database &amp; Storage
-</a:t>
-            </a:r>
-            <a:r>
-              <a:rPr sz="2000">
-                <a:solidFill>
-                  <a:srgbClr val="334155"/>
-                </a:solidFill>
-              </a:rPr>
-              <a:t>MySQL 8.0 Relational DBMS, mysql2 3.9 Connection Pool, 7 Normalized 3NF Tables, InnoDB Engine</a:t>
+              <a:defRPr sz="1900">
+                <a:solidFill>
+                  <a:srgbClr val="2563EB"/>
+                </a:solidFill>
+                <a:latin typeface="Arial"/>
+              </a:defRPr>
+            </a:pPr>
+            <a:r>
+              <a:t>MySQL 8.0  •  mysql2 Connection Pool  •  InnoDB Engine (7 Tables)</a:t>
+            </a:r>
+          </a:p>
+        </p:txBody>
+      </p:sp>
+      <p:sp>
+        <p:nvSpPr>
+          <p:cNvPr id="24" name="Rectangle 23"/>
+          <p:cNvSpPr/>
+          <p:nvPr/>
+        </p:nvSpPr>
+        <p:spPr>
+          <a:xfrm>
+            <a:off x="6217920" y="5020056"/>
+            <a:ext cx="5242255" cy="868680"/>
+          </a:xfrm>
+          <a:prstGeom prst="rect">
+            <a:avLst/>
+          </a:prstGeom>
+          <a:solidFill>
+            <a:srgbClr val="F1F5F9"/>
+          </a:solidFill>
+          <a:ln w="19050">
+            <a:solidFill>
+              <a:srgbClr val="CBD5E1"/>
+            </a:solidFill>
+          </a:ln>
+        </p:spPr>
+        <p:style>
+          <a:lnRef idx="1">
+            <a:schemeClr val="accent1"/>
+          </a:lnRef>
+          <a:fillRef idx="3">
+            <a:schemeClr val="accent1"/>
+          </a:fillRef>
+          <a:effectRef idx="2">
+            <a:schemeClr val="accent1"/>
+          </a:effectRef>
+          <a:fontRef idx="minor">
+            <a:schemeClr val="lt1"/>
+          </a:fontRef>
+        </p:style>
+        <p:txBody>
+          <a:bodyPr rtlCol="0" anchor="ctr"/>
+          <a:lstStyle/>
+          <a:p>
+            <a:pPr algn="ctr"/>
+          </a:p>
+        </p:txBody>
+      </p:sp>
+      <p:sp>
+        <p:nvSpPr>
+          <p:cNvPr id="25" name="TextBox 24"/>
+          <p:cNvSpPr txBox="1"/>
+          <p:nvPr/>
+        </p:nvSpPr>
+        <p:spPr>
+          <a:xfrm>
+            <a:off x="6400800" y="5111496"/>
+            <a:ext cx="4876495" cy="685800"/>
+          </a:xfrm>
+          <a:prstGeom prst="rect">
+            <a:avLst/>
+          </a:prstGeom>
+          <a:noFill/>
+        </p:spPr>
+        <p:txBody>
+          <a:bodyPr wrap="square" lIns="0" tIns="0">
+            <a:spAutoFit/>
+          </a:bodyPr>
+          <a:lstStyle/>
+          <a:p>
+            <a:pPr>
+              <a:defRPr sz="2100" b="1">
+                <a:solidFill>
+                  <a:srgbClr val="0F172A"/>
+                </a:solidFill>
+                <a:latin typeface="Arial"/>
+              </a:defRPr>
+            </a:pPr>
+            <a:r>
+              <a:t>Security &amp; Testing</a:t>
             </a:r>
           </a:p>
           <a:p>
             <a:pPr>
               <a:spcBef>
-                <a:spcPts val="1200"/>
+                <a:spcPts val="400"/>
               </a:spcBef>
-            </a:pPr>
-            <a:r>
-              <a:rPr b="1" sz="2100">
-                <a:solidFill>
-                  <a:srgbClr val="0F2744"/>
-                </a:solidFill>
-              </a:rPr>
-              <a:t>Security &amp; Tooling
-</a:t>
-            </a:r>
-            <a:r>
-              <a:rPr sz="2000">
-                <a:solidFill>
-                  <a:srgbClr val="334155"/>
-                </a:solidFill>
-              </a:rPr>
-              <a:t>JSON Web Tokens (JWT HS256), bcryptjs (10 salt rounds), Git &amp; GitHub, Playwright Test Runner</a:t>
+              <a:defRPr sz="1900">
+                <a:solidFill>
+                  <a:srgbClr val="2563EB"/>
+                </a:solidFill>
+                <a:latin typeface="Arial"/>
+              </a:defRPr>
+            </a:pPr>
+            <a:r>
+              <a:t>JSON Web Tokens (JWT HS256)  •  bcryptjs (10 rounds)  •  Playwright</a:t>
             </a:r>
           </a:p>
         </p:txBody>
@@ -8922,7 +9435,7 @@
           <a:noFill/>
         </p:spPr>
         <p:txBody>
-          <a:bodyPr wrap="square" lIns="0" tIns="0" rIns="0" bIns="0">
+          <a:bodyPr wrap="none" lIns="0" tIns="0" rIns="0" bIns="0">
             <a:spAutoFit/>
           </a:bodyPr>
           <a:lstStyle/>
@@ -8930,13 +9443,13 @@
             <a:pPr>
               <a:defRPr sz="1800" b="1">
                 <a:solidFill>
-                  <a:srgbClr val="1D4ED8"/>
-                </a:solidFill>
-                <a:latin typeface="Arial"/>
-              </a:defRPr>
-            </a:pPr>
-            <a:r>
-              <a:t>6. DATABASE DESIGN &amp; DATA MODEL</a:t>
+                  <a:srgbClr val="2563EB"/>
+                </a:solidFill>
+                <a:latin typeface="Arial"/>
+              </a:defRPr>
+            </a:pPr>
+            <a:r>
+              <a:t>6. DATABASE DESIGN</a:t>
             </a:r>
           </a:p>
         </p:txBody>
@@ -8958,7 +9471,7 @@
           <a:noFill/>
         </p:spPr>
         <p:txBody>
-          <a:bodyPr wrap="square" lIns="0" tIns="0" rIns="0" bIns="0">
+          <a:bodyPr wrap="none" lIns="0" tIns="0" rIns="0" bIns="0">
             <a:spAutoFit/>
           </a:bodyPr>
           <a:lstStyle/>
@@ -8966,13 +9479,13 @@
             <a:pPr>
               <a:defRPr sz="3200" b="1">
                 <a:solidFill>
-                  <a:srgbClr val="0F2744"/>
-                </a:solidFill>
-                <a:latin typeface="Arial"/>
-              </a:defRPr>
-            </a:pPr>
-            <a:r>
-              <a:t>Normalized 3NF Relational Schema with Immutable Audit Trail</a:t>
+                  <a:srgbClr val="0F172A"/>
+                </a:solidFill>
+                <a:latin typeface="Arial"/>
+              </a:defRPr>
+            </a:pPr>
+            <a:r>
+              <a:t>Simplified Entity-Relationship Architecture &amp; Data Integrity</a:t>
             </a:r>
           </a:p>
         </p:txBody>
@@ -8985,7 +9498,7 @@
         </p:nvSpPr>
         <p:spPr>
           <a:xfrm>
-            <a:off x="731520" y="6236208"/>
+            <a:off x="731520" y="6263640"/>
             <a:ext cx="10728655" cy="13716"/>
           </a:xfrm>
           <a:prstGeom prst="rect">
@@ -9029,7 +9542,7 @@
         <p:spPr>
           <a:xfrm>
             <a:off x="731520" y="6327648"/>
-            <a:ext cx="8412480" cy="320040"/>
+            <a:ext cx="8229600" cy="320040"/>
           </a:xfrm>
           <a:prstGeom prst="rect">
             <a:avLst/>
@@ -9045,13 +9558,13 @@
             <a:pPr>
               <a:defRPr sz="1600" b="1">
                 <a:solidFill>
-                  <a:srgbClr val="334155"/>
-                </a:solidFill>
-                <a:latin typeface="Arial"/>
-              </a:defRPr>
-            </a:pPr>
-            <a:r>
-              <a:t>Campus Complaint &amp; Maintenance Management System  |  Software Engineering Mini Project</a:t>
+                  <a:srgbClr val="475569"/>
+                </a:solidFill>
+                <a:latin typeface="Arial"/>
+              </a:defRPr>
+            </a:pPr>
+            <a:r>
+              <a:t>Campus Complaint &amp; Maintenance Management System  |  Software Engineering Lab</a:t>
             </a:r>
           </a:p>
         </p:txBody>
@@ -9081,7 +9594,7 @@
             <a:pPr algn="r">
               <a:defRPr sz="1600" b="1">
                 <a:solidFill>
-                  <a:srgbClr val="1D4ED8"/>
+                  <a:srgbClr val="2563EB"/>
                 </a:solidFill>
                 <a:latin typeface="Arial"/>
               </a:defRPr>
@@ -9094,24 +9607,24 @@
       </p:sp>
       <p:sp>
         <p:nvSpPr>
-          <p:cNvPr id="7" name="Rounded Rectangle 6"/>
+          <p:cNvPr id="7" name="Rectangle 6"/>
           <p:cNvSpPr/>
           <p:nvPr/>
         </p:nvSpPr>
         <p:spPr>
           <a:xfrm>
-            <a:off x="731520" y="1325880"/>
-            <a:ext cx="10728655" cy="2286000"/>
-          </a:xfrm>
-          <a:prstGeom prst="roundRect">
+            <a:off x="731520" y="1371600"/>
+            <a:ext cx="3017520" cy="1051560"/>
+          </a:xfrm>
+          <a:prstGeom prst="rect">
             <a:avLst/>
           </a:prstGeom>
           <a:solidFill>
-            <a:srgbClr val="F8FAFC"/>
+            <a:srgbClr val="FFFFFF"/>
           </a:solidFill>
-          <a:ln w="15240">
+          <a:ln w="19050">
             <a:solidFill>
-              <a:srgbClr val="CBD5E1"/>
+              <a:srgbClr val="0F172A"/>
             </a:solidFill>
           </a:ln>
         </p:spPr>
@@ -9130,6 +9643,67 @@
           </a:fontRef>
         </p:style>
         <p:txBody>
+          <a:bodyPr rtlCol="0" anchor="ctr" wrap="square"/>
+          <a:lstStyle/>
+          <a:p>
+            <a:pPr algn="ctr">
+              <a:defRPr sz="1800" b="1">
+                <a:solidFill>
+                  <a:srgbClr val="0F172A"/>
+                </a:solidFill>
+                <a:latin typeface="Arial"/>
+              </a:defRPr>
+            </a:pPr>
+            <a:r>
+              <a:t>USERS</a:t>
+            </a:r>
+            <a:br/>
+            <a:r>
+              <a:t>id (PK) • name • email</a:t>
+            </a:r>
+            <a:br/>
+            <a:r>
+              <a:t>role • department</a:t>
+            </a:r>
+          </a:p>
+        </p:txBody>
+      </p:sp>
+      <p:sp>
+        <p:nvSpPr>
+          <p:cNvPr id="8" name="Right Arrow 7"/>
+          <p:cNvSpPr/>
+          <p:nvPr/>
+        </p:nvSpPr>
+        <p:spPr>
+          <a:xfrm>
+            <a:off x="3886200" y="1783080"/>
+            <a:ext cx="320040" cy="201168"/>
+          </a:xfrm>
+          <a:prstGeom prst="rightArrow">
+            <a:avLst/>
+          </a:prstGeom>
+          <a:solidFill>
+            <a:srgbClr val="2563EB"/>
+          </a:solidFill>
+          <a:ln>
+            <a:noFill/>
+          </a:ln>
+        </p:spPr>
+        <p:style>
+          <a:lnRef idx="1">
+            <a:schemeClr val="accent1"/>
+          </a:lnRef>
+          <a:fillRef idx="3">
+            <a:schemeClr val="accent1"/>
+          </a:fillRef>
+          <a:effectRef idx="2">
+            <a:schemeClr val="accent1"/>
+          </a:effectRef>
+          <a:fontRef idx="minor">
+            <a:schemeClr val="lt1"/>
+          </a:fontRef>
+        </p:style>
+        <p:txBody>
           <a:bodyPr rtlCol="0" anchor="ctr"/>
           <a:lstStyle/>
           <a:p>
@@ -9139,52 +9713,122 @@
       </p:sp>
       <p:sp>
         <p:nvSpPr>
-          <p:cNvPr id="8" name="TextBox 7"/>
-          <p:cNvSpPr txBox="1"/>
-          <p:nvPr/>
-        </p:nvSpPr>
-        <p:spPr>
-          <a:xfrm>
-            <a:off x="914400" y="1417320"/>
-            <a:ext cx="10332720" cy="320040"/>
-          </a:xfrm>
-          <a:prstGeom prst="rect">
-            <a:avLst/>
-          </a:prstGeom>
-          <a:noFill/>
-        </p:spPr>
-        <p:txBody>
-          <a:bodyPr wrap="none" lIns="0" tIns="0">
-            <a:spAutoFit/>
-          </a:bodyPr>
-          <a:lstStyle/>
-          <a:p>
-            <a:pPr>
-              <a:defRPr sz="2200" b="1">
-                <a:solidFill>
-                  <a:srgbClr val="0F2744"/>
-                </a:solidFill>
-                <a:latin typeface="Arial"/>
-              </a:defRPr>
-            </a:pPr>
-            <a:r>
-              <a:t>Core Relational Entities &amp; Associations</a:t>
-            </a:r>
-          </a:p>
-        </p:txBody>
-      </p:sp>
-      <p:sp>
-        <p:nvSpPr>
-          <p:cNvPr id="9" name="Rounded Rectangle 8"/>
+          <p:cNvPr id="9" name="Rectangle 8"/>
           <p:cNvSpPr/>
           <p:nvPr/>
         </p:nvSpPr>
         <p:spPr>
           <a:xfrm>
-            <a:off x="914400" y="1828800"/>
-            <a:ext cx="3291840" cy="777240"/>
-          </a:xfrm>
-          <a:prstGeom prst="roundRect">
+            <a:off x="4389120" y="1371600"/>
+            <a:ext cx="3413455" cy="1051560"/>
+          </a:xfrm>
+          <a:prstGeom prst="rect">
+            <a:avLst/>
+          </a:prstGeom>
+          <a:solidFill>
+            <a:srgbClr val="0F172A"/>
+          </a:solidFill>
+          <a:ln w="19050">
+            <a:solidFill>
+              <a:srgbClr val="0F172A"/>
+            </a:solidFill>
+          </a:ln>
+        </p:spPr>
+        <p:style>
+          <a:lnRef idx="1">
+            <a:schemeClr val="accent1"/>
+          </a:lnRef>
+          <a:fillRef idx="3">
+            <a:schemeClr val="accent1"/>
+          </a:fillRef>
+          <a:effectRef idx="2">
+            <a:schemeClr val="accent1"/>
+          </a:effectRef>
+          <a:fontRef idx="minor">
+            <a:schemeClr val="lt1"/>
+          </a:fontRef>
+        </p:style>
+        <p:txBody>
+          <a:bodyPr rtlCol="0" anchor="ctr" wrap="square"/>
+          <a:lstStyle/>
+          <a:p>
+            <a:pPr algn="ctr">
+              <a:defRPr sz="1800" b="1">
+                <a:solidFill>
+                  <a:srgbClr val="FFFFFF"/>
+                </a:solidFill>
+                <a:latin typeface="Arial"/>
+              </a:defRPr>
+            </a:pPr>
+            <a:r>
+              <a:t>COMPLAINTS (Core Entity)</a:t>
+            </a:r>
+            <a:br/>
+            <a:r>
+              <a:t>id (PK) • complaint_number • user_id (FK)</a:t>
+            </a:r>
+            <a:br/>
+            <a:r>
+              <a:t>category_id (FK) • location_id (FK) • status</a:t>
+            </a:r>
+          </a:p>
+        </p:txBody>
+      </p:sp>
+      <p:sp>
+        <p:nvSpPr>
+          <p:cNvPr id="10" name="Right Arrow 9"/>
+          <p:cNvSpPr/>
+          <p:nvPr/>
+        </p:nvSpPr>
+        <p:spPr>
+          <a:xfrm>
+            <a:off x="7955279" y="1783080"/>
+            <a:ext cx="320040" cy="201168"/>
+          </a:xfrm>
+          <a:prstGeom prst="rightArrow">
+            <a:avLst/>
+          </a:prstGeom>
+          <a:solidFill>
+            <a:srgbClr val="2563EB"/>
+          </a:solidFill>
+          <a:ln>
+            <a:noFill/>
+          </a:ln>
+        </p:spPr>
+        <p:style>
+          <a:lnRef idx="1">
+            <a:schemeClr val="accent1"/>
+          </a:lnRef>
+          <a:fillRef idx="3">
+            <a:schemeClr val="accent1"/>
+          </a:fillRef>
+          <a:effectRef idx="2">
+            <a:schemeClr val="accent1"/>
+          </a:effectRef>
+          <a:fontRef idx="minor">
+            <a:schemeClr val="lt1"/>
+          </a:fontRef>
+        </p:style>
+        <p:txBody>
+          <a:bodyPr rtlCol="0" anchor="ctr"/>
+          <a:lstStyle/>
+          <a:p>
+            <a:pPr algn="ctr"/>
+          </a:p>
+        </p:txBody>
+      </p:sp>
+      <p:sp>
+        <p:nvSpPr>
+          <p:cNvPr id="11" name="Rectangle 10"/>
+          <p:cNvSpPr/>
+          <p:nvPr/>
+        </p:nvSpPr>
+        <p:spPr>
+          <a:xfrm>
+            <a:off x="8442655" y="1371600"/>
+            <a:ext cx="3017520" cy="1051560"/>
+          </a:xfrm>
+          <a:prstGeom prst="rect">
             <a:avLst/>
           </a:prstGeom>
           <a:solidFill>
@@ -9192,7 +9836,7 @@
           </a:solidFill>
           <a:ln w="19050">
             <a:solidFill>
-              <a:srgbClr val="0F2744"/>
+              <a:srgbClr val="0F172A"/>
             </a:solidFill>
           </a:ln>
         </p:spPr>
@@ -9217,42 +9861,44 @@
             <a:pPr algn="ctr">
               <a:defRPr sz="1800" b="1">
                 <a:solidFill>
-                  <a:srgbClr val="0F2744"/>
-                </a:solidFill>
-                <a:latin typeface="Arial"/>
-              </a:defRPr>
-            </a:pPr>
-            <a:r>
-              <a:t>USERS</a:t>
+                  <a:srgbClr val="0F172A"/>
+                </a:solidFill>
+                <a:latin typeface="Arial"/>
+              </a:defRPr>
+            </a:pPr>
+            <a:r>
+              <a:t>LOCATIONS &amp; CATEGORIES</a:t>
             </a:r>
             <a:br/>
             <a:r>
-              <a:t>id, name, email, role, department</a:t>
-            </a:r>
-          </a:p>
-        </p:txBody>
-      </p:sp>
-      <p:sp>
-        <p:nvSpPr>
-          <p:cNvPr id="10" name="Rounded Rectangle 9"/>
+              <a:t>building • floor • room</a:t>
+            </a:r>
+            <a:br/>
+            <a:r>
+              <a:t>category_name</a:t>
+            </a:r>
+          </a:p>
+        </p:txBody>
+      </p:sp>
+      <p:sp>
+        <p:nvSpPr>
+          <p:cNvPr id="12" name="Down Arrow 11"/>
           <p:cNvSpPr/>
           <p:nvPr/>
         </p:nvSpPr>
         <p:spPr>
           <a:xfrm>
-            <a:off x="4443984" y="1828800"/>
-            <a:ext cx="3291840" cy="777240"/>
-          </a:xfrm>
-          <a:prstGeom prst="roundRect">
+            <a:off x="2194560" y="2514600"/>
+            <a:ext cx="201168" cy="274320"/>
+          </a:xfrm>
+          <a:prstGeom prst="downArrow">
             <a:avLst/>
           </a:prstGeom>
           <a:solidFill>
-            <a:srgbClr val="0F2744"/>
+            <a:srgbClr val="2563EB"/>
           </a:solidFill>
-          <a:ln w="19050">
-            <a:solidFill>
-              <a:srgbClr val="0F2744"/>
-            </a:solidFill>
+          <a:ln>
+            <a:noFill/>
           </a:ln>
         </p:spPr>
         <p:style>
@@ -9270,39 +9916,25 @@
           </a:fontRef>
         </p:style>
         <p:txBody>
-          <a:bodyPr rtlCol="0" anchor="ctr" wrap="square"/>
-          <a:lstStyle/>
-          <a:p>
-            <a:pPr algn="ctr">
-              <a:defRPr sz="1800" b="1">
-                <a:solidFill>
-                  <a:srgbClr val="FFFFFF"/>
-                </a:solidFill>
-                <a:latin typeface="Arial"/>
-              </a:defRPr>
-            </a:pPr>
-            <a:r>
-              <a:t>COMPLAINTS (Core Entity)</a:t>
-            </a:r>
-            <a:br/>
-            <a:r>
-              <a:t>id, complaint_no, priority, status</a:t>
-            </a:r>
-          </a:p>
-        </p:txBody>
-      </p:sp>
-      <p:sp>
-        <p:nvSpPr>
-          <p:cNvPr id="11" name="Rounded Rectangle 10"/>
+          <a:bodyPr rtlCol="0" anchor="ctr"/>
+          <a:lstStyle/>
+          <a:p>
+            <a:pPr algn="ctr"/>
+          </a:p>
+        </p:txBody>
+      </p:sp>
+      <p:sp>
+        <p:nvSpPr>
+          <p:cNvPr id="13" name="Rectangle 12"/>
           <p:cNvSpPr/>
           <p:nvPr/>
         </p:nvSpPr>
         <p:spPr>
           <a:xfrm>
-            <a:off x="7982712" y="1828800"/>
-            <a:ext cx="3291840" cy="777240"/>
-          </a:xfrm>
-          <a:prstGeom prst="roundRect">
+            <a:off x="731520" y="2880360"/>
+            <a:ext cx="3017520" cy="1051560"/>
+          </a:xfrm>
+          <a:prstGeom prst="rect">
             <a:avLst/>
           </a:prstGeom>
           <a:solidFill>
@@ -9310,7 +9942,7 @@
           </a:solidFill>
           <a:ln w="19050">
             <a:solidFill>
-              <a:srgbClr val="0F2744"/>
+              <a:srgbClr val="2563EB"/>
             </a:solidFill>
           </a:ln>
         </p:spPr>
@@ -9335,33 +9967,80 @@
             <a:pPr algn="ctr">
               <a:defRPr sz="1800" b="1">
                 <a:solidFill>
-                  <a:srgbClr val="0F2744"/>
-                </a:solidFill>
-                <a:latin typeface="Arial"/>
-              </a:defRPr>
-            </a:pPr>
-            <a:r>
-              <a:t>LOCATIONS &amp; CATEGORIES</a:t>
+                  <a:srgbClr val="2563EB"/>
+                </a:solidFill>
+                <a:latin typeface="Arial"/>
+              </a:defRPr>
+            </a:pPr>
+            <a:r>
+              <a:t>COMPLAINT_ASSIGNMENTS</a:t>
             </a:r>
             <a:br/>
             <a:r>
-              <a:t>building, floor, room, category_name</a:t>
-            </a:r>
-          </a:p>
-        </p:txBody>
-      </p:sp>
-      <p:sp>
-        <p:nvSpPr>
-          <p:cNvPr id="12" name="Rounded Rectangle 11"/>
+              <a:t>staff_id (FK) • assigned_by (FK)</a:t>
+            </a:r>
+            <a:br/>
+            <a:r>
+              <a:t>assigned_at • notes</a:t>
+            </a:r>
+          </a:p>
+        </p:txBody>
+      </p:sp>
+      <p:sp>
+        <p:nvSpPr>
+          <p:cNvPr id="14" name="Down Arrow 13"/>
           <p:cNvSpPr/>
           <p:nvPr/>
         </p:nvSpPr>
         <p:spPr>
           <a:xfrm>
-            <a:off x="914400" y="2743200"/>
-            <a:ext cx="3291840" cy="731520"/>
-          </a:xfrm>
-          <a:prstGeom prst="roundRect">
+            <a:off x="5989320" y="2514600"/>
+            <a:ext cx="201168" cy="274320"/>
+          </a:xfrm>
+          <a:prstGeom prst="downArrow">
+            <a:avLst/>
+          </a:prstGeom>
+          <a:solidFill>
+            <a:srgbClr val="2563EB"/>
+          </a:solidFill>
+          <a:ln>
+            <a:noFill/>
+          </a:ln>
+        </p:spPr>
+        <p:style>
+          <a:lnRef idx="1">
+            <a:schemeClr val="accent1"/>
+          </a:lnRef>
+          <a:fillRef idx="3">
+            <a:schemeClr val="accent1"/>
+          </a:fillRef>
+          <a:effectRef idx="2">
+            <a:schemeClr val="accent1"/>
+          </a:effectRef>
+          <a:fontRef idx="minor">
+            <a:schemeClr val="lt1"/>
+          </a:fontRef>
+        </p:style>
+        <p:txBody>
+          <a:bodyPr rtlCol="0" anchor="ctr"/>
+          <a:lstStyle/>
+          <a:p>
+            <a:pPr algn="ctr"/>
+          </a:p>
+        </p:txBody>
+      </p:sp>
+      <p:sp>
+        <p:nvSpPr>
+          <p:cNvPr id="15" name="Rectangle 14"/>
+          <p:cNvSpPr/>
+          <p:nvPr/>
+        </p:nvSpPr>
+        <p:spPr>
+          <a:xfrm>
+            <a:off x="4389120" y="2880360"/>
+            <a:ext cx="3413455" cy="1051560"/>
+          </a:xfrm>
+          <a:prstGeom prst="rect">
             <a:avLst/>
           </a:prstGeom>
           <a:solidFill>
@@ -9369,7 +10048,7 @@
           </a:solidFill>
           <a:ln w="19050">
             <a:solidFill>
-              <a:srgbClr val="1D4ED8"/>
+              <a:srgbClr val="2563EB"/>
             </a:solidFill>
           </a:ln>
         </p:spPr>
@@ -9392,35 +10071,82 @@
           <a:lstStyle/>
           <a:p>
             <a:pPr algn="ctr">
-              <a:defRPr sz="1700" b="1">
-                <a:solidFill>
-                  <a:srgbClr val="1D4ED8"/>
-                </a:solidFill>
-                <a:latin typeface="Arial"/>
-              </a:defRPr>
-            </a:pPr>
-            <a:r>
-              <a:t>COMPLAINT_ASSIGNMENTS</a:t>
+              <a:defRPr sz="1800" b="1">
+                <a:solidFill>
+                  <a:srgbClr val="2563EB"/>
+                </a:solidFill>
+                <a:latin typeface="Arial"/>
+              </a:defRPr>
+            </a:pPr>
+            <a:r>
+              <a:t>COMPLAINT_UPDATES (Audit Log)</a:t>
             </a:r>
             <a:br/>
             <a:r>
-              <a:t>staff_id, assigned_by, assigned_at</a:t>
-            </a:r>
-          </a:p>
-        </p:txBody>
-      </p:sp>
-      <p:sp>
-        <p:nvSpPr>
-          <p:cNvPr id="13" name="Rounded Rectangle 12"/>
+              <a:t>old_status • new_status</a:t>
+            </a:r>
+            <a:br/>
+            <a:r>
+              <a:t>remarks • updated_by (FK) • created_at</a:t>
+            </a:r>
+          </a:p>
+        </p:txBody>
+      </p:sp>
+      <p:sp>
+        <p:nvSpPr>
+          <p:cNvPr id="16" name="Down Arrow 15"/>
           <p:cNvSpPr/>
           <p:nvPr/>
         </p:nvSpPr>
         <p:spPr>
           <a:xfrm>
-            <a:off x="4443984" y="2743200"/>
-            <a:ext cx="3291840" cy="731520"/>
-          </a:xfrm>
-          <a:prstGeom prst="roundRect">
+            <a:off x="9784080" y="2514600"/>
+            <a:ext cx="201168" cy="274320"/>
+          </a:xfrm>
+          <a:prstGeom prst="downArrow">
+            <a:avLst/>
+          </a:prstGeom>
+          <a:solidFill>
+            <a:srgbClr val="2563EB"/>
+          </a:solidFill>
+          <a:ln>
+            <a:noFill/>
+          </a:ln>
+        </p:spPr>
+        <p:style>
+          <a:lnRef idx="1">
+            <a:schemeClr val="accent1"/>
+          </a:lnRef>
+          <a:fillRef idx="3">
+            <a:schemeClr val="accent1"/>
+          </a:fillRef>
+          <a:effectRef idx="2">
+            <a:schemeClr val="accent1"/>
+          </a:effectRef>
+          <a:fontRef idx="minor">
+            <a:schemeClr val="lt1"/>
+          </a:fontRef>
+        </p:style>
+        <p:txBody>
+          <a:bodyPr rtlCol="0" anchor="ctr"/>
+          <a:lstStyle/>
+          <a:p>
+            <a:pPr algn="ctr"/>
+          </a:p>
+        </p:txBody>
+      </p:sp>
+      <p:sp>
+        <p:nvSpPr>
+          <p:cNvPr id="17" name="Rectangle 16"/>
+          <p:cNvSpPr/>
+          <p:nvPr/>
+        </p:nvSpPr>
+        <p:spPr>
+          <a:xfrm>
+            <a:off x="8442655" y="2880360"/>
+            <a:ext cx="3017520" cy="1051560"/>
+          </a:xfrm>
+          <a:prstGeom prst="rect">
             <a:avLst/>
           </a:prstGeom>
           <a:solidFill>
@@ -9428,7 +10154,7 @@
           </a:solidFill>
           <a:ln w="19050">
             <a:solidFill>
-              <a:srgbClr val="1D4ED8"/>
+              <a:srgbClr val="2563EB"/>
             </a:solidFill>
           </a:ln>
         </p:spPr>
@@ -9451,43 +10177,47 @@
           <a:lstStyle/>
           <a:p>
             <a:pPr algn="ctr">
-              <a:defRPr sz="1700" b="1">
-                <a:solidFill>
-                  <a:srgbClr val="1D4ED8"/>
-                </a:solidFill>
-                <a:latin typeface="Arial"/>
-              </a:defRPr>
-            </a:pPr>
-            <a:r>
-              <a:t>COMPLAINT_UPDATES (Audit Log)</a:t>
+              <a:defRPr sz="1800" b="1">
+                <a:solidFill>
+                  <a:srgbClr val="2563EB"/>
+                </a:solidFill>
+                <a:latin typeface="Arial"/>
+              </a:defRPr>
+            </a:pPr>
+            <a:r>
+              <a:t>FEEDBACK</a:t>
             </a:r>
             <a:br/>
             <a:r>
-              <a:t>old_status, new_status, remarks</a:t>
-            </a:r>
-          </a:p>
-        </p:txBody>
-      </p:sp>
-      <p:sp>
-        <p:nvSpPr>
-          <p:cNvPr id="14" name="Rounded Rectangle 13"/>
+              <a:t>complaint_id (FK) • user_id (FK)</a:t>
+            </a:r>
+            <a:br/>
+            <a:r>
+              <a:t>rating (1–5) • comments</a:t>
+            </a:r>
+          </a:p>
+        </p:txBody>
+      </p:sp>
+      <p:sp>
+        <p:nvSpPr>
+          <p:cNvPr id="18" name="Rectangle 17"/>
           <p:cNvSpPr/>
           <p:nvPr/>
         </p:nvSpPr>
         <p:spPr>
           <a:xfrm>
-            <a:off x="7982712" y="2743200"/>
-            <a:ext cx="3291840" cy="731520"/>
-          </a:xfrm>
-          <a:prstGeom prst="roundRect">
+            <a:off x="731520" y="4251960"/>
+            <a:ext cx="3392424" cy="1783080"/>
+          </a:xfrm>
+          <a:prstGeom prst="rect">
             <a:avLst/>
           </a:prstGeom>
           <a:solidFill>
-            <a:srgbClr val="FFFFFF"/>
+            <a:srgbClr val="F1F5F9"/>
           </a:solidFill>
           <a:ln w="19050">
             <a:solidFill>
-              <a:srgbClr val="1D4ED8"/>
+              <a:srgbClr val="CBD5E1"/>
             </a:solidFill>
           </a:ln>
         </p:spPr>
@@ -9506,45 +10236,83 @@
           </a:fontRef>
         </p:style>
         <p:txBody>
-          <a:bodyPr rtlCol="0" anchor="ctr" wrap="square"/>
-          <a:lstStyle/>
-          <a:p>
-            <a:pPr algn="ctr">
-              <a:defRPr sz="1700" b="1">
-                <a:solidFill>
-                  <a:srgbClr val="1D4ED8"/>
-                </a:solidFill>
-                <a:latin typeface="Arial"/>
-              </a:defRPr>
-            </a:pPr>
-            <a:r>
-              <a:t>FEEDBACK</a:t>
-            </a:r>
-            <a:br/>
-            <a:r>
-              <a:t>user_id, rating (1-5), comments</a:t>
-            </a:r>
-          </a:p>
-        </p:txBody>
-      </p:sp>
-      <p:sp>
-        <p:nvSpPr>
-          <p:cNvPr id="15" name="Rounded Rectangle 14"/>
+          <a:bodyPr rtlCol="0" anchor="ctr"/>
+          <a:lstStyle/>
+          <a:p>
+            <a:pPr algn="ctr"/>
+          </a:p>
+        </p:txBody>
+      </p:sp>
+      <p:sp>
+        <p:nvSpPr>
+          <p:cNvPr id="19" name="TextBox 18"/>
+          <p:cNvSpPr txBox="1"/>
+          <p:nvPr/>
+        </p:nvSpPr>
+        <p:spPr>
+          <a:xfrm>
+            <a:off x="914400" y="4361688"/>
+            <a:ext cx="3026664" cy="1563624"/>
+          </a:xfrm>
+          <a:prstGeom prst="rect">
+            <a:avLst/>
+          </a:prstGeom>
+          <a:noFill/>
+        </p:spPr>
+        <p:txBody>
+          <a:bodyPr wrap="square" lIns="0" tIns="0">
+            <a:spAutoFit/>
+          </a:bodyPr>
+          <a:lstStyle/>
+          <a:p>
+            <a:pPr>
+              <a:defRPr sz="2100" b="1">
+                <a:solidFill>
+                  <a:srgbClr val="0F172A"/>
+                </a:solidFill>
+                <a:latin typeface="Arial"/>
+              </a:defRPr>
+            </a:pPr>
+            <a:r>
+              <a:t>3NF Normalization</a:t>
+            </a:r>
+          </a:p>
+          <a:p>
+            <a:pPr>
+              <a:spcBef>
+                <a:spcPts val="600"/>
+              </a:spcBef>
+              <a:defRPr sz="1800">
+                <a:solidFill>
+                  <a:srgbClr val="1E293B"/>
+                </a:solidFill>
+                <a:latin typeface="Arial"/>
+              </a:defRPr>
+            </a:pPr>
+            <a:r>
+              <a:t>Redundancy eliminated across all tables. Campus buildings, rooms, and issue categories are maintained as independent master entities.</a:t>
+            </a:r>
+          </a:p>
+        </p:txBody>
+      </p:sp>
+      <p:sp>
+        <p:nvSpPr>
+          <p:cNvPr id="20" name="Rectangle 19"/>
           <p:cNvSpPr/>
           <p:nvPr/>
         </p:nvSpPr>
         <p:spPr>
           <a:xfrm>
-            <a:off x="731520" y="3794760"/>
-            <a:ext cx="3392424" cy="2286000"/>
-          </a:xfrm>
-          <a:prstGeom prst="roundRect">
+            <a:off x="4398264" y="4251960"/>
+            <a:ext cx="3392424" cy="1783080"/>
+          </a:xfrm>
+          <a:prstGeom prst="rect">
             <a:avLst/>
           </a:prstGeom>
           <a:solidFill>
-            <a:srgbClr val="FFFFFF"/>
+            <a:srgbClr val="F1F5F9"/>
           </a:solidFill>
-          <a:ln w="15240">
+          <a:ln w="19050">
             <a:solidFill>
               <a:srgbClr val="CBD5E1"/>
             </a:solidFill>
@@ -9574,14 +10342,14 @@
       </p:sp>
       <p:sp>
         <p:nvSpPr>
-          <p:cNvPr id="16" name="TextBox 15"/>
+          <p:cNvPr id="21" name="TextBox 20"/>
           <p:cNvSpPr txBox="1"/>
           <p:nvPr/>
         </p:nvSpPr>
         <p:spPr>
           <a:xfrm>
-            <a:off x="914400" y="3931920"/>
-            <a:ext cx="3026664" cy="2011680"/>
+            <a:off x="4581144" y="4361688"/>
+            <a:ext cx="3026664" cy="1563624"/>
           </a:xfrm>
           <a:prstGeom prst="rect">
             <a:avLst/>
@@ -9597,51 +10365,51 @@
             <a:pPr>
               <a:defRPr sz="2100" b="1">
                 <a:solidFill>
-                  <a:srgbClr val="0F2744"/>
-                </a:solidFill>
-                <a:latin typeface="Arial"/>
-              </a:defRPr>
-            </a:pPr>
-            <a:r>
-              <a:t>Third Normal Form (3NF)</a:t>
+                  <a:srgbClr val="2563EB"/>
+                </a:solidFill>
+                <a:latin typeface="Arial"/>
+              </a:defRPr>
+            </a:pPr>
+            <a:r>
+              <a:t>Referential Integrity</a:t>
             </a:r>
           </a:p>
           <a:p>
             <a:pPr>
               <a:spcBef>
-                <a:spcPts val="800"/>
+                <a:spcPts val="600"/>
               </a:spcBef>
-              <a:defRPr sz="1900">
-                <a:solidFill>
-                  <a:srgbClr val="111827"/>
-                </a:solidFill>
-                <a:latin typeface="Arial"/>
-              </a:defRPr>
-            </a:pPr>
-            <a:r>
-              <a:t>Redundancy eliminated. Campus locations and categories are stored as independent master tables, allowing dynamic additions without schema alterations.</a:t>
-            </a:r>
-          </a:p>
-        </p:txBody>
-      </p:sp>
-      <p:sp>
-        <p:nvSpPr>
-          <p:cNvPr id="17" name="Rounded Rectangle 16"/>
+              <a:defRPr sz="1800">
+                <a:solidFill>
+                  <a:srgbClr val="1E293B"/>
+                </a:solidFill>
+                <a:latin typeface="Arial"/>
+              </a:defRPr>
+            </a:pPr>
+            <a:r>
+              <a:t>Foreign key constraints with ON UPDATE / ON DELETE rules guarantee that tickets and history always map to valid users and rooms.</a:t>
+            </a:r>
+          </a:p>
+        </p:txBody>
+      </p:sp>
+      <p:sp>
+        <p:nvSpPr>
+          <p:cNvPr id="22" name="Rectangle 21"/>
           <p:cNvSpPr/>
           <p:nvPr/>
         </p:nvSpPr>
         <p:spPr>
           <a:xfrm>
-            <a:off x="4398264" y="3794760"/>
-            <a:ext cx="3392424" cy="2286000"/>
-          </a:xfrm>
-          <a:prstGeom prst="roundRect">
+            <a:off x="8065008" y="4251960"/>
+            <a:ext cx="3392424" cy="1783080"/>
+          </a:xfrm>
+          <a:prstGeom prst="rect">
             <a:avLst/>
           </a:prstGeom>
           <a:solidFill>
-            <a:srgbClr val="FFFFFF"/>
+            <a:srgbClr val="F1F5F9"/>
           </a:solidFill>
-          <a:ln w="15240">
+          <a:ln w="19050">
             <a:solidFill>
               <a:srgbClr val="CBD5E1"/>
             </a:solidFill>
@@ -9671,14 +10439,14 @@
       </p:sp>
       <p:sp>
         <p:nvSpPr>
-          <p:cNvPr id="18" name="TextBox 17"/>
+          <p:cNvPr id="23" name="TextBox 22"/>
           <p:cNvSpPr txBox="1"/>
           <p:nvPr/>
         </p:nvSpPr>
         <p:spPr>
           <a:xfrm>
-            <a:off x="4581144" y="3931920"/>
-            <a:ext cx="3026664" cy="2011680"/>
+            <a:off x="8247888" y="4361688"/>
+            <a:ext cx="3026664" cy="1563624"/>
           </a:xfrm>
           <a:prstGeom prst="rect">
             <a:avLst/>
@@ -9694,7 +10462,7 @@
             <a:pPr>
               <a:defRPr sz="2100" b="1">
                 <a:solidFill>
-                  <a:srgbClr val="1D4ED8"/>
+                  <a:srgbClr val="15803D"/>
                 </a:solidFill>
                 <a:latin typeface="Arial"/>
               </a:defRPr>
@@ -9706,114 +10474,17 @@
           <a:p>
             <a:pPr>
               <a:spcBef>
-                <a:spcPts val="800"/>
+                <a:spcPts val="600"/>
               </a:spcBef>
-              <a:defRPr sz="1900">
-                <a:solidFill>
-                  <a:srgbClr val="111827"/>
-                </a:solidFill>
-                <a:latin typeface="Arial"/>
-              </a:defRPr>
-            </a:pPr>
-            <a:r>
-              <a:t>All lifecycle transitions insert a new record into complaint_updates with old/new status, operator ID, and timestamp, guaranteeing complete accountability.</a:t>
-            </a:r>
-          </a:p>
-        </p:txBody>
-      </p:sp>
-      <p:sp>
-        <p:nvSpPr>
-          <p:cNvPr id="19" name="Rounded Rectangle 18"/>
-          <p:cNvSpPr/>
-          <p:nvPr/>
-        </p:nvSpPr>
-        <p:spPr>
-          <a:xfrm>
-            <a:off x="8065008" y="3794760"/>
-            <a:ext cx="3392424" cy="2286000"/>
-          </a:xfrm>
-          <a:prstGeom prst="roundRect">
-            <a:avLst/>
-          </a:prstGeom>
-          <a:solidFill>
-            <a:srgbClr val="FFFFFF"/>
-          </a:solidFill>
-          <a:ln w="15240">
-            <a:solidFill>
-              <a:srgbClr val="CBD5E1"/>
-            </a:solidFill>
-          </a:ln>
-        </p:spPr>
-        <p:style>
-          <a:lnRef idx="1">
-            <a:schemeClr val="accent1"/>
-          </a:lnRef>
-          <a:fillRef idx="3">
-            <a:schemeClr val="accent1"/>
-          </a:fillRef>
-          <a:effectRef idx="2">
-            <a:schemeClr val="accent1"/>
-          </a:effectRef>
-          <a:fontRef idx="minor">
-            <a:schemeClr val="lt1"/>
-          </a:fontRef>
-        </p:style>
-        <p:txBody>
-          <a:bodyPr rtlCol="0" anchor="ctr"/>
-          <a:lstStyle/>
-          <a:p>
-            <a:pPr algn="ctr"/>
-          </a:p>
-        </p:txBody>
-      </p:sp>
-      <p:sp>
-        <p:nvSpPr>
-          <p:cNvPr id="20" name="TextBox 19"/>
-          <p:cNvSpPr txBox="1"/>
-          <p:nvPr/>
-        </p:nvSpPr>
-        <p:spPr>
-          <a:xfrm>
-            <a:off x="8247888" y="3931920"/>
-            <a:ext cx="3026664" cy="2011680"/>
-          </a:xfrm>
-          <a:prstGeom prst="rect">
-            <a:avLst/>
-          </a:prstGeom>
-          <a:noFill/>
-        </p:spPr>
-        <p:txBody>
-          <a:bodyPr wrap="square" lIns="0" tIns="0">
-            <a:spAutoFit/>
-          </a:bodyPr>
-          <a:lstStyle/>
-          <a:p>
-            <a:pPr>
-              <a:defRPr sz="2100" b="1">
-                <a:solidFill>
-                  <a:srgbClr val="14532D"/>
-                </a:solidFill>
-                <a:latin typeface="Arial"/>
-              </a:defRPr>
-            </a:pPr>
-            <a:r>
-              <a:t>Referential Integrity</a:t>
-            </a:r>
-          </a:p>
-          <a:p>
-            <a:pPr>
-              <a:spcBef>
-                <a:spcPts val="800"/>
-              </a:spcBef>
-              <a:defRPr sz="1900">
-                <a:solidFill>
-                  <a:srgbClr val="111827"/>
-                </a:solidFill>
-                <a:latin typeface="Arial"/>
-              </a:defRPr>
-            </a:pPr>
-            <a:r>
-              <a:t>Foreign key constraints with RESTRICT/CASCADE rules prevent orphaned records. Inactive users and locations are flagged rather than deleted.</a:t>
+              <a:defRPr sz="1800">
+                <a:solidFill>
+                  <a:srgbClr val="1E293B"/>
+                </a:solidFill>
+                <a:latin typeface="Arial"/>
+              </a:defRPr>
+            </a:pPr>
+            <a:r>
+              <a:t>The complaint_updates table operates as an append-only transaction log, recording every status transition with operator IDs and timestamps.</a:t>
             </a:r>
           </a:p>
         </p:txBody>
@@ -9853,7 +10524,7 @@
           <a:noFill/>
         </p:spPr>
         <p:txBody>
-          <a:bodyPr wrap="square" lIns="0" tIns="0" rIns="0" bIns="0">
+          <a:bodyPr wrap="none" lIns="0" tIns="0" rIns="0" bIns="0">
             <a:spAutoFit/>
           </a:bodyPr>
           <a:lstStyle/>
@@ -9861,13 +10532,13 @@
             <a:pPr>
               <a:defRPr sz="1800" b="1">
                 <a:solidFill>
-                  <a:srgbClr val="1D4ED8"/>
-                </a:solidFill>
-                <a:latin typeface="Arial"/>
-              </a:defRPr>
-            </a:pPr>
-            <a:r>
-              <a:t>7. IMPLEMENTED APPLICATION SCREENS</a:t>
+                  <a:srgbClr val="2563EB"/>
+                </a:solidFill>
+                <a:latin typeface="Arial"/>
+              </a:defRPr>
+            </a:pPr>
+            <a:r>
+              <a:t>7. APPLICATION SCREENSHOTS</a:t>
             </a:r>
           </a:p>
         </p:txBody>
@@ -9889,7 +10560,7 @@
           <a:noFill/>
         </p:spPr>
         <p:txBody>
-          <a:bodyPr wrap="square" lIns="0" tIns="0" rIns="0" bIns="0">
+          <a:bodyPr wrap="none" lIns="0" tIns="0" rIns="0" bIns="0">
             <a:spAutoFit/>
           </a:bodyPr>
           <a:lstStyle/>
@@ -9897,13 +10568,13 @@
             <a:pPr>
               <a:defRPr sz="3200" b="1">
                 <a:solidFill>
-                  <a:srgbClr val="0F2744"/>
-                </a:solidFill>
-                <a:latin typeface="Arial"/>
-              </a:defRPr>
-            </a:pPr>
-            <a:r>
-              <a:t>Authentic User Interfaces Captured from the Running CCMS Application</a:t>
+                  <a:srgbClr val="0F172A"/>
+                </a:solidFill>
+                <a:latin typeface="Arial"/>
+              </a:defRPr>
+            </a:pPr>
+            <a:r>
+              <a:t>Authentic User Interfaces from the Running CCMS Application</a:t>
             </a:r>
           </a:p>
         </p:txBody>
@@ -9916,7 +10587,7 @@
         </p:nvSpPr>
         <p:spPr>
           <a:xfrm>
-            <a:off x="731520" y="6236208"/>
+            <a:off x="731520" y="6263640"/>
             <a:ext cx="10728655" cy="13716"/>
           </a:xfrm>
           <a:prstGeom prst="rect">
@@ -9960,7 +10631,7 @@
         <p:spPr>
           <a:xfrm>
             <a:off x="731520" y="6327648"/>
-            <a:ext cx="8412480" cy="320040"/>
+            <a:ext cx="8229600" cy="320040"/>
           </a:xfrm>
           <a:prstGeom prst="rect">
             <a:avLst/>
@@ -9976,13 +10647,13 @@
             <a:pPr>
               <a:defRPr sz="1600" b="1">
                 <a:solidFill>
-                  <a:srgbClr val="334155"/>
-                </a:solidFill>
-                <a:latin typeface="Arial"/>
-              </a:defRPr>
-            </a:pPr>
-            <a:r>
-              <a:t>Campus Complaint &amp; Maintenance Management System  |  Software Engineering Mini Project</a:t>
+                  <a:srgbClr val="475569"/>
+                </a:solidFill>
+                <a:latin typeface="Arial"/>
+              </a:defRPr>
+            </a:pPr>
+            <a:r>
+              <a:t>Campus Complaint &amp; Maintenance Management System  |  Software Engineering Lab</a:t>
             </a:r>
           </a:p>
         </p:txBody>
@@ -10012,7 +10683,7 @@
             <a:pPr algn="r">
               <a:defRPr sz="1600" b="1">
                 <a:solidFill>
-                  <a:srgbClr val="1D4ED8"/>
+                  <a:srgbClr val="2563EB"/>
                 </a:solidFill>
                 <a:latin typeface="Arial"/>
               </a:defRPr>
@@ -10020,57 +10691,12 @@
             <a:r>
               <a:t>Slide 8 of 10</a:t>
             </a:r>
-          </a:p>
-        </p:txBody>
-      </p:sp>
-      <p:sp>
-        <p:nvSpPr>
-          <p:cNvPr id="7" name="Rounded Rectangle 6"/>
-          <p:cNvSpPr/>
-          <p:nvPr/>
-        </p:nvSpPr>
-        <p:spPr>
-          <a:xfrm>
-            <a:off x="731520" y="1371600"/>
-            <a:ext cx="5120640" cy="4663440"/>
-          </a:xfrm>
-          <a:prstGeom prst="roundRect">
-            <a:avLst/>
-          </a:prstGeom>
-          <a:solidFill>
-            <a:srgbClr val="FFFFFF"/>
-          </a:solidFill>
-          <a:ln w="15240">
-            <a:solidFill>
-              <a:srgbClr val="CBD5E1"/>
-            </a:solidFill>
-          </a:ln>
-        </p:spPr>
-        <p:style>
-          <a:lnRef idx="1">
-            <a:schemeClr val="accent1"/>
-          </a:lnRef>
-          <a:fillRef idx="3">
-            <a:schemeClr val="accent1"/>
-          </a:fillRef>
-          <a:effectRef idx="2">
-            <a:schemeClr val="accent1"/>
-          </a:effectRef>
-          <a:fontRef idx="minor">
-            <a:schemeClr val="lt1"/>
-          </a:fontRef>
-        </p:style>
-        <p:txBody>
-          <a:bodyPr rtlCol="0" anchor="ctr"/>
-          <a:lstStyle/>
-          <a:p>
-            <a:pPr algn="ctr"/>
           </a:p>
         </p:txBody>
       </p:sp>
       <p:pic>
         <p:nvPicPr>
-          <p:cNvPr id="8" name="Picture 7" descr="07_admin_dashboard.png"/>
+          <p:cNvPr id="7" name="Picture 6" descr="07_admin_dashboard.png"/>
           <p:cNvPicPr>
             <a:picLocks noChangeAspect="1"/>
           </p:cNvPicPr>
@@ -10084,8 +10710,8 @@
         </p:blipFill>
         <p:spPr>
           <a:xfrm>
-            <a:off x="822960" y="1463040"/>
-            <a:ext cx="4937759" cy="3086099"/>
+            <a:off x="731520" y="1325880"/>
+            <a:ext cx="5120640" cy="3200400"/>
           </a:xfrm>
           <a:prstGeom prst="rect">
             <a:avLst/>
@@ -10094,14 +10720,14 @@
       </p:pic>
       <p:sp>
         <p:nvSpPr>
-          <p:cNvPr id="9" name="TextBox 8"/>
+          <p:cNvPr id="8" name="TextBox 7"/>
           <p:cNvSpPr txBox="1"/>
           <p:nvPr/>
         </p:nvSpPr>
         <p:spPr>
           <a:xfrm>
-            <a:off x="868680" y="4709160"/>
-            <a:ext cx="4846320" cy="1188720"/>
+            <a:off x="731520" y="4663440"/>
+            <a:ext cx="5120640" cy="1371600"/>
           </a:xfrm>
           <a:prstGeom prst="rect">
             <a:avLst/>
@@ -10115,9 +10741,9 @@
           <a:lstStyle/>
           <a:p>
             <a:pPr>
-              <a:defRPr sz="2100" b="1">
-                <a:solidFill>
-                  <a:srgbClr val="0F2744"/>
+              <a:defRPr sz="2200" b="1">
+                <a:solidFill>
+                  <a:srgbClr val="0F172A"/>
                 </a:solidFill>
                 <a:latin typeface="Arial"/>
               </a:defRPr>
@@ -10133,69 +10759,24 @@
               </a:spcBef>
               <a:defRPr sz="1900">
                 <a:solidFill>
-                  <a:srgbClr val="111827"/>
-                </a:solidFill>
-                <a:latin typeface="Arial"/>
-              </a:defRPr>
-            </a:pPr>
-            <a:r>
-              <a:t>① Real-Time Campus KPIs: Total, open, resolved, and critical ticket tallies.</a:t>
+                  <a:srgbClr val="1E293B"/>
+                </a:solidFill>
+                <a:latin typeface="Arial"/>
+              </a:defRPr>
+            </a:pPr>
+            <a:r>
+              <a:t>• Real-Time Campus KPIs: Total, open, resolved, and critical ticket counts.</a:t>
             </a:r>
             <a:br/>
             <a:r>
-              <a:t>② Governance &amp; Triage: Instant search, category filters, and verify/reject controls.</a:t>
-            </a:r>
-          </a:p>
-        </p:txBody>
-      </p:sp>
-      <p:sp>
-        <p:nvSpPr>
-          <p:cNvPr id="10" name="Rounded Rectangle 9"/>
-          <p:cNvSpPr/>
-          <p:nvPr/>
-        </p:nvSpPr>
-        <p:spPr>
-          <a:xfrm>
-            <a:off x="6339535" y="1371600"/>
-            <a:ext cx="5120640" cy="4663440"/>
-          </a:xfrm>
-          <a:prstGeom prst="roundRect">
-            <a:avLst/>
-          </a:prstGeom>
-          <a:solidFill>
-            <a:srgbClr val="FFFFFF"/>
-          </a:solidFill>
-          <a:ln w="15240">
-            <a:solidFill>
-              <a:srgbClr val="CBD5E1"/>
-            </a:solidFill>
-          </a:ln>
-        </p:spPr>
-        <p:style>
-          <a:lnRef idx="1">
-            <a:schemeClr val="accent1"/>
-          </a:lnRef>
-          <a:fillRef idx="3">
-            <a:schemeClr val="accent1"/>
-          </a:fillRef>
-          <a:effectRef idx="2">
-            <a:schemeClr val="accent1"/>
-          </a:effectRef>
-          <a:fontRef idx="minor">
-            <a:schemeClr val="lt1"/>
-          </a:fontRef>
-        </p:style>
-        <p:txBody>
-          <a:bodyPr rtlCol="0" anchor="ctr"/>
-          <a:lstStyle/>
-          <a:p>
-            <a:pPr algn="ctr"/>
+              <a:t>• Interactive Triage: Instant search, category filters, and verify/reject controls.</a:t>
+            </a:r>
           </a:p>
         </p:txBody>
       </p:sp>
       <p:pic>
         <p:nvPicPr>
-          <p:cNvPr id="11" name="Picture 10" descr="15_maintenance_tasks.png"/>
+          <p:cNvPr id="9" name="Picture 8" descr="15_maintenance_tasks.png"/>
           <p:cNvPicPr>
             <a:picLocks noChangeAspect="1"/>
           </p:cNvPicPr>
@@ -10209,8 +10790,8 @@
         </p:blipFill>
         <p:spPr>
           <a:xfrm>
-            <a:off x="6430975" y="1463040"/>
-            <a:ext cx="4937759" cy="3086099"/>
+            <a:off x="6339535" y="1325880"/>
+            <a:ext cx="5120640" cy="3200400"/>
           </a:xfrm>
           <a:prstGeom prst="rect">
             <a:avLst/>
@@ -10219,14 +10800,14 @@
       </p:pic>
       <p:sp>
         <p:nvSpPr>
-          <p:cNvPr id="12" name="TextBox 11"/>
+          <p:cNvPr id="10" name="TextBox 9"/>
           <p:cNvSpPr txBox="1"/>
           <p:nvPr/>
         </p:nvSpPr>
         <p:spPr>
           <a:xfrm>
-            <a:off x="6476695" y="4709160"/>
-            <a:ext cx="4846320" cy="1188720"/>
+            <a:off x="6339535" y="4663440"/>
+            <a:ext cx="5120640" cy="1371600"/>
           </a:xfrm>
           <a:prstGeom prst="rect">
             <a:avLst/>
@@ -10240,9 +10821,9 @@
           <a:lstStyle/>
           <a:p>
             <a:pPr>
-              <a:defRPr sz="2100" b="1">
-                <a:solidFill>
-                  <a:srgbClr val="14532D"/>
+              <a:defRPr sz="2200" b="1">
+                <a:solidFill>
+                  <a:srgbClr val="15803D"/>
                 </a:solidFill>
                 <a:latin typeface="Arial"/>
               </a:defRPr>
@@ -10258,17 +10839,17 @@
               </a:spcBef>
               <a:defRPr sz="1900">
                 <a:solidFill>
-                  <a:srgbClr val="111827"/>
-                </a:solidFill>
-                <a:latin typeface="Arial"/>
-              </a:defRPr>
-            </a:pPr>
-            <a:r>
-              <a:t>① Focused Dispatching: Displays exact campus building, floor, room, and urgency.</a:t>
+                  <a:srgbClr val="1E293B"/>
+                </a:solidFill>
+                <a:latin typeface="Arial"/>
+              </a:defRPr>
+            </a:pPr>
+            <a:r>
+              <a:t>• Room-Level Dispatching: Displays exact campus building, floor, room, and urgency.</a:t>
             </a:r>
             <a:br/>
             <a:r>
-              <a:t>② Work Execution: Single-click 'Start Work' and diagnostic resolution remarks submission.</a:t>
+              <a:t>• Work Execution: Single-click 'Start Work' and diagnostic resolution remarks submission.</a:t>
             </a:r>
           </a:p>
         </p:txBody>
@@ -10308,7 +10889,7 @@
           <a:noFill/>
         </p:spPr>
         <p:txBody>
-          <a:bodyPr wrap="square" lIns="0" tIns="0" rIns="0" bIns="0">
+          <a:bodyPr wrap="none" lIns="0" tIns="0" rIns="0" bIns="0">
             <a:spAutoFit/>
           </a:bodyPr>
           <a:lstStyle/>
@@ -10316,7 +10897,7 @@
             <a:pPr>
               <a:defRPr sz="1800" b="1">
                 <a:solidFill>
-                  <a:srgbClr val="1D4ED8"/>
+                  <a:srgbClr val="2563EB"/>
                 </a:solidFill>
                 <a:latin typeface="Arial"/>
               </a:defRPr>
@@ -10344,7 +10925,7 @@
           <a:noFill/>
         </p:spPr>
         <p:txBody>
-          <a:bodyPr wrap="square" lIns="0" tIns="0" rIns="0" bIns="0">
+          <a:bodyPr wrap="none" lIns="0" tIns="0" rIns="0" bIns="0">
             <a:spAutoFit/>
           </a:bodyPr>
           <a:lstStyle/>
@@ -10352,7 +10933,7 @@
             <a:pPr>
               <a:defRPr sz="3200" b="1">
                 <a:solidFill>
-                  <a:srgbClr val="0F2744"/>
+                  <a:srgbClr val="0F172A"/>
                 </a:solidFill>
                 <a:latin typeface="Arial"/>
               </a:defRPr>
@@ -10371,7 +10952,7 @@
         </p:nvSpPr>
         <p:spPr>
           <a:xfrm>
-            <a:off x="731520" y="6236208"/>
+            <a:off x="731520" y="6263640"/>
             <a:ext cx="10728655" cy="13716"/>
           </a:xfrm>
           <a:prstGeom prst="rect">
@@ -10415,7 +10996,7 @@
         <p:spPr>
           <a:xfrm>
             <a:off x="731520" y="6327648"/>
-            <a:ext cx="8412480" cy="320040"/>
+            <a:ext cx="8229600" cy="320040"/>
           </a:xfrm>
           <a:prstGeom prst="rect">
             <a:avLst/>
@@ -10431,13 +11012,13 @@
             <a:pPr>
               <a:defRPr sz="1600" b="1">
                 <a:solidFill>
-                  <a:srgbClr val="334155"/>
-                </a:solidFill>
-                <a:latin typeface="Arial"/>
-              </a:defRPr>
-            </a:pPr>
-            <a:r>
-              <a:t>Campus Complaint &amp; Maintenance Management System  |  Software Engineering Mini Project</a:t>
+                  <a:srgbClr val="475569"/>
+                </a:solidFill>
+                <a:latin typeface="Arial"/>
+              </a:defRPr>
+            </a:pPr>
+            <a:r>
+              <a:t>Campus Complaint &amp; Maintenance Management System  |  Software Engineering Lab</a:t>
             </a:r>
           </a:p>
         </p:txBody>
@@ -10467,7 +11048,7 @@
             <a:pPr algn="r">
               <a:defRPr sz="1600" b="1">
                 <a:solidFill>
-                  <a:srgbClr val="1D4ED8"/>
+                  <a:srgbClr val="2563EB"/>
                 </a:solidFill>
                 <a:latin typeface="Arial"/>
               </a:defRPr>
@@ -10480,59 +11061,14 @@
       </p:sp>
       <p:sp>
         <p:nvSpPr>
-          <p:cNvPr id="7" name="Rounded Rectangle 6"/>
-          <p:cNvSpPr/>
-          <p:nvPr/>
-        </p:nvSpPr>
-        <p:spPr>
-          <a:xfrm>
-            <a:off x="731520" y="1325880"/>
-            <a:ext cx="4389120" cy="4754880"/>
-          </a:xfrm>
-          <a:prstGeom prst="roundRect">
-            <a:avLst/>
-          </a:prstGeom>
-          <a:solidFill>
-            <a:srgbClr val="F8FAFC"/>
-          </a:solidFill>
-          <a:ln w="15240">
-            <a:solidFill>
-              <a:srgbClr val="CBD5E1"/>
-            </a:solidFill>
-          </a:ln>
-        </p:spPr>
-        <p:style>
-          <a:lnRef idx="1">
-            <a:schemeClr val="accent1"/>
-          </a:lnRef>
-          <a:fillRef idx="3">
-            <a:schemeClr val="accent1"/>
-          </a:fillRef>
-          <a:effectRef idx="2">
-            <a:schemeClr val="accent1"/>
-          </a:effectRef>
-          <a:fontRef idx="minor">
-            <a:schemeClr val="lt1"/>
-          </a:fontRef>
-        </p:style>
-        <p:txBody>
-          <a:bodyPr rtlCol="0" anchor="ctr"/>
-          <a:lstStyle/>
-          <a:p>
-            <a:pPr algn="ctr"/>
-          </a:p>
-        </p:txBody>
-      </p:sp>
-      <p:sp>
-        <p:nvSpPr>
-          <p:cNvPr id="8" name="TextBox 7"/>
+          <p:cNvPr id="7" name="TextBox 6"/>
           <p:cNvSpPr txBox="1"/>
           <p:nvPr/>
         </p:nvSpPr>
         <p:spPr>
           <a:xfrm>
-            <a:off x="960120" y="1508760"/>
-            <a:ext cx="3931920" cy="4389120"/>
+            <a:off x="731520" y="1280160"/>
+            <a:ext cx="4572000" cy="4754880"/>
           </a:xfrm>
           <a:prstGeom prst="rect">
             <a:avLst/>
@@ -10547,17 +11083,17 @@
           <a:p>
             <a:pPr>
               <a:spcAft>
-                <a:spcPts val="1000"/>
+                <a:spcPts val="1200"/>
               </a:spcAft>
               <a:defRPr sz="2400" b="1">
                 <a:solidFill>
-                  <a:srgbClr val="0F2744"/>
-                </a:solidFill>
-                <a:latin typeface="Arial"/>
-              </a:defRPr>
-            </a:pPr>
-            <a:r>
-              <a:t>Verification Methodology</a:t>
+                  <a:srgbClr val="0F172A"/>
+                </a:solidFill>
+                <a:latin typeface="Arial"/>
+              </a:defRPr>
+            </a:pPr>
+            <a:r>
+              <a:t>Testing Methodology</a:t>
             </a:r>
           </a:p>
           <a:p>
@@ -10569,7 +11105,7 @@
             <a:r>
               <a:rPr b="1" sz="2000">
                 <a:solidFill>
-                  <a:srgbClr val="1D4ED8"/>
+                  <a:srgbClr val="2563EB"/>
                 </a:solidFill>
               </a:rPr>
               <a:t>• Unit Testing:
@@ -10578,7 +11114,7 @@
             <a:r>
               <a:rPr sz="1900">
                 <a:solidFill>
-                  <a:srgbClr val="111827"/>
+                  <a:srgbClr val="1E293B"/>
                 </a:solidFill>
               </a:rPr>
               <a:t>Validated bcrypt password salting, token signing/verification, and unique CMP-ID generators.</a:t>
@@ -10593,7 +11129,7 @@
             <a:r>
               <a:rPr b="1" sz="2000">
                 <a:solidFill>
-                  <a:srgbClr val="1D4ED8"/>
+                  <a:srgbClr val="2563EB"/>
                 </a:solidFill>
               </a:rPr>
               <a:t>• Basis Path Testing:
@@ -10602,10 +11138,10 @@
             <a:r>
               <a:rPr sz="1900">
                 <a:solidFill>
-                  <a:srgbClr val="111827"/>
+                  <a:srgbClr val="1E293B"/>
                 </a:solidFill>
               </a:rPr>
-              <a:t>Mapped Cyclomatic Complexity V(G) = 11 for statusController.js; validated all legal and illegal transition branches.</a:t>
+              <a:t>Mapped Cyclomatic Complexity V(G) = 11 for statusController.js; validated all legal and illegal transition paths.</a:t>
             </a:r>
           </a:p>
           <a:p>
@@ -10617,16 +11153,16 @@
             <a:r>
               <a:rPr b="1" sz="2000">
                 <a:solidFill>
-                  <a:srgbClr val="1D4ED8"/>
+                  <a:srgbClr val="2563EB"/>
                 </a:solidFill>
               </a:rPr>
-              <a:t>• Role Access Boundary:
+              <a:t>• Role Access Testing:
 </a:t>
             </a:r>
             <a:r>
               <a:rPr sz="1900">
                 <a:solidFill>
-                  <a:srgbClr val="111827"/>
+                  <a:srgbClr val="1E293B"/>
                 </a:solidFill>
               </a:rPr>
               <a:t>Verified that student tokens cannot access administrative or technician endpoints (HTTP 403 Forbidden).</a:t>
@@ -10641,7 +11177,7 @@
             <a:r>
               <a:rPr b="1" sz="2000">
                 <a:solidFill>
-                  <a:srgbClr val="1D4ED8"/>
+                  <a:srgbClr val="2563EB"/>
                 </a:solidFill>
               </a:rPr>
               <a:t>• System Integration:
@@ -10650,7 +11186,7 @@
             <a:r>
               <a:rPr sz="1900">
                 <a:solidFill>
-                  <a:srgbClr val="111827"/>
+                  <a:srgbClr val="1E293B"/>
                 </a:solidFill>
               </a:rPr>
               <a:t>Automated browser validation via Playwright confirming end-to-end user journeys.</a:t>
@@ -10659,31 +11195,31 @@
           <a:p>
             <a:pPr>
               <a:spcBef>
-                <a:spcPts val="1400"/>
+                <a:spcPts val="1600"/>
               </a:spcBef>
             </a:pPr>
             <a:r>
               <a:rPr b="1" sz="2000">
                 <a:solidFill>
-                  <a:srgbClr val="14532D"/>
+                  <a:srgbClr val="15803D"/>
                 </a:solidFill>
               </a:rPr>
-              <a:t>✓ 30 / 30 Test Cases PASSED (100%)</a:t>
+              <a:t>✓ 30 / 30 Executed Test Cases PASSED (100%)</a:t>
             </a:r>
           </a:p>
         </p:txBody>
       </p:sp>
       <p:graphicFrame>
         <p:nvGraphicFramePr>
-          <p:cNvPr id="9" name="Table 8"/>
+          <p:cNvPr id="8" name="Table 7"/>
           <p:cNvGraphicFramePr>
             <a:graphicFrameLocks noGrp="1"/>
           </p:cNvGraphicFramePr>
           <p:nvPr/>
         </p:nvGraphicFramePr>
         <p:xfrm>
-          <a:off x="5303520" y="1325880"/>
-          <a:ext cx="6156655" cy="4754880"/>
+          <a:off x="5486400" y="1325880"/>
+          <a:ext cx="5973775" cy="4663440"/>
         </p:xfrm>
         <a:graphic>
           <a:graphicData uri="http://schemas.openxmlformats.org/drawingml/2006/table">
@@ -10693,18 +11229,18 @@
               </a:tblPr>
               <a:tblGrid>
                 <a:gridCol w="914400"/>
-                <a:gridCol w="2011680"/>
-                <a:gridCol w="2316175"/>
+                <a:gridCol w="1920240"/>
+                <a:gridCol w="2224735"/>
                 <a:gridCol w="914400"/>
               </a:tblGrid>
-              <a:tr h="679268">
+              <a:tr h="666205">
                 <a:tc>
                   <a:txBody>
                     <a:bodyPr/>
                     <a:lstStyle/>
                     <a:p>
                       <a:pPr algn="ctr">
-                        <a:defRPr sz="1900" b="1">
+                        <a:defRPr sz="1800" b="1">
                           <a:solidFill>
                             <a:srgbClr val="FFFFFF"/>
                           </a:solidFill>
@@ -10718,7 +11254,7 @@
                   </a:txBody>
                   <a:tcPr>
                     <a:solidFill>
-                      <a:srgbClr val="0F2744"/>
+                      <a:srgbClr val="0F172A"/>
                     </a:solidFill>
                   </a:tcPr>
                 </a:tc>
@@ -10728,7 +11264,7 @@
                     <a:lstStyle/>
                     <a:p>
                       <a:pPr algn="ctr">
-                        <a:defRPr sz="1900" b="1">
+                        <a:defRPr sz="1800" b="1">
                           <a:solidFill>
                             <a:srgbClr val="FFFFFF"/>
                           </a:solidFill>
@@ -10742,7 +11278,7 @@
                   </a:txBody>
                   <a:tcPr>
                     <a:solidFill>
-                      <a:srgbClr val="0F2744"/>
+                      <a:srgbClr val="0F172A"/>
                     </a:solidFill>
                   </a:tcPr>
                 </a:tc>
@@ -10752,7 +11288,7 @@
                     <a:lstStyle/>
                     <a:p>
                       <a:pPr algn="ctr">
-                        <a:defRPr sz="1900" b="1">
+                        <a:defRPr sz="1800" b="1">
                           <a:solidFill>
                             <a:srgbClr val="FFFFFF"/>
                           </a:solidFill>
@@ -10766,7 +11302,7 @@
                   </a:txBody>
                   <a:tcPr>
                     <a:solidFill>
-                      <a:srgbClr val="0F2744"/>
+                      <a:srgbClr val="0F172A"/>
                     </a:solidFill>
                   </a:tcPr>
                 </a:tc>
@@ -10776,7 +11312,7 @@
                     <a:lstStyle/>
                     <a:p>
                       <a:pPr algn="ctr">
-                        <a:defRPr sz="1900" b="1">
+                        <a:defRPr sz="1800" b="1">
                           <a:solidFill>
                             <a:srgbClr val="FFFFFF"/>
                           </a:solidFill>
@@ -10790,12 +11326,12 @@
                   </a:txBody>
                   <a:tcPr>
                     <a:solidFill>
-                      <a:srgbClr val="0F2744"/>
+                      <a:srgbClr val="0F172A"/>
                     </a:solidFill>
                   </a:tcPr>
                 </a:tc>
               </a:tr>
-              <a:tr h="679268">
+              <a:tr h="666205">
                 <a:tc>
                   <a:txBody>
                     <a:bodyPr/>
@@ -10804,7 +11340,7 @@
                       <a:pPr algn="ctr">
                         <a:defRPr sz="1800" b="1">
                           <a:solidFill>
-                            <a:srgbClr val="0F2744"/>
+                            <a:srgbClr val="0F172A"/>
                           </a:solidFill>
                           <a:latin typeface="Arial"/>
                         </a:defRPr>
@@ -10828,7 +11364,7 @@
                       <a:pPr>
                         <a:defRPr sz="1800">
                           <a:solidFill>
-                            <a:srgbClr val="111827"/>
+                            <a:srgbClr val="1E293B"/>
                           </a:solidFill>
                           <a:latin typeface="Arial"/>
                         </a:defRPr>
@@ -10852,7 +11388,7 @@
                       <a:pPr>
                         <a:defRPr sz="1800">
                           <a:solidFill>
-                            <a:srgbClr val="111827"/>
+                            <a:srgbClr val="1E293B"/>
                           </a:solidFill>
                           <a:latin typeface="Arial"/>
                         </a:defRPr>
@@ -10876,7 +11412,7 @@
                       <a:pPr algn="ctr">
                         <a:defRPr sz="1800" b="1">
                           <a:solidFill>
-                            <a:srgbClr val="14532D"/>
+                            <a:srgbClr val="15803D"/>
                           </a:solidFill>
                           <a:latin typeface="Arial"/>
                         </a:defRPr>
@@ -10893,7 +11429,7 @@
                   </a:tcPr>
                 </a:tc>
               </a:tr>
-              <a:tr h="679268">
+              <a:tr h="666205">
                 <a:tc>
                   <a:txBody>
                     <a:bodyPr/>
@@ -10902,7 +11438,7 @@
                       <a:pPr algn="ctr">
                         <a:defRPr sz="1800" b="1">
                           <a:solidFill>
-                            <a:srgbClr val="0F2744"/>
+                            <a:srgbClr val="0F172A"/>
                           </a:solidFill>
                           <a:latin typeface="Arial"/>
                         </a:defRPr>
@@ -10914,7 +11450,7 @@
                   </a:txBody>
                   <a:tcPr>
                     <a:solidFill>
-                      <a:srgbClr val="F8FAFC"/>
+                      <a:srgbClr val="F1F5F9"/>
                     </a:solidFill>
                   </a:tcPr>
                 </a:tc>
@@ -10926,7 +11462,7 @@
                       <a:pPr>
                         <a:defRPr sz="1800">
                           <a:solidFill>
-                            <a:srgbClr val="111827"/>
+                            <a:srgbClr val="1E293B"/>
                           </a:solidFill>
                           <a:latin typeface="Arial"/>
                         </a:defRPr>
@@ -10938,7 +11474,7 @@
                   </a:txBody>
                   <a:tcPr>
                     <a:solidFill>
-                      <a:srgbClr val="F8FAFC"/>
+                      <a:srgbClr val="F1F5F9"/>
                     </a:solidFill>
                   </a:tcPr>
                 </a:tc>
@@ -10950,7 +11486,7 @@
                       <a:pPr>
                         <a:defRPr sz="1800">
                           <a:solidFill>
-                            <a:srgbClr val="111827"/>
+                            <a:srgbClr val="1E293B"/>
                           </a:solidFill>
                           <a:latin typeface="Arial"/>
                         </a:defRPr>
@@ -10962,7 +11498,7 @@
                   </a:txBody>
                   <a:tcPr>
                     <a:solidFill>
-                      <a:srgbClr val="F8FAFC"/>
+                      <a:srgbClr val="F1F5F9"/>
                     </a:solidFill>
                   </a:tcPr>
                 </a:tc>
@@ -10974,7 +11510,7 @@
                       <a:pPr algn="ctr">
                         <a:defRPr sz="1800" b="1">
                           <a:solidFill>
-                            <a:srgbClr val="14532D"/>
+                            <a:srgbClr val="15803D"/>
                           </a:solidFill>
                           <a:latin typeface="Arial"/>
                         </a:defRPr>
@@ -10986,12 +11522,12 @@
                   </a:txBody>
                   <a:tcPr>
                     <a:solidFill>
-                      <a:srgbClr val="F8FAFC"/>
+                      <a:srgbClr val="F1F5F9"/>
                     </a:solidFill>
                   </a:tcPr>
                 </a:tc>
               </a:tr>
-              <a:tr h="679268">
+              <a:tr h="666205">
                 <a:tc>
                   <a:txBody>
                     <a:bodyPr/>
@@ -11000,7 +11536,7 @@
                       <a:pPr algn="ctr">
                         <a:defRPr sz="1800" b="1">
                           <a:solidFill>
-                            <a:srgbClr val="0F2744"/>
+                            <a:srgbClr val="0F172A"/>
                           </a:solidFill>
                           <a:latin typeface="Arial"/>
                         </a:defRPr>
@@ -11024,7 +11560,7 @@
                       <a:pPr>
                         <a:defRPr sz="1800">
                           <a:solidFill>
-                            <a:srgbClr val="111827"/>
+                            <a:srgbClr val="1E293B"/>
                           </a:solidFill>
                           <a:latin typeface="Arial"/>
                         </a:defRPr>
@@ -11048,7 +11584,7 @@
                       <a:pPr>
                         <a:defRPr sz="1800">
                           <a:solidFill>
-                            <a:srgbClr val="111827"/>
+                            <a:srgbClr val="1E293B"/>
                           </a:solidFill>
                           <a:latin typeface="Arial"/>
                         </a:defRPr>
@@ -11072,7 +11608,7 @@
                       <a:pPr algn="ctr">
                         <a:defRPr sz="1800" b="1">
                           <a:solidFill>
-                            <a:srgbClr val="14532D"/>
+                            <a:srgbClr val="15803D"/>
                           </a:solidFill>
                           <a:latin typeface="Arial"/>
                         </a:defRPr>
@@ -11089,7 +11625,7 @@
                   </a:tcPr>
                 </a:tc>
               </a:tr>
-              <a:tr h="679268">
+              <a:tr h="666205">
                 <a:tc>
                   <a:txBody>
                     <a:bodyPr/>
@@ -11098,7 +11634,7 @@
                       <a:pPr algn="ctr">
                         <a:defRPr sz="1800" b="1">
                           <a:solidFill>
-                            <a:srgbClr val="0F2744"/>
+                            <a:srgbClr val="0F172A"/>
                           </a:solidFill>
                           <a:latin typeface="Arial"/>
                         </a:defRPr>
@@ -11110,7 +11646,7 @@
                   </a:txBody>
                   <a:tcPr>
                     <a:solidFill>
-                      <a:srgbClr val="F8FAFC"/>
+                      <a:srgbClr val="F1F5F9"/>
                     </a:solidFill>
                   </a:tcPr>
                 </a:tc>
@@ -11122,7 +11658,7 @@
                       <a:pPr>
                         <a:defRPr sz="1800">
                           <a:solidFill>
-                            <a:srgbClr val="111827"/>
+                            <a:srgbClr val="1E293B"/>
                           </a:solidFill>
                           <a:latin typeface="Arial"/>
                         </a:defRPr>
@@ -11134,7 +11670,7 @@
                   </a:txBody>
                   <a:tcPr>
                     <a:solidFill>
-                      <a:srgbClr val="F8FAFC"/>
+                      <a:srgbClr val="F1F5F9"/>
                     </a:solidFill>
                   </a:tcPr>
                 </a:tc>
@@ -11146,7 +11682,7 @@
                       <a:pPr>
                         <a:defRPr sz="1800">
                           <a:solidFill>
-                            <a:srgbClr val="111827"/>
+                            <a:srgbClr val="1E293B"/>
                           </a:solidFill>
                           <a:latin typeface="Arial"/>
                         </a:defRPr>
@@ -11158,7 +11694,7 @@
                   </a:txBody>
                   <a:tcPr>
                     <a:solidFill>
-                      <a:srgbClr val="F8FAFC"/>
+                      <a:srgbClr val="F1F5F9"/>
                     </a:solidFill>
                   </a:tcPr>
                 </a:tc>
@@ -11170,7 +11706,7 @@
                       <a:pPr algn="ctr">
                         <a:defRPr sz="1800" b="1">
                           <a:solidFill>
-                            <a:srgbClr val="14532D"/>
+                            <a:srgbClr val="15803D"/>
                           </a:solidFill>
                           <a:latin typeface="Arial"/>
                         </a:defRPr>
@@ -11182,12 +11718,12 @@
                   </a:txBody>
                   <a:tcPr>
                     <a:solidFill>
-                      <a:srgbClr val="F8FAFC"/>
+                      <a:srgbClr val="F1F5F9"/>
                     </a:solidFill>
                   </a:tcPr>
                 </a:tc>
               </a:tr>
-              <a:tr h="679268">
+              <a:tr h="666205">
                 <a:tc>
                   <a:txBody>
                     <a:bodyPr/>
@@ -11196,7 +11732,7 @@
                       <a:pPr algn="ctr">
                         <a:defRPr sz="1800" b="1">
                           <a:solidFill>
-                            <a:srgbClr val="0F2744"/>
+                            <a:srgbClr val="0F172A"/>
                           </a:solidFill>
                           <a:latin typeface="Arial"/>
                         </a:defRPr>
@@ -11220,7 +11756,7 @@
                       <a:pPr>
                         <a:defRPr sz="1800">
                           <a:solidFill>
-                            <a:srgbClr val="111827"/>
+                            <a:srgbClr val="1E293B"/>
                           </a:solidFill>
                           <a:latin typeface="Arial"/>
                         </a:defRPr>
@@ -11244,7 +11780,7 @@
                       <a:pPr>
                         <a:defRPr sz="1800">
                           <a:solidFill>
-                            <a:srgbClr val="111827"/>
+                            <a:srgbClr val="1E293B"/>
                           </a:solidFill>
                           <a:latin typeface="Arial"/>
                         </a:defRPr>
@@ -11268,7 +11804,7 @@
                       <a:pPr algn="ctr">
                         <a:defRPr sz="1800" b="1">
                           <a:solidFill>
-                            <a:srgbClr val="14532D"/>
+                            <a:srgbClr val="15803D"/>
                           </a:solidFill>
                           <a:latin typeface="Arial"/>
                         </a:defRPr>
@@ -11285,7 +11821,7 @@
                   </a:tcPr>
                 </a:tc>
               </a:tr>
-              <a:tr h="679272">
+              <a:tr h="666210">
                 <a:tc>
                   <a:txBody>
                     <a:bodyPr/>
@@ -11294,7 +11830,7 @@
                       <a:pPr algn="ctr">
                         <a:defRPr sz="1800" b="1">
                           <a:solidFill>
-                            <a:srgbClr val="0F2744"/>
+                            <a:srgbClr val="0F172A"/>
                           </a:solidFill>
                           <a:latin typeface="Arial"/>
                         </a:defRPr>
@@ -11306,7 +11842,7 @@
                   </a:txBody>
                   <a:tcPr>
                     <a:solidFill>
-                      <a:srgbClr val="F8FAFC"/>
+                      <a:srgbClr val="F1F5F9"/>
                     </a:solidFill>
                   </a:tcPr>
                 </a:tc>
@@ -11318,7 +11854,7 @@
                       <a:pPr>
                         <a:defRPr sz="1800">
                           <a:solidFill>
-                            <a:srgbClr val="111827"/>
+                            <a:srgbClr val="1E293B"/>
                           </a:solidFill>
                           <a:latin typeface="Arial"/>
                         </a:defRPr>
@@ -11330,7 +11866,7 @@
                   </a:txBody>
                   <a:tcPr>
                     <a:solidFill>
-                      <a:srgbClr val="F8FAFC"/>
+                      <a:srgbClr val="F1F5F9"/>
                     </a:solidFill>
                   </a:tcPr>
                 </a:tc>
@@ -11342,7 +11878,7 @@
                       <a:pPr>
                         <a:defRPr sz="1800">
                           <a:solidFill>
-                            <a:srgbClr val="111827"/>
+                            <a:srgbClr val="1E293B"/>
                           </a:solidFill>
                           <a:latin typeface="Arial"/>
                         </a:defRPr>
@@ -11354,7 +11890,7 @@
                   </a:txBody>
                   <a:tcPr>
                     <a:solidFill>
-                      <a:srgbClr val="F8FAFC"/>
+                      <a:srgbClr val="F1F5F9"/>
                     </a:solidFill>
                   </a:tcPr>
                 </a:tc>
@@ -11366,7 +11902,7 @@
                       <a:pPr algn="ctr">
                         <a:defRPr sz="1800" b="1">
                           <a:solidFill>
-                            <a:srgbClr val="14532D"/>
+                            <a:srgbClr val="15803D"/>
                           </a:solidFill>
                           <a:latin typeface="Arial"/>
                         </a:defRPr>
@@ -11378,7 +11914,7 @@
                   </a:txBody>
                   <a:tcPr>
                     <a:solidFill>
-                      <a:srgbClr val="F8FAFC"/>
+                      <a:srgbClr val="F1F5F9"/>
                     </a:solidFill>
                   </a:tcPr>
                 </a:tc>

--- a/Campus_Complaint_Management_System_Mini_Project_Presentation.pptx
+++ b/Campus_Complaint_Management_System_Mini_Project_Presentation.pptx
@@ -3105,8 +3105,8 @@
         </p:nvSpPr>
         <p:spPr>
           <a:xfrm>
-            <a:off x="731520" y="1188720"/>
-            <a:ext cx="109728" cy="4389120"/>
+            <a:off x="914400" y="1280160"/>
+            <a:ext cx="73152" cy="4114800"/>
           </a:xfrm>
           <a:prstGeom prst="rect">
             <a:avLst/>
@@ -3148,8 +3148,8 @@
         </p:nvSpPr>
         <p:spPr>
           <a:xfrm>
-            <a:off x="1097280" y="1097280"/>
-            <a:ext cx="10332720" cy="4480560"/>
+            <a:off x="1188720" y="1188720"/>
+            <a:ext cx="6217920" cy="4389120"/>
           </a:xfrm>
           <a:prstGeom prst="rect">
             <a:avLst/>
@@ -3164,76 +3164,53 @@
           <a:p>
             <a:pPr>
               <a:spcAft>
+                <a:spcPts val="1400"/>
+              </a:spcAft>
+              <a:defRPr sz="1700" b="1">
+                <a:solidFill>
+                  <a:srgbClr val="2563EB"/>
+                </a:solidFill>
+                <a:latin typeface="Calibri"/>
+              </a:defRPr>
+            </a:pPr>
+            <a:r>
+              <a:t>23CS4219 — SOFTWARE ENGINEERING LABORATORY</a:t>
+            </a:r>
+          </a:p>
+          <a:p>
+            <a:pPr>
+              <a:spcAft>
                 <a:spcPts val="1200"/>
               </a:spcAft>
-              <a:defRPr sz="2000" b="1">
-                <a:solidFill>
-                  <a:srgbClr val="2563EB"/>
-                </a:solidFill>
-                <a:latin typeface="Arial"/>
-              </a:defRPr>
-            </a:pPr>
-            <a:r>
-              <a:t>23CS4219 — SOFTWARE ENGINEERING LABORATORY</a:t>
+              <a:defRPr sz="3200" b="1">
+                <a:solidFill>
+                  <a:srgbClr val="0F172A"/>
+                </a:solidFill>
+                <a:latin typeface="Calibri"/>
+              </a:defRPr>
+            </a:pPr>
+            <a:r>
+              <a:t>Campus Complaint &amp;</a:t>
+            </a:r>
+            <a:br/>
+            <a:r>
+              <a:t>Maintenance Management System</a:t>
             </a:r>
           </a:p>
           <a:p>
             <a:pPr>
               <a:spcAft>
-                <a:spcPts val="1000"/>
+                <a:spcPts val="2800"/>
               </a:spcAft>
-              <a:defRPr sz="3600" b="1">
-                <a:solidFill>
-                  <a:srgbClr val="0F172A"/>
-                </a:solidFill>
-                <a:latin typeface="Arial"/>
-              </a:defRPr>
-            </a:pPr>
-            <a:r>
-              <a:t>Campus Complaint &amp; Maintenance</a:t>
-            </a:r>
-            <a:br/>
-            <a:r>
-              <a:t>Management System</a:t>
-            </a:r>
-          </a:p>
-          <a:p>
-            <a:pPr>
-              <a:spcAft>
-                <a:spcPts val="2600"/>
-              </a:spcAft>
-              <a:defRPr sz="2200">
+              <a:defRPr sz="2000">
                 <a:solidFill>
                   <a:srgbClr val="475569"/>
                 </a:solidFill>
-                <a:latin typeface="Arial"/>
-              </a:defRPr>
-            </a:pPr>
-            <a:r>
-              <a:t>A Role-Based Full-Stack Web Application for Institutional Facility Grievance Tracking</a:t>
-            </a:r>
-          </a:p>
-          <a:p>
-            <a:pPr>
-              <a:spcAft>
-                <a:spcPts val="2400"/>
-              </a:spcAft>
-            </a:pPr>
-            <a:r>
-              <a:rPr b="1" sz="1800">
-                <a:solidFill>
-                  <a:srgbClr val="0F172A"/>
-                </a:solidFill>
-              </a:rPr>
-              <a:t>CORE WORKFLOW:  </a:t>
-            </a:r>
-            <a:r>
-              <a:rPr sz="1800">
-                <a:solidFill>
-                  <a:srgbClr val="2563EB"/>
-                </a:solidFill>
-              </a:rPr>
-              <a:t>Student Grievance Lodging  →  Administrative Triage  →  Technician Work Orders  →  Audited Resolution</a:t>
+                <a:latin typeface="Calibri"/>
+              </a:defRPr>
+            </a:pPr>
+            <a:r>
+              <a:t>Role-Based Full-Stack Web Application for Institutional Facility Grievance Tracking</a:t>
             </a:r>
           </a:p>
           <a:p>
@@ -3243,7 +3220,7 @@
               </a:spcBef>
             </a:pPr>
             <a:r>
-              <a:rPr b="1" sz="1900">
+              <a:rPr b="1" sz="1800">
                 <a:solidFill>
                   <a:srgbClr val="0F172A"/>
                 </a:solidFill>
@@ -3251,7 +3228,7 @@
               <a:t>Student Name:    </a:t>
             </a:r>
             <a:r>
-              <a:rPr sz="1900">
+              <a:rPr sz="1800">
                 <a:solidFill>
                   <a:srgbClr val="1E293B"/>
                 </a:solidFill>
@@ -3266,7 +3243,7 @@
               </a:spcBef>
             </a:pPr>
             <a:r>
-              <a:rPr b="1" sz="1900">
+              <a:rPr b="1" sz="1800">
                 <a:solidFill>
                   <a:srgbClr val="0F172A"/>
                 </a:solidFill>
@@ -3274,12 +3251,12 @@
               <a:t>Course &amp; Dept:   </a:t>
             </a:r>
             <a:r>
-              <a:rPr sz="1900">
+              <a:rPr sz="1800">
                 <a:solidFill>
                   <a:srgbClr val="1E293B"/>
                 </a:solidFill>
               </a:rPr>
-              <a:t>B.Tech CSE  |  Department of Computer Science and Engineering</a:t>
+              <a:t>B.Tech CSE  |  Department of Computer Science &amp; Engineering</a:t>
             </a:r>
           </a:p>
           <a:p>
@@ -3289,7 +3266,7 @@
               </a:spcBef>
             </a:pPr>
             <a:r>
-              <a:rPr b="1" sz="1900">
+              <a:rPr b="1" sz="1800">
                 <a:solidFill>
                   <a:srgbClr val="0F172A"/>
                 </a:solidFill>
@@ -3297,7 +3274,7 @@
               <a:t>Institution:     </a:t>
             </a:r>
             <a:r>
-              <a:rPr sz="1900">
+              <a:rPr sz="1800">
                 <a:solidFill>
                   <a:srgbClr val="1E293B"/>
                 </a:solidFill>
@@ -3312,20 +3289,187 @@
               </a:spcBef>
             </a:pPr>
             <a:r>
-              <a:rPr b="1" sz="1900">
+              <a:rPr b="1" sz="1800">
                 <a:solidFill>
                   <a:srgbClr val="0F172A"/>
                 </a:solidFill>
               </a:rPr>
-              <a:t>Faculty Guide:   </a:t>
-            </a:r>
-            <a:r>
-              <a:rPr sz="1900">
+              <a:t>Academic Year:   </a:t>
+            </a:r>
+            <a:r>
+              <a:rPr sz="1800">
                 <a:solidFill>
                   <a:srgbClr val="1E293B"/>
                 </a:solidFill>
               </a:rPr>
-              <a:t>[GUIDE NAME]  |  Academic Year: 2024–2025</a:t>
+              <a:t>2024–2025  |  Guide: [GUIDE NAME]</a:t>
+            </a:r>
+          </a:p>
+        </p:txBody>
+      </p:sp>
+      <p:sp>
+        <p:nvSpPr>
+          <p:cNvPr id="4" name="TextBox 3"/>
+          <p:cNvSpPr txBox="1"/>
+          <p:nvPr/>
+        </p:nvSpPr>
+        <p:spPr>
+          <a:xfrm>
+            <a:off x="7772400" y="1645920"/>
+            <a:ext cx="3474720" cy="3657600"/>
+          </a:xfrm>
+          <a:prstGeom prst="rect">
+            <a:avLst/>
+          </a:prstGeom>
+          <a:noFill/>
+        </p:spPr>
+        <p:txBody>
+          <a:bodyPr wrap="square" lIns="0" tIns="0">
+            <a:spAutoFit/>
+          </a:bodyPr>
+          <a:lstStyle/>
+          <a:p>
+            <a:pPr>
+              <a:spcAft>
+                <a:spcPts val="1600"/>
+              </a:spcAft>
+              <a:defRPr sz="1600" b="1">
+                <a:solidFill>
+                  <a:srgbClr val="2563EB"/>
+                </a:solidFill>
+                <a:latin typeface="Calibri"/>
+              </a:defRPr>
+            </a:pPr>
+            <a:r>
+              <a:t>DIGITAL LIFECYCLE</a:t>
+            </a:r>
+          </a:p>
+          <a:p>
+            <a:pPr>
+              <a:spcBef>
+                <a:spcPts val="800"/>
+              </a:spcBef>
+            </a:pPr>
+            <a:r>
+              <a:rPr b="1" sz="1800">
+                <a:solidFill>
+                  <a:srgbClr val="2563EB"/>
+                </a:solidFill>
+              </a:rPr>
+              <a:t>01  </a:t>
+            </a:r>
+            <a:r>
+              <a:rPr b="1" sz="1800">
+                <a:solidFill>
+                  <a:srgbClr val="0F172A"/>
+                </a:solidFill>
+              </a:rPr>
+              <a:t>Grievance Lodging
+</a:t>
+            </a:r>
+            <a:r>
+              <a:rPr sz="1700">
+                <a:solidFill>
+                  <a:srgbClr val="475569"/>
+                </a:solidFill>
+              </a:rPr>
+              <a:t>     Student reports issue with room &amp; photo</a:t>
+            </a:r>
+          </a:p>
+          <a:p>
+            <a:pPr>
+              <a:spcBef>
+                <a:spcPts val="800"/>
+              </a:spcBef>
+            </a:pPr>
+            <a:r>
+              <a:rPr b="1" sz="1800">
+                <a:solidFill>
+                  <a:srgbClr val="2563EB"/>
+                </a:solidFill>
+              </a:rPr>
+              <a:t>02  </a:t>
+            </a:r>
+            <a:r>
+              <a:rPr b="1" sz="1800">
+                <a:solidFill>
+                  <a:srgbClr val="0F172A"/>
+                </a:solidFill>
+              </a:rPr>
+              <a:t>Administrative Triage
+</a:t>
+            </a:r>
+            <a:r>
+              <a:rPr sz="1700">
+                <a:solidFill>
+                  <a:srgbClr val="475569"/>
+                </a:solidFill>
+              </a:rPr>
+              <a:t>     Verification &amp; staff allocation</a:t>
+            </a:r>
+          </a:p>
+          <a:p>
+            <a:pPr>
+              <a:spcBef>
+                <a:spcPts val="800"/>
+              </a:spcBef>
+            </a:pPr>
+            <a:r>
+              <a:rPr b="1" sz="1800">
+                <a:solidFill>
+                  <a:srgbClr val="2563EB"/>
+                </a:solidFill>
+              </a:rPr>
+              <a:t>03  </a:t>
+            </a:r>
+            <a:r>
+              <a:rPr b="1" sz="1800">
+                <a:solidFill>
+                  <a:srgbClr val="0F172A"/>
+                </a:solidFill>
+              </a:rPr>
+              <a:t>Technician Dispatch
+</a:t>
+            </a:r>
+            <a:r>
+              <a:rPr sz="1700">
+                <a:solidFill>
+                  <a:srgbClr val="475569"/>
+                </a:solidFill>
+              </a:rPr>
+              <a:t>     Active work order in queue</a:t>
+            </a:r>
+          </a:p>
+          <a:p>
+            <a:pPr>
+              <a:spcBef>
+                <a:spcPts val="800"/>
+              </a:spcBef>
+            </a:pPr>
+            <a:r>
+              <a:rPr b="1" sz="1800">
+                <a:solidFill>
+                  <a:srgbClr val="2563EB"/>
+                </a:solidFill>
+              </a:rPr>
+              <a:t>04  </a:t>
+            </a:r>
+            <a:r>
+              <a:rPr b="1" sz="1800">
+                <a:solidFill>
+                  <a:srgbClr val="0F172A"/>
+                </a:solidFill>
+              </a:rPr>
+              <a:t>Audited Resolution
+</a:t>
+            </a:r>
+            <a:r>
+              <a:rPr sz="1700">
+                <a:solidFill>
+                  <a:srgbClr val="475569"/>
+                </a:solidFill>
+              </a:rPr>
+              <a:t>     Diagnostic remarks &amp; student rating</a:t>
             </a:r>
           </a:p>
         </p:txBody>
@@ -3356,8 +3500,8 @@
         </p:nvSpPr>
         <p:spPr>
           <a:xfrm>
-            <a:off x="731520" y="365760"/>
-            <a:ext cx="10728655" cy="320040"/>
+            <a:off x="914400" y="384048"/>
+            <a:ext cx="10362895" cy="274320"/>
           </a:xfrm>
           <a:prstGeom prst="rect">
             <a:avLst/>
@@ -3371,15 +3515,15 @@
           <a:lstStyle/>
           <a:p>
             <a:pPr>
-              <a:defRPr sz="1800" b="1">
+              <a:defRPr sz="1600" b="1">
                 <a:solidFill>
                   <a:srgbClr val="2563EB"/>
                 </a:solidFill>
-                <a:latin typeface="Arial"/>
-              </a:defRPr>
-            </a:pPr>
-            <a:r>
-              <a:t>9. CONCLUSION &amp; FUTURE SCOPE</a:t>
+                <a:latin typeface="Calibri"/>
+              </a:defRPr>
+            </a:pPr>
+            <a:r>
+              <a:t>09 — CONCLUSION</a:t>
             </a:r>
           </a:p>
         </p:txBody>
@@ -3392,8 +3536,8 @@
         </p:nvSpPr>
         <p:spPr>
           <a:xfrm>
-            <a:off x="731520" y="658368"/>
-            <a:ext cx="10728655" cy="502920"/>
+            <a:off x="914400" y="658368"/>
+            <a:ext cx="10362895" cy="502920"/>
           </a:xfrm>
           <a:prstGeom prst="rect">
             <a:avLst/>
@@ -3407,15 +3551,15 @@
           <a:lstStyle/>
           <a:p>
             <a:pPr>
-              <a:defRPr sz="3200" b="1">
+              <a:defRPr sz="2800" b="1">
                 <a:solidFill>
                   <a:srgbClr val="0F172A"/>
                 </a:solidFill>
-                <a:latin typeface="Arial"/>
-              </a:defRPr>
-            </a:pPr>
-            <a:r>
-              <a:t>System Achievements, Practical Limitations &amp; Future Roadmap</a:t>
+                <a:latin typeface="Calibri"/>
+              </a:defRPr>
+            </a:pPr>
+            <a:r>
+              <a:t>Project Achievements &amp; Future Roadmap</a:t>
             </a:r>
           </a:p>
         </p:txBody>
@@ -3428,8 +3572,8 @@
         </p:nvSpPr>
         <p:spPr>
           <a:xfrm>
-            <a:off x="731520" y="6263640"/>
-            <a:ext cx="10728655" cy="13716"/>
+            <a:off x="914400" y="6263640"/>
+            <a:ext cx="10362895" cy="13716"/>
           </a:xfrm>
           <a:prstGeom prst="rect">
             <a:avLst/>
@@ -3471,8 +3615,8 @@
         </p:nvSpPr>
         <p:spPr>
           <a:xfrm>
-            <a:off x="731520" y="6327648"/>
-            <a:ext cx="8229600" cy="320040"/>
+            <a:off x="914400" y="6336792"/>
+            <a:ext cx="7772400" cy="292608"/>
           </a:xfrm>
           <a:prstGeom prst="rect">
             <a:avLst/>
@@ -3486,11 +3630,11 @@
           <a:lstStyle/>
           <a:p>
             <a:pPr>
-              <a:defRPr sz="1600" b="1">
+              <a:defRPr sz="1500" b="1">
                 <a:solidFill>
                   <a:srgbClr val="475569"/>
                 </a:solidFill>
-                <a:latin typeface="Arial"/>
+                <a:latin typeface="Calibri"/>
               </a:defRPr>
             </a:pPr>
             <a:r>
@@ -3507,8 +3651,8 @@
         </p:nvSpPr>
         <p:spPr>
           <a:xfrm>
-            <a:off x="9144000" y="6327648"/>
-            <a:ext cx="2316175" cy="320040"/>
+            <a:off x="8686800" y="6336792"/>
+            <a:ext cx="2590495" cy="292608"/>
           </a:xfrm>
           <a:prstGeom prst="rect">
             <a:avLst/>
@@ -3522,11 +3666,11 @@
           <a:lstStyle/>
           <a:p>
             <a:pPr algn="r">
-              <a:defRPr sz="1600" b="1">
+              <a:defRPr sz="1500" b="1">
                 <a:solidFill>
                   <a:srgbClr val="2563EB"/>
                 </a:solidFill>
-                <a:latin typeface="Arial"/>
+                <a:latin typeface="Calibri"/>
               </a:defRPr>
             </a:pPr>
             <a:r>
@@ -3537,59 +3681,14 @@
       </p:sp>
       <p:sp>
         <p:nvSpPr>
-          <p:cNvPr id="7" name="Rectangle 6"/>
-          <p:cNvSpPr/>
-          <p:nvPr/>
-        </p:nvSpPr>
-        <p:spPr>
-          <a:xfrm>
-            <a:off x="731520" y="1325880"/>
-            <a:ext cx="3392424" cy="4069080"/>
-          </a:xfrm>
-          <a:prstGeom prst="rect">
-            <a:avLst/>
-          </a:prstGeom>
-          <a:solidFill>
-            <a:srgbClr val="F0FDF4"/>
-          </a:solidFill>
-          <a:ln w="19050">
-            <a:solidFill>
-              <a:srgbClr val="22C55E"/>
-            </a:solidFill>
-          </a:ln>
-        </p:spPr>
-        <p:style>
-          <a:lnRef idx="1">
-            <a:schemeClr val="accent1"/>
-          </a:lnRef>
-          <a:fillRef idx="3">
-            <a:schemeClr val="accent1"/>
-          </a:fillRef>
-          <a:effectRef idx="2">
-            <a:schemeClr val="accent1"/>
-          </a:effectRef>
-          <a:fontRef idx="minor">
-            <a:schemeClr val="lt1"/>
-          </a:fontRef>
-        </p:style>
-        <p:txBody>
-          <a:bodyPr rtlCol="0" anchor="ctr"/>
-          <a:lstStyle/>
-          <a:p>
-            <a:pPr algn="ctr"/>
-          </a:p>
-        </p:txBody>
-      </p:sp>
-      <p:sp>
-        <p:nvSpPr>
-          <p:cNvPr id="8" name="TextBox 7"/>
+          <p:cNvPr id="7" name="TextBox 6"/>
           <p:cNvSpPr txBox="1"/>
           <p:nvPr/>
         </p:nvSpPr>
         <p:spPr>
           <a:xfrm>
-            <a:off x="914400" y="1463039"/>
-            <a:ext cx="3026664" cy="3794760"/>
+            <a:off x="914400" y="1371600"/>
+            <a:ext cx="10362895" cy="2194560"/>
           </a:xfrm>
           <a:prstGeom prst="rect">
             <a:avLst/>
@@ -3603,134 +3702,173 @@
           <a:lstStyle/>
           <a:p>
             <a:pPr>
-              <a:defRPr sz="2200" b="1">
+              <a:spcAft>
+                <a:spcPts val="800"/>
+              </a:spcAft>
+              <a:defRPr sz="2400" b="1">
+                <a:solidFill>
+                  <a:srgbClr val="0F172A"/>
+                </a:solidFill>
+                <a:latin typeface="Calibri"/>
+              </a:defRPr>
+            </a:pPr>
+            <a:r>
+              <a:t>What We Achieved</a:t>
+            </a:r>
+          </a:p>
+          <a:p>
+            <a:pPr>
+              <a:spcBef>
+                <a:spcPts val="600"/>
+              </a:spcBef>
+            </a:pPr>
+            <a:r>
+              <a:rPr b="1" sz="1900">
                 <a:solidFill>
                   <a:srgbClr val="15803D"/>
                 </a:solidFill>
-                <a:latin typeface="Arial"/>
-              </a:defRPr>
-            </a:pPr>
-            <a:r>
-              <a:t>What CCMS Achieved</a:t>
+              </a:rPr>
+              <a:t>✓ Digital Complaint Management: </a:t>
+            </a:r>
+            <a:r>
+              <a:rPr sz="1800">
+                <a:solidFill>
+                  <a:srgbClr val="1E293B"/>
+                </a:solidFill>
+              </a:rPr>
+              <a:t>Replaced error-prone manual logbooks with a 24/7 web-based grievance ecosystem.</a:t>
             </a:r>
           </a:p>
           <a:p>
             <a:pPr>
               <a:spcBef>
-                <a:spcPts val="800"/>
+                <a:spcPts val="600"/>
               </a:spcBef>
-              <a:defRPr sz="1900">
+            </a:pPr>
+            <a:r>
+              <a:rPr b="1" sz="1900">
+                <a:solidFill>
+                  <a:srgbClr val="15803D"/>
+                </a:solidFill>
+              </a:rPr>
+              <a:t>✓ Role-Based Access Control: </a:t>
+            </a:r>
+            <a:r>
+              <a:rPr sz="1800">
                 <a:solidFill>
                   <a:srgbClr val="1E293B"/>
                 </a:solidFill>
-              </a:defRPr>
-            </a:pPr>
-            <a:r>
-              <a:t>✓ Eliminated error-prone manual logbooks with a 24/7 web-based grievance portal.</a:t>
+              </a:rPr>
+              <a:t>Enforced strict privilege separation across Student, Faculty, Staff, and Administrator.</a:t>
             </a:r>
           </a:p>
           <a:p>
             <a:pPr>
               <a:spcBef>
-                <a:spcPts val="800"/>
+                <a:spcPts val="600"/>
               </a:spcBef>
-              <a:defRPr sz="1900">
+            </a:pPr>
+            <a:r>
+              <a:rPr b="1" sz="1900">
+                <a:solidFill>
+                  <a:srgbClr val="15803D"/>
+                </a:solidFill>
+              </a:rPr>
+              <a:t>✓ Controlled Complaint Lifecycle: </a:t>
+            </a:r>
+            <a:r>
+              <a:rPr sz="1800">
                 <a:solidFill>
                   <a:srgbClr val="1E293B"/>
                 </a:solidFill>
-              </a:defRPr>
-            </a:pPr>
-            <a:r>
-              <a:t>✓ Enforced strict role-based access across Student, Faculty, Staff, and Admin.</a:t>
+              </a:rPr>
+              <a:t>Server-side Finite State Machine preventing illegal state jumps and unauthorized closures.</a:t>
             </a:r>
           </a:p>
           <a:p>
             <a:pPr>
               <a:spcBef>
-                <a:spcPts val="800"/>
+                <a:spcPts val="600"/>
               </a:spcBef>
-              <a:defRPr sz="1900">
+            </a:pPr>
+            <a:r>
+              <a:rPr b="1" sz="1900">
+                <a:solidFill>
+                  <a:srgbClr val="15803D"/>
+                </a:solidFill>
+              </a:rPr>
+              <a:t>✓ Complete Audit Trail: </a:t>
+            </a:r>
+            <a:r>
+              <a:rPr sz="1800">
                 <a:solidFill>
                   <a:srgbClr val="1E293B"/>
                 </a:solidFill>
-              </a:defRPr>
-            </a:pPr>
-            <a:r>
-              <a:t>✓ Implemented an audited Finite State Machine preventing illegal status jumps.</a:t>
-            </a:r>
-          </a:p>
-          <a:p>
-            <a:pPr>
-              <a:spcBef>
-                <a:spcPts val="800"/>
-              </a:spcBef>
-              <a:defRPr sz="1900">
-                <a:solidFill>
-                  <a:srgbClr val="1E293B"/>
-                </a:solidFill>
-              </a:defRPr>
-            </a:pPr>
-            <a:r>
-              <a:t>✓ Established an immutable audit log ensuring complete administrative transparency.</a:t>
-            </a:r>
-          </a:p>
-        </p:txBody>
-      </p:sp>
-      <p:sp>
-        <p:nvSpPr>
-          <p:cNvPr id="9" name="Rectangle 8"/>
-          <p:cNvSpPr/>
-          <p:nvPr/>
-        </p:nvSpPr>
-        <p:spPr>
-          <a:xfrm>
-            <a:off x="4398264" y="1325880"/>
-            <a:ext cx="3392424" cy="4069080"/>
-          </a:xfrm>
-          <a:prstGeom prst="rect">
-            <a:avLst/>
-          </a:prstGeom>
-          <a:solidFill>
-            <a:srgbClr val="FEF3C7"/>
-          </a:solidFill>
-          <a:ln w="19050">
-            <a:solidFill>
-              <a:srgbClr val="F59E0B"/>
-            </a:solidFill>
-          </a:ln>
-        </p:spPr>
-        <p:style>
-          <a:lnRef idx="1">
-            <a:schemeClr val="accent1"/>
-          </a:lnRef>
-          <a:fillRef idx="3">
-            <a:schemeClr val="accent1"/>
-          </a:fillRef>
-          <a:effectRef idx="2">
-            <a:schemeClr val="accent1"/>
-          </a:effectRef>
-          <a:fontRef idx="minor">
-            <a:schemeClr val="lt1"/>
-          </a:fontRef>
-        </p:style>
-        <p:txBody>
-          <a:bodyPr rtlCol="0" anchor="ctr"/>
-          <a:lstStyle/>
-          <a:p>
-            <a:pPr algn="ctr"/>
-          </a:p>
-        </p:txBody>
-      </p:sp>
-      <p:sp>
-        <p:nvSpPr>
-          <p:cNvPr id="10" name="TextBox 9"/>
+              </a:rPr>
+              <a:t>Immutable update history logging operator IDs, remarks, and timestamps for full governance.</a:t>
+            </a:r>
+          </a:p>
+        </p:txBody>
+      </p:sp>
+      <p:sp>
+        <p:nvSpPr>
+          <p:cNvPr id="8" name="TextBox 7"/>
           <p:cNvSpPr txBox="1"/>
           <p:nvPr/>
         </p:nvSpPr>
         <p:spPr>
           <a:xfrm>
-            <a:off x="4581144" y="1463039"/>
-            <a:ext cx="3026664" cy="3794760"/>
+            <a:off x="914400" y="3657600"/>
+            <a:ext cx="10362895" cy="365760"/>
+          </a:xfrm>
+          <a:prstGeom prst="rect">
+            <a:avLst/>
+          </a:prstGeom>
+          <a:noFill/>
+        </p:spPr>
+        <p:txBody>
+          <a:bodyPr wrap="none" lIns="0" tIns="0">
+            <a:spAutoFit/>
+          </a:bodyPr>
+          <a:lstStyle/>
+          <a:p>
+            <a:r>
+              <a:rPr b="1" sz="1900">
+                <a:solidFill>
+                  <a:srgbClr val="0F172A"/>
+                </a:solidFill>
+              </a:rPr>
+              <a:t>CURRENT SYSTEM (Core Web Platform)   </a:t>
+            </a:r>
+            <a:r>
+              <a:rPr b="1" sz="2000">
+                <a:solidFill>
+                  <a:srgbClr val="2563EB"/>
+                </a:solidFill>
+              </a:rPr>
+              <a:t>────────────►   </a:t>
+            </a:r>
+            <a:r>
+              <a:rPr b="1" sz="1900">
+                <a:solidFill>
+                  <a:srgbClr val="2563EB"/>
+                </a:solidFill>
+              </a:rPr>
+              <a:t>FUTURE ROADMAP</a:t>
+            </a:r>
+          </a:p>
+        </p:txBody>
+      </p:sp>
+      <p:sp>
+        <p:nvSpPr>
+          <p:cNvPr id="9" name="TextBox 8"/>
+          <p:cNvSpPr txBox="1"/>
+          <p:nvPr/>
+        </p:nvSpPr>
+        <p:spPr>
+          <a:xfrm>
+            <a:off x="914400" y="4114800"/>
+            <a:ext cx="10362895" cy="1280160"/>
           </a:xfrm>
           <a:prstGeom prst="rect">
             <a:avLst/>
@@ -3744,215 +3882,77 @@
           <a:lstStyle/>
           <a:p>
             <a:pPr>
-              <a:defRPr sz="2200" b="1">
-                <a:solidFill>
-                  <a:srgbClr val="B45309"/>
-                </a:solidFill>
-                <a:latin typeface="Arial"/>
-              </a:defRPr>
-            </a:pPr>
-            <a:r>
-              <a:t>Current Limitations</a:t>
+              <a:defRPr sz="1800">
+                <a:solidFill>
+                  <a:srgbClr val="1E293B"/>
+                </a:solidFill>
+                <a:latin typeface="Calibri"/>
+              </a:defRPr>
+            </a:pPr>
+            <a:r>
+              <a:t>• Email / SMS Alerts: Automated push notifications via Nodemailer (SMTP) and Twilio (SMS).</a:t>
             </a:r>
           </a:p>
           <a:p>
             <a:pPr>
               <a:spcBef>
-                <a:spcPts val="800"/>
+                <a:spcPts val="400"/>
               </a:spcBef>
-              <a:defRPr sz="1900">
+              <a:defRPr sz="1800">
                 <a:solidFill>
                   <a:srgbClr val="1E293B"/>
                 </a:solidFill>
-              </a:defRPr>
-            </a:pPr>
-            <a:r>
-              <a:t>• Notification delivery relies on active web sessions (no external SMS/Email gateway).</a:t>
+                <a:latin typeface="Calibri"/>
+              </a:defRPr>
+            </a:pPr>
+            <a:r>
+              <a:t>• Cloud Object Storage: Migration of uploaded complaint photos from local disk to Amazon S3.</a:t>
             </a:r>
           </a:p>
           <a:p>
             <a:pPr>
               <a:spcBef>
-                <a:spcPts val="800"/>
+                <a:spcPts val="400"/>
               </a:spcBef>
-              <a:defRPr sz="1900">
+              <a:defRPr sz="1800">
                 <a:solidFill>
                   <a:srgbClr val="1E293B"/>
                 </a:solidFill>
-              </a:defRPr>
-            </a:pPr>
-            <a:r>
-              <a:t>• Evidence images stored on local server filesystem rather than cloud object storage.</a:t>
+                <a:latin typeface="Calibri"/>
+              </a:defRPr>
+            </a:pPr>
+            <a:r>
+              <a:t>• Native Mobile Client: Cross-platform iOS/Android app built using React Native.</a:t>
             </a:r>
           </a:p>
           <a:p>
             <a:pPr>
               <a:spcBef>
-                <a:spcPts val="800"/>
+                <a:spcPts val="400"/>
               </a:spcBef>
-              <a:defRPr sz="1900">
+              <a:defRPr sz="1800">
                 <a:solidFill>
                   <a:srgbClr val="1E293B"/>
                 </a:solidFill>
-              </a:defRPr>
-            </a:pPr>
-            <a:r>
-              <a:t>• Technician assignment requires manual administrative allocation.</a:t>
-            </a:r>
-          </a:p>
-        </p:txBody>
-      </p:sp>
-      <p:sp>
-        <p:nvSpPr>
-          <p:cNvPr id="11" name="Rectangle 10"/>
-          <p:cNvSpPr/>
-          <p:nvPr/>
-        </p:nvSpPr>
-        <p:spPr>
-          <a:xfrm>
-            <a:off x="8065008" y="1325880"/>
-            <a:ext cx="3392424" cy="4069080"/>
-          </a:xfrm>
-          <a:prstGeom prst="rect">
-            <a:avLst/>
-          </a:prstGeom>
-          <a:solidFill>
-            <a:srgbClr val="F1F5F9"/>
-          </a:solidFill>
-          <a:ln w="19050">
-            <a:solidFill>
-              <a:srgbClr val="2563EB"/>
-            </a:solidFill>
-          </a:ln>
-        </p:spPr>
-        <p:style>
-          <a:lnRef idx="1">
-            <a:schemeClr val="accent1"/>
-          </a:lnRef>
-          <a:fillRef idx="3">
-            <a:schemeClr val="accent1"/>
-          </a:fillRef>
-          <a:effectRef idx="2">
-            <a:schemeClr val="accent1"/>
-          </a:effectRef>
-          <a:fontRef idx="minor">
-            <a:schemeClr val="lt1"/>
-          </a:fontRef>
-        </p:style>
-        <p:txBody>
-          <a:bodyPr rtlCol="0" anchor="ctr"/>
-          <a:lstStyle/>
-          <a:p>
-            <a:pPr algn="ctr"/>
-          </a:p>
-        </p:txBody>
-      </p:sp>
-      <p:sp>
-        <p:nvSpPr>
-          <p:cNvPr id="12" name="TextBox 11"/>
+                <a:latin typeface="Calibri"/>
+              </a:defRPr>
+            </a:pPr>
+            <a:r>
+              <a:t>• Automated Task Dispatch: AI-driven technician assignment based on active workload and trade skills.</a:t>
+            </a:r>
+          </a:p>
+        </p:txBody>
+      </p:sp>
+      <p:sp>
+        <p:nvSpPr>
+          <p:cNvPr id="10" name="TextBox 9"/>
           <p:cNvSpPr txBox="1"/>
           <p:nvPr/>
         </p:nvSpPr>
         <p:spPr>
           <a:xfrm>
-            <a:off x="8247888" y="1463039"/>
-            <a:ext cx="3026664" cy="3794760"/>
-          </a:xfrm>
-          <a:prstGeom prst="rect">
-            <a:avLst/>
-          </a:prstGeom>
-          <a:noFill/>
-        </p:spPr>
-        <p:txBody>
-          <a:bodyPr wrap="square" lIns="0" tIns="0">
-            <a:spAutoFit/>
-          </a:bodyPr>
-          <a:lstStyle/>
-          <a:p>
-            <a:pPr>
-              <a:defRPr sz="2200" b="1">
-                <a:solidFill>
-                  <a:srgbClr val="2563EB"/>
-                </a:solidFill>
-                <a:latin typeface="Arial"/>
-              </a:defRPr>
-            </a:pPr>
-            <a:r>
-              <a:t>Future Roadmap</a:t>
-            </a:r>
-          </a:p>
-          <a:p>
-            <a:pPr>
-              <a:spcBef>
-                <a:spcPts val="800"/>
-              </a:spcBef>
-              <a:defRPr sz="1900">
-                <a:solidFill>
-                  <a:srgbClr val="1E293B"/>
-                </a:solidFill>
-              </a:defRPr>
-            </a:pPr>
-            <a:r>
-              <a:t>→ Integration of Nodemailer (SMTP) and Twilio (SMS) for automated push alerts.</a:t>
-            </a:r>
-          </a:p>
-          <a:p>
-            <a:pPr>
-              <a:spcBef>
-                <a:spcPts val="800"/>
-              </a:spcBef>
-              <a:defRPr sz="1900">
-                <a:solidFill>
-                  <a:srgbClr val="1E293B"/>
-                </a:solidFill>
-              </a:defRPr>
-            </a:pPr>
-            <a:r>
-              <a:t>→ Migration of evidence storage to Amazon S3 / Cloudinary cloud buckets.</a:t>
-            </a:r>
-          </a:p>
-          <a:p>
-            <a:pPr>
-              <a:spcBef>
-                <a:spcPts val="800"/>
-              </a:spcBef>
-              <a:defRPr sz="1900">
-                <a:solidFill>
-                  <a:srgbClr val="1E293B"/>
-                </a:solidFill>
-              </a:defRPr>
-            </a:pPr>
-            <a:r>
-              <a:t>→ Development of cross-platform mobile app using React Native.</a:t>
-            </a:r>
-          </a:p>
-          <a:p>
-            <a:pPr>
-              <a:spcBef>
-                <a:spcPts val="800"/>
-              </a:spcBef>
-              <a:defRPr sz="1900">
-                <a:solidFill>
-                  <a:srgbClr val="1E293B"/>
-                </a:solidFill>
-              </a:defRPr>
-            </a:pPr>
-            <a:r>
-              <a:t>→ Automated technician dispatching based on active workload and trade skills.</a:t>
-            </a:r>
-          </a:p>
-        </p:txBody>
-      </p:sp>
-      <p:sp>
-        <p:nvSpPr>
-          <p:cNvPr id="13" name="TextBox 12"/>
-          <p:cNvSpPr txBox="1"/>
-          <p:nvPr/>
-        </p:nvSpPr>
-        <p:spPr>
-          <a:xfrm>
-            <a:off x="731520" y="5559552"/>
-            <a:ext cx="10728655" cy="594360"/>
+            <a:off x="914400" y="5532120"/>
+            <a:ext cx="10362895" cy="548640"/>
           </a:xfrm>
           <a:prstGeom prst="rect">
             <a:avLst/>
@@ -3970,7 +3970,7 @@
                 <a:solidFill>
                   <a:srgbClr val="0F172A"/>
                 </a:solidFill>
-                <a:latin typeface="Arial"/>
+                <a:latin typeface="Calibri"/>
               </a:defRPr>
             </a:pPr>
             <a:r>
@@ -4005,8 +4005,8 @@
         </p:nvSpPr>
         <p:spPr>
           <a:xfrm>
-            <a:off x="731520" y="365760"/>
-            <a:ext cx="10728655" cy="320040"/>
+            <a:off x="914400" y="384048"/>
+            <a:ext cx="10362895" cy="274320"/>
           </a:xfrm>
           <a:prstGeom prst="rect">
             <a:avLst/>
@@ -4020,15 +4020,15 @@
           <a:lstStyle/>
           <a:p>
             <a:pPr>
-              <a:defRPr sz="1800" b="1">
+              <a:defRPr sz="1600" b="1">
                 <a:solidFill>
                   <a:srgbClr val="2563EB"/>
                 </a:solidFill>
-                <a:latin typeface="Arial"/>
-              </a:defRPr>
-            </a:pPr>
-            <a:r>
-              <a:t>1. PROBLEM &amp; MOTIVATION</a:t>
+                <a:latin typeface="Calibri"/>
+              </a:defRPr>
+            </a:pPr>
+            <a:r>
+              <a:t>01 — PROBLEM</a:t>
             </a:r>
           </a:p>
         </p:txBody>
@@ -4041,8 +4041,8 @@
         </p:nvSpPr>
         <p:spPr>
           <a:xfrm>
-            <a:off x="731520" y="658368"/>
-            <a:ext cx="10728655" cy="502920"/>
+            <a:off x="914400" y="658368"/>
+            <a:ext cx="10362895" cy="502920"/>
           </a:xfrm>
           <a:prstGeom prst="rect">
             <a:avLst/>
@@ -4056,15 +4056,15 @@
           <a:lstStyle/>
           <a:p>
             <a:pPr>
-              <a:defRPr sz="3200" b="1">
+              <a:defRPr sz="2800" b="1">
                 <a:solidFill>
                   <a:srgbClr val="0F172A"/>
                 </a:solidFill>
-                <a:latin typeface="Arial"/>
-              </a:defRPr>
-            </a:pPr>
-            <a:r>
-              <a:t>Traditional Paper Process vs. Proposed CCMS System</a:t>
+                <a:latin typeface="Calibri"/>
+              </a:defRPr>
+            </a:pPr>
+            <a:r>
+              <a:t>Why Campus Complaints Need a Digital Workflow</a:t>
             </a:r>
           </a:p>
         </p:txBody>
@@ -4077,8 +4077,8 @@
         </p:nvSpPr>
         <p:spPr>
           <a:xfrm>
-            <a:off x="731520" y="6263640"/>
-            <a:ext cx="10728655" cy="13716"/>
+            <a:off x="914400" y="6263640"/>
+            <a:ext cx="10362895" cy="13716"/>
           </a:xfrm>
           <a:prstGeom prst="rect">
             <a:avLst/>
@@ -4120,8 +4120,8 @@
         </p:nvSpPr>
         <p:spPr>
           <a:xfrm>
-            <a:off x="731520" y="6327648"/>
-            <a:ext cx="8229600" cy="320040"/>
+            <a:off x="914400" y="6336792"/>
+            <a:ext cx="7772400" cy="292608"/>
           </a:xfrm>
           <a:prstGeom prst="rect">
             <a:avLst/>
@@ -4135,11 +4135,11 @@
           <a:lstStyle/>
           <a:p>
             <a:pPr>
-              <a:defRPr sz="1600" b="1">
+              <a:defRPr sz="1500" b="1">
                 <a:solidFill>
                   <a:srgbClr val="475569"/>
                 </a:solidFill>
-                <a:latin typeface="Arial"/>
+                <a:latin typeface="Calibri"/>
               </a:defRPr>
             </a:pPr>
             <a:r>
@@ -4156,8 +4156,8 @@
         </p:nvSpPr>
         <p:spPr>
           <a:xfrm>
-            <a:off x="9144000" y="6327648"/>
-            <a:ext cx="2316175" cy="320040"/>
+            <a:off x="8686800" y="6336792"/>
+            <a:ext cx="2590495" cy="292608"/>
           </a:xfrm>
           <a:prstGeom prst="rect">
             <a:avLst/>
@@ -4171,11 +4171,11 @@
           <a:lstStyle/>
           <a:p>
             <a:pPr algn="r">
-              <a:defRPr sz="1600" b="1">
+              <a:defRPr sz="1500" b="1">
                 <a:solidFill>
                   <a:srgbClr val="2563EB"/>
                 </a:solidFill>
-                <a:latin typeface="Arial"/>
+                <a:latin typeface="Calibri"/>
               </a:defRPr>
             </a:pPr>
             <a:r>
@@ -4192,8 +4192,8 @@
         </p:nvSpPr>
         <p:spPr>
           <a:xfrm>
-            <a:off x="731520" y="1280160"/>
-            <a:ext cx="5029200" cy="365760"/>
+            <a:off x="914400" y="1463040"/>
+            <a:ext cx="4206240" cy="365760"/>
           </a:xfrm>
           <a:prstGeom prst="rect">
             <a:avLst/>
@@ -4211,11 +4211,11 @@
                 <a:solidFill>
                   <a:srgbClr val="B91C1C"/>
                 </a:solidFill>
-                <a:latin typeface="Arial"/>
-              </a:defRPr>
-            </a:pPr>
-            <a:r>
-              <a:t>Traditional Process (Manual)</a:t>
+                <a:latin typeface="Calibri"/>
+              </a:defRPr>
+            </a:pPr>
+            <a:r>
+              <a:t>TODAY</a:t>
             </a:r>
           </a:p>
         </p:txBody>
@@ -4228,19 +4228,17 @@
         </p:nvSpPr>
         <p:spPr>
           <a:xfrm>
-            <a:off x="731520" y="1783080"/>
-            <a:ext cx="4389120" cy="548640"/>
+            <a:off x="1097280" y="2103120"/>
+            <a:ext cx="18288" cy="2651760"/>
           </a:xfrm>
           <a:prstGeom prst="rect">
             <a:avLst/>
           </a:prstGeom>
           <a:solidFill>
-            <a:srgbClr val="FEF2F2"/>
+            <a:srgbClr val="CBD5E1"/>
           </a:solidFill>
-          <a:ln w="19050">
-            <a:solidFill>
-              <a:srgbClr val="EF4444"/>
-            </a:solidFill>
+          <a:ln>
+            <a:noFill/>
           </a:ln>
         </p:spPr>
         <p:style>
@@ -4258,39 +4256,29 @@
           </a:fontRef>
         </p:style>
         <p:txBody>
-          <a:bodyPr rtlCol="0" anchor="ctr" wrap="square"/>
-          <a:lstStyle/>
-          <a:p>
-            <a:pPr algn="ctr">
-              <a:defRPr sz="1900" b="1">
-                <a:solidFill>
-                  <a:srgbClr val="B91C1C"/>
-                </a:solidFill>
-                <a:latin typeface="Arial"/>
-              </a:defRPr>
-            </a:pPr>
-            <a:r>
-              <a:t>Paper Register</a:t>
-            </a:r>
-          </a:p>
-        </p:txBody>
-      </p:sp>
-      <p:sp>
-        <p:nvSpPr>
-          <p:cNvPr id="9" name="Down Arrow 8"/>
+          <a:bodyPr rtlCol="0" anchor="ctr"/>
+          <a:lstStyle/>
+          <a:p>
+            <a:pPr algn="ctr"/>
+          </a:p>
+        </p:txBody>
+      </p:sp>
+      <p:sp>
+        <p:nvSpPr>
+          <p:cNvPr id="9" name="Oval 8"/>
           <p:cNvSpPr/>
           <p:nvPr/>
         </p:nvSpPr>
         <p:spPr>
           <a:xfrm>
-            <a:off x="2834640" y="2350008"/>
-            <a:ext cx="182880" cy="274320"/>
-          </a:xfrm>
-          <a:prstGeom prst="downArrow">
+            <a:off x="1024128" y="2103120"/>
+            <a:ext cx="164592" cy="164592"/>
+          </a:xfrm>
+          <a:prstGeom prst="ellipse">
             <a:avLst/>
           </a:prstGeom>
           <a:solidFill>
-            <a:srgbClr val="EF4444"/>
+            <a:srgbClr val="B91C1C"/>
           </a:solidFill>
           <a:ln>
             <a:noFill/>
@@ -4320,25 +4308,72 @@
       </p:sp>
       <p:sp>
         <p:nvSpPr>
-          <p:cNvPr id="10" name="Rectangle 9"/>
+          <p:cNvPr id="10" name="TextBox 9"/>
+          <p:cNvSpPr txBox="1"/>
+          <p:nvPr/>
+        </p:nvSpPr>
+        <p:spPr>
+          <a:xfrm>
+            <a:off x="1325880" y="2011680"/>
+            <a:ext cx="3657600" cy="640080"/>
+          </a:xfrm>
+          <a:prstGeom prst="rect">
+            <a:avLst/>
+          </a:prstGeom>
+          <a:noFill/>
+        </p:spPr>
+        <p:txBody>
+          <a:bodyPr wrap="square" lIns="0" tIns="0">
+            <a:spAutoFit/>
+          </a:bodyPr>
+          <a:lstStyle/>
+          <a:p>
+            <a:pPr>
+              <a:defRPr sz="2000" b="1">
+                <a:solidFill>
+                  <a:srgbClr val="0F172A"/>
+                </a:solidFill>
+                <a:latin typeface="Calibri"/>
+              </a:defRPr>
+            </a:pPr>
+            <a:r>
+              <a:t>Paper Register</a:t>
+            </a:r>
+          </a:p>
+          <a:p>
+            <a:pPr>
+              <a:defRPr sz="1700">
+                <a:solidFill>
+                  <a:srgbClr val="475569"/>
+                </a:solidFill>
+                <a:latin typeface="Calibri"/>
+              </a:defRPr>
+            </a:pPr>
+            <a:r>
+              <a:t>Physical logbooks kept at administrative counters</a:t>
+            </a:r>
+          </a:p>
+        </p:txBody>
+      </p:sp>
+      <p:sp>
+        <p:nvSpPr>
+          <p:cNvPr id="11" name="Oval 10"/>
           <p:cNvSpPr/>
           <p:nvPr/>
         </p:nvSpPr>
         <p:spPr>
           <a:xfrm>
-            <a:off x="731520" y="2651760"/>
-            <a:ext cx="4389120" cy="548640"/>
-          </a:xfrm>
-          <a:prstGeom prst="rect">
+            <a:off x="1024128" y="2971800"/>
+            <a:ext cx="164592" cy="164592"/>
+          </a:xfrm>
+          <a:prstGeom prst="ellipse">
             <a:avLst/>
           </a:prstGeom>
           <a:solidFill>
-            <a:srgbClr val="FEF2F2"/>
+            <a:srgbClr val="B91C1C"/>
           </a:solidFill>
-          <a:ln w="19050">
-            <a:solidFill>
-              <a:srgbClr val="EF4444"/>
-            </a:solidFill>
+          <a:ln>
+            <a:noFill/>
           </a:ln>
         </p:spPr>
         <p:style>
@@ -4356,39 +4391,78 @@
           </a:fontRef>
         </p:style>
         <p:txBody>
-          <a:bodyPr rtlCol="0" anchor="ctr" wrap="square"/>
-          <a:lstStyle/>
-          <a:p>
-            <a:pPr algn="ctr">
-              <a:defRPr sz="1900" b="1">
-                <a:solidFill>
-                  <a:srgbClr val="B91C1C"/>
-                </a:solidFill>
-                <a:latin typeface="Arial"/>
+          <a:bodyPr rtlCol="0" anchor="ctr"/>
+          <a:lstStyle/>
+          <a:p>
+            <a:pPr algn="ctr"/>
+          </a:p>
+        </p:txBody>
+      </p:sp>
+      <p:sp>
+        <p:nvSpPr>
+          <p:cNvPr id="12" name="TextBox 11"/>
+          <p:cNvSpPr txBox="1"/>
+          <p:nvPr/>
+        </p:nvSpPr>
+        <p:spPr>
+          <a:xfrm>
+            <a:off x="1325880" y="2880360"/>
+            <a:ext cx="3657600" cy="640080"/>
+          </a:xfrm>
+          <a:prstGeom prst="rect">
+            <a:avLst/>
+          </a:prstGeom>
+          <a:noFill/>
+        </p:spPr>
+        <p:txBody>
+          <a:bodyPr wrap="square" lIns="0" tIns="0">
+            <a:spAutoFit/>
+          </a:bodyPr>
+          <a:lstStyle/>
+          <a:p>
+            <a:pPr>
+              <a:defRPr sz="2000" b="1">
+                <a:solidFill>
+                  <a:srgbClr val="0F172A"/>
+                </a:solidFill>
+                <a:latin typeface="Calibri"/>
               </a:defRPr>
             </a:pPr>
             <a:r>
               <a:t>Physical Counter</a:t>
             </a:r>
           </a:p>
-        </p:txBody>
-      </p:sp>
-      <p:sp>
-        <p:nvSpPr>
-          <p:cNvPr id="11" name="Down Arrow 10"/>
+          <a:p>
+            <a:pPr>
+              <a:defRPr sz="1700">
+                <a:solidFill>
+                  <a:srgbClr val="475569"/>
+                </a:solidFill>
+                <a:latin typeface="Calibri"/>
+              </a:defRPr>
+            </a:pPr>
+            <a:r>
+              <a:t>In-person reporting limited to office hours</a:t>
+            </a:r>
+          </a:p>
+        </p:txBody>
+      </p:sp>
+      <p:sp>
+        <p:nvSpPr>
+          <p:cNvPr id="13" name="Oval 12"/>
           <p:cNvSpPr/>
           <p:nvPr/>
         </p:nvSpPr>
         <p:spPr>
           <a:xfrm>
-            <a:off x="2834640" y="3218688"/>
-            <a:ext cx="182880" cy="274320"/>
-          </a:xfrm>
-          <a:prstGeom prst="downArrow">
+            <a:off x="1024128" y="3840479"/>
+            <a:ext cx="164592" cy="164592"/>
+          </a:xfrm>
+          <a:prstGeom prst="ellipse">
             <a:avLst/>
           </a:prstGeom>
           <a:solidFill>
-            <a:srgbClr val="EF4444"/>
+            <a:srgbClr val="B91C1C"/>
           </a:solidFill>
           <a:ln>
             <a:noFill/>
@@ -4418,25 +4492,72 @@
       </p:sp>
       <p:sp>
         <p:nvSpPr>
-          <p:cNvPr id="12" name="Rectangle 11"/>
+          <p:cNvPr id="14" name="TextBox 13"/>
+          <p:cNvSpPr txBox="1"/>
+          <p:nvPr/>
+        </p:nvSpPr>
+        <p:spPr>
+          <a:xfrm>
+            <a:off x="1325880" y="3749039"/>
+            <a:ext cx="3657600" cy="640080"/>
+          </a:xfrm>
+          <a:prstGeom prst="rect">
+            <a:avLst/>
+          </a:prstGeom>
+          <a:noFill/>
+        </p:spPr>
+        <p:txBody>
+          <a:bodyPr wrap="square" lIns="0" tIns="0">
+            <a:spAutoFit/>
+          </a:bodyPr>
+          <a:lstStyle/>
+          <a:p>
+            <a:pPr>
+              <a:defRPr sz="2000" b="1">
+                <a:solidFill>
+                  <a:srgbClr val="0F172A"/>
+                </a:solidFill>
+                <a:latin typeface="Calibri"/>
+              </a:defRPr>
+            </a:pPr>
+            <a:r>
+              <a:t>Verbal Work Order</a:t>
+            </a:r>
+          </a:p>
+          <a:p>
+            <a:pPr>
+              <a:defRPr sz="1700">
+                <a:solidFill>
+                  <a:srgbClr val="475569"/>
+                </a:solidFill>
+                <a:latin typeface="Calibri"/>
+              </a:defRPr>
+            </a:pPr>
+            <a:r>
+              <a:t>Unrecorded task assignments without SLAs</a:t>
+            </a:r>
+          </a:p>
+        </p:txBody>
+      </p:sp>
+      <p:sp>
+        <p:nvSpPr>
+          <p:cNvPr id="15" name="Oval 14"/>
           <p:cNvSpPr/>
           <p:nvPr/>
         </p:nvSpPr>
         <p:spPr>
           <a:xfrm>
-            <a:off x="731520" y="3520439"/>
-            <a:ext cx="4389120" cy="548640"/>
-          </a:xfrm>
-          <a:prstGeom prst="rect">
+            <a:off x="1024128" y="4709159"/>
+            <a:ext cx="164592" cy="164592"/>
+          </a:xfrm>
+          <a:prstGeom prst="ellipse">
             <a:avLst/>
           </a:prstGeom>
           <a:solidFill>
-            <a:srgbClr val="FEF2F2"/>
+            <a:srgbClr val="B91C1C"/>
           </a:solidFill>
-          <a:ln w="19050">
-            <a:solidFill>
-              <a:srgbClr val="EF4444"/>
-            </a:solidFill>
+          <a:ln>
+            <a:noFill/>
           </a:ln>
         </p:spPr>
         <p:style>
@@ -4454,39 +4575,150 @@
           </a:fontRef>
         </p:style>
         <p:txBody>
-          <a:bodyPr rtlCol="0" anchor="ctr" wrap="square"/>
+          <a:bodyPr rtlCol="0" anchor="ctr"/>
+          <a:lstStyle/>
+          <a:p>
+            <a:pPr algn="ctr"/>
+          </a:p>
+        </p:txBody>
+      </p:sp>
+      <p:sp>
+        <p:nvSpPr>
+          <p:cNvPr id="16" name="TextBox 15"/>
+          <p:cNvSpPr txBox="1"/>
+          <p:nvPr/>
+        </p:nvSpPr>
+        <p:spPr>
+          <a:xfrm>
+            <a:off x="1325880" y="4617720"/>
+            <a:ext cx="3657600" cy="640080"/>
+          </a:xfrm>
+          <a:prstGeom prst="rect">
+            <a:avLst/>
+          </a:prstGeom>
+          <a:noFill/>
+        </p:spPr>
+        <p:txBody>
+          <a:bodyPr wrap="square" lIns="0" tIns="0">
+            <a:spAutoFit/>
+          </a:bodyPr>
+          <a:lstStyle/>
+          <a:p>
+            <a:pPr>
+              <a:defRPr sz="2000" b="1">
+                <a:solidFill>
+                  <a:srgbClr val="0F172A"/>
+                </a:solidFill>
+                <a:latin typeface="Calibri"/>
+              </a:defRPr>
+            </a:pPr>
+            <a:r>
+              <a:t>❌ No Tracking</a:t>
+            </a:r>
+          </a:p>
+          <a:p>
+            <a:pPr>
+              <a:defRPr sz="1700">
+                <a:solidFill>
+                  <a:srgbClr val="475569"/>
+                </a:solidFill>
+                <a:latin typeface="Calibri"/>
+              </a:defRPr>
+            </a:pPr>
+            <a:r>
+              <a:t>Lost complaints, zero visibility, delayed repairs</a:t>
+            </a:r>
+          </a:p>
+        </p:txBody>
+      </p:sp>
+      <p:sp>
+        <p:nvSpPr>
+          <p:cNvPr id="17" name="TextBox 16"/>
+          <p:cNvSpPr txBox="1"/>
+          <p:nvPr/>
+        </p:nvSpPr>
+        <p:spPr>
+          <a:xfrm>
+            <a:off x="5303520" y="2926080"/>
+            <a:ext cx="1463040" cy="731520"/>
+          </a:xfrm>
+          <a:prstGeom prst="rect">
+            <a:avLst/>
+          </a:prstGeom>
+          <a:noFill/>
+        </p:spPr>
+        <p:txBody>
+          <a:bodyPr wrap="none" lIns="0" tIns="0">
+            <a:spAutoFit/>
+          </a:bodyPr>
           <a:lstStyle/>
           <a:p>
             <a:pPr algn="ctr">
-              <a:defRPr sz="1900" b="1">
-                <a:solidFill>
-                  <a:srgbClr val="B91C1C"/>
-                </a:solidFill>
-                <a:latin typeface="Arial"/>
-              </a:defRPr>
-            </a:pPr>
-            <a:r>
-              <a:t>Verbal Work Order</a:t>
-            </a:r>
-          </a:p>
-        </p:txBody>
-      </p:sp>
-      <p:sp>
-        <p:nvSpPr>
-          <p:cNvPr id="13" name="Down Arrow 12"/>
+              <a:defRPr sz="4000" b="1">
+                <a:solidFill>
+                  <a:srgbClr val="475569"/>
+                </a:solidFill>
+                <a:latin typeface="Calibri"/>
+              </a:defRPr>
+            </a:pPr>
+            <a:r>
+              <a:t>VS</a:t>
+            </a:r>
+          </a:p>
+        </p:txBody>
+      </p:sp>
+      <p:sp>
+        <p:nvSpPr>
+          <p:cNvPr id="18" name="TextBox 17"/>
+          <p:cNvSpPr txBox="1"/>
+          <p:nvPr/>
+        </p:nvSpPr>
+        <p:spPr>
+          <a:xfrm>
+            <a:off x="6949440" y="1463040"/>
+            <a:ext cx="4297680" cy="365760"/>
+          </a:xfrm>
+          <a:prstGeom prst="rect">
+            <a:avLst/>
+          </a:prstGeom>
+          <a:noFill/>
+        </p:spPr>
+        <p:txBody>
+          <a:bodyPr wrap="none" lIns="0" tIns="0">
+            <a:spAutoFit/>
+          </a:bodyPr>
+          <a:lstStyle/>
+          <a:p>
+            <a:pPr>
+              <a:defRPr sz="2400" b="1">
+                <a:solidFill>
+                  <a:srgbClr val="2563EB"/>
+                </a:solidFill>
+                <a:latin typeface="Calibri"/>
+              </a:defRPr>
+            </a:pPr>
+            <a:r>
+              <a:t>WITH CCMS</a:t>
+            </a:r>
+          </a:p>
+        </p:txBody>
+      </p:sp>
+      <p:sp>
+        <p:nvSpPr>
+          <p:cNvPr id="19" name="Rectangle 18"/>
           <p:cNvSpPr/>
           <p:nvPr/>
         </p:nvSpPr>
         <p:spPr>
           <a:xfrm>
-            <a:off x="2834640" y="4087368"/>
-            <a:ext cx="182880" cy="274320"/>
-          </a:xfrm>
-          <a:prstGeom prst="downArrow">
+            <a:off x="7132320" y="2057400"/>
+            <a:ext cx="18288" cy="2834640"/>
+          </a:xfrm>
+          <a:prstGeom prst="rect">
             <a:avLst/>
           </a:prstGeom>
           <a:solidFill>
-            <a:srgbClr val="EF4444"/>
+            <a:srgbClr val="2563EB"/>
           </a:solidFill>
           <a:ln>
             <a:noFill/>
@@ -4516,25 +4748,23 @@
       </p:sp>
       <p:sp>
         <p:nvSpPr>
-          <p:cNvPr id="14" name="Rectangle 13"/>
+          <p:cNvPr id="20" name="Oval 19"/>
           <p:cNvSpPr/>
           <p:nvPr/>
         </p:nvSpPr>
         <p:spPr>
           <a:xfrm>
-            <a:off x="731520" y="4389120"/>
-            <a:ext cx="4389120" cy="548640"/>
-          </a:xfrm>
-          <a:prstGeom prst="rect">
+            <a:off x="7059168" y="2057400"/>
+            <a:ext cx="164592" cy="164592"/>
+          </a:xfrm>
+          <a:prstGeom prst="ellipse">
             <a:avLst/>
           </a:prstGeom>
           <a:solidFill>
-            <a:srgbClr val="FEF2F2"/>
+            <a:srgbClr val="2563EB"/>
           </a:solidFill>
-          <a:ln w="19050">
-            <a:solidFill>
-              <a:srgbClr val="EF4444"/>
-            </a:solidFill>
+          <a:ln>
+            <a:noFill/>
           </a:ln>
         </p:spPr>
         <p:style>
@@ -4552,33 +4782,23 @@
           </a:fontRef>
         </p:style>
         <p:txBody>
-          <a:bodyPr rtlCol="0" anchor="ctr" wrap="square"/>
-          <a:lstStyle/>
-          <a:p>
-            <a:pPr algn="ctr">
-              <a:defRPr sz="1900" b="1">
-                <a:solidFill>
-                  <a:srgbClr val="B91C1C"/>
-                </a:solidFill>
-                <a:latin typeface="Arial"/>
-              </a:defRPr>
-            </a:pPr>
-            <a:r>
-              <a:t>No Tracking</a:t>
-            </a:r>
-          </a:p>
-        </p:txBody>
-      </p:sp>
-      <p:sp>
-        <p:nvSpPr>
-          <p:cNvPr id="15" name="TextBox 14"/>
+          <a:bodyPr rtlCol="0" anchor="ctr"/>
+          <a:lstStyle/>
+          <a:p>
+            <a:pPr algn="ctr"/>
+          </a:p>
+        </p:txBody>
+      </p:sp>
+      <p:sp>
+        <p:nvSpPr>
+          <p:cNvPr id="21" name="TextBox 20"/>
           <p:cNvSpPr txBox="1"/>
           <p:nvPr/>
         </p:nvSpPr>
         <p:spPr>
           <a:xfrm>
-            <a:off x="6217920" y="1280160"/>
-            <a:ext cx="5212080" cy="365760"/>
+            <a:off x="7360920" y="1965960"/>
+            <a:ext cx="3840480" cy="594360"/>
           </a:xfrm>
           <a:prstGeom prst="rect">
             <a:avLst/>
@@ -4586,46 +4806,57 @@
           <a:noFill/>
         </p:spPr>
         <p:txBody>
-          <a:bodyPr wrap="none" lIns="0" tIns="0">
+          <a:bodyPr wrap="square" lIns="0" tIns="0">
             <a:spAutoFit/>
           </a:bodyPr>
           <a:lstStyle/>
           <a:p>
             <a:pPr>
-              <a:defRPr sz="2400" b="1">
-                <a:solidFill>
-                  <a:srgbClr val="15803D"/>
-                </a:solidFill>
-                <a:latin typeface="Arial"/>
-              </a:defRPr>
-            </a:pPr>
-            <a:r>
-              <a:t>Proposed System (CCMS Web Portal)</a:t>
-            </a:r>
-          </a:p>
-        </p:txBody>
-      </p:sp>
-      <p:sp>
-        <p:nvSpPr>
-          <p:cNvPr id="16" name="Rectangle 15"/>
+              <a:defRPr sz="1900" b="1">
+                <a:solidFill>
+                  <a:srgbClr val="0F172A"/>
+                </a:solidFill>
+                <a:latin typeface="Calibri"/>
+              </a:defRPr>
+            </a:pPr>
+            <a:r>
+              <a:t>Web Portal</a:t>
+            </a:r>
+          </a:p>
+          <a:p>
+            <a:pPr>
+              <a:defRPr sz="1700">
+                <a:solidFill>
+                  <a:srgbClr val="475569"/>
+                </a:solidFill>
+                <a:latin typeface="Calibri"/>
+              </a:defRPr>
+            </a:pPr>
+            <a:r>
+              <a:t>24/7 access with campus location &amp; photo</a:t>
+            </a:r>
+          </a:p>
+        </p:txBody>
+      </p:sp>
+      <p:sp>
+        <p:nvSpPr>
+          <p:cNvPr id="22" name="Oval 21"/>
           <p:cNvSpPr/>
           <p:nvPr/>
         </p:nvSpPr>
         <p:spPr>
           <a:xfrm>
-            <a:off x="6217920" y="1783080"/>
-            <a:ext cx="5212080" cy="475488"/>
-          </a:xfrm>
-          <a:prstGeom prst="rect">
+            <a:off x="7059168" y="2752344"/>
+            <a:ext cx="164592" cy="164592"/>
+          </a:xfrm>
+          <a:prstGeom prst="ellipse">
             <a:avLst/>
           </a:prstGeom>
           <a:solidFill>
-            <a:srgbClr val="F0FDF4"/>
+            <a:srgbClr val="2563EB"/>
           </a:solidFill>
-          <a:ln w="19050">
-            <a:solidFill>
-              <a:srgbClr val="22C55E"/>
-            </a:solidFill>
+          <a:ln>
+            <a:noFill/>
           </a:ln>
         </p:spPr>
         <p:style>
@@ -4643,39 +4874,78 @@
           </a:fontRef>
         </p:style>
         <p:txBody>
-          <a:bodyPr rtlCol="0" anchor="ctr" wrap="square"/>
-          <a:lstStyle/>
-          <a:p>
-            <a:pPr algn="ctr">
-              <a:defRPr sz="1800" b="1">
-                <a:solidFill>
-                  <a:srgbClr val="15803D"/>
-                </a:solidFill>
-                <a:latin typeface="Arial"/>
-              </a:defRPr>
-            </a:pPr>
-            <a:r>
-              <a:t>Web Portal (24/7 Access)</a:t>
-            </a:r>
-          </a:p>
-        </p:txBody>
-      </p:sp>
-      <p:sp>
-        <p:nvSpPr>
-          <p:cNvPr id="17" name="Down Arrow 16"/>
+          <a:bodyPr rtlCol="0" anchor="ctr"/>
+          <a:lstStyle/>
+          <a:p>
+            <a:pPr algn="ctr"/>
+          </a:p>
+        </p:txBody>
+      </p:sp>
+      <p:sp>
+        <p:nvSpPr>
+          <p:cNvPr id="23" name="TextBox 22"/>
+          <p:cNvSpPr txBox="1"/>
+          <p:nvPr/>
+        </p:nvSpPr>
+        <p:spPr>
+          <a:xfrm>
+            <a:off x="7360920" y="2660904"/>
+            <a:ext cx="3840480" cy="594360"/>
+          </a:xfrm>
+          <a:prstGeom prst="rect">
+            <a:avLst/>
+          </a:prstGeom>
+          <a:noFill/>
+        </p:spPr>
+        <p:txBody>
+          <a:bodyPr wrap="square" lIns="0" tIns="0">
+            <a:spAutoFit/>
+          </a:bodyPr>
+          <a:lstStyle/>
+          <a:p>
+            <a:pPr>
+              <a:defRPr sz="1900" b="1">
+                <a:solidFill>
+                  <a:srgbClr val="0F172A"/>
+                </a:solidFill>
+                <a:latin typeface="Calibri"/>
+              </a:defRPr>
+            </a:pPr>
+            <a:r>
+              <a:t>Admin Verification</a:t>
+            </a:r>
+          </a:p>
+          <a:p>
+            <a:pPr>
+              <a:defRPr sz="1700">
+                <a:solidFill>
+                  <a:srgbClr val="475569"/>
+                </a:solidFill>
+                <a:latin typeface="Calibri"/>
+              </a:defRPr>
+            </a:pPr>
+            <a:r>
+              <a:t>Supervisory triage and validity checking</a:t>
+            </a:r>
+          </a:p>
+        </p:txBody>
+      </p:sp>
+      <p:sp>
+        <p:nvSpPr>
+          <p:cNvPr id="24" name="Oval 23"/>
           <p:cNvSpPr/>
           <p:nvPr/>
         </p:nvSpPr>
         <p:spPr>
           <a:xfrm>
-            <a:off x="8732520" y="2267712"/>
-            <a:ext cx="164592" cy="182880"/>
-          </a:xfrm>
-          <a:prstGeom prst="downArrow">
+            <a:off x="7059168" y="3447288"/>
+            <a:ext cx="164592" cy="164592"/>
+          </a:xfrm>
+          <a:prstGeom prst="ellipse">
             <a:avLst/>
           </a:prstGeom>
           <a:solidFill>
-            <a:srgbClr val="22C55E"/>
+            <a:srgbClr val="2563EB"/>
           </a:solidFill>
           <a:ln>
             <a:noFill/>
@@ -4705,25 +4975,72 @@
       </p:sp>
       <p:sp>
         <p:nvSpPr>
-          <p:cNvPr id="18" name="Rectangle 17"/>
+          <p:cNvPr id="25" name="TextBox 24"/>
+          <p:cNvSpPr txBox="1"/>
+          <p:nvPr/>
+        </p:nvSpPr>
+        <p:spPr>
+          <a:xfrm>
+            <a:off x="7360920" y="3355848"/>
+            <a:ext cx="3840480" cy="594360"/>
+          </a:xfrm>
+          <a:prstGeom prst="rect">
+            <a:avLst/>
+          </a:prstGeom>
+          <a:noFill/>
+        </p:spPr>
+        <p:txBody>
+          <a:bodyPr wrap="square" lIns="0" tIns="0">
+            <a:spAutoFit/>
+          </a:bodyPr>
+          <a:lstStyle/>
+          <a:p>
+            <a:pPr>
+              <a:defRPr sz="1900" b="1">
+                <a:solidFill>
+                  <a:srgbClr val="0F172A"/>
+                </a:solidFill>
+                <a:latin typeface="Calibri"/>
+              </a:defRPr>
+            </a:pPr>
+            <a:r>
+              <a:t>Staff Assignment</a:t>
+            </a:r>
+          </a:p>
+          <a:p>
+            <a:pPr>
+              <a:defRPr sz="1700">
+                <a:solidFill>
+                  <a:srgbClr val="475569"/>
+                </a:solidFill>
+                <a:latin typeface="Calibri"/>
+              </a:defRPr>
+            </a:pPr>
+            <a:r>
+              <a:t>Work dispatched directly to technician queue</a:t>
+            </a:r>
+          </a:p>
+        </p:txBody>
+      </p:sp>
+      <p:sp>
+        <p:nvSpPr>
+          <p:cNvPr id="26" name="Oval 25"/>
           <p:cNvSpPr/>
           <p:nvPr/>
         </p:nvSpPr>
         <p:spPr>
           <a:xfrm>
-            <a:off x="6217920" y="2459736"/>
-            <a:ext cx="5212080" cy="475488"/>
-          </a:xfrm>
-          <a:prstGeom prst="rect">
+            <a:off x="7059168" y="4142232"/>
+            <a:ext cx="164592" cy="164592"/>
+          </a:xfrm>
+          <a:prstGeom prst="ellipse">
             <a:avLst/>
           </a:prstGeom>
           <a:solidFill>
-            <a:srgbClr val="F0FDF4"/>
+            <a:srgbClr val="2563EB"/>
           </a:solidFill>
-          <a:ln w="19050">
-            <a:solidFill>
-              <a:srgbClr val="22C55E"/>
-            </a:solidFill>
+          <a:ln>
+            <a:noFill/>
           </a:ln>
         </p:spPr>
         <p:style>
@@ -4741,39 +5058,78 @@
           </a:fontRef>
         </p:style>
         <p:txBody>
-          <a:bodyPr rtlCol="0" anchor="ctr" wrap="square"/>
-          <a:lstStyle/>
-          <a:p>
-            <a:pPr algn="ctr">
-              <a:defRPr sz="1800" b="1">
-                <a:solidFill>
-                  <a:srgbClr val="15803D"/>
-                </a:solidFill>
-                <a:latin typeface="Arial"/>
-              </a:defRPr>
-            </a:pPr>
-            <a:r>
-              <a:t>Admin Verification</a:t>
-            </a:r>
-          </a:p>
-        </p:txBody>
-      </p:sp>
-      <p:sp>
-        <p:nvSpPr>
-          <p:cNvPr id="19" name="Down Arrow 18"/>
+          <a:bodyPr rtlCol="0" anchor="ctr"/>
+          <a:lstStyle/>
+          <a:p>
+            <a:pPr algn="ctr"/>
+          </a:p>
+        </p:txBody>
+      </p:sp>
+      <p:sp>
+        <p:nvSpPr>
+          <p:cNvPr id="27" name="TextBox 26"/>
+          <p:cNvSpPr txBox="1"/>
+          <p:nvPr/>
+        </p:nvSpPr>
+        <p:spPr>
+          <a:xfrm>
+            <a:off x="7360920" y="4050791"/>
+            <a:ext cx="3840480" cy="594360"/>
+          </a:xfrm>
+          <a:prstGeom prst="rect">
+            <a:avLst/>
+          </a:prstGeom>
+          <a:noFill/>
+        </p:spPr>
+        <p:txBody>
+          <a:bodyPr wrap="square" lIns="0" tIns="0">
+            <a:spAutoFit/>
+          </a:bodyPr>
+          <a:lstStyle/>
+          <a:p>
+            <a:pPr>
+              <a:defRPr sz="1900" b="1">
+                <a:solidFill>
+                  <a:srgbClr val="0F172A"/>
+                </a:solidFill>
+                <a:latin typeface="Calibri"/>
+              </a:defRPr>
+            </a:pPr>
+            <a:r>
+              <a:t>Status Tracking</a:t>
+            </a:r>
+          </a:p>
+          <a:p>
+            <a:pPr>
+              <a:defRPr sz="1700">
+                <a:solidFill>
+                  <a:srgbClr val="475569"/>
+                </a:solidFill>
+                <a:latin typeface="Calibri"/>
+              </a:defRPr>
+            </a:pPr>
+            <a:r>
+              <a:t>Live milestone progression from NEW to CLOSED</a:t>
+            </a:r>
+          </a:p>
+        </p:txBody>
+      </p:sp>
+      <p:sp>
+        <p:nvSpPr>
+          <p:cNvPr id="28" name="Oval 27"/>
           <p:cNvSpPr/>
           <p:nvPr/>
         </p:nvSpPr>
         <p:spPr>
           <a:xfrm>
-            <a:off x="8732520" y="2944368"/>
-            <a:ext cx="164592" cy="182880"/>
-          </a:xfrm>
-          <a:prstGeom prst="downArrow">
+            <a:off x="7059168" y="4837176"/>
+            <a:ext cx="164592" cy="164592"/>
+          </a:xfrm>
+          <a:prstGeom prst="ellipse">
             <a:avLst/>
           </a:prstGeom>
           <a:solidFill>
-            <a:srgbClr val="22C55E"/>
+            <a:srgbClr val="2563EB"/>
           </a:solidFill>
           <a:ln>
             <a:noFill/>
@@ -4803,312 +5159,85 @@
       </p:sp>
       <p:sp>
         <p:nvSpPr>
-          <p:cNvPr id="20" name="Rectangle 19"/>
-          <p:cNvSpPr/>
-          <p:nvPr/>
-        </p:nvSpPr>
-        <p:spPr>
-          <a:xfrm>
-            <a:off x="6217920" y="3136391"/>
-            <a:ext cx="5212080" cy="475488"/>
-          </a:xfrm>
-          <a:prstGeom prst="rect">
-            <a:avLst/>
-          </a:prstGeom>
-          <a:solidFill>
-            <a:srgbClr val="F0FDF4"/>
-          </a:solidFill>
-          <a:ln w="19050">
-            <a:solidFill>
-              <a:srgbClr val="22C55E"/>
-            </a:solidFill>
-          </a:ln>
-        </p:spPr>
-        <p:style>
-          <a:lnRef idx="1">
-            <a:schemeClr val="accent1"/>
-          </a:lnRef>
-          <a:fillRef idx="3">
-            <a:schemeClr val="accent1"/>
-          </a:fillRef>
-          <a:effectRef idx="2">
-            <a:schemeClr val="accent1"/>
-          </a:effectRef>
-          <a:fontRef idx="minor">
-            <a:schemeClr val="lt1"/>
-          </a:fontRef>
-        </p:style>
-        <p:txBody>
-          <a:bodyPr rtlCol="0" anchor="ctr" wrap="square"/>
-          <a:lstStyle/>
-          <a:p>
-            <a:pPr algn="ctr">
-              <a:defRPr sz="1800" b="1">
-                <a:solidFill>
-                  <a:srgbClr val="15803D"/>
-                </a:solidFill>
-                <a:latin typeface="Arial"/>
-              </a:defRPr>
-            </a:pPr>
-            <a:r>
-              <a:t>Staff Assignment</a:t>
-            </a:r>
-          </a:p>
-        </p:txBody>
-      </p:sp>
-      <p:sp>
-        <p:nvSpPr>
-          <p:cNvPr id="21" name="Down Arrow 20"/>
-          <p:cNvSpPr/>
-          <p:nvPr/>
-        </p:nvSpPr>
-        <p:spPr>
-          <a:xfrm>
-            <a:off x="8732520" y="3621024"/>
-            <a:ext cx="164592" cy="182880"/>
-          </a:xfrm>
-          <a:prstGeom prst="downArrow">
-            <a:avLst/>
-          </a:prstGeom>
-          <a:solidFill>
-            <a:srgbClr val="22C55E"/>
-          </a:solidFill>
-          <a:ln>
-            <a:noFill/>
-          </a:ln>
-        </p:spPr>
-        <p:style>
-          <a:lnRef idx="1">
-            <a:schemeClr val="accent1"/>
-          </a:lnRef>
-          <a:fillRef idx="3">
-            <a:schemeClr val="accent1"/>
-          </a:fillRef>
-          <a:effectRef idx="2">
-            <a:schemeClr val="accent1"/>
-          </a:effectRef>
-          <a:fontRef idx="minor">
-            <a:schemeClr val="lt1"/>
-          </a:fontRef>
-        </p:style>
-        <p:txBody>
-          <a:bodyPr rtlCol="0" anchor="ctr"/>
-          <a:lstStyle/>
-          <a:p>
-            <a:pPr algn="ctr"/>
-          </a:p>
-        </p:txBody>
-      </p:sp>
-      <p:sp>
-        <p:nvSpPr>
-          <p:cNvPr id="22" name="Rectangle 21"/>
-          <p:cNvSpPr/>
-          <p:nvPr/>
-        </p:nvSpPr>
-        <p:spPr>
-          <a:xfrm>
-            <a:off x="6217920" y="3813048"/>
-            <a:ext cx="5212080" cy="475488"/>
-          </a:xfrm>
-          <a:prstGeom prst="rect">
-            <a:avLst/>
-          </a:prstGeom>
-          <a:solidFill>
-            <a:srgbClr val="F0FDF4"/>
-          </a:solidFill>
-          <a:ln w="19050">
-            <a:solidFill>
-              <a:srgbClr val="22C55E"/>
-            </a:solidFill>
-          </a:ln>
-        </p:spPr>
-        <p:style>
-          <a:lnRef idx="1">
-            <a:schemeClr val="accent1"/>
-          </a:lnRef>
-          <a:fillRef idx="3">
-            <a:schemeClr val="accent1"/>
-          </a:fillRef>
-          <a:effectRef idx="2">
-            <a:schemeClr val="accent1"/>
-          </a:effectRef>
-          <a:fontRef idx="minor">
-            <a:schemeClr val="lt1"/>
-          </a:fontRef>
-        </p:style>
-        <p:txBody>
-          <a:bodyPr rtlCol="0" anchor="ctr" wrap="square"/>
-          <a:lstStyle/>
-          <a:p>
-            <a:pPr algn="ctr">
-              <a:defRPr sz="1800" b="1">
-                <a:solidFill>
-                  <a:srgbClr val="15803D"/>
-                </a:solidFill>
-                <a:latin typeface="Arial"/>
-              </a:defRPr>
-            </a:pPr>
-            <a:r>
-              <a:t>Status Tracking</a:t>
-            </a:r>
-          </a:p>
-        </p:txBody>
-      </p:sp>
-      <p:sp>
-        <p:nvSpPr>
-          <p:cNvPr id="23" name="Down Arrow 22"/>
-          <p:cNvSpPr/>
-          <p:nvPr/>
-        </p:nvSpPr>
-        <p:spPr>
-          <a:xfrm>
-            <a:off x="8732520" y="4297680"/>
-            <a:ext cx="164592" cy="182880"/>
-          </a:xfrm>
-          <a:prstGeom prst="downArrow">
-            <a:avLst/>
-          </a:prstGeom>
-          <a:solidFill>
-            <a:srgbClr val="22C55E"/>
-          </a:solidFill>
-          <a:ln>
-            <a:noFill/>
-          </a:ln>
-        </p:spPr>
-        <p:style>
-          <a:lnRef idx="1">
-            <a:schemeClr val="accent1"/>
-          </a:lnRef>
-          <a:fillRef idx="3">
-            <a:schemeClr val="accent1"/>
-          </a:fillRef>
-          <a:effectRef idx="2">
-            <a:schemeClr val="accent1"/>
-          </a:effectRef>
-          <a:fontRef idx="minor">
-            <a:schemeClr val="lt1"/>
-          </a:fontRef>
-        </p:style>
-        <p:txBody>
-          <a:bodyPr rtlCol="0" anchor="ctr"/>
-          <a:lstStyle/>
-          <a:p>
-            <a:pPr algn="ctr"/>
-          </a:p>
-        </p:txBody>
-      </p:sp>
-      <p:sp>
-        <p:nvSpPr>
-          <p:cNvPr id="24" name="Rectangle 23"/>
-          <p:cNvSpPr/>
-          <p:nvPr/>
-        </p:nvSpPr>
-        <p:spPr>
-          <a:xfrm>
-            <a:off x="6217920" y="4489704"/>
-            <a:ext cx="5212080" cy="475488"/>
-          </a:xfrm>
-          <a:prstGeom prst="rect">
-            <a:avLst/>
-          </a:prstGeom>
-          <a:solidFill>
-            <a:srgbClr val="F0FDF4"/>
-          </a:solidFill>
-          <a:ln w="19050">
-            <a:solidFill>
-              <a:srgbClr val="22C55E"/>
-            </a:solidFill>
-          </a:ln>
-        </p:spPr>
-        <p:style>
-          <a:lnRef idx="1">
-            <a:schemeClr val="accent1"/>
-          </a:lnRef>
-          <a:fillRef idx="3">
-            <a:schemeClr val="accent1"/>
-          </a:fillRef>
-          <a:effectRef idx="2">
-            <a:schemeClr val="accent1"/>
-          </a:effectRef>
-          <a:fontRef idx="minor">
-            <a:schemeClr val="lt1"/>
-          </a:fontRef>
-        </p:style>
-        <p:txBody>
-          <a:bodyPr rtlCol="0" anchor="ctr" wrap="square"/>
-          <a:lstStyle/>
-          <a:p>
-            <a:pPr algn="ctr">
-              <a:defRPr sz="1800" b="1">
-                <a:solidFill>
-                  <a:srgbClr val="15803D"/>
-                </a:solidFill>
-                <a:latin typeface="Arial"/>
-              </a:defRPr>
-            </a:pPr>
-            <a:r>
-              <a:t>Resolution &amp; Feedback</a:t>
-            </a:r>
-          </a:p>
-        </p:txBody>
-      </p:sp>
-      <p:sp>
-        <p:nvSpPr>
-          <p:cNvPr id="25" name="Rectangle 24"/>
-          <p:cNvSpPr/>
-          <p:nvPr/>
-        </p:nvSpPr>
-        <p:spPr>
-          <a:xfrm>
-            <a:off x="731520" y="5349240"/>
-            <a:ext cx="10728655" cy="685800"/>
-          </a:xfrm>
-          <a:prstGeom prst="rect">
-            <a:avLst/>
-          </a:prstGeom>
-          <a:solidFill>
-            <a:srgbClr val="F1F5F9"/>
-          </a:solidFill>
-          <a:ln w="19050">
-            <a:solidFill>
-              <a:srgbClr val="CBD5E1"/>
-            </a:solidFill>
-          </a:ln>
-        </p:spPr>
-        <p:style>
-          <a:lnRef idx="1">
-            <a:schemeClr val="accent1"/>
-          </a:lnRef>
-          <a:fillRef idx="3">
-            <a:schemeClr val="accent1"/>
-          </a:fillRef>
-          <a:effectRef idx="2">
-            <a:schemeClr val="accent1"/>
-          </a:effectRef>
-          <a:fontRef idx="minor">
-            <a:schemeClr val="lt1"/>
-          </a:fontRef>
-        </p:style>
-        <p:txBody>
-          <a:bodyPr rtlCol="0" anchor="ctr"/>
-          <a:lstStyle/>
-          <a:p>
-            <a:pPr algn="ctr"/>
-            <a:r>
-              <a:rPr b="1" sz="2000">
+          <p:cNvPr id="29" name="TextBox 28"/>
+          <p:cNvSpPr txBox="1"/>
+          <p:nvPr/>
+        </p:nvSpPr>
+        <p:spPr>
+          <a:xfrm>
+            <a:off x="7360920" y="4745736"/>
+            <a:ext cx="3840480" cy="594360"/>
+          </a:xfrm>
+          <a:prstGeom prst="rect">
+            <a:avLst/>
+          </a:prstGeom>
+          <a:noFill/>
+        </p:spPr>
+        <p:txBody>
+          <a:bodyPr wrap="square" lIns="0" tIns="0">
+            <a:spAutoFit/>
+          </a:bodyPr>
+          <a:lstStyle/>
+          <a:p>
+            <a:pPr>
+              <a:defRPr sz="1900" b="1">
                 <a:solidFill>
                   <a:srgbClr val="0F172A"/>
                 </a:solidFill>
-              </a:rPr>
-              <a:t>Core Bottlenecks Eliminated:   </a:t>
-            </a:r>
-            <a:r>
-              <a:rPr b="1" sz="2000">
-                <a:solidFill>
-                  <a:srgbClr val="B91C1C"/>
-                </a:solidFill>
-              </a:rPr>
-              <a:t>No Tracking  →  No Accountability  →  No Centralized Records</a:t>
+                <a:latin typeface="Calibri"/>
+              </a:defRPr>
+            </a:pPr>
+            <a:r>
+              <a:t>Audited Resolution</a:t>
+            </a:r>
+          </a:p>
+          <a:p>
+            <a:pPr>
+              <a:defRPr sz="1700">
+                <a:solidFill>
+                  <a:srgbClr val="475569"/>
+                </a:solidFill>
+                <a:latin typeface="Calibri"/>
+              </a:defRPr>
+            </a:pPr>
+            <a:r>
+              <a:t>Diagnostic completion notes and 1–5 star rating</a:t>
+            </a:r>
+          </a:p>
+        </p:txBody>
+      </p:sp>
+      <p:sp>
+        <p:nvSpPr>
+          <p:cNvPr id="30" name="TextBox 29"/>
+          <p:cNvSpPr txBox="1"/>
+          <p:nvPr/>
+        </p:nvSpPr>
+        <p:spPr>
+          <a:xfrm>
+            <a:off x="914400" y="5440680"/>
+            <a:ext cx="10362895" cy="411480"/>
+          </a:xfrm>
+          <a:prstGeom prst="rect">
+            <a:avLst/>
+          </a:prstGeom>
+          <a:noFill/>
+        </p:spPr>
+        <p:txBody>
+          <a:bodyPr wrap="none" lIns="0" tIns="0">
+            <a:spAutoFit/>
+          </a:bodyPr>
+          <a:lstStyle/>
+          <a:p>
+            <a:pPr>
+              <a:defRPr sz="2100" b="1">
+                <a:solidFill>
+                  <a:srgbClr val="0F172A"/>
+                </a:solidFill>
+                <a:latin typeface="Calibri"/>
+              </a:defRPr>
+            </a:pPr>
+            <a:r>
+              <a:t>CCMS replaces an untracked manual process with a centralized digital lifecycle.</a:t>
             </a:r>
           </a:p>
         </p:txBody>
@@ -5139,8 +5268,8 @@
         </p:nvSpPr>
         <p:spPr>
           <a:xfrm>
-            <a:off x="731520" y="365760"/>
-            <a:ext cx="10728655" cy="320040"/>
+            <a:off x="914400" y="384048"/>
+            <a:ext cx="10362895" cy="274320"/>
           </a:xfrm>
           <a:prstGeom prst="rect">
             <a:avLst/>
@@ -5154,15 +5283,15 @@
           <a:lstStyle/>
           <a:p>
             <a:pPr>
-              <a:defRPr sz="1800" b="1">
+              <a:defRPr sz="1600" b="1">
                 <a:solidFill>
                   <a:srgbClr val="2563EB"/>
                 </a:solidFill>
-                <a:latin typeface="Arial"/>
-              </a:defRPr>
-            </a:pPr>
-            <a:r>
-              <a:t>2. SOFTWARE ENGINEERING APPROACH</a:t>
+                <a:latin typeface="Calibri"/>
+              </a:defRPr>
+            </a:pPr>
+            <a:r>
+              <a:t>02 — SE APPROACH</a:t>
             </a:r>
           </a:p>
         </p:txBody>
@@ -5175,8 +5304,8 @@
         </p:nvSpPr>
         <p:spPr>
           <a:xfrm>
-            <a:off x="731520" y="658368"/>
-            <a:ext cx="10728655" cy="502920"/>
+            <a:off x="914400" y="658368"/>
+            <a:ext cx="10362895" cy="502920"/>
           </a:xfrm>
           <a:prstGeom prst="rect">
             <a:avLst/>
@@ -5190,11 +5319,11 @@
           <a:lstStyle/>
           <a:p>
             <a:pPr>
-              <a:defRPr sz="3200" b="1">
+              <a:defRPr sz="2800" b="1">
                 <a:solidFill>
                   <a:srgbClr val="0F172A"/>
                 </a:solidFill>
-                <a:latin typeface="Arial"/>
+                <a:latin typeface="Calibri"/>
               </a:defRPr>
             </a:pPr>
             <a:r>
@@ -5211,8 +5340,8 @@
         </p:nvSpPr>
         <p:spPr>
           <a:xfrm>
-            <a:off x="731520" y="6263640"/>
-            <a:ext cx="10728655" cy="13716"/>
+            <a:off x="914400" y="6263640"/>
+            <a:ext cx="10362895" cy="13716"/>
           </a:xfrm>
           <a:prstGeom prst="rect">
             <a:avLst/>
@@ -5254,8 +5383,8 @@
         </p:nvSpPr>
         <p:spPr>
           <a:xfrm>
-            <a:off x="731520" y="6327648"/>
-            <a:ext cx="8229600" cy="320040"/>
+            <a:off x="914400" y="6336792"/>
+            <a:ext cx="7772400" cy="292608"/>
           </a:xfrm>
           <a:prstGeom prst="rect">
             <a:avLst/>
@@ -5269,11 +5398,11 @@
           <a:lstStyle/>
           <a:p>
             <a:pPr>
-              <a:defRPr sz="1600" b="1">
+              <a:defRPr sz="1500" b="1">
                 <a:solidFill>
                   <a:srgbClr val="475569"/>
                 </a:solidFill>
-                <a:latin typeface="Arial"/>
+                <a:latin typeface="Calibri"/>
               </a:defRPr>
             </a:pPr>
             <a:r>
@@ -5290,8 +5419,8 @@
         </p:nvSpPr>
         <p:spPr>
           <a:xfrm>
-            <a:off x="9144000" y="6327648"/>
-            <a:ext cx="2316175" cy="320040"/>
+            <a:off x="8686800" y="6336792"/>
+            <a:ext cx="2590495" cy="292608"/>
           </a:xfrm>
           <a:prstGeom prst="rect">
             <a:avLst/>
@@ -5305,11 +5434,11 @@
           <a:lstStyle/>
           <a:p>
             <a:pPr algn="r">
-              <a:defRPr sz="1600" b="1">
+              <a:defRPr sz="1500" b="1">
                 <a:solidFill>
                   <a:srgbClr val="2563EB"/>
                 </a:solidFill>
-                <a:latin typeface="Arial"/>
+                <a:latin typeface="Calibri"/>
               </a:defRPr>
             </a:pPr>
             <a:r>
@@ -5326,65 +5455,10 @@
         </p:nvSpPr>
         <p:spPr>
           <a:xfrm>
-            <a:off x="731520" y="1325880"/>
-            <a:ext cx="1554480" cy="594360"/>
-          </a:xfrm>
-          <a:prstGeom prst="rect">
-            <a:avLst/>
-          </a:prstGeom>
-          <a:solidFill>
-            <a:srgbClr val="0F172A"/>
-          </a:solidFill>
-          <a:ln w="19050">
-            <a:solidFill>
-              <a:srgbClr val="0F172A"/>
-            </a:solidFill>
-          </a:ln>
-        </p:spPr>
-        <p:style>
-          <a:lnRef idx="1">
-            <a:schemeClr val="accent1"/>
-          </a:lnRef>
-          <a:fillRef idx="3">
-            <a:schemeClr val="accent1"/>
-          </a:fillRef>
-          <a:effectRef idx="2">
-            <a:schemeClr val="accent1"/>
-          </a:effectRef>
-          <a:fontRef idx="minor">
-            <a:schemeClr val="lt1"/>
-          </a:fontRef>
-        </p:style>
-        <p:txBody>
-          <a:bodyPr rtlCol="0" anchor="ctr" wrap="square"/>
-          <a:lstStyle/>
-          <a:p>
-            <a:pPr algn="ctr">
-              <a:defRPr sz="1900" b="1">
-                <a:solidFill>
-                  <a:srgbClr val="FFFFFF"/>
-                </a:solidFill>
-                <a:latin typeface="Arial"/>
-              </a:defRPr>
-            </a:pPr>
-            <a:r>
-              <a:t>Requirements</a:t>
-            </a:r>
-          </a:p>
-        </p:txBody>
-      </p:sp>
-      <p:sp>
-        <p:nvSpPr>
-          <p:cNvPr id="8" name="Right Arrow 7"/>
-          <p:cNvSpPr/>
-          <p:nvPr/>
-        </p:nvSpPr>
-        <p:spPr>
-          <a:xfrm>
-            <a:off x="2331720" y="1508760"/>
-            <a:ext cx="182880" cy="201168"/>
-          </a:xfrm>
-          <a:prstGeom prst="rightArrow">
+            <a:off x="1097280" y="1572768"/>
+            <a:ext cx="9784080" cy="18288"/>
+          </a:xfrm>
+          <a:prstGeom prst="rect">
             <a:avLst/>
           </a:prstGeom>
           <a:solidFill>
@@ -5418,71 +5492,16 @@
       </p:sp>
       <p:sp>
         <p:nvSpPr>
-          <p:cNvPr id="9" name="Rectangle 8"/>
+          <p:cNvPr id="8" name="Oval 7"/>
           <p:cNvSpPr/>
           <p:nvPr/>
         </p:nvSpPr>
         <p:spPr>
           <a:xfrm>
-            <a:off x="2560320" y="1325880"/>
-            <a:ext cx="1554480" cy="594360"/>
-          </a:xfrm>
-          <a:prstGeom prst="rect">
-            <a:avLst/>
-          </a:prstGeom>
-          <a:solidFill>
-            <a:srgbClr val="0F172A"/>
-          </a:solidFill>
-          <a:ln w="19050">
-            <a:solidFill>
-              <a:srgbClr val="0F172A"/>
-            </a:solidFill>
-          </a:ln>
-        </p:spPr>
-        <p:style>
-          <a:lnRef idx="1">
-            <a:schemeClr val="accent1"/>
-          </a:lnRef>
-          <a:fillRef idx="3">
-            <a:schemeClr val="accent1"/>
-          </a:fillRef>
-          <a:effectRef idx="2">
-            <a:schemeClr val="accent1"/>
-          </a:effectRef>
-          <a:fontRef idx="minor">
-            <a:schemeClr val="lt1"/>
-          </a:fontRef>
-        </p:style>
-        <p:txBody>
-          <a:bodyPr rtlCol="0" anchor="ctr" wrap="square"/>
-          <a:lstStyle/>
-          <a:p>
-            <a:pPr algn="ctr">
-              <a:defRPr sz="1900" b="1">
-                <a:solidFill>
-                  <a:srgbClr val="FFFFFF"/>
-                </a:solidFill>
-                <a:latin typeface="Arial"/>
-              </a:defRPr>
-            </a:pPr>
-            <a:r>
-              <a:t>Design</a:t>
-            </a:r>
-          </a:p>
-        </p:txBody>
-      </p:sp>
-      <p:sp>
-        <p:nvSpPr>
-          <p:cNvPr id="10" name="Right Arrow 9"/>
-          <p:cNvSpPr/>
-          <p:nvPr/>
-        </p:nvSpPr>
-        <p:spPr>
-          <a:xfrm>
-            <a:off x="4160520" y="1508760"/>
-            <a:ext cx="182880" cy="201168"/>
-          </a:xfrm>
-          <a:prstGeom prst="rightArrow">
+            <a:off x="1234440" y="1499616"/>
+            <a:ext cx="164592" cy="164592"/>
+          </a:xfrm>
+          <a:prstGeom prst="ellipse">
             <a:avLst/>
           </a:prstGeom>
           <a:solidFill>
@@ -5516,71 +5535,52 @@
       </p:sp>
       <p:sp>
         <p:nvSpPr>
-          <p:cNvPr id="11" name="Rectangle 10"/>
+          <p:cNvPr id="9" name="TextBox 8"/>
+          <p:cNvSpPr txBox="1"/>
+          <p:nvPr/>
+        </p:nvSpPr>
+        <p:spPr>
+          <a:xfrm>
+            <a:off x="731520" y="1755648"/>
+            <a:ext cx="1188720" cy="365760"/>
+          </a:xfrm>
+          <a:prstGeom prst="rect">
+            <a:avLst/>
+          </a:prstGeom>
+          <a:noFill/>
+        </p:spPr>
+        <p:txBody>
+          <a:bodyPr wrap="none" lIns="0" tIns="0">
+            <a:spAutoFit/>
+          </a:bodyPr>
+          <a:lstStyle/>
+          <a:p>
+            <a:pPr algn="ctr">
+              <a:defRPr sz="1600" b="1">
+                <a:solidFill>
+                  <a:srgbClr val="0F172A"/>
+                </a:solidFill>
+                <a:latin typeface="Calibri"/>
+              </a:defRPr>
+            </a:pPr>
+            <a:r>
+              <a:t>REQUIREMENTS</a:t>
+            </a:r>
+          </a:p>
+        </p:txBody>
+      </p:sp>
+      <p:sp>
+        <p:nvSpPr>
+          <p:cNvPr id="10" name="Oval 9"/>
           <p:cNvSpPr/>
           <p:nvPr/>
         </p:nvSpPr>
         <p:spPr>
           <a:xfrm>
-            <a:off x="4389120" y="1325880"/>
-            <a:ext cx="1554480" cy="594360"/>
-          </a:xfrm>
-          <a:prstGeom prst="rect">
-            <a:avLst/>
-          </a:prstGeom>
-          <a:solidFill>
-            <a:srgbClr val="0F172A"/>
-          </a:solidFill>
-          <a:ln w="19050">
-            <a:solidFill>
-              <a:srgbClr val="0F172A"/>
-            </a:solidFill>
-          </a:ln>
-        </p:spPr>
-        <p:style>
-          <a:lnRef idx="1">
-            <a:schemeClr val="accent1"/>
-          </a:lnRef>
-          <a:fillRef idx="3">
-            <a:schemeClr val="accent1"/>
-          </a:fillRef>
-          <a:effectRef idx="2">
-            <a:schemeClr val="accent1"/>
-          </a:effectRef>
-          <a:fontRef idx="minor">
-            <a:schemeClr val="lt1"/>
-          </a:fontRef>
-        </p:style>
-        <p:txBody>
-          <a:bodyPr rtlCol="0" anchor="ctr" wrap="square"/>
-          <a:lstStyle/>
-          <a:p>
-            <a:pPr algn="ctr">
-              <a:defRPr sz="1900" b="1">
-                <a:solidFill>
-                  <a:srgbClr val="FFFFFF"/>
-                </a:solidFill>
-                <a:latin typeface="Arial"/>
-              </a:defRPr>
-            </a:pPr>
-            <a:r>
-              <a:t>Implementation</a:t>
-            </a:r>
-          </a:p>
-        </p:txBody>
-      </p:sp>
-      <p:sp>
-        <p:nvSpPr>
-          <p:cNvPr id="12" name="Right Arrow 11"/>
-          <p:cNvSpPr/>
-          <p:nvPr/>
-        </p:nvSpPr>
-        <p:spPr>
-          <a:xfrm>
-            <a:off x="5989320" y="1508760"/>
-            <a:ext cx="182880" cy="201168"/>
-          </a:xfrm>
-          <a:prstGeom prst="rightArrow">
+            <a:off x="3154680" y="1499616"/>
+            <a:ext cx="164592" cy="164592"/>
+          </a:xfrm>
+          <a:prstGeom prst="ellipse">
             <a:avLst/>
           </a:prstGeom>
           <a:solidFill>
@@ -5614,71 +5614,52 @@
       </p:sp>
       <p:sp>
         <p:nvSpPr>
-          <p:cNvPr id="13" name="Rectangle 12"/>
+          <p:cNvPr id="11" name="TextBox 10"/>
+          <p:cNvSpPr txBox="1"/>
+          <p:nvPr/>
+        </p:nvSpPr>
+        <p:spPr>
+          <a:xfrm>
+            <a:off x="2651760" y="1755648"/>
+            <a:ext cx="1188720" cy="365760"/>
+          </a:xfrm>
+          <a:prstGeom prst="rect">
+            <a:avLst/>
+          </a:prstGeom>
+          <a:noFill/>
+        </p:spPr>
+        <p:txBody>
+          <a:bodyPr wrap="none" lIns="0" tIns="0">
+            <a:spAutoFit/>
+          </a:bodyPr>
+          <a:lstStyle/>
+          <a:p>
+            <a:pPr algn="ctr">
+              <a:defRPr sz="1600" b="1">
+                <a:solidFill>
+                  <a:srgbClr val="0F172A"/>
+                </a:solidFill>
+                <a:latin typeface="Calibri"/>
+              </a:defRPr>
+            </a:pPr>
+            <a:r>
+              <a:t>DESIGN</a:t>
+            </a:r>
+          </a:p>
+        </p:txBody>
+      </p:sp>
+      <p:sp>
+        <p:nvSpPr>
+          <p:cNvPr id="12" name="Oval 11"/>
           <p:cNvSpPr/>
           <p:nvPr/>
         </p:nvSpPr>
         <p:spPr>
           <a:xfrm>
-            <a:off x="6217920" y="1325880"/>
-            <a:ext cx="1554480" cy="594360"/>
-          </a:xfrm>
-          <a:prstGeom prst="rect">
-            <a:avLst/>
-          </a:prstGeom>
-          <a:solidFill>
-            <a:srgbClr val="0F172A"/>
-          </a:solidFill>
-          <a:ln w="19050">
-            <a:solidFill>
-              <a:srgbClr val="0F172A"/>
-            </a:solidFill>
-          </a:ln>
-        </p:spPr>
-        <p:style>
-          <a:lnRef idx="1">
-            <a:schemeClr val="accent1"/>
-          </a:lnRef>
-          <a:fillRef idx="3">
-            <a:schemeClr val="accent1"/>
-          </a:fillRef>
-          <a:effectRef idx="2">
-            <a:schemeClr val="accent1"/>
-          </a:effectRef>
-          <a:fontRef idx="minor">
-            <a:schemeClr val="lt1"/>
-          </a:fontRef>
-        </p:style>
-        <p:txBody>
-          <a:bodyPr rtlCol="0" anchor="ctr" wrap="square"/>
-          <a:lstStyle/>
-          <a:p>
-            <a:pPr algn="ctr">
-              <a:defRPr sz="1900" b="1">
-                <a:solidFill>
-                  <a:srgbClr val="FFFFFF"/>
-                </a:solidFill>
-                <a:latin typeface="Arial"/>
-              </a:defRPr>
-            </a:pPr>
-            <a:r>
-              <a:t>Security</a:t>
-            </a:r>
-          </a:p>
-        </p:txBody>
-      </p:sp>
-      <p:sp>
-        <p:nvSpPr>
-          <p:cNvPr id="14" name="Right Arrow 13"/>
-          <p:cNvSpPr/>
-          <p:nvPr/>
-        </p:nvSpPr>
-        <p:spPr>
-          <a:xfrm>
-            <a:off x="7818120" y="1508760"/>
-            <a:ext cx="182880" cy="201168"/>
-          </a:xfrm>
-          <a:prstGeom prst="rightArrow">
+            <a:off x="5074920" y="1499616"/>
+            <a:ext cx="164592" cy="164592"/>
+          </a:xfrm>
+          <a:prstGeom prst="ellipse">
             <a:avLst/>
           </a:prstGeom>
           <a:solidFill>
@@ -5712,71 +5693,52 @@
       </p:sp>
       <p:sp>
         <p:nvSpPr>
-          <p:cNvPr id="15" name="Rectangle 14"/>
+          <p:cNvPr id="13" name="TextBox 12"/>
+          <p:cNvSpPr txBox="1"/>
+          <p:nvPr/>
+        </p:nvSpPr>
+        <p:spPr>
+          <a:xfrm>
+            <a:off x="4572000" y="1755648"/>
+            <a:ext cx="1188720" cy="365760"/>
+          </a:xfrm>
+          <a:prstGeom prst="rect">
+            <a:avLst/>
+          </a:prstGeom>
+          <a:noFill/>
+        </p:spPr>
+        <p:txBody>
+          <a:bodyPr wrap="none" lIns="0" tIns="0">
+            <a:spAutoFit/>
+          </a:bodyPr>
+          <a:lstStyle/>
+          <a:p>
+            <a:pPr algn="ctr">
+              <a:defRPr sz="1600" b="1">
+                <a:solidFill>
+                  <a:srgbClr val="0F172A"/>
+                </a:solidFill>
+                <a:latin typeface="Calibri"/>
+              </a:defRPr>
+            </a:pPr>
+            <a:r>
+              <a:t>IMPLEMENTATION</a:t>
+            </a:r>
+          </a:p>
+        </p:txBody>
+      </p:sp>
+      <p:sp>
+        <p:nvSpPr>
+          <p:cNvPr id="14" name="Oval 13"/>
           <p:cNvSpPr/>
           <p:nvPr/>
         </p:nvSpPr>
         <p:spPr>
           <a:xfrm>
-            <a:off x="8046720" y="1325880"/>
-            <a:ext cx="1554480" cy="594360"/>
-          </a:xfrm>
-          <a:prstGeom prst="rect">
-            <a:avLst/>
-          </a:prstGeom>
-          <a:solidFill>
-            <a:srgbClr val="0F172A"/>
-          </a:solidFill>
-          <a:ln w="19050">
-            <a:solidFill>
-              <a:srgbClr val="0F172A"/>
-            </a:solidFill>
-          </a:ln>
-        </p:spPr>
-        <p:style>
-          <a:lnRef idx="1">
-            <a:schemeClr val="accent1"/>
-          </a:lnRef>
-          <a:fillRef idx="3">
-            <a:schemeClr val="accent1"/>
-          </a:fillRef>
-          <a:effectRef idx="2">
-            <a:schemeClr val="accent1"/>
-          </a:effectRef>
-          <a:fontRef idx="minor">
-            <a:schemeClr val="lt1"/>
-          </a:fontRef>
-        </p:style>
-        <p:txBody>
-          <a:bodyPr rtlCol="0" anchor="ctr" wrap="square"/>
-          <a:lstStyle/>
-          <a:p>
-            <a:pPr algn="ctr">
-              <a:defRPr sz="1900" b="1">
-                <a:solidFill>
-                  <a:srgbClr val="FFFFFF"/>
-                </a:solidFill>
-                <a:latin typeface="Arial"/>
-              </a:defRPr>
-            </a:pPr>
-            <a:r>
-              <a:t>Testing</a:t>
-            </a:r>
-          </a:p>
-        </p:txBody>
-      </p:sp>
-      <p:sp>
-        <p:nvSpPr>
-          <p:cNvPr id="16" name="Right Arrow 15"/>
-          <p:cNvSpPr/>
-          <p:nvPr/>
-        </p:nvSpPr>
-        <p:spPr>
-          <a:xfrm>
-            <a:off x="9646920" y="1508760"/>
-            <a:ext cx="182880" cy="201168"/>
-          </a:xfrm>
-          <a:prstGeom prst="rightArrow">
+            <a:off x="6995159" y="1499616"/>
+            <a:ext cx="164592" cy="164592"/>
+          </a:xfrm>
+          <a:prstGeom prst="ellipse">
             <a:avLst/>
           </a:prstGeom>
           <a:solidFill>
@@ -5810,25 +5772,59 @@
       </p:sp>
       <p:sp>
         <p:nvSpPr>
-          <p:cNvPr id="17" name="Rectangle 16"/>
+          <p:cNvPr id="15" name="TextBox 14"/>
+          <p:cNvSpPr txBox="1"/>
+          <p:nvPr/>
+        </p:nvSpPr>
+        <p:spPr>
+          <a:xfrm>
+            <a:off x="6492240" y="1755648"/>
+            <a:ext cx="1188720" cy="365760"/>
+          </a:xfrm>
+          <a:prstGeom prst="rect">
+            <a:avLst/>
+          </a:prstGeom>
+          <a:noFill/>
+        </p:spPr>
+        <p:txBody>
+          <a:bodyPr wrap="none" lIns="0" tIns="0">
+            <a:spAutoFit/>
+          </a:bodyPr>
+          <a:lstStyle/>
+          <a:p>
+            <a:pPr algn="ctr">
+              <a:defRPr sz="1600" b="1">
+                <a:solidFill>
+                  <a:srgbClr val="0F172A"/>
+                </a:solidFill>
+                <a:latin typeface="Calibri"/>
+              </a:defRPr>
+            </a:pPr>
+            <a:r>
+              <a:t>SECURITY</a:t>
+            </a:r>
+          </a:p>
+        </p:txBody>
+      </p:sp>
+      <p:sp>
+        <p:nvSpPr>
+          <p:cNvPr id="16" name="Oval 15"/>
           <p:cNvSpPr/>
           <p:nvPr/>
         </p:nvSpPr>
         <p:spPr>
           <a:xfrm>
-            <a:off x="9875520" y="1325880"/>
-            <a:ext cx="1584655" cy="594360"/>
-          </a:xfrm>
-          <a:prstGeom prst="rect">
+            <a:off x="8823960" y="1499616"/>
+            <a:ext cx="164592" cy="164592"/>
+          </a:xfrm>
+          <a:prstGeom prst="ellipse">
             <a:avLst/>
           </a:prstGeom>
           <a:solidFill>
-            <a:srgbClr val="0F172A"/>
+            <a:srgbClr val="2563EB"/>
           </a:solidFill>
-          <a:ln w="19050">
-            <a:solidFill>
-              <a:srgbClr val="0F172A"/>
-            </a:solidFill>
+          <a:ln>
+            <a:noFill/>
           </a:ln>
         </p:spPr>
         <p:style>
@@ -5846,33 +5842,23 @@
           </a:fontRef>
         </p:style>
         <p:txBody>
-          <a:bodyPr rtlCol="0" anchor="ctr" wrap="square"/>
-          <a:lstStyle/>
-          <a:p>
-            <a:pPr algn="ctr">
-              <a:defRPr sz="1900" b="1">
-                <a:solidFill>
-                  <a:srgbClr val="FFFFFF"/>
-                </a:solidFill>
-                <a:latin typeface="Arial"/>
-              </a:defRPr>
-            </a:pPr>
-            <a:r>
-              <a:t>Maintenance</a:t>
-            </a:r>
-          </a:p>
-        </p:txBody>
-      </p:sp>
-      <p:sp>
-        <p:nvSpPr>
-          <p:cNvPr id="18" name="TextBox 17"/>
+          <a:bodyPr rtlCol="0" anchor="ctr"/>
+          <a:lstStyle/>
+          <a:p>
+            <a:pPr algn="ctr"/>
+          </a:p>
+        </p:txBody>
+      </p:sp>
+      <p:sp>
+        <p:nvSpPr>
+          <p:cNvPr id="17" name="TextBox 16"/>
           <p:cNvSpPr txBox="1"/>
           <p:nvPr/>
         </p:nvSpPr>
         <p:spPr>
           <a:xfrm>
-            <a:off x="731520" y="2194560"/>
-            <a:ext cx="10728655" cy="365760"/>
+            <a:off x="8321040" y="1755648"/>
+            <a:ext cx="1188720" cy="365760"/>
           </a:xfrm>
           <a:prstGeom prst="rect">
             <a:avLst/>
@@ -5885,17 +5871,60 @@
           </a:bodyPr>
           <a:lstStyle/>
           <a:p>
-            <a:pPr>
-              <a:defRPr sz="2400" b="1">
+            <a:pPr algn="ctr">
+              <a:defRPr sz="1600" b="1">
                 <a:solidFill>
                   <a:srgbClr val="0F172A"/>
                 </a:solidFill>
-                <a:latin typeface="Arial"/>
-              </a:defRPr>
-            </a:pPr>
-            <a:r>
-              <a:t>Requirement → Implementation Traceability Mapping</a:t>
-            </a:r>
+                <a:latin typeface="Calibri"/>
+              </a:defRPr>
+            </a:pPr>
+            <a:r>
+              <a:t>TESTING</a:t>
+            </a:r>
+          </a:p>
+        </p:txBody>
+      </p:sp>
+      <p:sp>
+        <p:nvSpPr>
+          <p:cNvPr id="18" name="Oval 17"/>
+          <p:cNvSpPr/>
+          <p:nvPr/>
+        </p:nvSpPr>
+        <p:spPr>
+          <a:xfrm>
+            <a:off x="10561319" y="1499616"/>
+            <a:ext cx="164592" cy="164592"/>
+          </a:xfrm>
+          <a:prstGeom prst="ellipse">
+            <a:avLst/>
+          </a:prstGeom>
+          <a:solidFill>
+            <a:srgbClr val="2563EB"/>
+          </a:solidFill>
+          <a:ln>
+            <a:noFill/>
+          </a:ln>
+        </p:spPr>
+        <p:style>
+          <a:lnRef idx="1">
+            <a:schemeClr val="accent1"/>
+          </a:lnRef>
+          <a:fillRef idx="3">
+            <a:schemeClr val="accent1"/>
+          </a:fillRef>
+          <a:effectRef idx="2">
+            <a:schemeClr val="accent1"/>
+          </a:effectRef>
+          <a:fontRef idx="minor">
+            <a:schemeClr val="lt1"/>
+          </a:fontRef>
+        </p:style>
+        <p:txBody>
+          <a:bodyPr rtlCol="0" anchor="ctr"/>
+          <a:lstStyle/>
+          <a:p>
+            <a:pPr algn="ctr"/>
           </a:p>
         </p:txBody>
       </p:sp>
@@ -5907,8 +5936,80 @@
         </p:nvSpPr>
         <p:spPr>
           <a:xfrm>
-            <a:off x="731520" y="2651760"/>
-            <a:ext cx="10728655" cy="3383280"/>
+            <a:off x="10058400" y="1755648"/>
+            <a:ext cx="1188720" cy="365760"/>
+          </a:xfrm>
+          <a:prstGeom prst="rect">
+            <a:avLst/>
+          </a:prstGeom>
+          <a:noFill/>
+        </p:spPr>
+        <p:txBody>
+          <a:bodyPr wrap="none" lIns="0" tIns="0">
+            <a:spAutoFit/>
+          </a:bodyPr>
+          <a:lstStyle/>
+          <a:p>
+            <a:pPr algn="ctr">
+              <a:defRPr sz="1600" b="1">
+                <a:solidFill>
+                  <a:srgbClr val="0F172A"/>
+                </a:solidFill>
+                <a:latin typeface="Calibri"/>
+              </a:defRPr>
+            </a:pPr>
+            <a:r>
+              <a:t>MAINTENANCE</a:t>
+            </a:r>
+          </a:p>
+        </p:txBody>
+      </p:sp>
+      <p:sp>
+        <p:nvSpPr>
+          <p:cNvPr id="20" name="TextBox 19"/>
+          <p:cNvSpPr txBox="1"/>
+          <p:nvPr/>
+        </p:nvSpPr>
+        <p:spPr>
+          <a:xfrm>
+            <a:off x="914400" y="2468880"/>
+            <a:ext cx="10362895" cy="365760"/>
+          </a:xfrm>
+          <a:prstGeom prst="rect">
+            <a:avLst/>
+          </a:prstGeom>
+          <a:noFill/>
+        </p:spPr>
+        <p:txBody>
+          <a:bodyPr wrap="none" lIns="0" tIns="0">
+            <a:spAutoFit/>
+          </a:bodyPr>
+          <a:lstStyle/>
+          <a:p>
+            <a:pPr>
+              <a:defRPr sz="2200" b="1">
+                <a:solidFill>
+                  <a:srgbClr val="0F172A"/>
+                </a:solidFill>
+                <a:latin typeface="Calibri"/>
+              </a:defRPr>
+            </a:pPr>
+            <a:r>
+              <a:t>Requirements → Implementation Traceability Mapping</a:t>
+            </a:r>
+          </a:p>
+        </p:txBody>
+      </p:sp>
+      <p:sp>
+        <p:nvSpPr>
+          <p:cNvPr id="21" name="TextBox 20"/>
+          <p:cNvSpPr txBox="1"/>
+          <p:nvPr/>
+        </p:nvSpPr>
+        <p:spPr>
+          <a:xfrm>
+            <a:off x="914400" y="2926080"/>
+            <a:ext cx="10362895" cy="2926080"/>
           </a:xfrm>
           <a:prstGeom prst="rect">
             <a:avLst/>
@@ -5927,7 +6028,7 @@
                   <a:srgbClr val="2563EB"/>
                 </a:solidFill>
               </a:rPr>
-              <a:t>• Secure Access             </a:t>
+              <a:t>Secure Access            </a:t>
             </a:r>
             <a:r>
               <a:rPr b="1" sz="2000">
@@ -5943,13 +6044,13 @@
                   <a:srgbClr val="1E293B"/>
                 </a:solidFill>
               </a:rPr>
-              <a:t>Stateless JWT authentication + bcryptjs hashing + verifyToken middleware</a:t>
+              <a:t>Stateless JWT authentication + bcryptjs password hashing + verifyToken middleware</a:t>
             </a:r>
           </a:p>
           <a:p>
             <a:pPr>
               <a:spcBef>
-                <a:spcPts val="1000"/>
+                <a:spcPts val="1400"/>
               </a:spcBef>
             </a:pPr>
             <a:r>
@@ -5958,7 +6059,7 @@
                   <a:srgbClr val="2563EB"/>
                 </a:solidFill>
               </a:rPr>
-              <a:t>• Complaint Lodging         </a:t>
+              <a:t>Complaint Lodging        </a:t>
             </a:r>
             <a:r>
               <a:rPr b="1" sz="2000">
@@ -5974,13 +6075,13 @@
                   <a:srgbClr val="1E293B"/>
                 </a:solidFill>
               </a:rPr>
-              <a:t>Dynamic React form + campus category &amp; room mapping + Multer photo upload</a:t>
+              <a:t>Dynamic React form + campus category &amp; room mapping + Multer evidence upload</a:t>
             </a:r>
           </a:p>
           <a:p>
             <a:pPr>
               <a:spcBef>
-                <a:spcPts val="1000"/>
+                <a:spcPts val="1400"/>
               </a:spcBef>
             </a:pPr>
             <a:r>
@@ -5989,7 +6090,7 @@
                   <a:srgbClr val="2563EB"/>
                 </a:solidFill>
               </a:rPr>
-              <a:t>• Admin Control             </a:t>
+              <a:t>Lifecycle Control        </a:t>
             </a:r>
             <a:r>
               <a:rPr b="1" sz="2000">
@@ -6005,13 +6106,13 @@
                   <a:srgbClr val="1E293B"/>
                 </a:solidFill>
               </a:rPr>
-              <a:t>Centralized administrative dashboard with status filters + staff assignment</a:t>
+              <a:t>Strict server-side Finite State Machine validator + immutable complaint_updates log</a:t>
             </a:r>
           </a:p>
           <a:p>
             <a:pPr>
               <a:spcBef>
-                <a:spcPts val="1000"/>
+                <a:spcPts val="1400"/>
               </a:spcBef>
             </a:pPr>
             <a:r>
@@ -6020,7 +6121,7 @@
                   <a:srgbClr val="2563EB"/>
                 </a:solidFill>
               </a:rPr>
-              <a:t>• Audited Lifecycle         </a:t>
+              <a:t>Quality Verification     </a:t>
             </a:r>
             <a:r>
               <a:rPr b="1" sz="2000">
@@ -6036,69 +6137,7 @@
                   <a:srgbClr val="1E293B"/>
                 </a:solidFill>
               </a:rPr>
-              <a:t>Strict server-side Finite State Machine validator + immutable complaint_updates log</a:t>
-            </a:r>
-          </a:p>
-          <a:p>
-            <a:pPr>
-              <a:spcBef>
-                <a:spcPts val="1000"/>
-              </a:spcBef>
-            </a:pPr>
-            <a:r>
-              <a:rPr b="1" sz="2000">
-                <a:solidFill>
-                  <a:srgbClr val="2563EB"/>
-                </a:solidFill>
-              </a:rPr>
-              <a:t>• Technician Execution      </a:t>
-            </a:r>
-            <a:r>
-              <a:rPr b="1" sz="2000">
-                <a:solidFill>
-                  <a:srgbClr val="0F172A"/>
-                </a:solidFill>
-              </a:rPr>
-              <a:t>→   </a:t>
-            </a:r>
-            <a:r>
-              <a:rPr sz="2000">
-                <a:solidFill>
-                  <a:srgbClr val="1E293B"/>
-                </a:solidFill>
-              </a:rPr>
-              <a:t>Dedicated work order queue with real-time status progression (IN_PROGRESS → RESOLVED)</a:t>
-            </a:r>
-          </a:p>
-          <a:p>
-            <a:pPr>
-              <a:spcBef>
-                <a:spcPts val="1000"/>
-              </a:spcBef>
-            </a:pPr>
-            <a:r>
-              <a:rPr b="1" sz="2000">
-                <a:solidFill>
-                  <a:srgbClr val="2563EB"/>
-                </a:solidFill>
-              </a:rPr>
-              <a:t>• Quality Feedback          </a:t>
-            </a:r>
-            <a:r>
-              <a:rPr b="1" sz="2000">
-                <a:solidFill>
-                  <a:srgbClr val="0F172A"/>
-                </a:solidFill>
-              </a:rPr>
-              <a:t>→   </a:t>
-            </a:r>
-            <a:r>
-              <a:rPr sz="2000">
-                <a:solidFill>
-                  <a:srgbClr val="1E293B"/>
-                </a:solidFill>
-              </a:rPr>
-              <a:t>Post-resolution 1 to 5 star rating submission + reopening mechanism for recurring issues</a:t>
+              <a:t>Playwright end-to-end journeys + Basis Path Testing on transitions (V(G) = 11)</a:t>
             </a:r>
           </a:p>
         </p:txBody>
@@ -6129,8 +6168,8 @@
         </p:nvSpPr>
         <p:spPr>
           <a:xfrm>
-            <a:off x="731520" y="365760"/>
-            <a:ext cx="10728655" cy="320040"/>
+            <a:off x="914400" y="384048"/>
+            <a:ext cx="10362895" cy="274320"/>
           </a:xfrm>
           <a:prstGeom prst="rect">
             <a:avLst/>
@@ -6144,15 +6183,15 @@
           <a:lstStyle/>
           <a:p>
             <a:pPr>
-              <a:defRPr sz="1800" b="1">
+              <a:defRPr sz="1600" b="1">
                 <a:solidFill>
                   <a:srgbClr val="2563EB"/>
                 </a:solidFill>
-                <a:latin typeface="Arial"/>
-              </a:defRPr>
-            </a:pPr>
-            <a:r>
-              <a:t>3. SYSTEM ARCHITECTURE</a:t>
+                <a:latin typeface="Calibri"/>
+              </a:defRPr>
+            </a:pPr>
+            <a:r>
+              <a:t>03 — ARCHITECTURE</a:t>
             </a:r>
           </a:p>
         </p:txBody>
@@ -6165,8 +6204,8 @@
         </p:nvSpPr>
         <p:spPr>
           <a:xfrm>
-            <a:off x="731520" y="658368"/>
-            <a:ext cx="10728655" cy="502920"/>
+            <a:off x="914400" y="658368"/>
+            <a:ext cx="10362895" cy="502920"/>
           </a:xfrm>
           <a:prstGeom prst="rect">
             <a:avLst/>
@@ -6180,15 +6219,15 @@
           <a:lstStyle/>
           <a:p>
             <a:pPr>
-              <a:defRPr sz="3200" b="1">
+              <a:defRPr sz="2800" b="1">
                 <a:solidFill>
                   <a:srgbClr val="0F172A"/>
                 </a:solidFill>
-                <a:latin typeface="Arial"/>
-              </a:defRPr>
-            </a:pPr>
-            <a:r>
-              <a:t>Decoupled 3-Tier Layered Architecture with Stateless API Security</a:t>
+                <a:latin typeface="Calibri"/>
+              </a:defRPr>
+            </a:pPr>
+            <a:r>
+              <a:t>Decoupled 3-Tier Layered Architecture</a:t>
             </a:r>
           </a:p>
         </p:txBody>
@@ -6201,8 +6240,8 @@
         </p:nvSpPr>
         <p:spPr>
           <a:xfrm>
-            <a:off x="731520" y="6263640"/>
-            <a:ext cx="10728655" cy="13716"/>
+            <a:off x="914400" y="6263640"/>
+            <a:ext cx="10362895" cy="13716"/>
           </a:xfrm>
           <a:prstGeom prst="rect">
             <a:avLst/>
@@ -6244,8 +6283,8 @@
         </p:nvSpPr>
         <p:spPr>
           <a:xfrm>
-            <a:off x="731520" y="6327648"/>
-            <a:ext cx="8229600" cy="320040"/>
+            <a:off x="914400" y="6336792"/>
+            <a:ext cx="7772400" cy="292608"/>
           </a:xfrm>
           <a:prstGeom prst="rect">
             <a:avLst/>
@@ -6259,11 +6298,11 @@
           <a:lstStyle/>
           <a:p>
             <a:pPr>
-              <a:defRPr sz="1600" b="1">
+              <a:defRPr sz="1500" b="1">
                 <a:solidFill>
                   <a:srgbClr val="475569"/>
                 </a:solidFill>
-                <a:latin typeface="Arial"/>
+                <a:latin typeface="Calibri"/>
               </a:defRPr>
             </a:pPr>
             <a:r>
@@ -6280,8 +6319,8 @@
         </p:nvSpPr>
         <p:spPr>
           <a:xfrm>
-            <a:off x="9144000" y="6327648"/>
-            <a:ext cx="2316175" cy="320040"/>
+            <a:off x="8686800" y="6336792"/>
+            <a:ext cx="2590495" cy="292608"/>
           </a:xfrm>
           <a:prstGeom prst="rect">
             <a:avLst/>
@@ -6295,11 +6334,11 @@
           <a:lstStyle/>
           <a:p>
             <a:pPr algn="r">
-              <a:defRPr sz="1600" b="1">
+              <a:defRPr sz="1500" b="1">
                 <a:solidFill>
                   <a:srgbClr val="2563EB"/>
                 </a:solidFill>
-                <a:latin typeface="Arial"/>
+                <a:latin typeface="Calibri"/>
               </a:defRPr>
             </a:pPr>
             <a:r>
@@ -6316,8 +6355,8 @@
         </p:nvSpPr>
         <p:spPr>
           <a:xfrm>
-            <a:off x="731520" y="1325880"/>
-            <a:ext cx="5669280" cy="530352"/>
+            <a:off x="914400" y="1463040"/>
+            <a:ext cx="5669280" cy="502920"/>
           </a:xfrm>
           <a:prstGeom prst="rect">
             <a:avLst/>
@@ -6325,7 +6364,7 @@
           <a:solidFill>
             <a:srgbClr val="FFFFFF"/>
           </a:solidFill>
-          <a:ln w="19050">
+          <a:ln w="15240">
             <a:solidFill>
               <a:srgbClr val="0F172A"/>
             </a:solidFill>
@@ -6350,15 +6389,15 @@
           <a:lstStyle/>
           <a:p>
             <a:pPr algn="ctr">
-              <a:defRPr sz="1800" b="1">
+              <a:defRPr sz="1700" b="1">
                 <a:solidFill>
                   <a:srgbClr val="0F172A"/>
                 </a:solidFill>
-                <a:latin typeface="Arial"/>
-              </a:defRPr>
-            </a:pPr>
-            <a:r>
-              <a:t>Student  •  Faculty  •  Admin  •  Maintenance Staff</a:t>
+                <a:latin typeface="Calibri"/>
+              </a:defRPr>
+            </a:pPr>
+            <a:r>
+              <a:t>STUDENTS  |  FACULTY  |  ADMIN  |  STAFF</a:t>
             </a:r>
           </a:p>
         </p:txBody>
@@ -6371,7 +6410,7 @@
         </p:nvSpPr>
         <p:spPr>
           <a:xfrm>
-            <a:off x="3474720" y="1874519"/>
+            <a:off x="3657599" y="1993392"/>
             <a:ext cx="182880" cy="228600"/>
           </a:xfrm>
           <a:prstGeom prst="downArrow">
@@ -6414,8 +6453,8 @@
         </p:nvSpPr>
         <p:spPr>
           <a:xfrm>
-            <a:off x="731520" y="2121408"/>
-            <a:ext cx="5669280" cy="658368"/>
+            <a:off x="914400" y="2240280"/>
+            <a:ext cx="5669280" cy="594360"/>
           </a:xfrm>
           <a:prstGeom prst="rect">
             <a:avLst/>
@@ -6423,7 +6462,7 @@
           <a:solidFill>
             <a:srgbClr val="FFFFFF"/>
           </a:solidFill>
-          <a:ln w="19050">
+          <a:ln w="15240">
             <a:solidFill>
               <a:srgbClr val="2563EB"/>
             </a:solidFill>
@@ -6448,19 +6487,19 @@
           <a:lstStyle/>
           <a:p>
             <a:pPr algn="ctr">
-              <a:defRPr sz="1800" b="1">
+              <a:defRPr sz="1700" b="1">
                 <a:solidFill>
                   <a:srgbClr val="0F172A"/>
                 </a:solidFill>
-                <a:latin typeface="Arial"/>
-              </a:defRPr>
-            </a:pPr>
-            <a:r>
-              <a:t>React 18 + Vite Frontend (SPA)</a:t>
+                <a:latin typeface="Calibri"/>
+              </a:defRPr>
+            </a:pPr>
+            <a:r>
+              <a:t>REACT FRONTEND (SPA)</a:t>
             </a:r>
             <a:br/>
             <a:r>
-              <a:t>Component Hierarchy • Tailwind CSS • Axios Client</a:t>
+              <a:t>React 18 · Vite 5 · Tailwind CSS · Axios Client</a:t>
             </a:r>
           </a:p>
         </p:txBody>
@@ -6473,7 +6512,7 @@
         </p:nvSpPr>
         <p:spPr>
           <a:xfrm>
-            <a:off x="3474720" y="2798064"/>
+            <a:off x="3657599" y="2852928"/>
             <a:ext cx="182880" cy="228600"/>
           </a:xfrm>
           <a:prstGeom prst="downArrow">
@@ -6516,8 +6555,8 @@
         </p:nvSpPr>
         <p:spPr>
           <a:xfrm>
-            <a:off x="731520" y="3044952"/>
-            <a:ext cx="5669280" cy="658368"/>
+            <a:off x="914400" y="3108960"/>
+            <a:ext cx="5669280" cy="411480"/>
           </a:xfrm>
           <a:prstGeom prst="rect">
             <a:avLst/>
@@ -6525,7 +6564,7 @@
           <a:solidFill>
             <a:srgbClr val="FFFFFF"/>
           </a:solidFill>
-          <a:ln w="19050">
+          <a:ln w="15240">
             <a:solidFill>
               <a:srgbClr val="2563EB"/>
             </a:solidFill>
@@ -6550,32 +6589,87 @@
           <a:lstStyle/>
           <a:p>
             <a:pPr algn="ctr">
-              <a:defRPr sz="1800" b="1">
+              <a:defRPr sz="1700" b="1">
                 <a:solidFill>
                   <a:srgbClr val="0F172A"/>
                 </a:solidFill>
-                <a:latin typeface="Arial"/>
-              </a:defRPr>
-            </a:pPr>
-            <a:r>
-              <a:t>Node.js + Express REST API</a:t>
+                <a:latin typeface="Calibri"/>
+              </a:defRPr>
+            </a:pPr>
+            <a:r>
+              <a:t>REST API SERVER (Node.js 18 + Express 4.19)</a:t>
+            </a:r>
+          </a:p>
+        </p:txBody>
+      </p:sp>
+      <p:sp>
+        <p:nvSpPr>
+          <p:cNvPr id="12" name="Rectangle 11"/>
+          <p:cNvSpPr/>
+          <p:nvPr/>
+        </p:nvSpPr>
+        <p:spPr>
+          <a:xfrm>
+            <a:off x="1188720" y="3566160"/>
+            <a:ext cx="5120640" cy="530352"/>
+          </a:xfrm>
+          <a:prstGeom prst="rect">
+            <a:avLst/>
+          </a:prstGeom>
+          <a:solidFill>
+            <a:srgbClr val="F8FAFC"/>
+          </a:solidFill>
+          <a:ln w="15240">
+            <a:solidFill>
+              <a:srgbClr val="CBD5E1"/>
+            </a:solidFill>
+          </a:ln>
+        </p:spPr>
+        <p:style>
+          <a:lnRef idx="1">
+            <a:schemeClr val="accent1"/>
+          </a:lnRef>
+          <a:fillRef idx="3">
+            <a:schemeClr val="accent1"/>
+          </a:fillRef>
+          <a:effectRef idx="2">
+            <a:schemeClr val="accent1"/>
+          </a:effectRef>
+          <a:fontRef idx="minor">
+            <a:schemeClr val="lt1"/>
+          </a:fontRef>
+        </p:style>
+        <p:txBody>
+          <a:bodyPr rtlCol="0" anchor="ctr" wrap="square"/>
+          <a:lstStyle/>
+          <a:p>
+            <a:pPr algn="ctr">
+              <a:defRPr sz="1600" b="0">
+                <a:solidFill>
+                  <a:srgbClr val="1E293B"/>
+                </a:solidFill>
+                <a:latin typeface="Calibri"/>
+              </a:defRPr>
+            </a:pPr>
+            <a:r>
+              <a:t>Auth Middleware  |  Validation  |  FSM State Engine</a:t>
             </a:r>
             <a:br/>
             <a:r>
-              <a:t>Authentication • Validation • Multer Upload • State Machine</a:t>
-            </a:r>
-          </a:p>
-        </p:txBody>
-      </p:sp>
-      <p:sp>
-        <p:nvSpPr>
-          <p:cNvPr id="12" name="Down Arrow 11"/>
+              <a:t>Staff Assignment  |  Multer Upload  |  Audit Logger</a:t>
+            </a:r>
+          </a:p>
+        </p:txBody>
+      </p:sp>
+      <p:sp>
+        <p:nvSpPr>
+          <p:cNvPr id="13" name="Down Arrow 12"/>
           <p:cNvSpPr/>
           <p:nvPr/>
         </p:nvSpPr>
         <p:spPr>
           <a:xfrm>
-            <a:off x="3474720" y="3721608"/>
+            <a:off x="3657599" y="4133087"/>
             <a:ext cx="182880" cy="228600"/>
           </a:xfrm>
           <a:prstGeom prst="downArrow">
@@ -6612,14 +6706,14 @@
       </p:sp>
       <p:sp>
         <p:nvSpPr>
-          <p:cNvPr id="13" name="Rectangle 12"/>
+          <p:cNvPr id="14" name="Rectangle 13"/>
           <p:cNvSpPr/>
           <p:nvPr/>
         </p:nvSpPr>
         <p:spPr>
           <a:xfrm>
-            <a:off x="731520" y="3968496"/>
-            <a:ext cx="5669280" cy="658368"/>
+            <a:off x="914400" y="4389120"/>
+            <a:ext cx="5669280" cy="594360"/>
           </a:xfrm>
           <a:prstGeom prst="rect">
             <a:avLst/>
@@ -6627,7 +6721,7 @@
           <a:solidFill>
             <a:srgbClr val="0F172A"/>
           </a:solidFill>
-          <a:ln w="19050">
+          <a:ln w="15240">
             <a:solidFill>
               <a:srgbClr val="0F172A"/>
             </a:solidFill>
@@ -6652,41 +6746,41 @@
           <a:lstStyle/>
           <a:p>
             <a:pPr algn="ctr">
-              <a:defRPr sz="1800" b="1">
+              <a:defRPr sz="1700" b="1">
                 <a:solidFill>
                   <a:srgbClr val="FFFFFF"/>
                 </a:solidFill>
-                <a:latin typeface="Arial"/>
-              </a:defRPr>
-            </a:pPr>
-            <a:r>
-              <a:t>MySQL 8 Relational Database (ccms_db)</a:t>
+                <a:latin typeface="Calibri"/>
+              </a:defRPr>
+            </a:pPr>
+            <a:r>
+              <a:t>MYSQL 8 RELATIONAL DATABASE</a:t>
             </a:r>
             <a:br/>
             <a:r>
-              <a:t>7 Normalized 3NF Tables • InnoDB Engine • Connection Pool</a:t>
-            </a:r>
-          </a:p>
-        </p:txBody>
-      </p:sp>
-      <p:sp>
-        <p:nvSpPr>
-          <p:cNvPr id="14" name="Rectangle 13"/>
+              <a:t>ccms_db · 7 Normalized Tables · InnoDB Transactions</a:t>
+            </a:r>
+          </a:p>
+        </p:txBody>
+      </p:sp>
+      <p:sp>
+        <p:nvSpPr>
+          <p:cNvPr id="15" name="Rectangle 14"/>
           <p:cNvSpPr/>
           <p:nvPr/>
         </p:nvSpPr>
         <p:spPr>
           <a:xfrm>
-            <a:off x="4389120" y="3044952"/>
-            <a:ext cx="1920240" cy="658368"/>
+            <a:off x="4572000" y="2606040"/>
+            <a:ext cx="1920240" cy="411480"/>
           </a:xfrm>
           <a:prstGeom prst="rect">
             <a:avLst/>
           </a:prstGeom>
           <a:solidFill>
-            <a:srgbClr val="F1F5F9"/>
+            <a:srgbClr val="FFFFFF"/>
           </a:solidFill>
-          <a:ln w="19050">
+          <a:ln w="15240">
             <a:solidFill>
               <a:srgbClr val="2563EB"/>
             </a:solidFill>
@@ -6711,33 +6805,29 @@
           <a:lstStyle/>
           <a:p>
             <a:pPr algn="ctr">
-              <a:defRPr sz="1600" b="1">
+              <a:defRPr sz="1500" b="1">
                 <a:solidFill>
                   <a:srgbClr val="2563EB"/>
                 </a:solidFill>
-                <a:latin typeface="Arial"/>
-              </a:defRPr>
-            </a:pPr>
-            <a:r>
-              <a:t>JWT Auth Sideflow</a:t>
-            </a:r>
-            <a:br/>
-            <a:r>
-              <a:t>verifyToken Guard</a:t>
-            </a:r>
-          </a:p>
-        </p:txBody>
-      </p:sp>
-      <p:sp>
-        <p:nvSpPr>
-          <p:cNvPr id="15" name="TextBox 14"/>
+                <a:latin typeface="Calibri"/>
+              </a:defRPr>
+            </a:pPr>
+            <a:r>
+              <a:t>JWT Bearer Token</a:t>
+            </a:r>
+          </a:p>
+        </p:txBody>
+      </p:sp>
+      <p:sp>
+        <p:nvSpPr>
+          <p:cNvPr id="16" name="TextBox 15"/>
           <p:cNvSpPr txBox="1"/>
           <p:nvPr/>
         </p:nvSpPr>
         <p:spPr>
           <a:xfrm>
-            <a:off x="6675120" y="1325880"/>
-            <a:ext cx="4785055" cy="4114800"/>
+            <a:off x="7132320" y="1463040"/>
+            <a:ext cx="4114800" cy="4206240"/>
           </a:xfrm>
           <a:prstGeom prst="rect">
             <a:avLst/>
@@ -6752,13 +6842,13 @@
           <a:p>
             <a:pPr>
               <a:spcAft>
-                <a:spcPts val="1600"/>
+                <a:spcPts val="1400"/>
               </a:spcAft>
               <a:defRPr sz="2400" b="1">
                 <a:solidFill>
                   <a:srgbClr val="0F172A"/>
                 </a:solidFill>
-                <a:latin typeface="Arial"/>
+                <a:latin typeface="Calibri"/>
               </a:defRPr>
             </a:pPr>
             <a:r>
@@ -6768,11 +6858,11 @@
           <a:p>
             <a:pPr>
               <a:spcBef>
-                <a:spcPts val="1400"/>
+                <a:spcPts val="1200"/>
               </a:spcBef>
             </a:pPr>
             <a:r>
-              <a:rPr b="1" sz="2100">
+              <a:rPr b="1" sz="2000">
                 <a:solidFill>
                   <a:srgbClr val="2563EB"/>
                 </a:solidFill>
@@ -6781,22 +6871,22 @@
 </a:t>
             </a:r>
             <a:r>
-              <a:rPr sz="1900">
+              <a:rPr sz="1800">
                 <a:solidFill>
                   <a:srgbClr val="1E293B"/>
                 </a:solidFill>
               </a:rPr>
-              <a:t>Presentation layer is strictly decoupled from storage. The client never accesses MySQL directly; all operations are governed by validated REST endpoints.</a:t>
+              <a:t>Presentation tier is strictly decoupled from storage. The client never queries MySQL directly; all operations are governed by validated REST endpoints.</a:t>
             </a:r>
           </a:p>
           <a:p>
             <a:pPr>
               <a:spcBef>
-                <a:spcPts val="1400"/>
+                <a:spcPts val="1200"/>
               </a:spcBef>
             </a:pPr>
             <a:r>
-              <a:rPr b="1" sz="2100">
+              <a:rPr b="1" sz="2000">
                 <a:solidFill>
                   <a:srgbClr val="2563EB"/>
                 </a:solidFill>
@@ -6805,36 +6895,36 @@
 </a:t>
             </a:r>
             <a:r>
-              <a:rPr sz="1900">
+              <a:rPr sz="1800">
                 <a:solidFill>
                   <a:srgbClr val="1E293B"/>
                 </a:solidFill>
               </a:rPr>
-              <a:t>Eliminates server session storage. Each request carries a signed HS256 Bearer token, enabling horizontal scaling and high concurrency.</a:t>
+              <a:t>HS256 signed Bearer tokens eliminate server-side session state, enabling fast horizontal scaling and seamless route protection.</a:t>
             </a:r>
           </a:p>
           <a:p>
             <a:pPr>
               <a:spcBef>
-                <a:spcPts val="1400"/>
+                <a:spcPts val="1200"/>
               </a:spcBef>
             </a:pPr>
             <a:r>
-              <a:rPr b="1" sz="2100">
+              <a:rPr b="1" sz="2000">
                 <a:solidFill>
                   <a:srgbClr val="2563EB"/>
                 </a:solidFill>
               </a:rPr>
-              <a:t>• Relational Integrity &amp; ACID
+              <a:t>• ACID &amp; Referential Integrity
 </a:t>
             </a:r>
             <a:r>
-              <a:rPr sz="1900">
+              <a:rPr sz="1800">
                 <a:solidFill>
                   <a:srgbClr val="1E293B"/>
                 </a:solidFill>
               </a:rPr>
-              <a:t>Normalized schema with foreign key constraints, atomic transactions, and parameterized SQL queries eliminating SQL injection risks.</a:t>
+              <a:t>Normalized 3NF relational schema with strict foreign keys, atomic transactions, and parameterized SQL queries eliminating SQL injection.</a:t>
             </a:r>
           </a:p>
         </p:txBody>
@@ -6865,8 +6955,8 @@
         </p:nvSpPr>
         <p:spPr>
           <a:xfrm>
-            <a:off x="731520" y="365760"/>
-            <a:ext cx="10728655" cy="320040"/>
+            <a:off x="914400" y="384048"/>
+            <a:ext cx="10362895" cy="274320"/>
           </a:xfrm>
           <a:prstGeom prst="rect">
             <a:avLst/>
@@ -6880,15 +6970,15 @@
           <a:lstStyle/>
           <a:p>
             <a:pPr>
-              <a:defRPr sz="1800" b="1">
+              <a:defRPr sz="1600" b="1">
                 <a:solidFill>
                   <a:srgbClr val="2563EB"/>
                 </a:solidFill>
-                <a:latin typeface="Arial"/>
-              </a:defRPr>
-            </a:pPr>
-            <a:r>
-              <a:t>4. COMPLAINT WORKFLOW &amp; LIFECYCLE</a:t>
+                <a:latin typeface="Calibri"/>
+              </a:defRPr>
+            </a:pPr>
+            <a:r>
+              <a:t>04 — WORKFLOW</a:t>
             </a:r>
           </a:p>
         </p:txBody>
@@ -6901,8 +6991,8 @@
         </p:nvSpPr>
         <p:spPr>
           <a:xfrm>
-            <a:off x="731520" y="658368"/>
-            <a:ext cx="10728655" cy="502920"/>
+            <a:off x="914400" y="658368"/>
+            <a:ext cx="10362895" cy="502920"/>
           </a:xfrm>
           <a:prstGeom prst="rect">
             <a:avLst/>
@@ -6916,15 +7006,15 @@
           <a:lstStyle/>
           <a:p>
             <a:pPr>
-              <a:defRPr sz="3200" b="1">
+              <a:defRPr sz="2800" b="1">
                 <a:solidFill>
                   <a:srgbClr val="0F172A"/>
                 </a:solidFill>
-                <a:latin typeface="Arial"/>
-              </a:defRPr>
-            </a:pPr>
-            <a:r>
-              <a:t>Finite State Machine Enforcing Audited Status Progression</a:t>
+                <a:latin typeface="Calibri"/>
+              </a:defRPr>
+            </a:pPr>
+            <a:r>
+              <a:t>Finite State Machine &amp; Role Responsibilities</a:t>
             </a:r>
           </a:p>
         </p:txBody>
@@ -6937,8 +7027,8 @@
         </p:nvSpPr>
         <p:spPr>
           <a:xfrm>
-            <a:off x="731520" y="6263640"/>
-            <a:ext cx="10728655" cy="13716"/>
+            <a:off x="914400" y="6263640"/>
+            <a:ext cx="10362895" cy="13716"/>
           </a:xfrm>
           <a:prstGeom prst="rect">
             <a:avLst/>
@@ -6980,8 +7070,8 @@
         </p:nvSpPr>
         <p:spPr>
           <a:xfrm>
-            <a:off x="731520" y="6327648"/>
-            <a:ext cx="8229600" cy="320040"/>
+            <a:off x="914400" y="6336792"/>
+            <a:ext cx="7772400" cy="292608"/>
           </a:xfrm>
           <a:prstGeom prst="rect">
             <a:avLst/>
@@ -6995,11 +7085,11 @@
           <a:lstStyle/>
           <a:p>
             <a:pPr>
-              <a:defRPr sz="1600" b="1">
+              <a:defRPr sz="1500" b="1">
                 <a:solidFill>
                   <a:srgbClr val="475569"/>
                 </a:solidFill>
-                <a:latin typeface="Arial"/>
+                <a:latin typeface="Calibri"/>
               </a:defRPr>
             </a:pPr>
             <a:r>
@@ -7016,8 +7106,8 @@
         </p:nvSpPr>
         <p:spPr>
           <a:xfrm>
-            <a:off x="9144000" y="6327648"/>
-            <a:ext cx="2316175" cy="320040"/>
+            <a:off x="8686800" y="6336792"/>
+            <a:ext cx="2590495" cy="292608"/>
           </a:xfrm>
           <a:prstGeom prst="rect">
             <a:avLst/>
@@ -7031,11 +7121,11 @@
           <a:lstStyle/>
           <a:p>
             <a:pPr algn="r">
-              <a:defRPr sz="1600" b="1">
+              <a:defRPr sz="1500" b="1">
                 <a:solidFill>
                   <a:srgbClr val="2563EB"/>
                 </a:solidFill>
-                <a:latin typeface="Arial"/>
+                <a:latin typeface="Calibri"/>
               </a:defRPr>
             </a:pPr>
             <a:r>
@@ -7052,8 +7142,8 @@
         </p:nvSpPr>
         <p:spPr>
           <a:xfrm>
-            <a:off x="731520" y="1463040"/>
-            <a:ext cx="1280160" cy="640080"/>
+            <a:off x="914400" y="1554480"/>
+            <a:ext cx="1280160" cy="594360"/>
           </a:xfrm>
           <a:prstGeom prst="rect">
             <a:avLst/>
@@ -7061,7 +7151,7 @@
           <a:solidFill>
             <a:srgbClr val="0F172A"/>
           </a:solidFill>
-          <a:ln w="19050">
+          <a:ln w="15240">
             <a:solidFill>
               <a:srgbClr val="0F172A"/>
             </a:solidFill>
@@ -7086,11 +7176,11 @@
           <a:lstStyle/>
           <a:p>
             <a:pPr algn="ctr">
-              <a:defRPr sz="1900" b="1">
+              <a:defRPr sz="1800" b="1">
                 <a:solidFill>
                   <a:srgbClr val="FFFFFF"/>
                 </a:solidFill>
-                <a:latin typeface="Arial"/>
+                <a:latin typeface="Calibri"/>
               </a:defRPr>
             </a:pPr>
             <a:r>
@@ -7107,8 +7197,8 @@
         </p:nvSpPr>
         <p:spPr>
           <a:xfrm>
-            <a:off x="2084832" y="1664208"/>
-            <a:ext cx="219456" cy="201168"/>
+            <a:off x="2267712" y="1737360"/>
+            <a:ext cx="201168" cy="182880"/>
           </a:xfrm>
           <a:prstGeom prst="rightArrow">
             <a:avLst/>
@@ -7150,8 +7240,8 @@
         </p:nvSpPr>
         <p:spPr>
           <a:xfrm>
-            <a:off x="2468880" y="1463040"/>
-            <a:ext cx="1463040" cy="640080"/>
+            <a:off x="2560320" y="1554480"/>
+            <a:ext cx="1463040" cy="594360"/>
           </a:xfrm>
           <a:prstGeom prst="rect">
             <a:avLst/>
@@ -7159,7 +7249,7 @@
           <a:solidFill>
             <a:srgbClr val="0F172A"/>
           </a:solidFill>
-          <a:ln w="19050">
+          <a:ln w="15240">
             <a:solidFill>
               <a:srgbClr val="0F172A"/>
             </a:solidFill>
@@ -7184,11 +7274,11 @@
           <a:lstStyle/>
           <a:p>
             <a:pPr algn="ctr">
-              <a:defRPr sz="1900" b="1">
+              <a:defRPr sz="1800" b="1">
                 <a:solidFill>
                   <a:srgbClr val="FFFFFF"/>
                 </a:solidFill>
-                <a:latin typeface="Arial"/>
+                <a:latin typeface="Calibri"/>
               </a:defRPr>
             </a:pPr>
             <a:r>
@@ -7205,8 +7295,8 @@
         </p:nvSpPr>
         <p:spPr>
           <a:xfrm>
-            <a:off x="4005072" y="1664208"/>
-            <a:ext cx="219456" cy="201168"/>
+            <a:off x="4096512" y="1737360"/>
+            <a:ext cx="201168" cy="182880"/>
           </a:xfrm>
           <a:prstGeom prst="rightArrow">
             <a:avLst/>
@@ -7248,8 +7338,8 @@
         </p:nvSpPr>
         <p:spPr>
           <a:xfrm>
-            <a:off x="4389120" y="1463040"/>
-            <a:ext cx="1463040" cy="640080"/>
+            <a:off x="4389120" y="1554480"/>
+            <a:ext cx="1463040" cy="594360"/>
           </a:xfrm>
           <a:prstGeom prst="rect">
             <a:avLst/>
@@ -7257,7 +7347,7 @@
           <a:solidFill>
             <a:srgbClr val="0F172A"/>
           </a:solidFill>
-          <a:ln w="19050">
+          <a:ln w="15240">
             <a:solidFill>
               <a:srgbClr val="0F172A"/>
             </a:solidFill>
@@ -7282,11 +7372,11 @@
           <a:lstStyle/>
           <a:p>
             <a:pPr algn="ctr">
-              <a:defRPr sz="1900" b="1">
+              <a:defRPr sz="1800" b="1">
                 <a:solidFill>
                   <a:srgbClr val="FFFFFF"/>
                 </a:solidFill>
-                <a:latin typeface="Arial"/>
+                <a:latin typeface="Calibri"/>
               </a:defRPr>
             </a:pPr>
             <a:r>
@@ -7303,8 +7393,8 @@
         </p:nvSpPr>
         <p:spPr>
           <a:xfrm>
-            <a:off x="5925312" y="1664208"/>
-            <a:ext cx="219456" cy="201168"/>
+            <a:off x="5925312" y="1737360"/>
+            <a:ext cx="201168" cy="182880"/>
           </a:xfrm>
           <a:prstGeom prst="rightArrow">
             <a:avLst/>
@@ -7346,8 +7436,8 @@
         </p:nvSpPr>
         <p:spPr>
           <a:xfrm>
-            <a:off x="6309360" y="1463040"/>
-            <a:ext cx="1645920" cy="640080"/>
+            <a:off x="6217920" y="1554480"/>
+            <a:ext cx="1645920" cy="594360"/>
           </a:xfrm>
           <a:prstGeom prst="rect">
             <a:avLst/>
@@ -7355,7 +7445,7 @@
           <a:solidFill>
             <a:srgbClr val="0F172A"/>
           </a:solidFill>
-          <a:ln w="19050">
+          <a:ln w="15240">
             <a:solidFill>
               <a:srgbClr val="0F172A"/>
             </a:solidFill>
@@ -7380,11 +7470,11 @@
           <a:lstStyle/>
           <a:p>
             <a:pPr algn="ctr">
-              <a:defRPr sz="1900" b="1">
+              <a:defRPr sz="1800" b="1">
                 <a:solidFill>
                   <a:srgbClr val="FFFFFF"/>
                 </a:solidFill>
-                <a:latin typeface="Arial"/>
+                <a:latin typeface="Calibri"/>
               </a:defRPr>
             </a:pPr>
             <a:r>
@@ -7401,8 +7491,8 @@
         </p:nvSpPr>
         <p:spPr>
           <a:xfrm>
-            <a:off x="8028432" y="1664208"/>
-            <a:ext cx="219456" cy="201168"/>
+            <a:off x="7936992" y="1737360"/>
+            <a:ext cx="201168" cy="182880"/>
           </a:xfrm>
           <a:prstGeom prst="rightArrow">
             <a:avLst/>
@@ -7444,8 +7534,8 @@
         </p:nvSpPr>
         <p:spPr>
           <a:xfrm>
-            <a:off x="8412480" y="1463040"/>
-            <a:ext cx="1463040" cy="640080"/>
+            <a:off x="8229600" y="1554480"/>
+            <a:ext cx="1463040" cy="594360"/>
           </a:xfrm>
           <a:prstGeom prst="rect">
             <a:avLst/>
@@ -7453,7 +7543,7 @@
           <a:solidFill>
             <a:srgbClr val="0F172A"/>
           </a:solidFill>
-          <a:ln w="19050">
+          <a:ln w="15240">
             <a:solidFill>
               <a:srgbClr val="0F172A"/>
             </a:solidFill>
@@ -7478,11 +7568,11 @@
           <a:lstStyle/>
           <a:p>
             <a:pPr algn="ctr">
-              <a:defRPr sz="1900" b="1">
+              <a:defRPr sz="1800" b="1">
                 <a:solidFill>
                   <a:srgbClr val="FFFFFF"/>
                 </a:solidFill>
-                <a:latin typeface="Arial"/>
+                <a:latin typeface="Calibri"/>
               </a:defRPr>
             </a:pPr>
             <a:r>
@@ -7499,8 +7589,8 @@
         </p:nvSpPr>
         <p:spPr>
           <a:xfrm>
-            <a:off x="9948672" y="1664208"/>
-            <a:ext cx="219456" cy="201168"/>
+            <a:off x="9765792" y="1737360"/>
+            <a:ext cx="201168" cy="182880"/>
           </a:xfrm>
           <a:prstGeom prst="rightArrow">
             <a:avLst/>
@@ -7542,8 +7632,8 @@
         </p:nvSpPr>
         <p:spPr>
           <a:xfrm>
-            <a:off x="10332720" y="1463040"/>
-            <a:ext cx="1127455" cy="640080"/>
+            <a:off x="10058400" y="1554480"/>
+            <a:ext cx="1218895" cy="594360"/>
           </a:xfrm>
           <a:prstGeom prst="rect">
             <a:avLst/>
@@ -7551,7 +7641,7 @@
           <a:solidFill>
             <a:srgbClr val="0F172A"/>
           </a:solidFill>
-          <a:ln w="19050">
+          <a:ln w="15240">
             <a:solidFill>
               <a:srgbClr val="0F172A"/>
             </a:solidFill>
@@ -7576,11 +7666,11 @@
           <a:lstStyle/>
           <a:p>
             <a:pPr algn="ctr">
-              <a:defRPr sz="1900" b="1">
+              <a:defRPr sz="1800" b="1">
                 <a:solidFill>
                   <a:srgbClr val="FFFFFF"/>
                 </a:solidFill>
-                <a:latin typeface="Arial"/>
+                <a:latin typeface="Calibri"/>
               </a:defRPr>
             </a:pPr>
             <a:r>
@@ -7597,18 +7687,18 @@
         </p:nvSpPr>
         <p:spPr>
           <a:xfrm>
-            <a:off x="2468880" y="2423160"/>
-            <a:ext cx="2011680" cy="502920"/>
+            <a:off x="2560320" y="2468880"/>
+            <a:ext cx="2011680" cy="457200"/>
           </a:xfrm>
           <a:prstGeom prst="rect">
             <a:avLst/>
           </a:prstGeom>
           <a:solidFill>
-            <a:srgbClr val="FEF2F2"/>
+            <a:srgbClr val="FFFFFF"/>
           </a:solidFill>
-          <a:ln w="19050">
+          <a:ln w="15240">
             <a:solidFill>
-              <a:srgbClr val="EF4444"/>
+              <a:srgbClr val="B91C1C"/>
             </a:solidFill>
           </a:ln>
         </p:spPr>
@@ -7631,11 +7721,11 @@
           <a:lstStyle/>
           <a:p>
             <a:pPr algn="ctr">
-              <a:defRPr sz="1700" b="1">
+              <a:defRPr sz="1600" b="1">
                 <a:solidFill>
                   <a:srgbClr val="B91C1C"/>
                 </a:solidFill>
-                <a:latin typeface="Arial"/>
+                <a:latin typeface="Calibri"/>
               </a:defRPr>
             </a:pPr>
             <a:r>
@@ -7652,14 +7742,14 @@
         </p:nvSpPr>
         <p:spPr>
           <a:xfrm>
-            <a:off x="3383280" y="2121408"/>
+            <a:off x="3474720" y="2167128"/>
             <a:ext cx="164592" cy="274320"/>
           </a:xfrm>
           <a:prstGeom prst="downArrow">
             <a:avLst/>
           </a:prstGeom>
           <a:solidFill>
-            <a:srgbClr val="EF4444"/>
+            <a:srgbClr val="B91C1C"/>
           </a:solidFill>
           <a:ln>
             <a:noFill/>
@@ -7695,18 +7785,18 @@
         </p:nvSpPr>
         <p:spPr>
           <a:xfrm>
-            <a:off x="9418320" y="2423160"/>
-            <a:ext cx="2041855" cy="502920"/>
+            <a:off x="9265615" y="2468880"/>
+            <a:ext cx="2011680" cy="457200"/>
           </a:xfrm>
           <a:prstGeom prst="rect">
             <a:avLst/>
           </a:prstGeom>
           <a:solidFill>
-            <a:srgbClr val="FEF3C7"/>
+            <a:srgbClr val="FFFFFF"/>
           </a:solidFill>
-          <a:ln w="19050">
+          <a:ln w="15240">
             <a:solidFill>
-              <a:srgbClr val="F59E0B"/>
+              <a:srgbClr val="B45309"/>
             </a:solidFill>
           </a:ln>
         </p:spPr>
@@ -7729,15 +7819,15 @@
           <a:lstStyle/>
           <a:p>
             <a:pPr algn="ctr">
-              <a:defRPr sz="1700" b="1">
+              <a:defRPr sz="1600" b="1">
                 <a:solidFill>
                   <a:srgbClr val="B45309"/>
                 </a:solidFill>
-                <a:latin typeface="Arial"/>
-              </a:defRPr>
-            </a:pPr>
-            <a:r>
-              <a:t>REOPENED (Persistent)</a:t>
+                <a:latin typeface="Calibri"/>
+              </a:defRPr>
+            </a:pPr>
+            <a:r>
+              <a:t>REOPENED (Recurring)</a:t>
             </a:r>
           </a:p>
         </p:txBody>
@@ -7750,14 +7840,14 @@
         </p:nvSpPr>
         <p:spPr>
           <a:xfrm>
-            <a:off x="10332720" y="2121408"/>
+            <a:off x="10149840" y="2167128"/>
             <a:ext cx="164592" cy="274320"/>
           </a:xfrm>
           <a:prstGeom prst="downArrow">
             <a:avLst/>
           </a:prstGeom>
           <a:solidFill>
-            <a:srgbClr val="F59E0B"/>
+            <a:srgbClr val="B45309"/>
           </a:solidFill>
           <a:ln>
             <a:noFill/>
@@ -7787,59 +7877,14 @@
       </p:sp>
       <p:sp>
         <p:nvSpPr>
-          <p:cNvPr id="22" name="Rectangle 21"/>
-          <p:cNvSpPr/>
-          <p:nvPr/>
-        </p:nvSpPr>
-        <p:spPr>
-          <a:xfrm>
-            <a:off x="731520" y="3337560"/>
-            <a:ext cx="3392424" cy="2560320"/>
-          </a:xfrm>
-          <a:prstGeom prst="rect">
-            <a:avLst/>
-          </a:prstGeom>
-          <a:solidFill>
-            <a:srgbClr val="F1F5F9"/>
-          </a:solidFill>
-          <a:ln w="19050">
-            <a:solidFill>
-              <a:srgbClr val="CBD5E1"/>
-            </a:solidFill>
-          </a:ln>
-        </p:spPr>
-        <p:style>
-          <a:lnRef idx="1">
-            <a:schemeClr val="accent1"/>
-          </a:lnRef>
-          <a:fillRef idx="3">
-            <a:schemeClr val="accent1"/>
-          </a:fillRef>
-          <a:effectRef idx="2">
-            <a:schemeClr val="accent1"/>
-          </a:effectRef>
-          <a:fontRef idx="minor">
-            <a:schemeClr val="lt1"/>
-          </a:fontRef>
-        </p:style>
-        <p:txBody>
-          <a:bodyPr rtlCol="0" anchor="ctr"/>
-          <a:lstStyle/>
-          <a:p>
-            <a:pPr algn="ctr"/>
-          </a:p>
-        </p:txBody>
-      </p:sp>
-      <p:sp>
-        <p:nvSpPr>
-          <p:cNvPr id="23" name="TextBox 22"/>
+          <p:cNvPr id="22" name="TextBox 21"/>
           <p:cNvSpPr txBox="1"/>
           <p:nvPr/>
         </p:nvSpPr>
         <p:spPr>
           <a:xfrm>
-            <a:off x="914400" y="3474720"/>
-            <a:ext cx="3026664" cy="2286000"/>
+            <a:off x="914400" y="3337560"/>
+            <a:ext cx="3291840" cy="2468880"/>
           </a:xfrm>
           <a:prstGeom prst="rect">
             <a:avLst/>
@@ -7853,15 +7898,15 @@
           <a:lstStyle/>
           <a:p>
             <a:pPr>
-              <a:defRPr sz="2200" b="1">
+              <a:defRPr sz="2100" b="1">
                 <a:solidFill>
                   <a:srgbClr val="2563EB"/>
                 </a:solidFill>
-                <a:latin typeface="Arial"/>
-              </a:defRPr>
-            </a:pPr>
-            <a:r>
-              <a:t>Student / Faculty</a:t>
+                <a:latin typeface="Calibri"/>
+              </a:defRPr>
+            </a:pPr>
+            <a:r>
+              <a:t>STUDENT / FACULTY</a:t>
             </a:r>
           </a:p>
           <a:p>
@@ -7869,11 +7914,11 @@
               <a:spcBef>
                 <a:spcPts val="400"/>
               </a:spcBef>
-              <a:defRPr sz="1900" b="1">
+              <a:defRPr sz="1800" b="1">
                 <a:solidFill>
                   <a:srgbClr val="0F172A"/>
                 </a:solidFill>
-                <a:latin typeface="Arial"/>
+                <a:latin typeface="Calibri"/>
               </a:defRPr>
             </a:pPr>
             <a:r>
@@ -7883,124 +7928,63 @@
           <a:p>
             <a:pPr>
               <a:spcBef>
-                <a:spcPts val="500"/>
+                <a:spcPts val="600"/>
               </a:spcBef>
-              <a:defRPr sz="1800">
+              <a:defRPr sz="1700">
                 <a:solidFill>
                   <a:srgbClr val="1E293B"/>
                 </a:solidFill>
-                <a:latin typeface="Arial"/>
-              </a:defRPr>
-            </a:pPr>
-            <a:r>
-              <a:t>• Lodges complaint with campus building &amp; room.</a:t>
+                <a:latin typeface="Calibri"/>
+              </a:defRPr>
+            </a:pPr>
+            <a:r>
+              <a:t>• Lodges complaint with building, room &amp; photo evidence</a:t>
             </a:r>
           </a:p>
           <a:p>
             <a:pPr>
               <a:spcBef>
-                <a:spcPts val="500"/>
+                <a:spcPts val="600"/>
               </a:spcBef>
-              <a:defRPr sz="1800">
+              <a:defRPr sz="1700">
                 <a:solidFill>
                   <a:srgbClr val="1E293B"/>
                 </a:solidFill>
-                <a:latin typeface="Arial"/>
-              </a:defRPr>
-            </a:pPr>
-            <a:r>
-              <a:t>• Attaches optional photographic evidence.</a:t>
+                <a:latin typeface="Calibri"/>
+              </a:defRPr>
+            </a:pPr>
+            <a:r>
+              <a:t>• Tracks live milestone timeline from submission to fix</a:t>
             </a:r>
           </a:p>
           <a:p>
             <a:pPr>
               <a:spcBef>
-                <a:spcPts val="500"/>
+                <a:spcPts val="600"/>
               </a:spcBef>
-              <a:defRPr sz="1800">
+              <a:defRPr sz="1700">
                 <a:solidFill>
                   <a:srgbClr val="1E293B"/>
                 </a:solidFill>
-                <a:latin typeface="Arial"/>
-              </a:defRPr>
-            </a:pPr>
-            <a:r>
-              <a:t>• Monitors real-time status progression.</a:t>
-            </a:r>
-          </a:p>
-          <a:p>
-            <a:pPr>
-              <a:spcBef>
-                <a:spcPts val="500"/>
-              </a:spcBef>
-              <a:defRPr sz="1800">
-                <a:solidFill>
-                  <a:srgbClr val="1E293B"/>
-                </a:solidFill>
-                <a:latin typeface="Arial"/>
-              </a:defRPr>
-            </a:pPr>
-            <a:r>
-              <a:t>• Submits 1–5 star rating upon resolution.</a:t>
-            </a:r>
-          </a:p>
-        </p:txBody>
-      </p:sp>
-      <p:sp>
-        <p:nvSpPr>
-          <p:cNvPr id="24" name="Rectangle 23"/>
-          <p:cNvSpPr/>
-          <p:nvPr/>
-        </p:nvSpPr>
-        <p:spPr>
-          <a:xfrm>
-            <a:off x="4398264" y="3337560"/>
-            <a:ext cx="3392424" cy="2560320"/>
-          </a:xfrm>
-          <a:prstGeom prst="rect">
-            <a:avLst/>
-          </a:prstGeom>
-          <a:solidFill>
-            <a:srgbClr val="F1F5F9"/>
-          </a:solidFill>
-          <a:ln w="19050">
-            <a:solidFill>
-              <a:srgbClr val="CBD5E1"/>
-            </a:solidFill>
-          </a:ln>
-        </p:spPr>
-        <p:style>
-          <a:lnRef idx="1">
-            <a:schemeClr val="accent1"/>
-          </a:lnRef>
-          <a:fillRef idx="3">
-            <a:schemeClr val="accent1"/>
-          </a:fillRef>
-          <a:effectRef idx="2">
-            <a:schemeClr val="accent1"/>
-          </a:effectRef>
-          <a:fontRef idx="minor">
-            <a:schemeClr val="lt1"/>
-          </a:fontRef>
-        </p:style>
-        <p:txBody>
-          <a:bodyPr rtlCol="0" anchor="ctr"/>
-          <a:lstStyle/>
-          <a:p>
-            <a:pPr algn="ctr"/>
-          </a:p>
-        </p:txBody>
-      </p:sp>
-      <p:sp>
-        <p:nvSpPr>
-          <p:cNvPr id="25" name="TextBox 24"/>
+                <a:latin typeface="Calibri"/>
+              </a:defRPr>
+            </a:pPr>
+            <a:r>
+              <a:t>• Submits 1–5 star rating and feedback upon closure</a:t>
+            </a:r>
+          </a:p>
+        </p:txBody>
+      </p:sp>
+      <p:sp>
+        <p:nvSpPr>
+          <p:cNvPr id="23" name="TextBox 22"/>
           <p:cNvSpPr txBox="1"/>
           <p:nvPr/>
         </p:nvSpPr>
         <p:spPr>
           <a:xfrm>
-            <a:off x="4581144" y="3474720"/>
-            <a:ext cx="3026664" cy="2286000"/>
+            <a:off x="4434840" y="3337560"/>
+            <a:ext cx="3291840" cy="2468880"/>
           </a:xfrm>
           <a:prstGeom prst="rect">
             <a:avLst/>
@@ -8014,15 +7998,15 @@
           <a:lstStyle/>
           <a:p>
             <a:pPr>
-              <a:defRPr sz="2200" b="1">
+              <a:defRPr sz="2100" b="1">
                 <a:solidFill>
                   <a:srgbClr val="0F172A"/>
                 </a:solidFill>
-                <a:latin typeface="Arial"/>
-              </a:defRPr>
-            </a:pPr>
-            <a:r>
-              <a:t>Administrator</a:t>
+                <a:latin typeface="Calibri"/>
+              </a:defRPr>
+            </a:pPr>
+            <a:r>
+              <a:t>ADMINISTRATOR</a:t>
             </a:r>
           </a:p>
           <a:p>
@@ -8030,11 +8014,11 @@
               <a:spcBef>
                 <a:spcPts val="400"/>
               </a:spcBef>
-              <a:defRPr sz="1900" b="1">
+              <a:defRPr sz="1800" b="1">
                 <a:solidFill>
                   <a:srgbClr val="0F172A"/>
                 </a:solidFill>
-                <a:latin typeface="Arial"/>
+                <a:latin typeface="Calibri"/>
               </a:defRPr>
             </a:pPr>
             <a:r>
@@ -8044,124 +8028,63 @@
           <a:p>
             <a:pPr>
               <a:spcBef>
-                <a:spcPts val="500"/>
+                <a:spcPts val="600"/>
               </a:spcBef>
-              <a:defRPr sz="1800">
+              <a:defRPr sz="1700">
                 <a:solidFill>
                   <a:srgbClr val="1E293B"/>
                 </a:solidFill>
-                <a:latin typeface="Arial"/>
-              </a:defRPr>
-            </a:pPr>
-            <a:r>
-              <a:t>• Reviews complaint details and authenticity.</a:t>
+                <a:latin typeface="Calibri"/>
+              </a:defRPr>
+            </a:pPr>
+            <a:r>
+              <a:t>• Inspects ticket details; marks VERIFIED or REJECTED</a:t>
             </a:r>
           </a:p>
           <a:p>
             <a:pPr>
               <a:spcBef>
-                <a:spcPts val="500"/>
+                <a:spcPts val="600"/>
               </a:spcBef>
-              <a:defRPr sz="1800">
+              <a:defRPr sz="1700">
                 <a:solidFill>
                   <a:srgbClr val="1E293B"/>
                 </a:solidFill>
-                <a:latin typeface="Arial"/>
-              </a:defRPr>
-            </a:pPr>
-            <a:r>
-              <a:t>• Accepts (VERIFIED) or dismisses (REJECTED).</a:t>
+                <a:latin typeface="Calibri"/>
+              </a:defRPr>
+            </a:pPr>
+            <a:r>
+              <a:t>• Dispatches work order to qualified maintenance staff</a:t>
             </a:r>
           </a:p>
           <a:p>
             <a:pPr>
               <a:spcBef>
-                <a:spcPts val="500"/>
+                <a:spcPts val="600"/>
               </a:spcBef>
-              <a:defRPr sz="1800">
+              <a:defRPr sz="1700">
                 <a:solidFill>
                   <a:srgbClr val="1E293B"/>
                 </a:solidFill>
-                <a:latin typeface="Arial"/>
-              </a:defRPr>
-            </a:pPr>
-            <a:r>
-              <a:t>• Assigns task to active technician.</a:t>
-            </a:r>
-          </a:p>
-          <a:p>
-            <a:pPr>
-              <a:spcBef>
-                <a:spcPts val="500"/>
-              </a:spcBef>
-              <a:defRPr sz="1800">
-                <a:solidFill>
-                  <a:srgbClr val="1E293B"/>
-                </a:solidFill>
-                <a:latin typeface="Arial"/>
-              </a:defRPr>
-            </a:pPr>
-            <a:r>
-              <a:t>• Reviews repair notes &amp; confirms closure.</a:t>
-            </a:r>
-          </a:p>
-        </p:txBody>
-      </p:sp>
-      <p:sp>
-        <p:nvSpPr>
-          <p:cNvPr id="26" name="Rectangle 25"/>
-          <p:cNvSpPr/>
-          <p:nvPr/>
-        </p:nvSpPr>
-        <p:spPr>
-          <a:xfrm>
-            <a:off x="8065008" y="3337560"/>
-            <a:ext cx="3392424" cy="2560320"/>
-          </a:xfrm>
-          <a:prstGeom prst="rect">
-            <a:avLst/>
-          </a:prstGeom>
-          <a:solidFill>
-            <a:srgbClr val="F1F5F9"/>
-          </a:solidFill>
-          <a:ln w="19050">
-            <a:solidFill>
-              <a:srgbClr val="CBD5E1"/>
-            </a:solidFill>
-          </a:ln>
-        </p:spPr>
-        <p:style>
-          <a:lnRef idx="1">
-            <a:schemeClr val="accent1"/>
-          </a:lnRef>
-          <a:fillRef idx="3">
-            <a:schemeClr val="accent1"/>
-          </a:fillRef>
-          <a:effectRef idx="2">
-            <a:schemeClr val="accent1"/>
-          </a:effectRef>
-          <a:fontRef idx="minor">
-            <a:schemeClr val="lt1"/>
-          </a:fontRef>
-        </p:style>
-        <p:txBody>
-          <a:bodyPr rtlCol="0" anchor="ctr"/>
-          <a:lstStyle/>
-          <a:p>
-            <a:pPr algn="ctr"/>
-          </a:p>
-        </p:txBody>
-      </p:sp>
-      <p:sp>
-        <p:nvSpPr>
-          <p:cNvPr id="27" name="TextBox 26"/>
+                <a:latin typeface="Calibri"/>
+              </a:defRPr>
+            </a:pPr>
+            <a:r>
+              <a:t>• Reviews repair diagnostic notes and confirms closure</a:t>
+            </a:r>
+          </a:p>
+        </p:txBody>
+      </p:sp>
+      <p:sp>
+        <p:nvSpPr>
+          <p:cNvPr id="24" name="TextBox 23"/>
           <p:cNvSpPr txBox="1"/>
           <p:nvPr/>
         </p:nvSpPr>
         <p:spPr>
           <a:xfrm>
-            <a:off x="8247888" y="3474720"/>
-            <a:ext cx="3026664" cy="2286000"/>
+            <a:off x="7955279" y="3337560"/>
+            <a:ext cx="3291840" cy="2468880"/>
           </a:xfrm>
           <a:prstGeom prst="rect">
             <a:avLst/>
@@ -8175,15 +8098,15 @@
           <a:lstStyle/>
           <a:p>
             <a:pPr>
-              <a:defRPr sz="2200" b="1">
+              <a:defRPr sz="2100" b="1">
                 <a:solidFill>
                   <a:srgbClr val="15803D"/>
                 </a:solidFill>
-                <a:latin typeface="Arial"/>
-              </a:defRPr>
-            </a:pPr>
-            <a:r>
-              <a:t>Maintenance Staff</a:t>
+                <a:latin typeface="Calibri"/>
+              </a:defRPr>
+            </a:pPr>
+            <a:r>
+              <a:t>MAINTENANCE STAFF</a:t>
             </a:r>
           </a:p>
           <a:p>
@@ -8191,11 +8114,11 @@
               <a:spcBef>
                 <a:spcPts val="400"/>
               </a:spcBef>
-              <a:defRPr sz="1900" b="1">
+              <a:defRPr sz="1800" b="1">
                 <a:solidFill>
                   <a:srgbClr val="0F172A"/>
                 </a:solidFill>
-                <a:latin typeface="Arial"/>
+                <a:latin typeface="Calibri"/>
               </a:defRPr>
             </a:pPr>
             <a:r>
@@ -8205,65 +8128,49 @@
           <a:p>
             <a:pPr>
               <a:spcBef>
-                <a:spcPts val="500"/>
+                <a:spcPts val="600"/>
               </a:spcBef>
-              <a:defRPr sz="1800">
+              <a:defRPr sz="1700">
                 <a:solidFill>
                   <a:srgbClr val="1E293B"/>
                 </a:solidFill>
-                <a:latin typeface="Arial"/>
-              </a:defRPr>
-            </a:pPr>
-            <a:r>
-              <a:t>• Accesses assigned work orders queue.</a:t>
+                <a:latin typeface="Calibri"/>
+              </a:defRPr>
+            </a:pPr>
+            <a:r>
+              <a:t>• Accesses assigned work orders in dedicated queue</a:t>
             </a:r>
           </a:p>
           <a:p>
             <a:pPr>
               <a:spcBef>
-                <a:spcPts val="500"/>
+                <a:spcPts val="600"/>
               </a:spcBef>
-              <a:defRPr sz="1800">
+              <a:defRPr sz="1700">
                 <a:solidFill>
                   <a:srgbClr val="1E293B"/>
                 </a:solidFill>
-                <a:latin typeface="Arial"/>
-              </a:defRPr>
-            </a:pPr>
-            <a:r>
-              <a:t>• Begins physical remediation (IN PROGRESS).</a:t>
+                <a:latin typeface="Calibri"/>
+              </a:defRPr>
+            </a:pPr>
+            <a:r>
+              <a:t>• Transitions status to IN PROGRESS upon starting repair</a:t>
             </a:r>
           </a:p>
           <a:p>
             <a:pPr>
               <a:spcBef>
-                <a:spcPts val="500"/>
+                <a:spcPts val="600"/>
               </a:spcBef>
-              <a:defRPr sz="1800">
+              <a:defRPr sz="1700">
                 <a:solidFill>
                   <a:srgbClr val="1E293B"/>
                 </a:solidFill>
-                <a:latin typeface="Arial"/>
-              </a:defRPr>
-            </a:pPr>
-            <a:r>
-              <a:t>• Logs diagnostic &amp; repair remarks.</a:t>
-            </a:r>
-          </a:p>
-          <a:p>
-            <a:pPr>
-              <a:spcBef>
-                <a:spcPts val="500"/>
-              </a:spcBef>
-              <a:defRPr sz="1800">
-                <a:solidFill>
-                  <a:srgbClr val="1E293B"/>
-                </a:solidFill>
-                <a:latin typeface="Arial"/>
-              </a:defRPr>
-            </a:pPr>
-            <a:r>
-              <a:t>• Marks complaint successfully RESOLVED.</a:t>
+                <a:latin typeface="Calibri"/>
+              </a:defRPr>
+            </a:pPr>
+            <a:r>
+              <a:t>• Logs diagnostic remarks and marks ticket RESOLVED</a:t>
             </a:r>
           </a:p>
         </p:txBody>
@@ -8294,8 +8201,8 @@
         </p:nvSpPr>
         <p:spPr>
           <a:xfrm>
-            <a:off x="731520" y="365760"/>
-            <a:ext cx="10728655" cy="320040"/>
+            <a:off x="914400" y="384048"/>
+            <a:ext cx="10362895" cy="274320"/>
           </a:xfrm>
           <a:prstGeom prst="rect">
             <a:avLst/>
@@ -8309,15 +8216,15 @@
           <a:lstStyle/>
           <a:p>
             <a:pPr>
-              <a:defRPr sz="1800" b="1">
+              <a:defRPr sz="1600" b="1">
                 <a:solidFill>
                   <a:srgbClr val="2563EB"/>
                 </a:solidFill>
-                <a:latin typeface="Arial"/>
-              </a:defRPr>
-            </a:pPr>
-            <a:r>
-              <a:t>5. MAJOR MODULES &amp; TECHNOLOGY STACK</a:t>
+                <a:latin typeface="Calibri"/>
+              </a:defRPr>
+            </a:pPr>
+            <a:r>
+              <a:t>05 — MODULES &amp; TECH</a:t>
             </a:r>
           </a:p>
         </p:txBody>
@@ -8330,8 +8237,8 @@
         </p:nvSpPr>
         <p:spPr>
           <a:xfrm>
-            <a:off x="731520" y="658368"/>
-            <a:ext cx="10728655" cy="502920"/>
+            <a:off x="914400" y="658368"/>
+            <a:ext cx="10362895" cy="502920"/>
           </a:xfrm>
           <a:prstGeom prst="rect">
             <a:avLst/>
@@ -8345,15 +8252,15 @@
           <a:lstStyle/>
           <a:p>
             <a:pPr>
-              <a:defRPr sz="3200" b="1">
+              <a:defRPr sz="2800" b="1">
                 <a:solidFill>
                   <a:srgbClr val="0F172A"/>
                 </a:solidFill>
-                <a:latin typeface="Arial"/>
-              </a:defRPr>
-            </a:pPr>
-            <a:r>
-              <a:t>Functional System Modules &amp; Production Software Stack</a:t>
+                <a:latin typeface="Calibri"/>
+              </a:defRPr>
+            </a:pPr>
+            <a:r>
+              <a:t>System Modules &amp; Production Technology Stack</a:t>
             </a:r>
           </a:p>
         </p:txBody>
@@ -8366,8 +8273,8 @@
         </p:nvSpPr>
         <p:spPr>
           <a:xfrm>
-            <a:off x="731520" y="6263640"/>
-            <a:ext cx="10728655" cy="13716"/>
+            <a:off x="914400" y="6263640"/>
+            <a:ext cx="10362895" cy="13716"/>
           </a:xfrm>
           <a:prstGeom prst="rect">
             <a:avLst/>
@@ -8409,8 +8316,8 @@
         </p:nvSpPr>
         <p:spPr>
           <a:xfrm>
-            <a:off x="731520" y="6327648"/>
-            <a:ext cx="8229600" cy="320040"/>
+            <a:off x="914400" y="6336792"/>
+            <a:ext cx="7772400" cy="292608"/>
           </a:xfrm>
           <a:prstGeom prst="rect">
             <a:avLst/>
@@ -8424,11 +8331,11 @@
           <a:lstStyle/>
           <a:p>
             <a:pPr>
-              <a:defRPr sz="1600" b="1">
+              <a:defRPr sz="1500" b="1">
                 <a:solidFill>
                   <a:srgbClr val="475569"/>
                 </a:solidFill>
-                <a:latin typeface="Arial"/>
+                <a:latin typeface="Calibri"/>
               </a:defRPr>
             </a:pPr>
             <a:r>
@@ -8445,8 +8352,8 @@
         </p:nvSpPr>
         <p:spPr>
           <a:xfrm>
-            <a:off x="9144000" y="6327648"/>
-            <a:ext cx="2316175" cy="320040"/>
+            <a:off x="8686800" y="6336792"/>
+            <a:ext cx="2590495" cy="292608"/>
           </a:xfrm>
           <a:prstGeom prst="rect">
             <a:avLst/>
@@ -8460,11 +8367,11 @@
           <a:lstStyle/>
           <a:p>
             <a:pPr algn="r">
-              <a:defRPr sz="1600" b="1">
+              <a:defRPr sz="1500" b="1">
                 <a:solidFill>
                   <a:srgbClr val="2563EB"/>
                 </a:solidFill>
-                <a:latin typeface="Arial"/>
+                <a:latin typeface="Calibri"/>
               </a:defRPr>
             </a:pPr>
             <a:r>
@@ -8481,8 +8388,8 @@
         </p:nvSpPr>
         <p:spPr>
           <a:xfrm>
-            <a:off x="731520" y="1280160"/>
-            <a:ext cx="5029200" cy="365760"/>
+            <a:off x="914400" y="1371600"/>
+            <a:ext cx="4846320" cy="365760"/>
           </a:xfrm>
           <a:prstGeom prst="rect">
             <a:avLst/>
@@ -8496,15 +8403,15 @@
           <a:lstStyle/>
           <a:p>
             <a:pPr>
-              <a:defRPr sz="2400" b="1">
+              <a:defRPr sz="2200" b="1">
                 <a:solidFill>
                   <a:srgbClr val="0F172A"/>
                 </a:solidFill>
-                <a:latin typeface="Arial"/>
-              </a:defRPr>
-            </a:pPr>
-            <a:r>
-              <a:t>System Functional Modules</a:t>
+                <a:latin typeface="Calibri"/>
+              </a:defRPr>
+            </a:pPr>
+            <a:r>
+              <a:t>MODULE FLOW</a:t>
             </a:r>
           </a:p>
         </p:txBody>
@@ -8517,8 +8424,8 @@
         </p:nvSpPr>
         <p:spPr>
           <a:xfrm>
-            <a:off x="731520" y="1783080"/>
-            <a:ext cx="5029200" cy="566928"/>
+            <a:off x="914400" y="1874519"/>
+            <a:ext cx="4846320" cy="530352"/>
           </a:xfrm>
           <a:prstGeom prst="rect">
             <a:avLst/>
@@ -8526,7 +8433,7 @@
           <a:solidFill>
             <a:srgbClr val="FFFFFF"/>
           </a:solidFill>
-          <a:ln w="19050">
+          <a:ln w="15240">
             <a:solidFill>
               <a:srgbClr val="2563EB"/>
             </a:solidFill>
@@ -8551,11 +8458,11 @@
           <a:lstStyle/>
           <a:p>
             <a:pPr algn="ctr">
-              <a:defRPr sz="1700" b="1">
+              <a:defRPr sz="1600" b="1">
                 <a:solidFill>
                   <a:srgbClr val="0F172A"/>
                 </a:solidFill>
-                <a:latin typeface="Arial"/>
+                <a:latin typeface="Calibri"/>
               </a:defRPr>
             </a:pPr>
             <a:r>
@@ -8563,7 +8470,7 @@
             </a:r>
             <a:br/>
             <a:r>
-              <a:t>(Registration, login, JWT token issuance, and role access guards)</a:t>
+              <a:t>Registration, login, JWT token issuance, route guards</a:t>
             </a:r>
           </a:p>
         </p:txBody>
@@ -8576,8 +8483,8 @@
         </p:nvSpPr>
         <p:spPr>
           <a:xfrm>
-            <a:off x="3154680" y="2368296"/>
-            <a:ext cx="182880" cy="256032"/>
+            <a:off x="3246120" y="2423160"/>
+            <a:ext cx="164592" cy="237744"/>
           </a:xfrm>
           <a:prstGeom prst="downArrow">
             <a:avLst/>
@@ -8619,8 +8526,8 @@
         </p:nvSpPr>
         <p:spPr>
           <a:xfrm>
-            <a:off x="731520" y="2651760"/>
-            <a:ext cx="5029200" cy="566928"/>
+            <a:off x="914400" y="2697479"/>
+            <a:ext cx="4846320" cy="530352"/>
           </a:xfrm>
           <a:prstGeom prst="rect">
             <a:avLst/>
@@ -8628,7 +8535,7 @@
           <a:solidFill>
             <a:srgbClr val="FFFFFF"/>
           </a:solidFill>
-          <a:ln w="19050">
+          <a:ln w="15240">
             <a:solidFill>
               <a:srgbClr val="2563EB"/>
             </a:solidFill>
@@ -8653,11 +8560,11 @@
           <a:lstStyle/>
           <a:p>
             <a:pPr algn="ctr">
-              <a:defRPr sz="1700" b="1">
+              <a:defRPr sz="1600" b="1">
                 <a:solidFill>
                   <a:srgbClr val="0F172A"/>
                 </a:solidFill>
-                <a:latin typeface="Arial"/>
+                <a:latin typeface="Calibri"/>
               </a:defRPr>
             </a:pPr>
             <a:r>
@@ -8665,7 +8572,7 @@
             </a:r>
             <a:br/>
             <a:r>
-              <a:t>(Dynamic React form, category/room selection, Multer file upload)</a:t>
+              <a:t>Dynamic React form, category/room mapping, Multer upload</a:t>
             </a:r>
           </a:p>
         </p:txBody>
@@ -8678,8 +8585,8 @@
         </p:nvSpPr>
         <p:spPr>
           <a:xfrm>
-            <a:off x="3154680" y="3236976"/>
-            <a:ext cx="182880" cy="256032"/>
+            <a:off x="3246120" y="3246120"/>
+            <a:ext cx="164592" cy="237744"/>
           </a:xfrm>
           <a:prstGeom prst="downArrow">
             <a:avLst/>
@@ -8721,8 +8628,8 @@
         </p:nvSpPr>
         <p:spPr>
           <a:xfrm>
-            <a:off x="731520" y="3520439"/>
-            <a:ext cx="5029200" cy="566928"/>
+            <a:off x="914400" y="3520439"/>
+            <a:ext cx="4846320" cy="530352"/>
           </a:xfrm>
           <a:prstGeom prst="rect">
             <a:avLst/>
@@ -8730,7 +8637,7 @@
           <a:solidFill>
             <a:srgbClr val="FFFFFF"/>
           </a:solidFill>
-          <a:ln w="19050">
+          <a:ln w="15240">
             <a:solidFill>
               <a:srgbClr val="2563EB"/>
             </a:solidFill>
@@ -8755,19 +8662,19 @@
           <a:lstStyle/>
           <a:p>
             <a:pPr algn="ctr">
-              <a:defRPr sz="1700" b="1">
+              <a:defRPr sz="1600" b="1">
                 <a:solidFill>
                   <a:srgbClr val="0F172A"/>
                 </a:solidFill>
-                <a:latin typeface="Arial"/>
-              </a:defRPr>
-            </a:pPr>
-            <a:r>
-              <a:t>Admin Control Center</a:t>
+                <a:latin typeface="Calibri"/>
+              </a:defRPr>
+            </a:pPr>
+            <a:r>
+              <a:t>Administrative Triage</a:t>
             </a:r>
             <a:br/>
             <a:r>
-              <a:t>(Campus-wide triage, status filters, staff assignment interface)</a:t>
+              <a:t>Campus-wide review, status filtering, staff assignment</a:t>
             </a:r>
           </a:p>
         </p:txBody>
@@ -8780,8 +8687,8 @@
         </p:nvSpPr>
         <p:spPr>
           <a:xfrm>
-            <a:off x="3154680" y="4105655"/>
-            <a:ext cx="182880" cy="256032"/>
+            <a:off x="3246120" y="4069079"/>
+            <a:ext cx="164592" cy="237744"/>
           </a:xfrm>
           <a:prstGeom prst="downArrow">
             <a:avLst/>
@@ -8823,8 +8730,8 @@
         </p:nvSpPr>
         <p:spPr>
           <a:xfrm>
-            <a:off x="731520" y="4389120"/>
-            <a:ext cx="5029200" cy="566928"/>
+            <a:off x="914400" y="4343400"/>
+            <a:ext cx="4846320" cy="530352"/>
           </a:xfrm>
           <a:prstGeom prst="rect">
             <a:avLst/>
@@ -8832,7 +8739,7 @@
           <a:solidFill>
             <a:srgbClr val="FFFFFF"/>
           </a:solidFill>
-          <a:ln w="19050">
+          <a:ln w="15240">
             <a:solidFill>
               <a:srgbClr val="2563EB"/>
             </a:solidFill>
@@ -8857,11 +8764,11 @@
           <a:lstStyle/>
           <a:p>
             <a:pPr algn="ctr">
-              <a:defRPr sz="1700" b="1">
+              <a:defRPr sz="1600" b="1">
                 <a:solidFill>
                   <a:srgbClr val="0F172A"/>
                 </a:solidFill>
-                <a:latin typeface="Arial"/>
+                <a:latin typeface="Calibri"/>
               </a:defRPr>
             </a:pPr>
             <a:r>
@@ -8869,7 +8776,7 @@
             </a:r>
             <a:br/>
             <a:r>
-              <a:t>(Technician task queue, work commencement, resolution remarks)</a:t>
+              <a:t>Technician queue, work commencement, repair remarks</a:t>
             </a:r>
           </a:p>
         </p:txBody>
@@ -8882,8 +8789,8 @@
         </p:nvSpPr>
         <p:spPr>
           <a:xfrm>
-            <a:off x="3154680" y="4974336"/>
-            <a:ext cx="182880" cy="256032"/>
+            <a:off x="3246120" y="4892040"/>
+            <a:ext cx="164592" cy="237744"/>
           </a:xfrm>
           <a:prstGeom prst="downArrow">
             <a:avLst/>
@@ -8925,8 +8832,8 @@
         </p:nvSpPr>
         <p:spPr>
           <a:xfrm>
-            <a:off x="731520" y="5257800"/>
-            <a:ext cx="5029200" cy="566928"/>
+            <a:off x="914400" y="5166360"/>
+            <a:ext cx="4846320" cy="530352"/>
           </a:xfrm>
           <a:prstGeom prst="rect">
             <a:avLst/>
@@ -8934,7 +8841,7 @@
           <a:solidFill>
             <a:srgbClr val="FFFFFF"/>
           </a:solidFill>
-          <a:ln w="19050">
+          <a:ln w="15240">
             <a:solidFill>
               <a:srgbClr val="2563EB"/>
             </a:solidFill>
@@ -8959,19 +8866,19 @@
           <a:lstStyle/>
           <a:p>
             <a:pPr algn="ctr">
-              <a:defRPr sz="1700" b="1">
+              <a:defRPr sz="1600" b="1">
                 <a:solidFill>
                   <a:srgbClr val="0F172A"/>
                 </a:solidFill>
-                <a:latin typeface="Arial"/>
-              </a:defRPr>
-            </a:pPr>
-            <a:r>
-              <a:t>Audit History &amp; Feedback</a:t>
+                <a:latin typeface="Calibri"/>
+              </a:defRPr>
+            </a:pPr>
+            <a:r>
+              <a:t>Audit &amp; Feedback</a:t>
             </a:r>
             <a:br/>
             <a:r>
-              <a:t>(Append-only status history in complaint_updates + student rating)</a:t>
+              <a:t>Append-only status history in complaint_updates &amp; ratings</a:t>
             </a:r>
           </a:p>
         </p:txBody>
@@ -8984,89 +8891,8 @@
         </p:nvSpPr>
         <p:spPr>
           <a:xfrm>
-            <a:off x="6217920" y="1280160"/>
-            <a:ext cx="5212080" cy="365760"/>
-          </a:xfrm>
-          <a:prstGeom prst="rect">
-            <a:avLst/>
-          </a:prstGeom>
-          <a:noFill/>
-        </p:spPr>
-        <p:txBody>
-          <a:bodyPr wrap="none" lIns="0" tIns="0">
-            <a:spAutoFit/>
-          </a:bodyPr>
-          <a:lstStyle/>
-          <a:p>
-            <a:pPr>
-              <a:defRPr sz="2400" b="1">
-                <a:solidFill>
-                  <a:srgbClr val="0F172A"/>
-                </a:solidFill>
-                <a:latin typeface="Arial"/>
-              </a:defRPr>
-            </a:pPr>
-            <a:r>
-              <a:t>Production Technology Stack</a:t>
-            </a:r>
-          </a:p>
-        </p:txBody>
-      </p:sp>
-      <p:sp>
-        <p:nvSpPr>
-          <p:cNvPr id="18" name="Rectangle 17"/>
-          <p:cNvSpPr/>
-          <p:nvPr/>
-        </p:nvSpPr>
-        <p:spPr>
-          <a:xfrm>
-            <a:off x="6217920" y="1783080"/>
-            <a:ext cx="5242255" cy="868680"/>
-          </a:xfrm>
-          <a:prstGeom prst="rect">
-            <a:avLst/>
-          </a:prstGeom>
-          <a:solidFill>
-            <a:srgbClr val="F1F5F9"/>
-          </a:solidFill>
-          <a:ln w="19050">
-            <a:solidFill>
-              <a:srgbClr val="CBD5E1"/>
-            </a:solidFill>
-          </a:ln>
-        </p:spPr>
-        <p:style>
-          <a:lnRef idx="1">
-            <a:schemeClr val="accent1"/>
-          </a:lnRef>
-          <a:fillRef idx="3">
-            <a:schemeClr val="accent1"/>
-          </a:fillRef>
-          <a:effectRef idx="2">
-            <a:schemeClr val="accent1"/>
-          </a:effectRef>
-          <a:fontRef idx="minor">
-            <a:schemeClr val="lt1"/>
-          </a:fontRef>
-        </p:style>
-        <p:txBody>
-          <a:bodyPr rtlCol="0" anchor="ctr"/>
-          <a:lstStyle/>
-          <a:p>
-            <a:pPr algn="ctr"/>
-          </a:p>
-        </p:txBody>
-      </p:sp>
-      <p:sp>
-        <p:nvSpPr>
-          <p:cNvPr id="19" name="TextBox 18"/>
-          <p:cNvSpPr txBox="1"/>
-          <p:nvPr/>
-        </p:nvSpPr>
-        <p:spPr>
-          <a:xfrm>
-            <a:off x="6400800" y="1874519"/>
-            <a:ext cx="4876495" cy="685800"/>
+            <a:off x="6583680" y="1371600"/>
+            <a:ext cx="4663440" cy="4389120"/>
           </a:xfrm>
           <a:prstGeom prst="rect">
             <a:avLst/>
@@ -9080,322 +8906,114 @@
           <a:lstStyle/>
           <a:p>
             <a:pPr>
-              <a:defRPr sz="2100" b="1">
+              <a:spcAft>
+                <a:spcPts val="1200"/>
+              </a:spcAft>
+              <a:defRPr sz="2200" b="1">
                 <a:solidFill>
                   <a:srgbClr val="0F172A"/>
                 </a:solidFill>
-                <a:latin typeface="Arial"/>
-              </a:defRPr>
-            </a:pPr>
-            <a:r>
-              <a:t>Frontend Tier</a:t>
+                <a:latin typeface="Calibri"/>
+              </a:defRPr>
+            </a:pPr>
+            <a:r>
+              <a:t>TECHNOLOGY STACK</a:t>
             </a:r>
           </a:p>
           <a:p>
             <a:pPr>
               <a:spcBef>
-                <a:spcPts val="400"/>
+                <a:spcPts val="1400"/>
               </a:spcBef>
-              <a:defRPr sz="1900">
+            </a:pPr>
+            <a:r>
+              <a:rPr b="1" sz="2000">
                 <a:solidFill>
                   <a:srgbClr val="2563EB"/>
                 </a:solidFill>
-                <a:latin typeface="Arial"/>
-              </a:defRPr>
-            </a:pPr>
-            <a:r>
-              <a:t>React 18  •  Vite 5  •  Tailwind CSS  •  Axios  •  React Router</a:t>
-            </a:r>
-          </a:p>
-        </p:txBody>
-      </p:sp>
-      <p:sp>
-        <p:nvSpPr>
-          <p:cNvPr id="20" name="Rectangle 19"/>
-          <p:cNvSpPr/>
-          <p:nvPr/>
-        </p:nvSpPr>
-        <p:spPr>
-          <a:xfrm>
-            <a:off x="6217920" y="2862072"/>
-            <a:ext cx="5242255" cy="868680"/>
-          </a:xfrm>
-          <a:prstGeom prst="rect">
-            <a:avLst/>
-          </a:prstGeom>
-          <a:solidFill>
-            <a:srgbClr val="F1F5F9"/>
-          </a:solidFill>
-          <a:ln w="19050">
-            <a:solidFill>
-              <a:srgbClr val="CBD5E1"/>
-            </a:solidFill>
-          </a:ln>
-        </p:spPr>
-        <p:style>
-          <a:lnRef idx="1">
-            <a:schemeClr val="accent1"/>
-          </a:lnRef>
-          <a:fillRef idx="3">
-            <a:schemeClr val="accent1"/>
-          </a:fillRef>
-          <a:effectRef idx="2">
-            <a:schemeClr val="accent1"/>
-          </a:effectRef>
-          <a:fontRef idx="minor">
-            <a:schemeClr val="lt1"/>
-          </a:fontRef>
-        </p:style>
-        <p:txBody>
-          <a:bodyPr rtlCol="0" anchor="ctr"/>
-          <a:lstStyle/>
-          <a:p>
-            <a:pPr algn="ctr"/>
-          </a:p>
-        </p:txBody>
-      </p:sp>
-      <p:sp>
-        <p:nvSpPr>
-          <p:cNvPr id="21" name="TextBox 20"/>
-          <p:cNvSpPr txBox="1"/>
-          <p:nvPr/>
-        </p:nvSpPr>
-        <p:spPr>
-          <a:xfrm>
-            <a:off x="6400800" y="2953512"/>
-            <a:ext cx="4876495" cy="685800"/>
-          </a:xfrm>
-          <a:prstGeom prst="rect">
-            <a:avLst/>
-          </a:prstGeom>
-          <a:noFill/>
-        </p:spPr>
-        <p:txBody>
-          <a:bodyPr wrap="square" lIns="0" tIns="0">
-            <a:spAutoFit/>
-          </a:bodyPr>
-          <a:lstStyle/>
-          <a:p>
-            <a:pPr>
-              <a:defRPr sz="2100" b="1">
-                <a:solidFill>
-                  <a:srgbClr val="0F172A"/>
-                </a:solidFill>
-                <a:latin typeface="Arial"/>
-              </a:defRPr>
-            </a:pPr>
-            <a:r>
-              <a:t>Backend Tier</a:t>
+              </a:rPr>
+              <a:t>FRONTEND
+</a:t>
+            </a:r>
+            <a:r>
+              <a:rPr sz="1800">
+                <a:solidFill>
+                  <a:srgbClr val="1E293B"/>
+                </a:solidFill>
+              </a:rPr>
+              <a:t>React 18  ·  Vite 5  ·  Tailwind CSS  ·  Axios  ·  React Router</a:t>
             </a:r>
           </a:p>
           <a:p>
             <a:pPr>
               <a:spcBef>
-                <a:spcPts val="400"/>
+                <a:spcPts val="1400"/>
               </a:spcBef>
-              <a:defRPr sz="1900">
+            </a:pPr>
+            <a:r>
+              <a:rPr b="1" sz="2000">
                 <a:solidFill>
                   <a:srgbClr val="2563EB"/>
                 </a:solidFill>
-                <a:latin typeface="Arial"/>
-              </a:defRPr>
-            </a:pPr>
-            <a:r>
-              <a:t>Node.js 18 LTS  •  Express 4.19  •  express-validator  •  Multer</a:t>
-            </a:r>
-          </a:p>
-        </p:txBody>
-      </p:sp>
-      <p:sp>
-        <p:nvSpPr>
-          <p:cNvPr id="22" name="Rectangle 21"/>
-          <p:cNvSpPr/>
-          <p:nvPr/>
-        </p:nvSpPr>
-        <p:spPr>
-          <a:xfrm>
-            <a:off x="6217920" y="3941063"/>
-            <a:ext cx="5242255" cy="868680"/>
-          </a:xfrm>
-          <a:prstGeom prst="rect">
-            <a:avLst/>
-          </a:prstGeom>
-          <a:solidFill>
-            <a:srgbClr val="F1F5F9"/>
-          </a:solidFill>
-          <a:ln w="19050">
-            <a:solidFill>
-              <a:srgbClr val="CBD5E1"/>
-            </a:solidFill>
-          </a:ln>
-        </p:spPr>
-        <p:style>
-          <a:lnRef idx="1">
-            <a:schemeClr val="accent1"/>
-          </a:lnRef>
-          <a:fillRef idx="3">
-            <a:schemeClr val="accent1"/>
-          </a:fillRef>
-          <a:effectRef idx="2">
-            <a:schemeClr val="accent1"/>
-          </a:effectRef>
-          <a:fontRef idx="minor">
-            <a:schemeClr val="lt1"/>
-          </a:fontRef>
-        </p:style>
-        <p:txBody>
-          <a:bodyPr rtlCol="0" anchor="ctr"/>
-          <a:lstStyle/>
-          <a:p>
-            <a:pPr algn="ctr"/>
-          </a:p>
-        </p:txBody>
-      </p:sp>
-      <p:sp>
-        <p:nvSpPr>
-          <p:cNvPr id="23" name="TextBox 22"/>
-          <p:cNvSpPr txBox="1"/>
-          <p:nvPr/>
-        </p:nvSpPr>
-        <p:spPr>
-          <a:xfrm>
-            <a:off x="6400800" y="4032503"/>
-            <a:ext cx="4876495" cy="685800"/>
-          </a:xfrm>
-          <a:prstGeom prst="rect">
-            <a:avLst/>
-          </a:prstGeom>
-          <a:noFill/>
-        </p:spPr>
-        <p:txBody>
-          <a:bodyPr wrap="square" lIns="0" tIns="0">
-            <a:spAutoFit/>
-          </a:bodyPr>
-          <a:lstStyle/>
-          <a:p>
-            <a:pPr>
-              <a:defRPr sz="2100" b="1">
-                <a:solidFill>
-                  <a:srgbClr val="0F172A"/>
-                </a:solidFill>
-                <a:latin typeface="Arial"/>
-              </a:defRPr>
-            </a:pPr>
-            <a:r>
-              <a:t>Database &amp; Storage</a:t>
+              </a:rPr>
+              <a:t>BACKEND
+</a:t>
+            </a:r>
+            <a:r>
+              <a:rPr sz="1800">
+                <a:solidFill>
+                  <a:srgbClr val="1E293B"/>
+                </a:solidFill>
+              </a:rPr>
+              <a:t>Node.js 18 LTS  ·  Express 4.19  ·  express-validator  ·  Multer</a:t>
             </a:r>
           </a:p>
           <a:p>
             <a:pPr>
               <a:spcBef>
-                <a:spcPts val="400"/>
+                <a:spcPts val="1400"/>
               </a:spcBef>
-              <a:defRPr sz="1900">
+            </a:pPr>
+            <a:r>
+              <a:rPr b="1" sz="2000">
                 <a:solidFill>
                   <a:srgbClr val="2563EB"/>
                 </a:solidFill>
-                <a:latin typeface="Arial"/>
-              </a:defRPr>
-            </a:pPr>
-            <a:r>
-              <a:t>MySQL 8.0  •  mysql2 Connection Pool  •  InnoDB Engine (7 Tables)</a:t>
-            </a:r>
-          </a:p>
-        </p:txBody>
-      </p:sp>
-      <p:sp>
-        <p:nvSpPr>
-          <p:cNvPr id="24" name="Rectangle 23"/>
-          <p:cNvSpPr/>
-          <p:nvPr/>
-        </p:nvSpPr>
-        <p:spPr>
-          <a:xfrm>
-            <a:off x="6217920" y="5020056"/>
-            <a:ext cx="5242255" cy="868680"/>
-          </a:xfrm>
-          <a:prstGeom prst="rect">
-            <a:avLst/>
-          </a:prstGeom>
-          <a:solidFill>
-            <a:srgbClr val="F1F5F9"/>
-          </a:solidFill>
-          <a:ln w="19050">
-            <a:solidFill>
-              <a:srgbClr val="CBD5E1"/>
-            </a:solidFill>
-          </a:ln>
-        </p:spPr>
-        <p:style>
-          <a:lnRef idx="1">
-            <a:schemeClr val="accent1"/>
-          </a:lnRef>
-          <a:fillRef idx="3">
-            <a:schemeClr val="accent1"/>
-          </a:fillRef>
-          <a:effectRef idx="2">
-            <a:schemeClr val="accent1"/>
-          </a:effectRef>
-          <a:fontRef idx="minor">
-            <a:schemeClr val="lt1"/>
-          </a:fontRef>
-        </p:style>
-        <p:txBody>
-          <a:bodyPr rtlCol="0" anchor="ctr"/>
-          <a:lstStyle/>
-          <a:p>
-            <a:pPr algn="ctr"/>
-          </a:p>
-        </p:txBody>
-      </p:sp>
-      <p:sp>
-        <p:nvSpPr>
-          <p:cNvPr id="25" name="TextBox 24"/>
-          <p:cNvSpPr txBox="1"/>
-          <p:nvPr/>
-        </p:nvSpPr>
-        <p:spPr>
-          <a:xfrm>
-            <a:off x="6400800" y="5111496"/>
-            <a:ext cx="4876495" cy="685800"/>
-          </a:xfrm>
-          <a:prstGeom prst="rect">
-            <a:avLst/>
-          </a:prstGeom>
-          <a:noFill/>
-        </p:spPr>
-        <p:txBody>
-          <a:bodyPr wrap="square" lIns="0" tIns="0">
-            <a:spAutoFit/>
-          </a:bodyPr>
-          <a:lstStyle/>
-          <a:p>
-            <a:pPr>
-              <a:defRPr sz="2100" b="1">
-                <a:solidFill>
-                  <a:srgbClr val="0F172A"/>
-                </a:solidFill>
-                <a:latin typeface="Arial"/>
-              </a:defRPr>
-            </a:pPr>
-            <a:r>
-              <a:t>Security &amp; Testing</a:t>
+              </a:rPr>
+              <a:t>DATABASE
+</a:t>
+            </a:r>
+            <a:r>
+              <a:rPr sz="1800">
+                <a:solidFill>
+                  <a:srgbClr val="1E293B"/>
+                </a:solidFill>
+              </a:rPr>
+              <a:t>MySQL 8.0  ·  mysql2 Connection Pool  ·  InnoDB Engine (7 Tables)</a:t>
             </a:r>
           </a:p>
           <a:p>
             <a:pPr>
               <a:spcBef>
-                <a:spcPts val="400"/>
+                <a:spcPts val="1400"/>
               </a:spcBef>
-              <a:defRPr sz="1900">
+            </a:pPr>
+            <a:r>
+              <a:rPr b="1" sz="2000">
                 <a:solidFill>
                   <a:srgbClr val="2563EB"/>
                 </a:solidFill>
-                <a:latin typeface="Arial"/>
-              </a:defRPr>
-            </a:pPr>
-            <a:r>
-              <a:t>JSON Web Tokens (JWT HS256)  •  bcryptjs (10 rounds)  •  Playwright</a:t>
+              </a:rPr>
+              <a:t>SECURITY / TESTING
+</a:t>
+            </a:r>
+            <a:r>
+              <a:rPr sz="1800">
+                <a:solidFill>
+                  <a:srgbClr val="1E293B"/>
+                </a:solidFill>
+              </a:rPr>
+              <a:t>JSON Web Tokens (JWT HS256)  ·  bcryptjs (10 rounds)  ·  Playwright</a:t>
             </a:r>
           </a:p>
         </p:txBody>
@@ -9426,8 +9044,8 @@
         </p:nvSpPr>
         <p:spPr>
           <a:xfrm>
-            <a:off x="731520" y="365760"/>
-            <a:ext cx="10728655" cy="320040"/>
+            <a:off x="914400" y="384048"/>
+            <a:ext cx="10362895" cy="274320"/>
           </a:xfrm>
           <a:prstGeom prst="rect">
             <a:avLst/>
@@ -9441,15 +9059,15 @@
           <a:lstStyle/>
           <a:p>
             <a:pPr>
-              <a:defRPr sz="1800" b="1">
+              <a:defRPr sz="1600" b="1">
                 <a:solidFill>
                   <a:srgbClr val="2563EB"/>
                 </a:solidFill>
-                <a:latin typeface="Arial"/>
-              </a:defRPr>
-            </a:pPr>
-            <a:r>
-              <a:t>6. DATABASE DESIGN</a:t>
+                <a:latin typeface="Calibri"/>
+              </a:defRPr>
+            </a:pPr>
+            <a:r>
+              <a:t>06 — DATA MODEL</a:t>
             </a:r>
           </a:p>
         </p:txBody>
@@ -9462,8 +9080,8 @@
         </p:nvSpPr>
         <p:spPr>
           <a:xfrm>
-            <a:off x="731520" y="658368"/>
-            <a:ext cx="10728655" cy="502920"/>
+            <a:off x="914400" y="658368"/>
+            <a:ext cx="10362895" cy="502920"/>
           </a:xfrm>
           <a:prstGeom prst="rect">
             <a:avLst/>
@@ -9477,15 +9095,15 @@
           <a:lstStyle/>
           <a:p>
             <a:pPr>
-              <a:defRPr sz="3200" b="1">
+              <a:defRPr sz="2800" b="1">
                 <a:solidFill>
                   <a:srgbClr val="0F172A"/>
                 </a:solidFill>
-                <a:latin typeface="Arial"/>
-              </a:defRPr>
-            </a:pPr>
-            <a:r>
-              <a:t>Simplified Entity-Relationship Architecture &amp; Data Integrity</a:t>
+                <a:latin typeface="Calibri"/>
+              </a:defRPr>
+            </a:pPr>
+            <a:r>
+              <a:t>Relational Database Schema &amp; Data Integrity</a:t>
             </a:r>
           </a:p>
         </p:txBody>
@@ -9498,8 +9116,8 @@
         </p:nvSpPr>
         <p:spPr>
           <a:xfrm>
-            <a:off x="731520" y="6263640"/>
-            <a:ext cx="10728655" cy="13716"/>
+            <a:off x="914400" y="6263640"/>
+            <a:ext cx="10362895" cy="13716"/>
           </a:xfrm>
           <a:prstGeom prst="rect">
             <a:avLst/>
@@ -9541,8 +9159,8 @@
         </p:nvSpPr>
         <p:spPr>
           <a:xfrm>
-            <a:off x="731520" y="6327648"/>
-            <a:ext cx="8229600" cy="320040"/>
+            <a:off x="914400" y="6336792"/>
+            <a:ext cx="7772400" cy="292608"/>
           </a:xfrm>
           <a:prstGeom prst="rect">
             <a:avLst/>
@@ -9556,11 +9174,11 @@
           <a:lstStyle/>
           <a:p>
             <a:pPr>
-              <a:defRPr sz="1600" b="1">
+              <a:defRPr sz="1500" b="1">
                 <a:solidFill>
                   <a:srgbClr val="475569"/>
                 </a:solidFill>
-                <a:latin typeface="Arial"/>
+                <a:latin typeface="Calibri"/>
               </a:defRPr>
             </a:pPr>
             <a:r>
@@ -9577,8 +9195,8 @@
         </p:nvSpPr>
         <p:spPr>
           <a:xfrm>
-            <a:off x="9144000" y="6327648"/>
-            <a:ext cx="2316175" cy="320040"/>
+            <a:off x="8686800" y="6336792"/>
+            <a:ext cx="2590495" cy="292608"/>
           </a:xfrm>
           <a:prstGeom prst="rect">
             <a:avLst/>
@@ -9592,11 +9210,11 @@
           <a:lstStyle/>
           <a:p>
             <a:pPr algn="r">
-              <a:defRPr sz="1600" b="1">
+              <a:defRPr sz="1500" b="1">
                 <a:solidFill>
                   <a:srgbClr val="2563EB"/>
                 </a:solidFill>
-                <a:latin typeface="Arial"/>
+                <a:latin typeface="Calibri"/>
               </a:defRPr>
             </a:pPr>
             <a:r>
@@ -9613,8 +9231,8 @@
         </p:nvSpPr>
         <p:spPr>
           <a:xfrm>
-            <a:off x="731520" y="1371600"/>
-            <a:ext cx="3017520" cy="1051560"/>
+            <a:off x="914400" y="1417320"/>
+            <a:ext cx="2926080" cy="960120"/>
           </a:xfrm>
           <a:prstGeom prst="rect">
             <a:avLst/>
@@ -9622,7 +9240,7 @@
           <a:solidFill>
             <a:srgbClr val="FFFFFF"/>
           </a:solidFill>
-          <a:ln w="19050">
+          <a:ln w="15240">
             <a:solidFill>
               <a:srgbClr val="0F172A"/>
             </a:solidFill>
@@ -9647,11 +9265,11 @@
           <a:lstStyle/>
           <a:p>
             <a:pPr algn="ctr">
-              <a:defRPr sz="1800" b="1">
+              <a:defRPr sz="1700" b="1">
                 <a:solidFill>
                   <a:srgbClr val="0F172A"/>
                 </a:solidFill>
-                <a:latin typeface="Arial"/>
+                <a:latin typeface="Calibri"/>
               </a:defRPr>
             </a:pPr>
             <a:r>
@@ -9659,11 +9277,11 @@
             </a:r>
             <a:br/>
             <a:r>
-              <a:t>id (PK) • name • email</a:t>
+              <a:t>id (PK) · name · email</a:t>
             </a:r>
             <a:br/>
             <a:r>
-              <a:t>role • department</a:t>
+              <a:t>role · department</a:t>
             </a:r>
           </a:p>
         </p:txBody>
@@ -9676,7 +9294,7 @@
         </p:nvSpPr>
         <p:spPr>
           <a:xfrm>
-            <a:off x="3886200" y="1783080"/>
+            <a:off x="3931920" y="1783080"/>
             <a:ext cx="320040" cy="201168"/>
           </a:xfrm>
           <a:prstGeom prst="rightArrow">
@@ -9719,8 +9337,8 @@
         </p:nvSpPr>
         <p:spPr>
           <a:xfrm>
-            <a:off x="4389120" y="1371600"/>
-            <a:ext cx="3413455" cy="1051560"/>
+            <a:off x="4389120" y="1417320"/>
+            <a:ext cx="3413455" cy="960120"/>
           </a:xfrm>
           <a:prstGeom prst="rect">
             <a:avLst/>
@@ -9728,7 +9346,7 @@
           <a:solidFill>
             <a:srgbClr val="0F172A"/>
           </a:solidFill>
-          <a:ln w="19050">
+          <a:ln w="15240">
             <a:solidFill>
               <a:srgbClr val="0F172A"/>
             </a:solidFill>
@@ -9753,11 +9371,11 @@
           <a:lstStyle/>
           <a:p>
             <a:pPr algn="ctr">
-              <a:defRPr sz="1800" b="1">
+              <a:defRPr sz="1700" b="1">
                 <a:solidFill>
                   <a:srgbClr val="FFFFFF"/>
                 </a:solidFill>
-                <a:latin typeface="Arial"/>
+                <a:latin typeface="Calibri"/>
               </a:defRPr>
             </a:pPr>
             <a:r>
@@ -9765,11 +9383,11 @@
             </a:r>
             <a:br/>
             <a:r>
-              <a:t>id (PK) • complaint_number • user_id (FK)</a:t>
+              <a:t>id (PK) · complaint_number · user_id (FK)</a:t>
             </a:r>
             <a:br/>
             <a:r>
-              <a:t>category_id (FK) • location_id (FK) • status</a:t>
+              <a:t>category_id (FK) · location_id (FK) · status</a:t>
             </a:r>
           </a:p>
         </p:txBody>
@@ -9782,7 +9400,7 @@
         </p:nvSpPr>
         <p:spPr>
           <a:xfrm>
-            <a:off x="7955279" y="1783080"/>
+            <a:off x="7909560" y="1783080"/>
             <a:ext cx="320040" cy="201168"/>
           </a:xfrm>
           <a:prstGeom prst="rightArrow">
@@ -9825,8 +9443,8 @@
         </p:nvSpPr>
         <p:spPr>
           <a:xfrm>
-            <a:off x="8442655" y="1371600"/>
-            <a:ext cx="3017520" cy="1051560"/>
+            <a:off x="8351215" y="1417320"/>
+            <a:ext cx="2926080" cy="960120"/>
           </a:xfrm>
           <a:prstGeom prst="rect">
             <a:avLst/>
@@ -9834,7 +9452,7 @@
           <a:solidFill>
             <a:srgbClr val="FFFFFF"/>
           </a:solidFill>
-          <a:ln w="19050">
+          <a:ln w="15240">
             <a:solidFill>
               <a:srgbClr val="0F172A"/>
             </a:solidFill>
@@ -9859,11 +9477,11 @@
           <a:lstStyle/>
           <a:p>
             <a:pPr algn="ctr">
-              <a:defRPr sz="1800" b="1">
+              <a:defRPr sz="1700" b="1">
                 <a:solidFill>
                   <a:srgbClr val="0F172A"/>
                 </a:solidFill>
-                <a:latin typeface="Arial"/>
+                <a:latin typeface="Calibri"/>
               </a:defRPr>
             </a:pPr>
             <a:r>
@@ -9871,7 +9489,7 @@
             </a:r>
             <a:br/>
             <a:r>
-              <a:t>building • floor • room</a:t>
+              <a:t>building · floor · room</a:t>
             </a:r>
             <a:br/>
             <a:r>
@@ -9888,8 +9506,8 @@
         </p:nvSpPr>
         <p:spPr>
           <a:xfrm>
-            <a:off x="2194560" y="2514600"/>
-            <a:ext cx="201168" cy="274320"/>
+            <a:off x="2286000" y="2423160"/>
+            <a:ext cx="182880" cy="274320"/>
           </a:xfrm>
           <a:prstGeom prst="downArrow">
             <a:avLst/>
@@ -9931,8 +9549,8 @@
         </p:nvSpPr>
         <p:spPr>
           <a:xfrm>
-            <a:off x="731520" y="2880360"/>
-            <a:ext cx="3017520" cy="1051560"/>
+            <a:off x="914400" y="2743200"/>
+            <a:ext cx="2926080" cy="960120"/>
           </a:xfrm>
           <a:prstGeom prst="rect">
             <a:avLst/>
@@ -9940,7 +9558,7 @@
           <a:solidFill>
             <a:srgbClr val="FFFFFF"/>
           </a:solidFill>
-          <a:ln w="19050">
+          <a:ln w="15240">
             <a:solidFill>
               <a:srgbClr val="2563EB"/>
             </a:solidFill>
@@ -9965,11 +9583,11 @@
           <a:lstStyle/>
           <a:p>
             <a:pPr algn="ctr">
-              <a:defRPr sz="1800" b="1">
+              <a:defRPr sz="1700" b="1">
                 <a:solidFill>
                   <a:srgbClr val="2563EB"/>
                 </a:solidFill>
-                <a:latin typeface="Arial"/>
+                <a:latin typeface="Calibri"/>
               </a:defRPr>
             </a:pPr>
             <a:r>
@@ -9977,11 +9595,11 @@
             </a:r>
             <a:br/>
             <a:r>
-              <a:t>staff_id (FK) • assigned_by (FK)</a:t>
+              <a:t>staff_id (FK) · assigned_by (FK)</a:t>
             </a:r>
             <a:br/>
             <a:r>
-              <a:t>assigned_at • notes</a:t>
+              <a:t>assigned_at · notes</a:t>
             </a:r>
           </a:p>
         </p:txBody>
@@ -9994,8 +9612,8 @@
         </p:nvSpPr>
         <p:spPr>
           <a:xfrm>
-            <a:off x="5989320" y="2514600"/>
-            <a:ext cx="201168" cy="274320"/>
+            <a:off x="5989320" y="2423160"/>
+            <a:ext cx="182880" cy="274320"/>
           </a:xfrm>
           <a:prstGeom prst="downArrow">
             <a:avLst/>
@@ -10037,8 +9655,8 @@
         </p:nvSpPr>
         <p:spPr>
           <a:xfrm>
-            <a:off x="4389120" y="2880360"/>
-            <a:ext cx="3413455" cy="1051560"/>
+            <a:off x="4389120" y="2743200"/>
+            <a:ext cx="3413455" cy="960120"/>
           </a:xfrm>
           <a:prstGeom prst="rect">
             <a:avLst/>
@@ -10046,7 +9664,7 @@
           <a:solidFill>
             <a:srgbClr val="FFFFFF"/>
           </a:solidFill>
-          <a:ln w="19050">
+          <a:ln w="15240">
             <a:solidFill>
               <a:srgbClr val="2563EB"/>
             </a:solidFill>
@@ -10071,11 +9689,11 @@
           <a:lstStyle/>
           <a:p>
             <a:pPr algn="ctr">
-              <a:defRPr sz="1800" b="1">
+              <a:defRPr sz="1700" b="1">
                 <a:solidFill>
                   <a:srgbClr val="2563EB"/>
                 </a:solidFill>
-                <a:latin typeface="Arial"/>
+                <a:latin typeface="Calibri"/>
               </a:defRPr>
             </a:pPr>
             <a:r>
@@ -10083,11 +9701,11 @@
             </a:r>
             <a:br/>
             <a:r>
-              <a:t>old_status • new_status</a:t>
+              <a:t>old_status · new_status · remarks</a:t>
             </a:r>
             <a:br/>
             <a:r>
-              <a:t>remarks • updated_by (FK) • created_at</a:t>
+              <a:t>updated_by (FK) · created_at</a:t>
             </a:r>
           </a:p>
         </p:txBody>
@@ -10100,8 +9718,8 @@
         </p:nvSpPr>
         <p:spPr>
           <a:xfrm>
-            <a:off x="9784080" y="2514600"/>
-            <a:ext cx="201168" cy="274320"/>
+            <a:off x="9692640" y="2423160"/>
+            <a:ext cx="182880" cy="274320"/>
           </a:xfrm>
           <a:prstGeom prst="downArrow">
             <a:avLst/>
@@ -10143,8 +9761,8 @@
         </p:nvSpPr>
         <p:spPr>
           <a:xfrm>
-            <a:off x="8442655" y="2880360"/>
-            <a:ext cx="3017520" cy="1051560"/>
+            <a:off x="8351215" y="2743200"/>
+            <a:ext cx="2926080" cy="960120"/>
           </a:xfrm>
           <a:prstGeom prst="rect">
             <a:avLst/>
@@ -10152,7 +9770,7 @@
           <a:solidFill>
             <a:srgbClr val="FFFFFF"/>
           </a:solidFill>
-          <a:ln w="19050">
+          <a:ln w="15240">
             <a:solidFill>
               <a:srgbClr val="2563EB"/>
             </a:solidFill>
@@ -10177,11 +9795,11 @@
           <a:lstStyle/>
           <a:p>
             <a:pPr algn="ctr">
-              <a:defRPr sz="1800" b="1">
+              <a:defRPr sz="1700" b="1">
                 <a:solidFill>
                   <a:srgbClr val="2563EB"/>
                 </a:solidFill>
-                <a:latin typeface="Arial"/>
+                <a:latin typeface="Calibri"/>
               </a:defRPr>
             </a:pPr>
             <a:r>
@@ -10189,11 +9807,11 @@
             </a:r>
             <a:br/>
             <a:r>
-              <a:t>complaint_id (FK) • user_id (FK)</a:t>
+              <a:t>complaint_id (FK) · user_id (FK)</a:t>
             </a:r>
             <a:br/>
             <a:r>
-              <a:t>rating (1–5) • comments</a:t>
+              <a:t>rating (1–5) · comments</a:t>
             </a:r>
           </a:p>
         </p:txBody>
@@ -10206,19 +9824,17 @@
         </p:nvSpPr>
         <p:spPr>
           <a:xfrm>
-            <a:off x="731520" y="4251960"/>
-            <a:ext cx="3392424" cy="1783080"/>
+            <a:off x="914400" y="4023360"/>
+            <a:ext cx="10362895" cy="13716"/>
           </a:xfrm>
           <a:prstGeom prst="rect">
             <a:avLst/>
           </a:prstGeom>
           <a:solidFill>
-            <a:srgbClr val="F1F5F9"/>
+            <a:srgbClr val="CBD5E1"/>
           </a:solidFill>
-          <a:ln w="19050">
-            <a:solidFill>
-              <a:srgbClr val="CBD5E1"/>
-            </a:solidFill>
+          <a:ln>
+            <a:noFill/>
           </a:ln>
         </p:spPr>
         <p:style>
@@ -10251,8 +9867,8 @@
         </p:nvSpPr>
         <p:spPr>
           <a:xfrm>
-            <a:off x="914400" y="4361688"/>
-            <a:ext cx="3026664" cy="1563624"/>
+            <a:off x="914400" y="4160520"/>
+            <a:ext cx="3291840" cy="1828800"/>
           </a:xfrm>
           <a:prstGeom prst="rect">
             <a:avLst/>
@@ -10270,7 +9886,7 @@
                 <a:solidFill>
                   <a:srgbClr val="0F172A"/>
                 </a:solidFill>
-                <a:latin typeface="Arial"/>
+                <a:latin typeface="Calibri"/>
               </a:defRPr>
             </a:pPr>
             <a:r>
@@ -10282,74 +9898,29 @@
               <a:spcBef>
                 <a:spcPts val="600"/>
               </a:spcBef>
-              <a:defRPr sz="1800">
+              <a:defRPr sz="1700">
                 <a:solidFill>
                   <a:srgbClr val="1E293B"/>
                 </a:solidFill>
-                <a:latin typeface="Arial"/>
-              </a:defRPr>
-            </a:pPr>
-            <a:r>
-              <a:t>Redundancy eliminated across all tables. Campus buildings, rooms, and issue categories are maintained as independent master entities.</a:t>
-            </a:r>
-          </a:p>
-        </p:txBody>
-      </p:sp>
-      <p:sp>
-        <p:nvSpPr>
-          <p:cNvPr id="20" name="Rectangle 19"/>
-          <p:cNvSpPr/>
-          <p:nvPr/>
-        </p:nvSpPr>
-        <p:spPr>
-          <a:xfrm>
-            <a:off x="4398264" y="4251960"/>
-            <a:ext cx="3392424" cy="1783080"/>
-          </a:xfrm>
-          <a:prstGeom prst="rect">
-            <a:avLst/>
-          </a:prstGeom>
-          <a:solidFill>
-            <a:srgbClr val="F1F5F9"/>
-          </a:solidFill>
-          <a:ln w="19050">
-            <a:solidFill>
-              <a:srgbClr val="CBD5E1"/>
-            </a:solidFill>
-          </a:ln>
-        </p:spPr>
-        <p:style>
-          <a:lnRef idx="1">
-            <a:schemeClr val="accent1"/>
-          </a:lnRef>
-          <a:fillRef idx="3">
-            <a:schemeClr val="accent1"/>
-          </a:fillRef>
-          <a:effectRef idx="2">
-            <a:schemeClr val="accent1"/>
-          </a:effectRef>
-          <a:fontRef idx="minor">
-            <a:schemeClr val="lt1"/>
-          </a:fontRef>
-        </p:style>
-        <p:txBody>
-          <a:bodyPr rtlCol="0" anchor="ctr"/>
-          <a:lstStyle/>
-          <a:p>
-            <a:pPr algn="ctr"/>
-          </a:p>
-        </p:txBody>
-      </p:sp>
-      <p:sp>
-        <p:nvSpPr>
-          <p:cNvPr id="21" name="TextBox 20"/>
+                <a:latin typeface="Calibri"/>
+              </a:defRPr>
+            </a:pPr>
+            <a:r>
+              <a:t>Redundancy eliminated. Campus locations and categories are stored as independent master tables, allowing dynamic additions without schema alterations.</a:t>
+            </a:r>
+          </a:p>
+        </p:txBody>
+      </p:sp>
+      <p:sp>
+        <p:nvSpPr>
+          <p:cNvPr id="20" name="TextBox 19"/>
           <p:cNvSpPr txBox="1"/>
           <p:nvPr/>
         </p:nvSpPr>
         <p:spPr>
           <a:xfrm>
-            <a:off x="4581144" y="4361688"/>
-            <a:ext cx="3026664" cy="1563624"/>
+            <a:off x="4434840" y="4160520"/>
+            <a:ext cx="3291840" cy="1828800"/>
           </a:xfrm>
           <a:prstGeom prst="rect">
             <a:avLst/>
@@ -10367,7 +9938,7 @@
                 <a:solidFill>
                   <a:srgbClr val="2563EB"/>
                 </a:solidFill>
-                <a:latin typeface="Arial"/>
+                <a:latin typeface="Calibri"/>
               </a:defRPr>
             </a:pPr>
             <a:r>
@@ -10379,11 +9950,11 @@
               <a:spcBef>
                 <a:spcPts val="600"/>
               </a:spcBef>
-              <a:defRPr sz="1800">
+              <a:defRPr sz="1700">
                 <a:solidFill>
                   <a:srgbClr val="1E293B"/>
                 </a:solidFill>
-                <a:latin typeface="Arial"/>
+                <a:latin typeface="Calibri"/>
               </a:defRPr>
             </a:pPr>
             <a:r>
@@ -10394,59 +9965,14 @@
       </p:sp>
       <p:sp>
         <p:nvSpPr>
-          <p:cNvPr id="22" name="Rectangle 21"/>
-          <p:cNvSpPr/>
-          <p:nvPr/>
-        </p:nvSpPr>
-        <p:spPr>
-          <a:xfrm>
-            <a:off x="8065008" y="4251960"/>
-            <a:ext cx="3392424" cy="1783080"/>
-          </a:xfrm>
-          <a:prstGeom prst="rect">
-            <a:avLst/>
-          </a:prstGeom>
-          <a:solidFill>
-            <a:srgbClr val="F1F5F9"/>
-          </a:solidFill>
-          <a:ln w="19050">
-            <a:solidFill>
-              <a:srgbClr val="CBD5E1"/>
-            </a:solidFill>
-          </a:ln>
-        </p:spPr>
-        <p:style>
-          <a:lnRef idx="1">
-            <a:schemeClr val="accent1"/>
-          </a:lnRef>
-          <a:fillRef idx="3">
-            <a:schemeClr val="accent1"/>
-          </a:fillRef>
-          <a:effectRef idx="2">
-            <a:schemeClr val="accent1"/>
-          </a:effectRef>
-          <a:fontRef idx="minor">
-            <a:schemeClr val="lt1"/>
-          </a:fontRef>
-        </p:style>
-        <p:txBody>
-          <a:bodyPr rtlCol="0" anchor="ctr"/>
-          <a:lstStyle/>
-          <a:p>
-            <a:pPr algn="ctr"/>
-          </a:p>
-        </p:txBody>
-      </p:sp>
-      <p:sp>
-        <p:nvSpPr>
-          <p:cNvPr id="23" name="TextBox 22"/>
+          <p:cNvPr id="21" name="TextBox 20"/>
           <p:cNvSpPr txBox="1"/>
           <p:nvPr/>
         </p:nvSpPr>
         <p:spPr>
           <a:xfrm>
-            <a:off x="8247888" y="4361688"/>
-            <a:ext cx="3026664" cy="1563624"/>
+            <a:off x="7955279" y="4160520"/>
+            <a:ext cx="3291840" cy="1828800"/>
           </a:xfrm>
           <a:prstGeom prst="rect">
             <a:avLst/>
@@ -10464,7 +9990,7 @@
                 <a:solidFill>
                   <a:srgbClr val="15803D"/>
                 </a:solidFill>
-                <a:latin typeface="Arial"/>
+                <a:latin typeface="Calibri"/>
               </a:defRPr>
             </a:pPr>
             <a:r>
@@ -10476,11 +10002,11 @@
               <a:spcBef>
                 <a:spcPts val="600"/>
               </a:spcBef>
-              <a:defRPr sz="1800">
+              <a:defRPr sz="1700">
                 <a:solidFill>
                   <a:srgbClr val="1E293B"/>
                 </a:solidFill>
-                <a:latin typeface="Arial"/>
+                <a:latin typeface="Calibri"/>
               </a:defRPr>
             </a:pPr>
             <a:r>
@@ -10515,8 +10041,8 @@
         </p:nvSpPr>
         <p:spPr>
           <a:xfrm>
-            <a:off x="731520" y="365760"/>
-            <a:ext cx="10728655" cy="320040"/>
+            <a:off x="914400" y="384048"/>
+            <a:ext cx="10362895" cy="274320"/>
           </a:xfrm>
           <a:prstGeom prst="rect">
             <a:avLst/>
@@ -10530,15 +10056,15 @@
           <a:lstStyle/>
           <a:p>
             <a:pPr>
-              <a:defRPr sz="1800" b="1">
+              <a:defRPr sz="1600" b="1">
                 <a:solidFill>
                   <a:srgbClr val="2563EB"/>
                 </a:solidFill>
-                <a:latin typeface="Arial"/>
-              </a:defRPr>
-            </a:pPr>
-            <a:r>
-              <a:t>7. APPLICATION SCREENSHOTS</a:t>
+                <a:latin typeface="Calibri"/>
+              </a:defRPr>
+            </a:pPr>
+            <a:r>
+              <a:t>07 — APPLICATION</a:t>
             </a:r>
           </a:p>
         </p:txBody>
@@ -10551,8 +10077,8 @@
         </p:nvSpPr>
         <p:spPr>
           <a:xfrm>
-            <a:off x="731520" y="658368"/>
-            <a:ext cx="10728655" cy="502920"/>
+            <a:off x="914400" y="658368"/>
+            <a:ext cx="10362895" cy="502920"/>
           </a:xfrm>
           <a:prstGeom prst="rect">
             <a:avLst/>
@@ -10566,15 +10092,15 @@
           <a:lstStyle/>
           <a:p>
             <a:pPr>
-              <a:defRPr sz="3200" b="1">
+              <a:defRPr sz="2800" b="1">
                 <a:solidFill>
                   <a:srgbClr val="0F172A"/>
                 </a:solidFill>
-                <a:latin typeface="Arial"/>
-              </a:defRPr>
-            </a:pPr>
-            <a:r>
-              <a:t>Authentic User Interfaces from the Running CCMS Application</a:t>
+                <a:latin typeface="Calibri"/>
+              </a:defRPr>
+            </a:pPr>
+            <a:r>
+              <a:t>Authentic Application User Interface</a:t>
             </a:r>
           </a:p>
         </p:txBody>
@@ -10587,8 +10113,8 @@
         </p:nvSpPr>
         <p:spPr>
           <a:xfrm>
-            <a:off x="731520" y="6263640"/>
-            <a:ext cx="10728655" cy="13716"/>
+            <a:off x="914400" y="6263640"/>
+            <a:ext cx="10362895" cy="13716"/>
           </a:xfrm>
           <a:prstGeom prst="rect">
             <a:avLst/>
@@ -10630,8 +10156,8 @@
         </p:nvSpPr>
         <p:spPr>
           <a:xfrm>
-            <a:off x="731520" y="6327648"/>
-            <a:ext cx="8229600" cy="320040"/>
+            <a:off x="914400" y="6336792"/>
+            <a:ext cx="7772400" cy="292608"/>
           </a:xfrm>
           <a:prstGeom prst="rect">
             <a:avLst/>
@@ -10645,11 +10171,11 @@
           <a:lstStyle/>
           <a:p>
             <a:pPr>
-              <a:defRPr sz="1600" b="1">
+              <a:defRPr sz="1500" b="1">
                 <a:solidFill>
                   <a:srgbClr val="475569"/>
                 </a:solidFill>
-                <a:latin typeface="Arial"/>
+                <a:latin typeface="Calibri"/>
               </a:defRPr>
             </a:pPr>
             <a:r>
@@ -10666,8 +10192,8 @@
         </p:nvSpPr>
         <p:spPr>
           <a:xfrm>
-            <a:off x="9144000" y="6327648"/>
-            <a:ext cx="2316175" cy="320040"/>
+            <a:off x="8686800" y="6336792"/>
+            <a:ext cx="2590495" cy="292608"/>
           </a:xfrm>
           <a:prstGeom prst="rect">
             <a:avLst/>
@@ -10681,11 +10207,11 @@
           <a:lstStyle/>
           <a:p>
             <a:pPr algn="r">
-              <a:defRPr sz="1600" b="1">
+              <a:defRPr sz="1500" b="1">
                 <a:solidFill>
                   <a:srgbClr val="2563EB"/>
                 </a:solidFill>
-                <a:latin typeface="Arial"/>
+                <a:latin typeface="Calibri"/>
               </a:defRPr>
             </a:pPr>
             <a:r>
@@ -10710,8 +10236,8 @@
         </p:blipFill>
         <p:spPr>
           <a:xfrm>
-            <a:off x="731520" y="1325880"/>
-            <a:ext cx="5120640" cy="3200400"/>
+            <a:off x="914400" y="1417320"/>
+            <a:ext cx="4937760" cy="3086100"/>
           </a:xfrm>
           <a:prstGeom prst="rect">
             <a:avLst/>
@@ -10726,8 +10252,8 @@
         </p:nvSpPr>
         <p:spPr>
           <a:xfrm>
-            <a:off x="731520" y="4663440"/>
-            <a:ext cx="5120640" cy="1371600"/>
+            <a:off x="914400" y="4663440"/>
+            <a:ext cx="4937760" cy="1371600"/>
           </a:xfrm>
           <a:prstGeom prst="rect">
             <a:avLst/>
@@ -10741,15 +10267,15 @@
           <a:lstStyle/>
           <a:p>
             <a:pPr>
-              <a:defRPr sz="2200" b="1">
+              <a:defRPr sz="2100" b="1">
                 <a:solidFill>
                   <a:srgbClr val="0F172A"/>
                 </a:solidFill>
-                <a:latin typeface="Arial"/>
-              </a:defRPr>
-            </a:pPr>
-            <a:r>
-              <a:t>1. Administrator Control Center</a:t>
+                <a:latin typeface="Calibri"/>
+              </a:defRPr>
+            </a:pPr>
+            <a:r>
+              <a:t>Administrator Control Center</a:t>
             </a:r>
           </a:p>
           <a:p>
@@ -10757,11 +10283,11 @@
               <a:spcBef>
                 <a:spcPts val="400"/>
               </a:spcBef>
-              <a:defRPr sz="1900">
+              <a:defRPr sz="1800">
                 <a:solidFill>
                   <a:srgbClr val="1E293B"/>
                 </a:solidFill>
-                <a:latin typeface="Arial"/>
+                <a:latin typeface="Calibri"/>
               </a:defRPr>
             </a:pPr>
             <a:r>
@@ -10790,8 +10316,8 @@
         </p:blipFill>
         <p:spPr>
           <a:xfrm>
-            <a:off x="6339535" y="1325880"/>
-            <a:ext cx="5120640" cy="3200400"/>
+            <a:off x="6339535" y="1417320"/>
+            <a:ext cx="4937760" cy="3086100"/>
           </a:xfrm>
           <a:prstGeom prst="rect">
             <a:avLst/>
@@ -10807,7 +10333,7 @@
         <p:spPr>
           <a:xfrm>
             <a:off x="6339535" y="4663440"/>
-            <a:ext cx="5120640" cy="1371600"/>
+            <a:ext cx="4937760" cy="1371600"/>
           </a:xfrm>
           <a:prstGeom prst="rect">
             <a:avLst/>
@@ -10821,15 +10347,15 @@
           <a:lstStyle/>
           <a:p>
             <a:pPr>
-              <a:defRPr sz="2200" b="1">
+              <a:defRPr sz="2100" b="1">
                 <a:solidFill>
                   <a:srgbClr val="15803D"/>
                 </a:solidFill>
-                <a:latin typeface="Arial"/>
-              </a:defRPr>
-            </a:pPr>
-            <a:r>
-              <a:t>2. Technician Work Order Queue</a:t>
+                <a:latin typeface="Calibri"/>
+              </a:defRPr>
+            </a:pPr>
+            <a:r>
+              <a:t>Technician Work Order Queue</a:t>
             </a:r>
           </a:p>
           <a:p>
@@ -10837,19 +10363,19 @@
               <a:spcBef>
                 <a:spcPts val="400"/>
               </a:spcBef>
-              <a:defRPr sz="1900">
+              <a:defRPr sz="1800">
                 <a:solidFill>
                   <a:srgbClr val="1E293B"/>
                 </a:solidFill>
-                <a:latin typeface="Arial"/>
-              </a:defRPr>
-            </a:pPr>
-            <a:r>
-              <a:t>• Room-Level Dispatching: Displays exact campus building, floor, room, and urgency.</a:t>
+                <a:latin typeface="Calibri"/>
+              </a:defRPr>
+            </a:pPr>
+            <a:r>
+              <a:t>• Room-Level Dispatching: Displays exact campus building, floor, and urgency.</a:t>
             </a:r>
             <a:br/>
             <a:r>
-              <a:t>• Work Execution: Single-click 'Start Work' and diagnostic resolution remarks submission.</a:t>
+              <a:t>• Work Execution: Single-click 'Start Work' and diagnostic remarks submission.</a:t>
             </a:r>
           </a:p>
         </p:txBody>
@@ -10880,8 +10406,8 @@
         </p:nvSpPr>
         <p:spPr>
           <a:xfrm>
-            <a:off x="731520" y="365760"/>
-            <a:ext cx="10728655" cy="320040"/>
+            <a:off x="914400" y="384048"/>
+            <a:ext cx="10362895" cy="274320"/>
           </a:xfrm>
           <a:prstGeom prst="rect">
             <a:avLst/>
@@ -10895,15 +10421,15 @@
           <a:lstStyle/>
           <a:p>
             <a:pPr>
-              <a:defRPr sz="1800" b="1">
+              <a:defRPr sz="1600" b="1">
                 <a:solidFill>
                   <a:srgbClr val="2563EB"/>
                 </a:solidFill>
-                <a:latin typeface="Arial"/>
-              </a:defRPr>
-            </a:pPr>
-            <a:r>
-              <a:t>8. TESTING &amp; QUALITY VERIFICATION</a:t>
+                <a:latin typeface="Calibri"/>
+              </a:defRPr>
+            </a:pPr>
+            <a:r>
+              <a:t>08 — TESTING</a:t>
             </a:r>
           </a:p>
         </p:txBody>
@@ -10916,8 +10442,8 @@
         </p:nvSpPr>
         <p:spPr>
           <a:xfrm>
-            <a:off x="731520" y="658368"/>
-            <a:ext cx="10728655" cy="502920"/>
+            <a:off x="914400" y="658368"/>
+            <a:ext cx="10362895" cy="502920"/>
           </a:xfrm>
           <a:prstGeom prst="rect">
             <a:avLst/>
@@ -10931,15 +10457,15 @@
           <a:lstStyle/>
           <a:p>
             <a:pPr>
-              <a:defRPr sz="3200" b="1">
+              <a:defRPr sz="2800" b="1">
                 <a:solidFill>
                   <a:srgbClr val="0F172A"/>
                 </a:solidFill>
-                <a:latin typeface="Arial"/>
-              </a:defRPr>
-            </a:pPr>
-            <a:r>
-              <a:t>Rigorous Multi-Level Verification with 100% Pass Rate</a:t>
+                <a:latin typeface="Calibri"/>
+              </a:defRPr>
+            </a:pPr>
+            <a:r>
+              <a:t>Quality Assurance &amp; Test Execution Results</a:t>
             </a:r>
           </a:p>
         </p:txBody>
@@ -10952,8 +10478,8 @@
         </p:nvSpPr>
         <p:spPr>
           <a:xfrm>
-            <a:off x="731520" y="6263640"/>
-            <a:ext cx="10728655" cy="13716"/>
+            <a:off x="914400" y="6263640"/>
+            <a:ext cx="10362895" cy="13716"/>
           </a:xfrm>
           <a:prstGeom prst="rect">
             <a:avLst/>
@@ -10995,8 +10521,8 @@
         </p:nvSpPr>
         <p:spPr>
           <a:xfrm>
-            <a:off x="731520" y="6327648"/>
-            <a:ext cx="8229600" cy="320040"/>
+            <a:off x="914400" y="6336792"/>
+            <a:ext cx="7772400" cy="292608"/>
           </a:xfrm>
           <a:prstGeom prst="rect">
             <a:avLst/>
@@ -11010,11 +10536,11 @@
           <a:lstStyle/>
           <a:p>
             <a:pPr>
-              <a:defRPr sz="1600" b="1">
+              <a:defRPr sz="1500" b="1">
                 <a:solidFill>
                   <a:srgbClr val="475569"/>
                 </a:solidFill>
-                <a:latin typeface="Arial"/>
+                <a:latin typeface="Calibri"/>
               </a:defRPr>
             </a:pPr>
             <a:r>
@@ -11031,8 +10557,8 @@
         </p:nvSpPr>
         <p:spPr>
           <a:xfrm>
-            <a:off x="9144000" y="6327648"/>
-            <a:ext cx="2316175" cy="320040"/>
+            <a:off x="8686800" y="6336792"/>
+            <a:ext cx="2590495" cy="292608"/>
           </a:xfrm>
           <a:prstGeom prst="rect">
             <a:avLst/>
@@ -11046,11 +10572,11 @@
           <a:lstStyle/>
           <a:p>
             <a:pPr algn="r">
-              <a:defRPr sz="1600" b="1">
+              <a:defRPr sz="1500" b="1">
                 <a:solidFill>
                   <a:srgbClr val="2563EB"/>
                 </a:solidFill>
-                <a:latin typeface="Arial"/>
+                <a:latin typeface="Calibri"/>
               </a:defRPr>
             </a:pPr>
             <a:r>
@@ -11067,8 +10593,57 @@
         </p:nvSpPr>
         <p:spPr>
           <a:xfrm>
-            <a:off x="731520" y="1280160"/>
-            <a:ext cx="4572000" cy="4754880"/>
+            <a:off x="914400" y="1371600"/>
+            <a:ext cx="4572000" cy="1188720"/>
+          </a:xfrm>
+          <a:prstGeom prst="rect">
+            <a:avLst/>
+          </a:prstGeom>
+          <a:noFill/>
+        </p:spPr>
+        <p:txBody>
+          <a:bodyPr wrap="none" lIns="0" tIns="0">
+            <a:spAutoFit/>
+          </a:bodyPr>
+          <a:lstStyle/>
+          <a:p>
+            <a:pPr>
+              <a:defRPr sz="4800" b="1">
+                <a:solidFill>
+                  <a:srgbClr val="15803D"/>
+                </a:solidFill>
+                <a:latin typeface="Calibri"/>
+              </a:defRPr>
+            </a:pPr>
+            <a:r>
+              <a:t>30 / 30</a:t>
+            </a:r>
+          </a:p>
+          <a:p>
+            <a:pPr>
+              <a:defRPr sz="1900" b="1">
+                <a:solidFill>
+                  <a:srgbClr val="0F172A"/>
+                </a:solidFill>
+                <a:latin typeface="Calibri"/>
+              </a:defRPr>
+            </a:pPr>
+            <a:r>
+              <a:t>TEST CASES PASSED  ·  100% PASS RATE</a:t>
+            </a:r>
+          </a:p>
+        </p:txBody>
+      </p:sp>
+      <p:sp>
+        <p:nvSpPr>
+          <p:cNvPr id="8" name="TextBox 7"/>
+          <p:cNvSpPr txBox="1"/>
+          <p:nvPr/>
+        </p:nvSpPr>
+        <p:spPr>
+          <a:xfrm>
+            <a:off x="914400" y="2743200"/>
+            <a:ext cx="4572000" cy="3200400"/>
           </a:xfrm>
           <a:prstGeom prst="rect">
             <a:avLst/>
@@ -11081,848 +10656,287 @@
           </a:bodyPr>
           <a:lstStyle/>
           <a:p>
+            <a:r>
+              <a:rPr b="1" sz="1900">
+                <a:solidFill>
+                  <a:srgbClr val="2563EB"/>
+                </a:solidFill>
+              </a:rPr>
+              <a:t>UNIT
+</a:t>
+            </a:r>
+            <a:r>
+              <a:rPr sz="1700">
+                <a:solidFill>
+                  <a:srgbClr val="1E293B"/>
+                </a:solidFill>
+              </a:rPr>
+              <a:t>Authentication, token verification, unique CMP-ID generators</a:t>
+            </a:r>
+          </a:p>
+          <a:p>
+            <a:pPr>
+              <a:spcBef>
+                <a:spcPts val="1000"/>
+              </a:spcBef>
+            </a:pPr>
+            <a:r>
+              <a:rPr b="1" sz="1900">
+                <a:solidFill>
+                  <a:srgbClr val="2563EB"/>
+                </a:solidFill>
+              </a:rPr>
+              <a:t>BASIS PATH
+</a:t>
+            </a:r>
+            <a:r>
+              <a:rPr sz="1700">
+                <a:solidFill>
+                  <a:srgbClr val="1E293B"/>
+                </a:solidFill>
+              </a:rPr>
+              <a:t>Cyclomatic Complexity V(G) = 11 covering all legal &amp; illegal FSM branches</a:t>
+            </a:r>
+          </a:p>
+          <a:p>
+            <a:pPr>
+              <a:spcBef>
+                <a:spcPts val="1000"/>
+              </a:spcBef>
+            </a:pPr>
+            <a:r>
+              <a:rPr b="1" sz="1900">
+                <a:solidFill>
+                  <a:srgbClr val="2563EB"/>
+                </a:solidFill>
+              </a:rPr>
+              <a:t>ROLE ACCESS
+</a:t>
+            </a:r>
+            <a:r>
+              <a:rPr sz="1700">
+                <a:solidFill>
+                  <a:srgbClr val="1E293B"/>
+                </a:solidFill>
+              </a:rPr>
+              <a:t>Student tokens strictly barred from admin endpoints (HTTP 403 Forbidden)</a:t>
+            </a:r>
+          </a:p>
+          <a:p>
+            <a:pPr>
+              <a:spcBef>
+                <a:spcPts val="1000"/>
+              </a:spcBef>
+            </a:pPr>
+            <a:r>
+              <a:rPr b="1" sz="1900">
+                <a:solidFill>
+                  <a:srgbClr val="2563EB"/>
+                </a:solidFill>
+              </a:rPr>
+              <a:t>INTEGRATION
+</a:t>
+            </a:r>
+            <a:r>
+              <a:rPr sz="1700">
+                <a:solidFill>
+                  <a:srgbClr val="1E293B"/>
+                </a:solidFill>
+              </a:rPr>
+              <a:t>End-to-end browser workflows automated and validated with Playwright</a:t>
+            </a:r>
+          </a:p>
+        </p:txBody>
+      </p:sp>
+      <p:sp>
+        <p:nvSpPr>
+          <p:cNvPr id="9" name="TextBox 8"/>
+          <p:cNvSpPr txBox="1"/>
+          <p:nvPr/>
+        </p:nvSpPr>
+        <p:spPr>
+          <a:xfrm>
+            <a:off x="6035040" y="1371600"/>
+            <a:ext cx="5212080" cy="4572000"/>
+          </a:xfrm>
+          <a:prstGeom prst="rect">
+            <a:avLst/>
+          </a:prstGeom>
+          <a:noFill/>
+        </p:spPr>
+        <p:txBody>
+          <a:bodyPr wrap="square" lIns="0" tIns="0">
+            <a:spAutoFit/>
+          </a:bodyPr>
+          <a:lstStyle/>
+          <a:p>
             <a:pPr>
               <a:spcAft>
-                <a:spcPts val="1200"/>
+                <a:spcPts val="1400"/>
               </a:spcAft>
-              <a:defRPr sz="2400" b="1">
+              <a:defRPr sz="2200" b="1">
                 <a:solidFill>
                   <a:srgbClr val="0F172A"/>
                 </a:solidFill>
-                <a:latin typeface="Arial"/>
-              </a:defRPr>
-            </a:pPr>
-            <a:r>
-              <a:t>Testing Methodology</a:t>
+                <a:latin typeface="Calibri"/>
+              </a:defRPr>
+            </a:pPr>
+            <a:r>
+              <a:t>Key Verification Scenarios</a:t>
             </a:r>
           </a:p>
           <a:p>
             <a:pPr>
               <a:spcBef>
-                <a:spcPts val="800"/>
+                <a:spcPts val="1400"/>
               </a:spcBef>
             </a:pPr>
             <a:r>
-              <a:rPr b="1" sz="2000">
-                <a:solidFill>
-                  <a:srgbClr val="2563EB"/>
+              <a:rPr b="1" sz="1900">
+                <a:solidFill>
+                  <a:srgbClr val="0F172A"/>
                 </a:solidFill>
               </a:rPr>
-              <a:t>• Unit Testing:
+              <a:t>• TC-01 | Administrator Authentication
 </a:t>
             </a:r>
             <a:r>
-              <a:rPr sz="1900">
+              <a:rPr sz="1700">
+                <a:solidFill>
+                  <a:srgbClr val="475569"/>
+                </a:solidFill>
+              </a:rPr>
+              <a:t>   Endpoint: POST /api/auth/login
+</a:t>
+            </a:r>
+            <a:r>
+              <a:rPr sz="1700">
                 <a:solidFill>
                   <a:srgbClr val="1E293B"/>
                 </a:solidFill>
               </a:rPr>
-              <a:t>Validated bcrypt password salting, token signing/verification, and unique CMP-ID generators.</a:t>
+              <a:t>   Result: HTTP 200; Valid JWT token issued; Admin authorized
+</a:t>
+            </a:r>
+            <a:r>
+              <a:rPr b="1" sz="1700">
+                <a:solidFill>
+                  <a:srgbClr val="0F172A"/>
+                </a:solidFill>
+              </a:rPr>
+              <a:t>   Status: </a:t>
+            </a:r>
+            <a:r>
+              <a:rPr b="1" sz="1800">
+                <a:solidFill>
+                  <a:srgbClr val="15803D"/>
+                </a:solidFill>
+              </a:rPr>
+              <a:t>PASS</a:t>
             </a:r>
           </a:p>
           <a:p>
             <a:pPr>
               <a:spcBef>
-                <a:spcPts val="800"/>
+                <a:spcPts val="1400"/>
               </a:spcBef>
             </a:pPr>
             <a:r>
-              <a:rPr b="1" sz="2000">
-                <a:solidFill>
-                  <a:srgbClr val="2563EB"/>
+              <a:rPr b="1" sz="1900">
+                <a:solidFill>
+                  <a:srgbClr val="0F172A"/>
                 </a:solidFill>
               </a:rPr>
-              <a:t>• Basis Path Testing:
+              <a:t>• TC-04 | Illegal Transition Protection
 </a:t>
             </a:r>
             <a:r>
-              <a:rPr sz="1900">
+              <a:rPr sz="1700">
+                <a:solidFill>
+                  <a:srgbClr val="475569"/>
+                </a:solidFill>
+              </a:rPr>
+              <a:t>   Endpoint: PUT /api/complaints/:id/status
+</a:t>
+            </a:r>
+            <a:r>
+              <a:rPr sz="1700">
                 <a:solidFill>
                   <a:srgbClr val="1E293B"/>
                 </a:solidFill>
               </a:rPr>
-              <a:t>Mapped Cyclomatic Complexity V(G) = 11 for statusController.js; validated all legal and illegal transition paths.</a:t>
+              <a:t>   Result: HTTP 400 Bad Request; FSM validator blocks NEW → CLOSED jump
+</a:t>
+            </a:r>
+            <a:r>
+              <a:rPr b="1" sz="1700">
+                <a:solidFill>
+                  <a:srgbClr val="0F172A"/>
+                </a:solidFill>
+              </a:rPr>
+              <a:t>   Status: </a:t>
+            </a:r>
+            <a:r>
+              <a:rPr b="1" sz="1800">
+                <a:solidFill>
+                  <a:srgbClr val="15803D"/>
+                </a:solidFill>
+              </a:rPr>
+              <a:t>PASS</a:t>
             </a:r>
           </a:p>
           <a:p>
             <a:pPr>
               <a:spcBef>
-                <a:spcPts val="800"/>
+                <a:spcPts val="1400"/>
               </a:spcBef>
             </a:pPr>
             <a:r>
-              <a:rPr b="1" sz="2000">
-                <a:solidFill>
-                  <a:srgbClr val="2563EB"/>
+              <a:rPr b="1" sz="1900">
+                <a:solidFill>
+                  <a:srgbClr val="0F172A"/>
                 </a:solidFill>
               </a:rPr>
-              <a:t>• Role Access Testing:
+              <a:t>• TC-05 | RBAC Route Authorization
 </a:t>
             </a:r>
             <a:r>
-              <a:rPr sz="1900">
+              <a:rPr sz="1700">
+                <a:solidFill>
+                  <a:srgbClr val="475569"/>
+                </a:solidFill>
+              </a:rPr>
+              <a:t>   Endpoint: POST /api/complaints/:id/assign
+</a:t>
+            </a:r>
+            <a:r>
+              <a:rPr sz="1700">
                 <a:solidFill>
                   <a:srgbClr val="1E293B"/>
                 </a:solidFill>
               </a:rPr>
-              <a:t>Verified that student tokens cannot access administrative or technician endpoints (HTTP 403 Forbidden).</a:t>
-            </a:r>
-          </a:p>
-          <a:p>
-            <a:pPr>
-              <a:spcBef>
-                <a:spcPts val="800"/>
-              </a:spcBef>
-            </a:pPr>
-            <a:r>
-              <a:rPr b="1" sz="2000">
-                <a:solidFill>
-                  <a:srgbClr val="2563EB"/>
+              <a:t>   Result: HTTP 403 Forbidden; Non-admin role barred from assignment API
+</a:t>
+            </a:r>
+            <a:r>
+              <a:rPr b="1" sz="1700">
+                <a:solidFill>
+                  <a:srgbClr val="0F172A"/>
                 </a:solidFill>
               </a:rPr>
-              <a:t>• System Integration:
-</a:t>
-            </a:r>
-            <a:r>
-              <a:rPr sz="1900">
-                <a:solidFill>
-                  <a:srgbClr val="1E293B"/>
+              <a:t>   Status: </a:t>
+            </a:r>
+            <a:r>
+              <a:rPr b="1" sz="1800">
+                <a:solidFill>
+                  <a:srgbClr val="15803D"/>
                 </a:solidFill>
               </a:rPr>
-              <a:t>Automated browser validation via Playwright confirming end-to-end user journeys.</a:t>
-            </a:r>
-          </a:p>
-          <a:p>
-            <a:pPr>
-              <a:spcBef>
-                <a:spcPts val="1600"/>
-              </a:spcBef>
-            </a:pPr>
-            <a:r>
-              <a:rPr b="1" sz="2000">
-                <a:solidFill>
-                  <a:srgbClr val="15803D"/>
-                </a:solidFill>
-              </a:rPr>
-              <a:t>✓ 30 / 30 Executed Test Cases PASSED (100%)</a:t>
-            </a:r>
-          </a:p>
-        </p:txBody>
-      </p:sp>
-      <p:graphicFrame>
-        <p:nvGraphicFramePr>
-          <p:cNvPr id="8" name="Table 7"/>
-          <p:cNvGraphicFramePr>
-            <a:graphicFrameLocks noGrp="1"/>
-          </p:cNvGraphicFramePr>
-          <p:nvPr/>
-        </p:nvGraphicFramePr>
-        <p:xfrm>
-          <a:off x="5486400" y="1325880"/>
-          <a:ext cx="5973775" cy="4663440"/>
-        </p:xfrm>
-        <a:graphic>
-          <a:graphicData uri="http://schemas.openxmlformats.org/drawingml/2006/table">
-            <a:tbl>
-              <a:tblPr firstRow="1" bandRow="1">
-                <a:tableStyleId>{5C22544A-7EE6-4342-B048-85BDC9FD1C3A}</a:tableStyleId>
-              </a:tblPr>
-              <a:tblGrid>
-                <a:gridCol w="914400"/>
-                <a:gridCol w="1920240"/>
-                <a:gridCol w="2224735"/>
-                <a:gridCol w="914400"/>
-              </a:tblGrid>
-              <a:tr h="666205">
-                <a:tc>
-                  <a:txBody>
-                    <a:bodyPr/>
-                    <a:lstStyle/>
-                    <a:p>
-                      <a:pPr algn="ctr">
-                        <a:defRPr sz="1800" b="1">
-                          <a:solidFill>
-                            <a:srgbClr val="FFFFFF"/>
-                          </a:solidFill>
-                          <a:latin typeface="Arial"/>
-                        </a:defRPr>
-                      </a:pPr>
-                      <a:r>
-                        <a:t>Test ID</a:t>
-                      </a:r>
-                    </a:p>
-                  </a:txBody>
-                  <a:tcPr>
-                    <a:solidFill>
-                      <a:srgbClr val="0F172A"/>
-                    </a:solidFill>
-                  </a:tcPr>
-                </a:tc>
-                <a:tc>
-                  <a:txBody>
-                    <a:bodyPr/>
-                    <a:lstStyle/>
-                    <a:p>
-                      <a:pPr algn="ctr">
-                        <a:defRPr sz="1800" b="1">
-                          <a:solidFill>
-                            <a:srgbClr val="FFFFFF"/>
-                          </a:solidFill>
-                          <a:latin typeface="Arial"/>
-                        </a:defRPr>
-                      </a:pPr>
-                      <a:r>
-                        <a:t>Scenario Evaluated</a:t>
-                      </a:r>
-                    </a:p>
-                  </a:txBody>
-                  <a:tcPr>
-                    <a:solidFill>
-                      <a:srgbClr val="0F172A"/>
-                    </a:solidFill>
-                  </a:tcPr>
-                </a:tc>
-                <a:tc>
-                  <a:txBody>
-                    <a:bodyPr/>
-                    <a:lstStyle/>
-                    <a:p>
-                      <a:pPr algn="ctr">
-                        <a:defRPr sz="1800" b="1">
-                          <a:solidFill>
-                            <a:srgbClr val="FFFFFF"/>
-                          </a:solidFill>
-                          <a:latin typeface="Arial"/>
-                        </a:defRPr>
-                      </a:pPr>
-                      <a:r>
-                        <a:t>Observed Result</a:t>
-                      </a:r>
-                    </a:p>
-                  </a:txBody>
-                  <a:tcPr>
-                    <a:solidFill>
-                      <a:srgbClr val="0F172A"/>
-                    </a:solidFill>
-                  </a:tcPr>
-                </a:tc>
-                <a:tc>
-                  <a:txBody>
-                    <a:bodyPr/>
-                    <a:lstStyle/>
-                    <a:p>
-                      <a:pPr algn="ctr">
-                        <a:defRPr sz="1800" b="1">
-                          <a:solidFill>
-                            <a:srgbClr val="FFFFFF"/>
-                          </a:solidFill>
-                          <a:latin typeface="Arial"/>
-                        </a:defRPr>
-                      </a:pPr>
-                      <a:r>
-                        <a:t>Status</a:t>
-                      </a:r>
-                    </a:p>
-                  </a:txBody>
-                  <a:tcPr>
-                    <a:solidFill>
-                      <a:srgbClr val="0F172A"/>
-                    </a:solidFill>
-                  </a:tcPr>
-                </a:tc>
-              </a:tr>
-              <a:tr h="666205">
-                <a:tc>
-                  <a:txBody>
-                    <a:bodyPr/>
-                    <a:lstStyle/>
-                    <a:p>
-                      <a:pPr algn="ctr">
-                        <a:defRPr sz="1800" b="1">
-                          <a:solidFill>
-                            <a:srgbClr val="0F172A"/>
-                          </a:solidFill>
-                          <a:latin typeface="Arial"/>
-                        </a:defRPr>
-                      </a:pPr>
-                      <a:r>
-                        <a:t>TC-01</a:t>
-                      </a:r>
-                    </a:p>
-                  </a:txBody>
-                  <a:tcPr>
-                    <a:solidFill>
-                      <a:srgbClr val="FFFFFF"/>
-                    </a:solidFill>
-                  </a:tcPr>
-                </a:tc>
-                <a:tc>
-                  <a:txBody>
-                    <a:bodyPr/>
-                    <a:lstStyle/>
-                    <a:p>
-                      <a:pPr>
-                        <a:defRPr sz="1800">
-                          <a:solidFill>
-                            <a:srgbClr val="1E293B"/>
-                          </a:solidFill>
-                          <a:latin typeface="Arial"/>
-                        </a:defRPr>
-                      </a:pPr>
-                      <a:r>
-                        <a:t>Administrator Authentication</a:t>
-                      </a:r>
-                    </a:p>
-                  </a:txBody>
-                  <a:tcPr>
-                    <a:solidFill>
-                      <a:srgbClr val="FFFFFF"/>
-                    </a:solidFill>
-                  </a:tcPr>
-                </a:tc>
-                <a:tc>
-                  <a:txBody>
-                    <a:bodyPr/>
-                    <a:lstStyle/>
-                    <a:p>
-                      <a:pPr>
-                        <a:defRPr sz="1800">
-                          <a:solidFill>
-                            <a:srgbClr val="1E293B"/>
-                          </a:solidFill>
-                          <a:latin typeface="Arial"/>
-                        </a:defRPr>
-                      </a:pPr>
-                      <a:r>
-                        <a:t>HTTP 200; JWT issued; Admin access</a:t>
-                      </a:r>
-                    </a:p>
-                  </a:txBody>
-                  <a:tcPr>
-                    <a:solidFill>
-                      <a:srgbClr val="FFFFFF"/>
-                    </a:solidFill>
-                  </a:tcPr>
-                </a:tc>
-                <a:tc>
-                  <a:txBody>
-                    <a:bodyPr/>
-                    <a:lstStyle/>
-                    <a:p>
-                      <a:pPr algn="ctr">
-                        <a:defRPr sz="1800" b="1">
-                          <a:solidFill>
-                            <a:srgbClr val="15803D"/>
-                          </a:solidFill>
-                          <a:latin typeface="Arial"/>
-                        </a:defRPr>
-                      </a:pPr>
-                      <a:r>
-                        <a:t>PASS</a:t>
-                      </a:r>
-                    </a:p>
-                  </a:txBody>
-                  <a:tcPr>
-                    <a:solidFill>
-                      <a:srgbClr val="FFFFFF"/>
-                    </a:solidFill>
-                  </a:tcPr>
-                </a:tc>
-              </a:tr>
-              <a:tr h="666205">
-                <a:tc>
-                  <a:txBody>
-                    <a:bodyPr/>
-                    <a:lstStyle/>
-                    <a:p>
-                      <a:pPr algn="ctr">
-                        <a:defRPr sz="1800" b="1">
-                          <a:solidFill>
-                            <a:srgbClr val="0F172A"/>
-                          </a:solidFill>
-                          <a:latin typeface="Arial"/>
-                        </a:defRPr>
-                      </a:pPr>
-                      <a:r>
-                        <a:t>TC-02</a:t>
-                      </a:r>
-                    </a:p>
-                  </a:txBody>
-                  <a:tcPr>
-                    <a:solidFill>
-                      <a:srgbClr val="F1F5F9"/>
-                    </a:solidFill>
-                  </a:tcPr>
-                </a:tc>
-                <a:tc>
-                  <a:txBody>
-                    <a:bodyPr/>
-                    <a:lstStyle/>
-                    <a:p>
-                      <a:pPr>
-                        <a:defRPr sz="1800">
-                          <a:solidFill>
-                            <a:srgbClr val="1E293B"/>
-                          </a:solidFill>
-                          <a:latin typeface="Arial"/>
-                        </a:defRPr>
-                      </a:pPr>
-                      <a:r>
-                        <a:t>Student User Authentication</a:t>
-                      </a:r>
-                    </a:p>
-                  </a:txBody>
-                  <a:tcPr>
-                    <a:solidFill>
-                      <a:srgbClr val="F1F5F9"/>
-                    </a:solidFill>
-                  </a:tcPr>
-                </a:tc>
-                <a:tc>
-                  <a:txBody>
-                    <a:bodyPr/>
-                    <a:lstStyle/>
-                    <a:p>
-                      <a:pPr>
-                        <a:defRPr sz="1800">
-                          <a:solidFill>
-                            <a:srgbClr val="1E293B"/>
-                          </a:solidFill>
-                          <a:latin typeface="Arial"/>
-                        </a:defRPr>
-                      </a:pPr>
-                      <a:r>
-                        <a:t>HTTP 200; JWT issued; Student view</a:t>
-                      </a:r>
-                    </a:p>
-                  </a:txBody>
-                  <a:tcPr>
-                    <a:solidFill>
-                      <a:srgbClr val="F1F5F9"/>
-                    </a:solidFill>
-                  </a:tcPr>
-                </a:tc>
-                <a:tc>
-                  <a:txBody>
-                    <a:bodyPr/>
-                    <a:lstStyle/>
-                    <a:p>
-                      <a:pPr algn="ctr">
-                        <a:defRPr sz="1800" b="1">
-                          <a:solidFill>
-                            <a:srgbClr val="15803D"/>
-                          </a:solidFill>
-                          <a:latin typeface="Arial"/>
-                        </a:defRPr>
-                      </a:pPr>
-                      <a:r>
-                        <a:t>PASS</a:t>
-                      </a:r>
-                    </a:p>
-                  </a:txBody>
-                  <a:tcPr>
-                    <a:solidFill>
-                      <a:srgbClr val="F1F5F9"/>
-                    </a:solidFill>
-                  </a:tcPr>
-                </a:tc>
-              </a:tr>
-              <a:tr h="666205">
-                <a:tc>
-                  <a:txBody>
-                    <a:bodyPr/>
-                    <a:lstStyle/>
-                    <a:p>
-                      <a:pPr algn="ctr">
-                        <a:defRPr sz="1800" b="1">
-                          <a:solidFill>
-                            <a:srgbClr val="0F172A"/>
-                          </a:solidFill>
-                          <a:latin typeface="Arial"/>
-                        </a:defRPr>
-                      </a:pPr>
-                      <a:r>
-                        <a:t>TC-03</a:t>
-                      </a:r>
-                    </a:p>
-                  </a:txBody>
-                  <a:tcPr>
-                    <a:solidFill>
-                      <a:srgbClr val="FFFFFF"/>
-                    </a:solidFill>
-                  </a:tcPr>
-                </a:tc>
-                <a:tc>
-                  <a:txBody>
-                    <a:bodyPr/>
-                    <a:lstStyle/>
-                    <a:p>
-                      <a:pPr>
-                        <a:defRPr sz="1800">
-                          <a:solidFill>
-                            <a:srgbClr val="1E293B"/>
-                          </a:solidFill>
-                          <a:latin typeface="Arial"/>
-                        </a:defRPr>
-                      </a:pPr>
-                      <a:r>
-                        <a:t>Complaint Lodging with Photo</a:t>
-                      </a:r>
-                    </a:p>
-                  </a:txBody>
-                  <a:tcPr>
-                    <a:solidFill>
-                      <a:srgbClr val="FFFFFF"/>
-                    </a:solidFill>
-                  </a:tcPr>
-                </a:tc>
-                <a:tc>
-                  <a:txBody>
-                    <a:bodyPr/>
-                    <a:lstStyle/>
-                    <a:p>
-                      <a:pPr>
-                        <a:defRPr sz="1800">
-                          <a:solidFill>
-                            <a:srgbClr val="1E293B"/>
-                          </a:solidFill>
-                          <a:latin typeface="Arial"/>
-                        </a:defRPr>
-                      </a:pPr>
-                      <a:r>
-                        <a:t>HTTP 201; CMP-ID generated in DB</a:t>
-                      </a:r>
-                    </a:p>
-                  </a:txBody>
-                  <a:tcPr>
-                    <a:solidFill>
-                      <a:srgbClr val="FFFFFF"/>
-                    </a:solidFill>
-                  </a:tcPr>
-                </a:tc>
-                <a:tc>
-                  <a:txBody>
-                    <a:bodyPr/>
-                    <a:lstStyle/>
-                    <a:p>
-                      <a:pPr algn="ctr">
-                        <a:defRPr sz="1800" b="1">
-                          <a:solidFill>
-                            <a:srgbClr val="15803D"/>
-                          </a:solidFill>
-                          <a:latin typeface="Arial"/>
-                        </a:defRPr>
-                      </a:pPr>
-                      <a:r>
-                        <a:t>PASS</a:t>
-                      </a:r>
-                    </a:p>
-                  </a:txBody>
-                  <a:tcPr>
-                    <a:solidFill>
-                      <a:srgbClr val="FFFFFF"/>
-                    </a:solidFill>
-                  </a:tcPr>
-                </a:tc>
-              </a:tr>
-              <a:tr h="666205">
-                <a:tc>
-                  <a:txBody>
-                    <a:bodyPr/>
-                    <a:lstStyle/>
-                    <a:p>
-                      <a:pPr algn="ctr">
-                        <a:defRPr sz="1800" b="1">
-                          <a:solidFill>
-                            <a:srgbClr val="0F172A"/>
-                          </a:solidFill>
-                          <a:latin typeface="Arial"/>
-                        </a:defRPr>
-                      </a:pPr>
-                      <a:r>
-                        <a:t>TC-04</a:t>
-                      </a:r>
-                    </a:p>
-                  </a:txBody>
-                  <a:tcPr>
-                    <a:solidFill>
-                      <a:srgbClr val="F1F5F9"/>
-                    </a:solidFill>
-                  </a:tcPr>
-                </a:tc>
-                <a:tc>
-                  <a:txBody>
-                    <a:bodyPr/>
-                    <a:lstStyle/>
-                    <a:p>
-                      <a:pPr>
-                        <a:defRPr sz="1800">
-                          <a:solidFill>
-                            <a:srgbClr val="1E293B"/>
-                          </a:solidFill>
-                          <a:latin typeface="Arial"/>
-                        </a:defRPr>
-                      </a:pPr>
-                      <a:r>
-                        <a:t>Illegal Transition (NEW→CLOSED)</a:t>
-                      </a:r>
-                    </a:p>
-                  </a:txBody>
-                  <a:tcPr>
-                    <a:solidFill>
-                      <a:srgbClr val="F1F5F9"/>
-                    </a:solidFill>
-                  </a:tcPr>
-                </a:tc>
-                <a:tc>
-                  <a:txBody>
-                    <a:bodyPr/>
-                    <a:lstStyle/>
-                    <a:p>
-                      <a:pPr>
-                        <a:defRPr sz="1800">
-                          <a:solidFill>
-                            <a:srgbClr val="1E293B"/>
-                          </a:solidFill>
-                          <a:latin typeface="Arial"/>
-                        </a:defRPr>
-                      </a:pPr>
-                      <a:r>
-                        <a:t>HTTP 400 Bad Request; FSM guarded</a:t>
-                      </a:r>
-                    </a:p>
-                  </a:txBody>
-                  <a:tcPr>
-                    <a:solidFill>
-                      <a:srgbClr val="F1F5F9"/>
-                    </a:solidFill>
-                  </a:tcPr>
-                </a:tc>
-                <a:tc>
-                  <a:txBody>
-                    <a:bodyPr/>
-                    <a:lstStyle/>
-                    <a:p>
-                      <a:pPr algn="ctr">
-                        <a:defRPr sz="1800" b="1">
-                          <a:solidFill>
-                            <a:srgbClr val="15803D"/>
-                          </a:solidFill>
-                          <a:latin typeface="Arial"/>
-                        </a:defRPr>
-                      </a:pPr>
-                      <a:r>
-                        <a:t>PASS</a:t>
-                      </a:r>
-                    </a:p>
-                  </a:txBody>
-                  <a:tcPr>
-                    <a:solidFill>
-                      <a:srgbClr val="F1F5F9"/>
-                    </a:solidFill>
-                  </a:tcPr>
-                </a:tc>
-              </a:tr>
-              <a:tr h="666205">
-                <a:tc>
-                  <a:txBody>
-                    <a:bodyPr/>
-                    <a:lstStyle/>
-                    <a:p>
-                      <a:pPr algn="ctr">
-                        <a:defRPr sz="1800" b="1">
-                          <a:solidFill>
-                            <a:srgbClr val="0F172A"/>
-                          </a:solidFill>
-                          <a:latin typeface="Arial"/>
-                        </a:defRPr>
-                      </a:pPr>
-                      <a:r>
-                        <a:t>TC-05</a:t>
-                      </a:r>
-                    </a:p>
-                  </a:txBody>
-                  <a:tcPr>
-                    <a:solidFill>
-                      <a:srgbClr val="FFFFFF"/>
-                    </a:solidFill>
-                  </a:tcPr>
-                </a:tc>
-                <a:tc>
-                  <a:txBody>
-                    <a:bodyPr/>
-                    <a:lstStyle/>
-                    <a:p>
-                      <a:pPr>
-                        <a:defRPr sz="1800">
-                          <a:solidFill>
-                            <a:srgbClr val="1E293B"/>
-                          </a:solidFill>
-                          <a:latin typeface="Arial"/>
-                        </a:defRPr>
-                      </a:pPr>
-                      <a:r>
-                        <a:t>Technician Work Assignment</a:t>
-                      </a:r>
-                    </a:p>
-                  </a:txBody>
-                  <a:tcPr>
-                    <a:solidFill>
-                      <a:srgbClr val="FFFFFF"/>
-                    </a:solidFill>
-                  </a:tcPr>
-                </a:tc>
-                <a:tc>
-                  <a:txBody>
-                    <a:bodyPr/>
-                    <a:lstStyle/>
-                    <a:p>
-                      <a:pPr>
-                        <a:defRPr sz="1800">
-                          <a:solidFill>
-                            <a:srgbClr val="1E293B"/>
-                          </a:solidFill>
-                          <a:latin typeface="Arial"/>
-                        </a:defRPr>
-                      </a:pPr>
-                      <a:r>
-                        <a:t>HTTP 200; Dispatched to staff queue</a:t>
-                      </a:r>
-                    </a:p>
-                  </a:txBody>
-                  <a:tcPr>
-                    <a:solidFill>
-                      <a:srgbClr val="FFFFFF"/>
-                    </a:solidFill>
-                  </a:tcPr>
-                </a:tc>
-                <a:tc>
-                  <a:txBody>
-                    <a:bodyPr/>
-                    <a:lstStyle/>
-                    <a:p>
-                      <a:pPr algn="ctr">
-                        <a:defRPr sz="1800" b="1">
-                          <a:solidFill>
-                            <a:srgbClr val="15803D"/>
-                          </a:solidFill>
-                          <a:latin typeface="Arial"/>
-                        </a:defRPr>
-                      </a:pPr>
-                      <a:r>
-                        <a:t>PASS</a:t>
-                      </a:r>
-                    </a:p>
-                  </a:txBody>
-                  <a:tcPr>
-                    <a:solidFill>
-                      <a:srgbClr val="FFFFFF"/>
-                    </a:solidFill>
-                  </a:tcPr>
-                </a:tc>
-              </a:tr>
-              <a:tr h="666210">
-                <a:tc>
-                  <a:txBody>
-                    <a:bodyPr/>
-                    <a:lstStyle/>
-                    <a:p>
-                      <a:pPr algn="ctr">
-                        <a:defRPr sz="1800" b="1">
-                          <a:solidFill>
-                            <a:srgbClr val="0F172A"/>
-                          </a:solidFill>
-                          <a:latin typeface="Arial"/>
-                        </a:defRPr>
-                      </a:pPr>
-                      <a:r>
-                        <a:t>TC-06</a:t>
-                      </a:r>
-                    </a:p>
-                  </a:txBody>
-                  <a:tcPr>
-                    <a:solidFill>
-                      <a:srgbClr val="F1F5F9"/>
-                    </a:solidFill>
-                  </a:tcPr>
-                </a:tc>
-                <a:tc>
-                  <a:txBody>
-                    <a:bodyPr/>
-                    <a:lstStyle/>
-                    <a:p>
-                      <a:pPr>
-                        <a:defRPr sz="1800">
-                          <a:solidFill>
-                            <a:srgbClr val="1E293B"/>
-                          </a:solidFill>
-                          <a:latin typeface="Arial"/>
-                        </a:defRPr>
-                      </a:pPr>
-                      <a:r>
-                        <a:t>Unauthorized Endpoint Access</a:t>
-                      </a:r>
-                    </a:p>
-                  </a:txBody>
-                  <a:tcPr>
-                    <a:solidFill>
-                      <a:srgbClr val="F1F5F9"/>
-                    </a:solidFill>
-                  </a:tcPr>
-                </a:tc>
-                <a:tc>
-                  <a:txBody>
-                    <a:bodyPr/>
-                    <a:lstStyle/>
-                    <a:p>
-                      <a:pPr>
-                        <a:defRPr sz="1800">
-                          <a:solidFill>
-                            <a:srgbClr val="1E293B"/>
-                          </a:solidFill>
-                          <a:latin typeface="Arial"/>
-                        </a:defRPr>
-                      </a:pPr>
-                      <a:r>
-                        <a:t>HTTP 403 Forbidden; Access blocked</a:t>
-                      </a:r>
-                    </a:p>
-                  </a:txBody>
-                  <a:tcPr>
-                    <a:solidFill>
-                      <a:srgbClr val="F1F5F9"/>
-                    </a:solidFill>
-                  </a:tcPr>
-                </a:tc>
-                <a:tc>
-                  <a:txBody>
-                    <a:bodyPr/>
-                    <a:lstStyle/>
-                    <a:p>
-                      <a:pPr algn="ctr">
-                        <a:defRPr sz="1800" b="1">
-                          <a:solidFill>
-                            <a:srgbClr val="15803D"/>
-                          </a:solidFill>
-                          <a:latin typeface="Arial"/>
-                        </a:defRPr>
-                      </a:pPr>
-                      <a:r>
-                        <a:t>PASS</a:t>
-                      </a:r>
-                    </a:p>
-                  </a:txBody>
-                  <a:tcPr>
-                    <a:solidFill>
-                      <a:srgbClr val="F1F5F9"/>
-                    </a:solidFill>
-                  </a:tcPr>
-                </a:tc>
-              </a:tr>
-            </a:tbl>
-          </a:graphicData>
-        </a:graphic>
-      </p:graphicFrame>
+              <a:t>PASS</a:t>
+            </a:r>
+          </a:p>
+        </p:txBody>
+      </p:sp>
     </p:spTree>
   </p:cSld>
   <p:clrMapOvr>
